--- a/temp.pptx
+++ b/temp.pptx
@@ -5,10 +5,12 @@
     <p:sldMasterId id="2147483658" r:id="rId1"/>
   </p:sldMasterIdLst>
   <p:notesMasterIdLst>
-    <p:notesMasterId r:id="rId3"/>
+    <p:notesMasterId r:id="rId5"/>
   </p:notesMasterIdLst>
   <p:sldIdLst>
     <p:sldId id="2014" r:id="rId2"/>
+    <p:sldId id="2017" r:id="rId3"/>
+    <p:sldId id="2018" r:id="rId4"/>
   </p:sldIdLst>
   <p:sldSz cx="9906000" cy="6858000" type="A4"/>
   <p:notesSz cx="7315200" cy="9601200"/>
@@ -1638,6 +1640,314 @@
     <p:extLst>
       <p:ext uri="{BB962C8B-B14F-4D97-AF65-F5344CB8AC3E}">
         <p14:creationId xmlns:p14="http://schemas.microsoft.com/office/powerpoint/2010/main" val="3039280848"/>
+      </p:ext>
+    </p:extLst>
+  </p:cSld>
+  <p:clrMapOvr>
+    <a:masterClrMapping/>
+  </p:clrMapOvr>
+</p:notes>
+</file>
+
+<file path=ppt/notesSlides/notesSlide2.xml><?xml version="1.0" encoding="utf-8"?>
+<p:notes xmlns:a="http://schemas.openxmlformats.org/drawingml/2006/main" xmlns:r="http://schemas.openxmlformats.org/officeDocument/2006/relationships" xmlns:p="http://schemas.openxmlformats.org/presentationml/2006/main">
+  <p:cSld>
+    <p:spTree>
+      <p:nvGrpSpPr>
+        <p:cNvPr id="1" name="">
+          <a:extLst>
+            <a:ext uri="{FF2B5EF4-FFF2-40B4-BE49-F238E27FC236}">
+              <a16:creationId xmlns:a16="http://schemas.microsoft.com/office/drawing/2014/main" id="{9A851A70-D7FF-B69E-2F1F-5276D7F44C59}"/>
+            </a:ext>
+          </a:extLst>
+        </p:cNvPr>
+        <p:cNvGrpSpPr/>
+        <p:nvPr/>
+      </p:nvGrpSpPr>
+      <p:grpSpPr>
+        <a:xfrm>
+          <a:off x="0" y="0"/>
+          <a:ext cx="0" cy="0"/>
+          <a:chOff x="0" y="0"/>
+          <a:chExt cx="0" cy="0"/>
+        </a:xfrm>
+      </p:grpSpPr>
+      <p:sp>
+        <p:nvSpPr>
+          <p:cNvPr id="2" name="投影片影像版面配置區 1">
+            <a:extLst>
+              <a:ext uri="{FF2B5EF4-FFF2-40B4-BE49-F238E27FC236}">
+                <a16:creationId xmlns:a16="http://schemas.microsoft.com/office/drawing/2014/main" id="{4FB2E1DE-40DE-B1BA-7135-64BFFB1631B9}"/>
+              </a:ext>
+            </a:extLst>
+          </p:cNvPr>
+          <p:cNvSpPr>
+            <a:spLocks noGrp="1" noRot="1" noChangeAspect="1"/>
+          </p:cNvSpPr>
+          <p:nvPr>
+            <p:ph type="sldImg"/>
+          </p:nvPr>
+        </p:nvSpPr>
+        <p:spPr/>
+      </p:sp>
+      <p:sp>
+        <p:nvSpPr>
+          <p:cNvPr id="3" name="備忘稿版面配置區 2">
+            <a:extLst>
+              <a:ext uri="{FF2B5EF4-FFF2-40B4-BE49-F238E27FC236}">
+                <a16:creationId xmlns:a16="http://schemas.microsoft.com/office/drawing/2014/main" id="{C4F8DB8E-F5F1-21EB-D41F-2C635FB715D5}"/>
+              </a:ext>
+            </a:extLst>
+          </p:cNvPr>
+          <p:cNvSpPr>
+            <a:spLocks noGrp="1"/>
+          </p:cNvSpPr>
+          <p:nvPr>
+            <p:ph type="body" idx="1"/>
+          </p:nvPr>
+        </p:nvSpPr>
+        <p:spPr/>
+        <p:txBody>
+          <a:bodyPr/>
+          <a:lstStyle/>
+          <a:p>
+            <a:pPr marL="0" indent="0"/>
+            <a:endParaRPr lang="zh-TW" altLang="en-US" dirty="0"/>
+          </a:p>
+        </p:txBody>
+      </p:sp>
+      <p:sp>
+        <p:nvSpPr>
+          <p:cNvPr id="4" name="投影片編號版面配置區 3">
+            <a:extLst>
+              <a:ext uri="{FF2B5EF4-FFF2-40B4-BE49-F238E27FC236}">
+                <a16:creationId xmlns:a16="http://schemas.microsoft.com/office/drawing/2014/main" id="{A81AD260-1FA1-46D2-EEFC-6CE390861C06}"/>
+              </a:ext>
+            </a:extLst>
+          </p:cNvPr>
+          <p:cNvSpPr>
+            <a:spLocks noGrp="1"/>
+          </p:cNvSpPr>
+          <p:nvPr>
+            <p:ph type="sldNum" idx="12"/>
+          </p:nvPr>
+        </p:nvSpPr>
+        <p:spPr/>
+        <p:txBody>
+          <a:bodyPr/>
+          <a:lstStyle/>
+          <a:p>
+            <a:pPr marL="0" marR="0" lvl="0" indent="0" algn="r" rtl="0">
+              <a:spcBef>
+                <a:spcPts val="0"/>
+              </a:spcBef>
+              <a:spcAft>
+                <a:spcPts val="0"/>
+              </a:spcAft>
+              <a:buNone/>
+            </a:pPr>
+            <a:fld id="{00000000-1234-1234-1234-123412341234}" type="slidenum">
+              <a:rPr lang="en-US" sz="2000" b="0" i="0" u="none" strike="noStrike" cap="none" smtClean="0">
+                <a:solidFill>
+                  <a:schemeClr val="dk1"/>
+                </a:solidFill>
+                <a:latin typeface="Times New Roman"/>
+                <a:ea typeface="Times New Roman"/>
+                <a:cs typeface="Times New Roman"/>
+                <a:sym typeface="Times New Roman"/>
+              </a:rPr>
+              <a:t>2</a:t>
+            </a:fld>
+            <a:endParaRPr lang="en-US" sz="2000" b="0" i="0" u="none" strike="noStrike" cap="none" dirty="0">
+              <a:solidFill>
+                <a:schemeClr val="dk1"/>
+              </a:solidFill>
+              <a:latin typeface="Times New Roman"/>
+              <a:ea typeface="Times New Roman"/>
+              <a:cs typeface="Times New Roman"/>
+              <a:sym typeface="Times New Roman"/>
+            </a:endParaRPr>
+          </a:p>
+        </p:txBody>
+      </p:sp>
+    </p:spTree>
+    <p:extLst>
+      <p:ext uri="{BB962C8B-B14F-4D97-AF65-F5344CB8AC3E}">
+        <p14:creationId xmlns:p14="http://schemas.microsoft.com/office/powerpoint/2010/main" val="3805465276"/>
+      </p:ext>
+    </p:extLst>
+  </p:cSld>
+  <p:clrMapOvr>
+    <a:masterClrMapping/>
+  </p:clrMapOvr>
+</p:notes>
+</file>
+
+<file path=ppt/notesSlides/notesSlide3.xml><?xml version="1.0" encoding="utf-8"?>
+<p:notes xmlns:a="http://schemas.openxmlformats.org/drawingml/2006/main" xmlns:r="http://schemas.openxmlformats.org/officeDocument/2006/relationships" xmlns:p="http://schemas.openxmlformats.org/presentationml/2006/main">
+  <p:cSld>
+    <p:spTree>
+      <p:nvGrpSpPr>
+        <p:cNvPr id="1" name="">
+          <a:extLst>
+            <a:ext uri="{FF2B5EF4-FFF2-40B4-BE49-F238E27FC236}">
+              <a16:creationId xmlns:a16="http://schemas.microsoft.com/office/drawing/2014/main" id="{9A851A70-D7FF-B69E-2F1F-5276D7F44C59}"/>
+            </a:ext>
+          </a:extLst>
+        </p:cNvPr>
+        <p:cNvGrpSpPr/>
+        <p:nvPr/>
+      </p:nvGrpSpPr>
+      <p:grpSpPr>
+        <a:xfrm>
+          <a:off x="0" y="0"/>
+          <a:ext cx="0" cy="0"/>
+          <a:chOff x="0" y="0"/>
+          <a:chExt cx="0" cy="0"/>
+        </a:xfrm>
+      </p:grpSpPr>
+      <p:sp>
+        <p:nvSpPr>
+          <p:cNvPr id="2" name="投影片影像版面配置區 1">
+            <a:extLst>
+              <a:ext uri="{FF2B5EF4-FFF2-40B4-BE49-F238E27FC236}">
+                <a16:creationId xmlns:a16="http://schemas.microsoft.com/office/drawing/2014/main" id="{4FB2E1DE-40DE-B1BA-7135-64BFFB1631B9}"/>
+              </a:ext>
+            </a:extLst>
+          </p:cNvPr>
+          <p:cNvSpPr>
+            <a:spLocks noGrp="1" noRot="1" noChangeAspect="1"/>
+          </p:cNvSpPr>
+          <p:nvPr>
+            <p:ph type="sldImg"/>
+          </p:nvPr>
+        </p:nvSpPr>
+        <p:spPr/>
+      </p:sp>
+      <p:sp>
+        <p:nvSpPr>
+          <p:cNvPr id="3" name="備忘稿版面配置區 2">
+            <a:extLst>
+              <a:ext uri="{FF2B5EF4-FFF2-40B4-BE49-F238E27FC236}">
+                <a16:creationId xmlns:a16="http://schemas.microsoft.com/office/drawing/2014/main" id="{C4F8DB8E-F5F1-21EB-D41F-2C635FB715D5}"/>
+              </a:ext>
+            </a:extLst>
+          </p:cNvPr>
+          <p:cNvSpPr>
+            <a:spLocks noGrp="1"/>
+          </p:cNvSpPr>
+          <p:nvPr>
+            <p:ph type="body" idx="1"/>
+          </p:nvPr>
+        </p:nvSpPr>
+        <p:spPr/>
+        <p:txBody>
+          <a:bodyPr/>
+          <a:lstStyle/>
+          <a:p>
+            <a:pPr marL="0" indent="0"/>
+            <a:r>
+              <a:rPr lang="zh-TW" altLang="en-US" dirty="0"/>
+              <a:t>沒有</a:t>
+            </a:r>
+            <a:r>
+              <a:rPr lang="en-US" altLang="zh-TW" dirty="0" err="1"/>
+              <a:t>vcgt</a:t>
+            </a:r>
+            <a:r>
+              <a:rPr lang="zh-TW" altLang="en-US" dirty="0"/>
+              <a:t>、</a:t>
+            </a:r>
+            <a:r>
+              <a:rPr lang="en-US" altLang="zh-TW" dirty="0"/>
+              <a:t>MS00</a:t>
+            </a:r>
+            <a:r>
+              <a:rPr lang="zh-TW" altLang="en-US" dirty="0"/>
+              <a:t>、</a:t>
+            </a:r>
+            <a:r>
+              <a:rPr lang="en-US" altLang="zh-TW" dirty="0"/>
+              <a:t>MCH2</a:t>
+            </a:r>
+            <a:r>
+              <a:rPr lang="zh-TW" altLang="en-US" dirty="0"/>
+              <a:t>等</a:t>
+            </a:r>
+            <a:r>
+              <a:rPr lang="en-US" altLang="zh-TW" dirty="0"/>
+              <a:t>tag</a:t>
+            </a:r>
+            <a:r>
+              <a:rPr lang="zh-TW" altLang="en-US" dirty="0"/>
+              <a:t>，所以他這只能生成純粹色彩描述檔的</a:t>
+            </a:r>
+            <a:r>
+              <a:rPr lang="en-US" altLang="zh-TW" dirty="0"/>
+              <a:t>ICC Profile</a:t>
+            </a:r>
+            <a:endParaRPr lang="zh-TW" altLang="en-US" dirty="0"/>
+          </a:p>
+        </p:txBody>
+      </p:sp>
+      <p:sp>
+        <p:nvSpPr>
+          <p:cNvPr id="4" name="投影片編號版面配置區 3">
+            <a:extLst>
+              <a:ext uri="{FF2B5EF4-FFF2-40B4-BE49-F238E27FC236}">
+                <a16:creationId xmlns:a16="http://schemas.microsoft.com/office/drawing/2014/main" id="{A81AD260-1FA1-46D2-EEFC-6CE390861C06}"/>
+              </a:ext>
+            </a:extLst>
+          </p:cNvPr>
+          <p:cNvSpPr>
+            <a:spLocks noGrp="1"/>
+          </p:cNvSpPr>
+          <p:nvPr>
+            <p:ph type="sldNum" idx="12"/>
+          </p:nvPr>
+        </p:nvSpPr>
+        <p:spPr/>
+        <p:txBody>
+          <a:bodyPr/>
+          <a:lstStyle/>
+          <a:p>
+            <a:pPr marL="0" marR="0" lvl="0" indent="0" algn="r" rtl="0">
+              <a:spcBef>
+                <a:spcPts val="0"/>
+              </a:spcBef>
+              <a:spcAft>
+                <a:spcPts val="0"/>
+              </a:spcAft>
+              <a:buNone/>
+            </a:pPr>
+            <a:fld id="{00000000-1234-1234-1234-123412341234}" type="slidenum">
+              <a:rPr lang="en-US" sz="2000" b="0" i="0" u="none" strike="noStrike" cap="none" smtClean="0">
+                <a:solidFill>
+                  <a:schemeClr val="dk1"/>
+                </a:solidFill>
+                <a:latin typeface="Times New Roman"/>
+                <a:ea typeface="Times New Roman"/>
+                <a:cs typeface="Times New Roman"/>
+                <a:sym typeface="Times New Roman"/>
+              </a:rPr>
+              <a:t>3</a:t>
+            </a:fld>
+            <a:endParaRPr lang="en-US" sz="2000" b="0" i="0" u="none" strike="noStrike" cap="none" dirty="0">
+              <a:solidFill>
+                <a:schemeClr val="dk1"/>
+              </a:solidFill>
+              <a:latin typeface="Times New Roman"/>
+              <a:ea typeface="Times New Roman"/>
+              <a:cs typeface="Times New Roman"/>
+              <a:sym typeface="Times New Roman"/>
+            </a:endParaRPr>
+          </a:p>
+        </p:txBody>
+      </p:sp>
+    </p:spTree>
+    <p:extLst>
+      <p:ext uri="{BB962C8B-B14F-4D97-AF65-F5344CB8AC3E}">
+        <p14:creationId xmlns:p14="http://schemas.microsoft.com/office/powerpoint/2010/main" val="3917064610"/>
       </p:ext>
     </p:extLst>
   </p:cSld>
@@ -5205,511 +5515,6 @@
       </p:sp>
       <p:sp>
         <p:nvSpPr>
-          <p:cNvPr id="8" name="文字版面配置區 6">
-            <a:extLst>
-              <a:ext uri="{FF2B5EF4-FFF2-40B4-BE49-F238E27FC236}">
-                <a16:creationId xmlns:a16="http://schemas.microsoft.com/office/drawing/2014/main" id="{B362863B-770E-5FA2-25CC-948566047750}"/>
-              </a:ext>
-            </a:extLst>
-          </p:cNvPr>
-          <p:cNvSpPr txBox="1"/>
-          <p:nvPr/>
-        </p:nvSpPr>
-        <p:spPr>
-          <a:xfrm>
-            <a:off x="609602" y="1223724"/>
-            <a:ext cx="8686796" cy="4700685"/>
-          </a:xfrm>
-          <a:prstGeom prst="rect">
-            <a:avLst/>
-          </a:prstGeom>
-          <a:noFill/>
-          <a:ln>
-            <a:noFill/>
-          </a:ln>
-        </p:spPr>
-        <p:txBody>
-          <a:bodyPr spcFirstLastPara="1" wrap="square" lIns="91425" tIns="45700" rIns="91425" bIns="45700" anchor="t" anchorCtr="0">
-            <a:noAutofit/>
-          </a:bodyPr>
-          <a:lstStyle>
-            <a:defPPr marR="0" lvl="0" algn="l" rtl="0">
-              <a:lnSpc>
-                <a:spcPct val="100000"/>
-              </a:lnSpc>
-              <a:spcBef>
-                <a:spcPts val="0"/>
-              </a:spcBef>
-              <a:spcAft>
-                <a:spcPts val="0"/>
-              </a:spcAft>
-            </a:defPPr>
-            <a:lvl1pPr marL="457200" marR="0" lvl="0" indent="-406400" algn="l" rtl="0">
-              <a:lnSpc>
-                <a:spcPct val="100000"/>
-              </a:lnSpc>
-              <a:spcBef>
-                <a:spcPts val="560"/>
-              </a:spcBef>
-              <a:spcAft>
-                <a:spcPts val="0"/>
-              </a:spcAft>
-              <a:buClr>
-                <a:schemeClr val="accent2"/>
-              </a:buClr>
-              <a:buSzPts val="2800"/>
-              <a:buFont typeface="Noto Sans Symbols"/>
-              <a:buChar char="❖"/>
-              <a:defRPr sz="2800" b="0" i="0" u="none" strike="noStrike" cap="none">
-                <a:solidFill>
-                  <a:schemeClr val="dk1"/>
-                </a:solidFill>
-                <a:latin typeface="Times New Roman"/>
-                <a:ea typeface="Times New Roman"/>
-                <a:cs typeface="Times New Roman"/>
-                <a:sym typeface="Times New Roman"/>
-              </a:defRPr>
-            </a:lvl1pPr>
-            <a:lvl2pPr marL="914400" marR="0" lvl="1" indent="-381000" algn="l" rtl="0">
-              <a:lnSpc>
-                <a:spcPct val="100000"/>
-              </a:lnSpc>
-              <a:spcBef>
-                <a:spcPts val="480"/>
-              </a:spcBef>
-              <a:spcAft>
-                <a:spcPts val="0"/>
-              </a:spcAft>
-              <a:buClr>
-                <a:srgbClr val="FF5050"/>
-              </a:buClr>
-              <a:buSzPts val="2400"/>
-              <a:buFont typeface="Noto Sans Symbols"/>
-              <a:buChar char="▪"/>
-              <a:defRPr sz="2400" b="0" i="0" u="none" strike="noStrike" cap="none">
-                <a:solidFill>
-                  <a:schemeClr val="dk1"/>
-                </a:solidFill>
-                <a:latin typeface="Times New Roman"/>
-                <a:ea typeface="Times New Roman"/>
-                <a:cs typeface="Times New Roman"/>
-                <a:sym typeface="Times New Roman"/>
-              </a:defRPr>
-            </a:lvl2pPr>
-            <a:lvl3pPr marL="1371600" marR="0" lvl="2" indent="-355600" algn="l" rtl="0">
-              <a:lnSpc>
-                <a:spcPct val="100000"/>
-              </a:lnSpc>
-              <a:spcBef>
-                <a:spcPts val="400"/>
-              </a:spcBef>
-              <a:spcAft>
-                <a:spcPts val="0"/>
-              </a:spcAft>
-              <a:buClr>
-                <a:srgbClr val="6699FF"/>
-              </a:buClr>
-              <a:buSzPts val="2000"/>
-              <a:buFont typeface="Times New Roman"/>
-              <a:buChar char="•"/>
-              <a:defRPr sz="2000" b="0" i="0" u="none" strike="noStrike" cap="none">
-                <a:solidFill>
-                  <a:schemeClr val="dk1"/>
-                </a:solidFill>
-                <a:latin typeface="Times New Roman"/>
-                <a:ea typeface="Times New Roman"/>
-                <a:cs typeface="Times New Roman"/>
-                <a:sym typeface="Times New Roman"/>
-              </a:defRPr>
-            </a:lvl3pPr>
-            <a:lvl4pPr marL="1828800" marR="0" lvl="3" indent="-355600" algn="l" rtl="0">
-              <a:lnSpc>
-                <a:spcPct val="100000"/>
-              </a:lnSpc>
-              <a:spcBef>
-                <a:spcPts val="400"/>
-              </a:spcBef>
-              <a:spcAft>
-                <a:spcPts val="0"/>
-              </a:spcAft>
-              <a:buClr>
-                <a:srgbClr val="FF5050"/>
-              </a:buClr>
-              <a:buSzPts val="2000"/>
-              <a:buFont typeface="Times New Roman"/>
-              <a:buChar char="o"/>
-              <a:defRPr sz="2000" b="0" i="0" u="none" strike="noStrike" cap="none">
-                <a:solidFill>
-                  <a:schemeClr val="dk1"/>
-                </a:solidFill>
-                <a:latin typeface="Times New Roman"/>
-                <a:ea typeface="Times New Roman"/>
-                <a:cs typeface="Times New Roman"/>
-                <a:sym typeface="Times New Roman"/>
-              </a:defRPr>
-            </a:lvl4pPr>
-            <a:lvl5pPr marL="2286000" marR="0" lvl="4" indent="-355600" algn="l" rtl="0">
-              <a:lnSpc>
-                <a:spcPct val="100000"/>
-              </a:lnSpc>
-              <a:spcBef>
-                <a:spcPts val="400"/>
-              </a:spcBef>
-              <a:spcAft>
-                <a:spcPts val="0"/>
-              </a:spcAft>
-              <a:buClr>
-                <a:srgbClr val="FF5050"/>
-              </a:buClr>
-              <a:buSzPts val="2000"/>
-              <a:buFont typeface="Times New Roman"/>
-              <a:buChar char="o"/>
-              <a:defRPr sz="2000" b="0" i="0" u="none" strike="noStrike" cap="none">
-                <a:solidFill>
-                  <a:schemeClr val="dk1"/>
-                </a:solidFill>
-                <a:latin typeface="Times New Roman"/>
-                <a:ea typeface="Times New Roman"/>
-                <a:cs typeface="Times New Roman"/>
-                <a:sym typeface="Times New Roman"/>
-              </a:defRPr>
-            </a:lvl5pPr>
-            <a:lvl6pPr marL="2743200" marR="0" lvl="5" indent="-355600" algn="l" rtl="0">
-              <a:lnSpc>
-                <a:spcPct val="100000"/>
-              </a:lnSpc>
-              <a:spcBef>
-                <a:spcPts val="400"/>
-              </a:spcBef>
-              <a:spcAft>
-                <a:spcPts val="0"/>
-              </a:spcAft>
-              <a:buClr>
-                <a:srgbClr val="FF5050"/>
-              </a:buClr>
-              <a:buSzPts val="2000"/>
-              <a:buFont typeface="Times New Roman"/>
-              <a:buChar char="o"/>
-              <a:defRPr sz="2000" b="0" i="0" u="none" strike="noStrike" cap="none">
-                <a:solidFill>
-                  <a:schemeClr val="dk1"/>
-                </a:solidFill>
-                <a:latin typeface="Times New Roman"/>
-                <a:ea typeface="Times New Roman"/>
-                <a:cs typeface="Times New Roman"/>
-                <a:sym typeface="Times New Roman"/>
-              </a:defRPr>
-            </a:lvl6pPr>
-            <a:lvl7pPr marL="3200400" marR="0" lvl="6" indent="-355600" algn="l" rtl="0">
-              <a:lnSpc>
-                <a:spcPct val="100000"/>
-              </a:lnSpc>
-              <a:spcBef>
-                <a:spcPts val="400"/>
-              </a:spcBef>
-              <a:spcAft>
-                <a:spcPts val="0"/>
-              </a:spcAft>
-              <a:buClr>
-                <a:srgbClr val="FF5050"/>
-              </a:buClr>
-              <a:buSzPts val="2000"/>
-              <a:buFont typeface="Times New Roman"/>
-              <a:buChar char="o"/>
-              <a:defRPr sz="2000" b="0" i="0" u="none" strike="noStrike" cap="none">
-                <a:solidFill>
-                  <a:schemeClr val="dk1"/>
-                </a:solidFill>
-                <a:latin typeface="Times New Roman"/>
-                <a:ea typeface="Times New Roman"/>
-                <a:cs typeface="Times New Roman"/>
-                <a:sym typeface="Times New Roman"/>
-              </a:defRPr>
-            </a:lvl7pPr>
-            <a:lvl8pPr marL="3657600" marR="0" lvl="7" indent="-355600" algn="l" rtl="0">
-              <a:lnSpc>
-                <a:spcPct val="100000"/>
-              </a:lnSpc>
-              <a:spcBef>
-                <a:spcPts val="400"/>
-              </a:spcBef>
-              <a:spcAft>
-                <a:spcPts val="0"/>
-              </a:spcAft>
-              <a:buClr>
-                <a:srgbClr val="FF5050"/>
-              </a:buClr>
-              <a:buSzPts val="2000"/>
-              <a:buFont typeface="Times New Roman"/>
-              <a:buChar char="o"/>
-              <a:defRPr sz="2000" b="0" i="0" u="none" strike="noStrike" cap="none">
-                <a:solidFill>
-                  <a:schemeClr val="dk1"/>
-                </a:solidFill>
-                <a:latin typeface="Times New Roman"/>
-                <a:ea typeface="Times New Roman"/>
-                <a:cs typeface="Times New Roman"/>
-                <a:sym typeface="Times New Roman"/>
-              </a:defRPr>
-            </a:lvl8pPr>
-            <a:lvl9pPr marL="4114800" marR="0" lvl="8" indent="-355600" algn="l" rtl="0">
-              <a:lnSpc>
-                <a:spcPct val="100000"/>
-              </a:lnSpc>
-              <a:spcBef>
-                <a:spcPts val="400"/>
-              </a:spcBef>
-              <a:spcAft>
-                <a:spcPts val="0"/>
-              </a:spcAft>
-              <a:buClr>
-                <a:srgbClr val="FF5050"/>
-              </a:buClr>
-              <a:buSzPts val="2000"/>
-              <a:buFont typeface="Times New Roman"/>
-              <a:buChar char="o"/>
-              <a:defRPr sz="2000" b="0" i="0" u="none" strike="noStrike" cap="none">
-                <a:solidFill>
-                  <a:schemeClr val="dk1"/>
-                </a:solidFill>
-                <a:latin typeface="Times New Roman"/>
-                <a:ea typeface="Times New Roman"/>
-                <a:cs typeface="Times New Roman"/>
-                <a:sym typeface="Times New Roman"/>
-              </a:defRPr>
-            </a:lvl9pPr>
-          </a:lstStyle>
-          <a:p>
-            <a:pPr>
-              <a:lnSpc>
-                <a:spcPct val="150000"/>
-              </a:lnSpc>
-            </a:pPr>
-            <a:r>
-              <a:rPr lang="zh-TW" altLang="en-US" sz="2000" dirty="0">
-                <a:latin typeface="Times New Roman" panose="02020603050405020304" pitchFamily="18" charset="0"/>
-                <a:ea typeface="標楷體" panose="03000509000000000000" pitchFamily="65" charset="-120"/>
-                <a:cs typeface="Times New Roman" panose="02020603050405020304" pitchFamily="18" charset="0"/>
-              </a:rPr>
-              <a:t>研究方向</a:t>
-            </a:r>
-            <a:endParaRPr lang="en-US" altLang="zh-TW" sz="2000" dirty="0">
-              <a:latin typeface="Times New Roman" panose="02020603050405020304" pitchFamily="18" charset="0"/>
-              <a:ea typeface="標楷體" panose="03000509000000000000" pitchFamily="65" charset="-120"/>
-              <a:cs typeface="Times New Roman" panose="02020603050405020304" pitchFamily="18" charset="0"/>
-            </a:endParaRPr>
-          </a:p>
-          <a:p>
-            <a:pPr lvl="1">
-              <a:lnSpc>
-                <a:spcPct val="150000"/>
-              </a:lnSpc>
-            </a:pPr>
-            <a:r>
-              <a:rPr lang="en-US" altLang="zh-TW" sz="1600" dirty="0" err="1">
-                <a:latin typeface="Times New Roman" panose="02020603050405020304" pitchFamily="18" charset="0"/>
-                <a:ea typeface="標楷體" panose="03000509000000000000" pitchFamily="65" charset="-120"/>
-                <a:cs typeface="Times New Roman" panose="02020603050405020304" pitchFamily="18" charset="0"/>
-              </a:rPr>
-              <a:t>DisplayCAL</a:t>
-            </a:r>
-            <a:r>
-              <a:rPr lang="en-US" altLang="zh-TW" sz="1600" dirty="0">
-                <a:latin typeface="Times New Roman" panose="02020603050405020304" pitchFamily="18" charset="0"/>
-                <a:ea typeface="標楷體" panose="03000509000000000000" pitchFamily="65" charset="-120"/>
-                <a:cs typeface="Times New Roman" panose="02020603050405020304" pitchFamily="18" charset="0"/>
-              </a:rPr>
-              <a:t> </a:t>
-            </a:r>
-            <a:r>
-              <a:rPr lang="zh-TW" altLang="en-US" sz="1600" dirty="0">
-                <a:latin typeface="Times New Roman" panose="02020603050405020304" pitchFamily="18" charset="0"/>
-                <a:ea typeface="標楷體" panose="03000509000000000000" pitchFamily="65" charset="-120"/>
-                <a:cs typeface="Times New Roman" panose="02020603050405020304" pitchFamily="18" charset="0"/>
-              </a:rPr>
-              <a:t>產生的 </a:t>
-            </a:r>
-            <a:r>
-              <a:rPr lang="en-US" altLang="zh-TW" sz="1600" dirty="0">
-                <a:latin typeface="Times New Roman" panose="02020603050405020304" pitchFamily="18" charset="0"/>
-                <a:ea typeface="標楷體" panose="03000509000000000000" pitchFamily="65" charset="-120"/>
-                <a:cs typeface="Times New Roman" panose="02020603050405020304" pitchFamily="18" charset="0"/>
-              </a:rPr>
-              <a:t>ICC </a:t>
-            </a:r>
-            <a:r>
-              <a:rPr lang="zh-TW" altLang="zh-TW" sz="1600" dirty="0">
-                <a:latin typeface="Times New Roman" panose="02020603050405020304" pitchFamily="18" charset="0"/>
-                <a:ea typeface="標楷體" panose="03000509000000000000" pitchFamily="65" charset="-120"/>
-                <a:cs typeface="Times New Roman" panose="02020603050405020304" pitchFamily="18" charset="0"/>
-              </a:rPr>
-              <a:t>Profile</a:t>
-            </a:r>
-            <a:r>
-              <a:rPr lang="zh-TW" altLang="en-US" sz="1600" dirty="0">
-                <a:latin typeface="Times New Roman" panose="02020603050405020304" pitchFamily="18" charset="0"/>
-                <a:ea typeface="標楷體" panose="03000509000000000000" pitchFamily="65" charset="-120"/>
-                <a:cs typeface="Times New Roman" panose="02020603050405020304" pitchFamily="18" charset="0"/>
-              </a:rPr>
-              <a:t> 中，</a:t>
-            </a:r>
-            <a:r>
-              <a:rPr lang="en-US" altLang="zh-TW" sz="1600" dirty="0">
-                <a:latin typeface="Times New Roman" panose="02020603050405020304" pitchFamily="18" charset="0"/>
-                <a:ea typeface="標楷體" panose="03000509000000000000" pitchFamily="65" charset="-120"/>
-                <a:cs typeface="Times New Roman" panose="02020603050405020304" pitchFamily="18" charset="0"/>
-              </a:rPr>
-              <a:t>VCGT</a:t>
-            </a:r>
-            <a:r>
-              <a:rPr lang="zh-TW" altLang="en-US" sz="1600" dirty="0">
-                <a:latin typeface="Times New Roman" panose="02020603050405020304" pitchFamily="18" charset="0"/>
-                <a:ea typeface="標楷體" panose="03000509000000000000" pitchFamily="65" charset="-120"/>
-                <a:cs typeface="Times New Roman" panose="02020603050405020304" pitchFamily="18" charset="0"/>
-              </a:rPr>
-              <a:t>是否可被 </a:t>
-            </a:r>
-            <a:r>
-              <a:rPr lang="en-US" altLang="zh-TW" sz="1600" dirty="0">
-                <a:latin typeface="Times New Roman" panose="02020603050405020304" pitchFamily="18" charset="0"/>
-                <a:ea typeface="標楷體" panose="03000509000000000000" pitchFamily="65" charset="-120"/>
-                <a:cs typeface="Times New Roman" panose="02020603050405020304" pitchFamily="18" charset="0"/>
-              </a:rPr>
-              <a:t>Windows calibration loader </a:t>
-            </a:r>
-            <a:r>
-              <a:rPr lang="zh-TW" altLang="en-US" sz="1600" dirty="0">
-                <a:latin typeface="Times New Roman" panose="02020603050405020304" pitchFamily="18" charset="0"/>
-                <a:ea typeface="標楷體" panose="03000509000000000000" pitchFamily="65" charset="-120"/>
-                <a:cs typeface="Times New Roman" panose="02020603050405020304" pitchFamily="18" charset="0"/>
-              </a:rPr>
-              <a:t>並使用</a:t>
-            </a:r>
-            <a:endParaRPr lang="en-US" altLang="zh-TW" sz="1600" dirty="0">
-              <a:latin typeface="Times New Roman" panose="02020603050405020304" pitchFamily="18" charset="0"/>
-              <a:ea typeface="標楷體" panose="03000509000000000000" pitchFamily="65" charset="-120"/>
-              <a:cs typeface="Times New Roman" panose="02020603050405020304" pitchFamily="18" charset="0"/>
-            </a:endParaRPr>
-          </a:p>
-          <a:p>
-            <a:pPr lvl="1">
-              <a:lnSpc>
-                <a:spcPct val="150000"/>
-              </a:lnSpc>
-            </a:pPr>
-            <a:r>
-              <a:rPr lang="en-US" altLang="zh-TW" sz="1600" dirty="0" err="1">
-                <a:latin typeface="Times New Roman" panose="02020603050405020304" pitchFamily="18" charset="0"/>
-                <a:ea typeface="標楷體" panose="03000509000000000000" pitchFamily="65" charset="-120"/>
-                <a:cs typeface="Times New Roman" panose="02020603050405020304" pitchFamily="18" charset="0"/>
-              </a:rPr>
-              <a:t>DisplayCAL</a:t>
-            </a:r>
-            <a:r>
-              <a:rPr lang="en-US" altLang="zh-TW" sz="1600" dirty="0">
-                <a:latin typeface="Times New Roman" panose="02020603050405020304" pitchFamily="18" charset="0"/>
-                <a:ea typeface="標楷體" panose="03000509000000000000" pitchFamily="65" charset="-120"/>
-                <a:cs typeface="Times New Roman" panose="02020603050405020304" pitchFamily="18" charset="0"/>
-              </a:rPr>
-              <a:t> </a:t>
-            </a:r>
-            <a:r>
-              <a:rPr lang="zh-TW" altLang="en-US" sz="1600" dirty="0">
-                <a:latin typeface="Times New Roman" panose="02020603050405020304" pitchFamily="18" charset="0"/>
-                <a:ea typeface="標楷體" panose="03000509000000000000" pitchFamily="65" charset="-120"/>
-                <a:cs typeface="Times New Roman" panose="02020603050405020304" pitchFamily="18" charset="0"/>
-              </a:rPr>
-              <a:t>產生的 </a:t>
-            </a:r>
-            <a:r>
-              <a:rPr lang="en-US" altLang="zh-TW" sz="1600" dirty="0">
-                <a:latin typeface="Times New Roman" panose="02020603050405020304" pitchFamily="18" charset="0"/>
-                <a:ea typeface="標楷體" panose="03000509000000000000" pitchFamily="65" charset="-120"/>
-                <a:cs typeface="Times New Roman" panose="02020603050405020304" pitchFamily="18" charset="0"/>
-              </a:rPr>
-              <a:t>ICC </a:t>
-            </a:r>
-            <a:r>
-              <a:rPr lang="zh-TW" altLang="zh-TW" sz="1600" dirty="0">
-                <a:latin typeface="Times New Roman" panose="02020603050405020304" pitchFamily="18" charset="0"/>
-                <a:ea typeface="標楷體" panose="03000509000000000000" pitchFamily="65" charset="-120"/>
-                <a:cs typeface="Times New Roman" panose="02020603050405020304" pitchFamily="18" charset="0"/>
-              </a:rPr>
-              <a:t>Profile</a:t>
-            </a:r>
-            <a:r>
-              <a:rPr lang="zh-TW" altLang="en-US" sz="1600" dirty="0">
-                <a:latin typeface="Times New Roman" panose="02020603050405020304" pitchFamily="18" charset="0"/>
-                <a:ea typeface="標楷體" panose="03000509000000000000" pitchFamily="65" charset="-120"/>
-                <a:cs typeface="Times New Roman" panose="02020603050405020304" pitchFamily="18" charset="0"/>
-              </a:rPr>
-              <a:t> 裡放了什麼 </a:t>
-            </a:r>
-            <a:r>
-              <a:rPr lang="en-US" altLang="zh-TW" sz="1600" dirty="0">
-                <a:latin typeface="Times New Roman" panose="02020603050405020304" pitchFamily="18" charset="0"/>
-                <a:ea typeface="標楷體" panose="03000509000000000000" pitchFamily="65" charset="-120"/>
-                <a:cs typeface="Times New Roman" panose="02020603050405020304" pitchFamily="18" charset="0"/>
-              </a:rPr>
-              <a:t>calibration data</a:t>
-            </a:r>
-          </a:p>
-          <a:p>
-            <a:pPr lvl="1">
-              <a:lnSpc>
-                <a:spcPct val="150000"/>
-              </a:lnSpc>
-            </a:pPr>
-            <a:r>
-              <a:rPr lang="en-US" altLang="zh-TW" sz="1600" dirty="0">
-                <a:latin typeface="Times New Roman" panose="02020603050405020304" pitchFamily="18" charset="0"/>
-                <a:ea typeface="標楷體" panose="03000509000000000000" pitchFamily="65" charset="-120"/>
-                <a:cs typeface="Times New Roman" panose="02020603050405020304" pitchFamily="18" charset="0"/>
-              </a:rPr>
-              <a:t>Calibration LUT </a:t>
-            </a:r>
-            <a:r>
-              <a:rPr lang="zh-TW" altLang="en-US" sz="1600" dirty="0">
-                <a:latin typeface="Times New Roman" panose="02020603050405020304" pitchFamily="18" charset="0"/>
-                <a:ea typeface="標楷體" panose="03000509000000000000" pitchFamily="65" charset="-120"/>
-                <a:cs typeface="Times New Roman" panose="02020603050405020304" pitchFamily="18" charset="0"/>
-              </a:rPr>
-              <a:t>怎麼計算、什麼樣子、儲存哪裡</a:t>
-            </a:r>
-            <a:endParaRPr lang="en-US" altLang="zh-TW" sz="1600" dirty="0">
-              <a:latin typeface="Times New Roman" panose="02020603050405020304" pitchFamily="18" charset="0"/>
-              <a:ea typeface="標楷體" panose="03000509000000000000" pitchFamily="65" charset="-120"/>
-              <a:cs typeface="Times New Roman" panose="02020603050405020304" pitchFamily="18" charset="0"/>
-            </a:endParaRPr>
-          </a:p>
-          <a:p>
-            <a:pPr lvl="1">
-              <a:lnSpc>
-                <a:spcPct val="150000"/>
-              </a:lnSpc>
-            </a:pPr>
-            <a:endParaRPr lang="en-US" altLang="zh-TW" sz="2000" dirty="0">
-              <a:latin typeface="Times New Roman" panose="02020603050405020304" pitchFamily="18" charset="0"/>
-              <a:ea typeface="標楷體" panose="03000509000000000000" pitchFamily="65" charset="-120"/>
-              <a:cs typeface="Times New Roman" panose="02020603050405020304" pitchFamily="18" charset="0"/>
-            </a:endParaRPr>
-          </a:p>
-          <a:p>
-            <a:pPr lvl="1">
-              <a:lnSpc>
-                <a:spcPct val="150000"/>
-              </a:lnSpc>
-            </a:pPr>
-            <a:endParaRPr lang="en-US" altLang="zh-TW" sz="1600" dirty="0">
-              <a:latin typeface="Times New Roman" panose="02020603050405020304" pitchFamily="18" charset="0"/>
-              <a:ea typeface="標楷體" panose="03000509000000000000" pitchFamily="65" charset="-120"/>
-              <a:cs typeface="Times New Roman" panose="02020603050405020304" pitchFamily="18" charset="0"/>
-            </a:endParaRPr>
-          </a:p>
-        </p:txBody>
-      </p:sp>
-      <p:sp>
-        <p:nvSpPr>
           <p:cNvPr id="37" name="文字方塊 36">
             <a:extLst>
               <a:ext uri="{FF2B5EF4-FFF2-40B4-BE49-F238E27FC236}">
@@ -5793,10 +5598,863 @@
           </a:p>
         </p:txBody>
       </p:sp>
+      <p:sp>
+        <p:nvSpPr>
+          <p:cNvPr id="7" name="文字版面配置區 6">
+            <a:extLst>
+              <a:ext uri="{FF2B5EF4-FFF2-40B4-BE49-F238E27FC236}">
+                <a16:creationId xmlns:a16="http://schemas.microsoft.com/office/drawing/2014/main" id="{CD09BAD2-DA31-372D-DFF4-D7CC21EBE4FD}"/>
+              </a:ext>
+            </a:extLst>
+          </p:cNvPr>
+          <p:cNvSpPr txBox="1"/>
+          <p:nvPr/>
+        </p:nvSpPr>
+        <p:spPr>
+          <a:xfrm>
+            <a:off x="609602" y="935857"/>
+            <a:ext cx="8686796" cy="4700685"/>
+          </a:xfrm>
+          <a:prstGeom prst="rect">
+            <a:avLst/>
+          </a:prstGeom>
+          <a:noFill/>
+          <a:ln>
+            <a:noFill/>
+          </a:ln>
+        </p:spPr>
+        <p:txBody>
+          <a:bodyPr spcFirstLastPara="1" wrap="square" lIns="91425" tIns="45700" rIns="91425" bIns="45700" anchor="t" anchorCtr="0">
+            <a:noAutofit/>
+          </a:bodyPr>
+          <a:lstStyle>
+            <a:defPPr marR="0" lvl="0" algn="l" rtl="0">
+              <a:lnSpc>
+                <a:spcPct val="100000"/>
+              </a:lnSpc>
+              <a:spcBef>
+                <a:spcPts val="0"/>
+              </a:spcBef>
+              <a:spcAft>
+                <a:spcPts val="0"/>
+              </a:spcAft>
+            </a:defPPr>
+            <a:lvl1pPr marL="457200" marR="0" lvl="0" indent="-406400" algn="l" rtl="0">
+              <a:lnSpc>
+                <a:spcPct val="100000"/>
+              </a:lnSpc>
+              <a:spcBef>
+                <a:spcPts val="560"/>
+              </a:spcBef>
+              <a:spcAft>
+                <a:spcPts val="0"/>
+              </a:spcAft>
+              <a:buClr>
+                <a:schemeClr val="accent2"/>
+              </a:buClr>
+              <a:buSzPts val="2800"/>
+              <a:buFont typeface="Noto Sans Symbols"/>
+              <a:buChar char="❖"/>
+              <a:defRPr sz="2800" b="0" i="0" u="none" strike="noStrike" cap="none">
+                <a:solidFill>
+                  <a:schemeClr val="dk1"/>
+                </a:solidFill>
+                <a:latin typeface="Times New Roman"/>
+                <a:ea typeface="Times New Roman"/>
+                <a:cs typeface="Times New Roman"/>
+                <a:sym typeface="Times New Roman"/>
+              </a:defRPr>
+            </a:lvl1pPr>
+            <a:lvl2pPr marL="914400" marR="0" lvl="1" indent="-381000" algn="l" rtl="0">
+              <a:lnSpc>
+                <a:spcPct val="100000"/>
+              </a:lnSpc>
+              <a:spcBef>
+                <a:spcPts val="480"/>
+              </a:spcBef>
+              <a:spcAft>
+                <a:spcPts val="0"/>
+              </a:spcAft>
+              <a:buClr>
+                <a:srgbClr val="FF5050"/>
+              </a:buClr>
+              <a:buSzPts val="2400"/>
+              <a:buFont typeface="Noto Sans Symbols"/>
+              <a:buChar char="▪"/>
+              <a:defRPr sz="2400" b="0" i="0" u="none" strike="noStrike" cap="none">
+                <a:solidFill>
+                  <a:schemeClr val="dk1"/>
+                </a:solidFill>
+                <a:latin typeface="Times New Roman"/>
+                <a:ea typeface="Times New Roman"/>
+                <a:cs typeface="Times New Roman"/>
+                <a:sym typeface="Times New Roman"/>
+              </a:defRPr>
+            </a:lvl2pPr>
+            <a:lvl3pPr marL="1371600" marR="0" lvl="2" indent="-355600" algn="l" rtl="0">
+              <a:lnSpc>
+                <a:spcPct val="100000"/>
+              </a:lnSpc>
+              <a:spcBef>
+                <a:spcPts val="400"/>
+              </a:spcBef>
+              <a:spcAft>
+                <a:spcPts val="0"/>
+              </a:spcAft>
+              <a:buClr>
+                <a:srgbClr val="6699FF"/>
+              </a:buClr>
+              <a:buSzPts val="2000"/>
+              <a:buFont typeface="Times New Roman"/>
+              <a:buChar char="•"/>
+              <a:defRPr sz="2000" b="0" i="0" u="none" strike="noStrike" cap="none">
+                <a:solidFill>
+                  <a:schemeClr val="dk1"/>
+                </a:solidFill>
+                <a:latin typeface="Times New Roman"/>
+                <a:ea typeface="Times New Roman"/>
+                <a:cs typeface="Times New Roman"/>
+                <a:sym typeface="Times New Roman"/>
+              </a:defRPr>
+            </a:lvl3pPr>
+            <a:lvl4pPr marL="1828800" marR="0" lvl="3" indent="-355600" algn="l" rtl="0">
+              <a:lnSpc>
+                <a:spcPct val="100000"/>
+              </a:lnSpc>
+              <a:spcBef>
+                <a:spcPts val="400"/>
+              </a:spcBef>
+              <a:spcAft>
+                <a:spcPts val="0"/>
+              </a:spcAft>
+              <a:buClr>
+                <a:srgbClr val="FF5050"/>
+              </a:buClr>
+              <a:buSzPts val="2000"/>
+              <a:buFont typeface="Times New Roman"/>
+              <a:buChar char="o"/>
+              <a:defRPr sz="2000" b="0" i="0" u="none" strike="noStrike" cap="none">
+                <a:solidFill>
+                  <a:schemeClr val="dk1"/>
+                </a:solidFill>
+                <a:latin typeface="Times New Roman"/>
+                <a:ea typeface="Times New Roman"/>
+                <a:cs typeface="Times New Roman"/>
+                <a:sym typeface="Times New Roman"/>
+              </a:defRPr>
+            </a:lvl4pPr>
+            <a:lvl5pPr marL="2286000" marR="0" lvl="4" indent="-355600" algn="l" rtl="0">
+              <a:lnSpc>
+                <a:spcPct val="100000"/>
+              </a:lnSpc>
+              <a:spcBef>
+                <a:spcPts val="400"/>
+              </a:spcBef>
+              <a:spcAft>
+                <a:spcPts val="0"/>
+              </a:spcAft>
+              <a:buClr>
+                <a:srgbClr val="FF5050"/>
+              </a:buClr>
+              <a:buSzPts val="2000"/>
+              <a:buFont typeface="Times New Roman"/>
+              <a:buChar char="o"/>
+              <a:defRPr sz="2000" b="0" i="0" u="none" strike="noStrike" cap="none">
+                <a:solidFill>
+                  <a:schemeClr val="dk1"/>
+                </a:solidFill>
+                <a:latin typeface="Times New Roman"/>
+                <a:ea typeface="Times New Roman"/>
+                <a:cs typeface="Times New Roman"/>
+                <a:sym typeface="Times New Roman"/>
+              </a:defRPr>
+            </a:lvl5pPr>
+            <a:lvl6pPr marL="2743200" marR="0" lvl="5" indent="-355600" algn="l" rtl="0">
+              <a:lnSpc>
+                <a:spcPct val="100000"/>
+              </a:lnSpc>
+              <a:spcBef>
+                <a:spcPts val="400"/>
+              </a:spcBef>
+              <a:spcAft>
+                <a:spcPts val="0"/>
+              </a:spcAft>
+              <a:buClr>
+                <a:srgbClr val="FF5050"/>
+              </a:buClr>
+              <a:buSzPts val="2000"/>
+              <a:buFont typeface="Times New Roman"/>
+              <a:buChar char="o"/>
+              <a:defRPr sz="2000" b="0" i="0" u="none" strike="noStrike" cap="none">
+                <a:solidFill>
+                  <a:schemeClr val="dk1"/>
+                </a:solidFill>
+                <a:latin typeface="Times New Roman"/>
+                <a:ea typeface="Times New Roman"/>
+                <a:cs typeface="Times New Roman"/>
+                <a:sym typeface="Times New Roman"/>
+              </a:defRPr>
+            </a:lvl6pPr>
+            <a:lvl7pPr marL="3200400" marR="0" lvl="6" indent="-355600" algn="l" rtl="0">
+              <a:lnSpc>
+                <a:spcPct val="100000"/>
+              </a:lnSpc>
+              <a:spcBef>
+                <a:spcPts val="400"/>
+              </a:spcBef>
+              <a:spcAft>
+                <a:spcPts val="0"/>
+              </a:spcAft>
+              <a:buClr>
+                <a:srgbClr val="FF5050"/>
+              </a:buClr>
+              <a:buSzPts val="2000"/>
+              <a:buFont typeface="Times New Roman"/>
+              <a:buChar char="o"/>
+              <a:defRPr sz="2000" b="0" i="0" u="none" strike="noStrike" cap="none">
+                <a:solidFill>
+                  <a:schemeClr val="dk1"/>
+                </a:solidFill>
+                <a:latin typeface="Times New Roman"/>
+                <a:ea typeface="Times New Roman"/>
+                <a:cs typeface="Times New Roman"/>
+                <a:sym typeface="Times New Roman"/>
+              </a:defRPr>
+            </a:lvl7pPr>
+            <a:lvl8pPr marL="3657600" marR="0" lvl="7" indent="-355600" algn="l" rtl="0">
+              <a:lnSpc>
+                <a:spcPct val="100000"/>
+              </a:lnSpc>
+              <a:spcBef>
+                <a:spcPts val="400"/>
+              </a:spcBef>
+              <a:spcAft>
+                <a:spcPts val="0"/>
+              </a:spcAft>
+              <a:buClr>
+                <a:srgbClr val="FF5050"/>
+              </a:buClr>
+              <a:buSzPts val="2000"/>
+              <a:buFont typeface="Times New Roman"/>
+              <a:buChar char="o"/>
+              <a:defRPr sz="2000" b="0" i="0" u="none" strike="noStrike" cap="none">
+                <a:solidFill>
+                  <a:schemeClr val="dk1"/>
+                </a:solidFill>
+                <a:latin typeface="Times New Roman"/>
+                <a:ea typeface="Times New Roman"/>
+                <a:cs typeface="Times New Roman"/>
+                <a:sym typeface="Times New Roman"/>
+              </a:defRPr>
+            </a:lvl8pPr>
+            <a:lvl9pPr marL="4114800" marR="0" lvl="8" indent="-355600" algn="l" rtl="0">
+              <a:lnSpc>
+                <a:spcPct val="100000"/>
+              </a:lnSpc>
+              <a:spcBef>
+                <a:spcPts val="400"/>
+              </a:spcBef>
+              <a:spcAft>
+                <a:spcPts val="0"/>
+              </a:spcAft>
+              <a:buClr>
+                <a:srgbClr val="FF5050"/>
+              </a:buClr>
+              <a:buSzPts val="2000"/>
+              <a:buFont typeface="Times New Roman"/>
+              <a:buChar char="o"/>
+              <a:defRPr sz="2000" b="0" i="0" u="none" strike="noStrike" cap="none">
+                <a:solidFill>
+                  <a:schemeClr val="dk1"/>
+                </a:solidFill>
+                <a:latin typeface="Times New Roman"/>
+                <a:ea typeface="Times New Roman"/>
+                <a:cs typeface="Times New Roman"/>
+                <a:sym typeface="Times New Roman"/>
+              </a:defRPr>
+            </a:lvl9pPr>
+          </a:lstStyle>
+          <a:p>
+            <a:pPr>
+              <a:lnSpc>
+                <a:spcPct val="150000"/>
+              </a:lnSpc>
+            </a:pPr>
+            <a:r>
+              <a:rPr lang="en-US" altLang="zh-TW" sz="2000" dirty="0">
+                <a:solidFill>
+                  <a:schemeClr val="tx1"/>
+                </a:solidFill>
+                <a:latin typeface="Times New Roman" panose="02020603050405020304" pitchFamily="18" charset="0"/>
+                <a:ea typeface="標楷體" panose="03000509000000000000" pitchFamily="65" charset="-120"/>
+                <a:cs typeface="Times New Roman" panose="02020603050405020304" pitchFamily="18" charset="0"/>
+              </a:rPr>
+              <a:t>ICC </a:t>
+            </a:r>
+            <a:r>
+              <a:rPr lang="en-US" altLang="zh-TW" sz="2000" dirty="0" err="1">
+                <a:solidFill>
+                  <a:schemeClr val="tx1"/>
+                </a:solidFill>
+                <a:latin typeface="Times New Roman" panose="02020603050405020304" pitchFamily="18" charset="0"/>
+                <a:ea typeface="標楷體" panose="03000509000000000000" pitchFamily="65" charset="-120"/>
+                <a:cs typeface="Times New Roman" panose="02020603050405020304" pitchFamily="18" charset="0"/>
+              </a:rPr>
+              <a:t>Profiole</a:t>
+            </a:r>
+            <a:r>
+              <a:rPr lang="en-US" altLang="zh-TW" sz="2000" dirty="0">
+                <a:solidFill>
+                  <a:schemeClr val="tx1"/>
+                </a:solidFill>
+                <a:latin typeface="Times New Roman" panose="02020603050405020304" pitchFamily="18" charset="0"/>
+                <a:ea typeface="標楷體" panose="03000509000000000000" pitchFamily="65" charset="-120"/>
+                <a:cs typeface="Times New Roman" panose="02020603050405020304" pitchFamily="18" charset="0"/>
+              </a:rPr>
+              <a:t> Gamma</a:t>
+            </a:r>
+            <a:r>
+              <a:rPr lang="zh-TW" altLang="en-US" sz="2000" dirty="0">
+                <a:solidFill>
+                  <a:schemeClr val="tx1"/>
+                </a:solidFill>
+                <a:latin typeface="Times New Roman" panose="02020603050405020304" pitchFamily="18" charset="0"/>
+                <a:ea typeface="標楷體" panose="03000509000000000000" pitchFamily="65" charset="-120"/>
+                <a:cs typeface="Times New Roman" panose="02020603050405020304" pitchFamily="18" charset="0"/>
+              </a:rPr>
+              <a:t> 與校正曲線量測</a:t>
+            </a:r>
+            <a:endParaRPr lang="en-US" altLang="zh-TW" sz="2000" dirty="0">
+              <a:solidFill>
+                <a:schemeClr val="tx1"/>
+              </a:solidFill>
+              <a:latin typeface="Times New Roman" panose="02020603050405020304" pitchFamily="18" charset="0"/>
+              <a:ea typeface="標楷體" panose="03000509000000000000" pitchFamily="65" charset="-120"/>
+              <a:cs typeface="Times New Roman" panose="02020603050405020304" pitchFamily="18" charset="0"/>
+            </a:endParaRPr>
+          </a:p>
+          <a:p>
+            <a:pPr lvl="1">
+              <a:lnSpc>
+                <a:spcPts val="3000"/>
+              </a:lnSpc>
+            </a:pPr>
+            <a:r>
+              <a:rPr lang="zh-TW" altLang="en-US" sz="1600" dirty="0">
+                <a:solidFill>
+                  <a:schemeClr val="tx1"/>
+                </a:solidFill>
+                <a:latin typeface="Times New Roman" panose="02020603050405020304" pitchFamily="18" charset="0"/>
+                <a:ea typeface="標楷體" panose="03000509000000000000" pitchFamily="65" charset="-120"/>
+                <a:cs typeface="Times New Roman" panose="02020603050405020304" pitchFamily="18" charset="0"/>
+              </a:rPr>
+              <a:t>測試項目</a:t>
+            </a:r>
+            <a:r>
+              <a:rPr lang="en-US" altLang="zh-TW" sz="1600" dirty="0">
+                <a:solidFill>
+                  <a:schemeClr val="tx1"/>
+                </a:solidFill>
+                <a:latin typeface="Times New Roman" panose="02020603050405020304" pitchFamily="18" charset="0"/>
+                <a:ea typeface="標楷體" panose="03000509000000000000" pitchFamily="65" charset="-120"/>
+                <a:cs typeface="Times New Roman" panose="02020603050405020304" pitchFamily="18" charset="0"/>
+              </a:rPr>
+              <a:t>:</a:t>
+            </a:r>
+            <a:r>
+              <a:rPr lang="zh-TW" altLang="en-US" sz="1600" dirty="0">
+                <a:solidFill>
+                  <a:schemeClr val="tx1"/>
+                </a:solidFill>
+                <a:latin typeface="Times New Roman" panose="02020603050405020304" pitchFamily="18" charset="0"/>
+                <a:ea typeface="標楷體" panose="03000509000000000000" pitchFamily="65" charset="-120"/>
+                <a:cs typeface="Times New Roman" panose="02020603050405020304" pitchFamily="18" charset="0"/>
+              </a:rPr>
+              <a:t> </a:t>
+            </a:r>
+            <a:r>
+              <a:rPr lang="en-US" altLang="zh-TW" sz="1600" dirty="0">
+                <a:solidFill>
+                  <a:schemeClr val="tx1"/>
+                </a:solidFill>
+                <a:latin typeface="Times New Roman" panose="02020603050405020304" pitchFamily="18" charset="0"/>
+                <a:ea typeface="標楷體" panose="03000509000000000000" pitchFamily="65" charset="-120"/>
+                <a:cs typeface="Times New Roman" panose="02020603050405020304" pitchFamily="18" charset="0"/>
+              </a:rPr>
+              <a:t>Gamma 1.8 </a:t>
+            </a:r>
+            <a:r>
+              <a:rPr lang="zh-TW" altLang="en-US" sz="1600" dirty="0">
+                <a:solidFill>
+                  <a:schemeClr val="tx1"/>
+                </a:solidFill>
+                <a:latin typeface="Times New Roman" panose="02020603050405020304" pitchFamily="18" charset="0"/>
+                <a:ea typeface="標楷體" panose="03000509000000000000" pitchFamily="65" charset="-120"/>
+                <a:cs typeface="Times New Roman" panose="02020603050405020304" pitchFamily="18" charset="0"/>
+              </a:rPr>
+              <a:t>  </a:t>
+            </a:r>
+            <a:r>
+              <a:rPr lang="en-US" altLang="zh-TW" sz="1600" dirty="0">
+                <a:solidFill>
+                  <a:schemeClr val="tx1"/>
+                </a:solidFill>
+                <a:latin typeface="Times New Roman" panose="02020603050405020304" pitchFamily="18" charset="0"/>
+                <a:ea typeface="標楷體" panose="03000509000000000000" pitchFamily="65" charset="-120"/>
+                <a:cs typeface="Times New Roman" panose="02020603050405020304" pitchFamily="18" charset="0"/>
+              </a:rPr>
+              <a:t>2.0 </a:t>
+            </a:r>
+            <a:r>
+              <a:rPr lang="zh-TW" altLang="en-US" sz="1600" dirty="0">
+                <a:solidFill>
+                  <a:schemeClr val="tx1"/>
+                </a:solidFill>
+                <a:latin typeface="Times New Roman" panose="02020603050405020304" pitchFamily="18" charset="0"/>
+                <a:ea typeface="標楷體" panose="03000509000000000000" pitchFamily="65" charset="-120"/>
+                <a:cs typeface="Times New Roman" panose="02020603050405020304" pitchFamily="18" charset="0"/>
+              </a:rPr>
+              <a:t>  </a:t>
+            </a:r>
+            <a:r>
+              <a:rPr lang="en-US" altLang="zh-TW" sz="1600" dirty="0">
+                <a:solidFill>
+                  <a:schemeClr val="tx1"/>
+                </a:solidFill>
+                <a:latin typeface="Times New Roman" panose="02020603050405020304" pitchFamily="18" charset="0"/>
+                <a:ea typeface="標楷體" panose="03000509000000000000" pitchFamily="65" charset="-120"/>
+                <a:cs typeface="Times New Roman" panose="02020603050405020304" pitchFamily="18" charset="0"/>
+              </a:rPr>
+              <a:t>2.2 </a:t>
+            </a:r>
+            <a:r>
+              <a:rPr lang="zh-TW" altLang="en-US" sz="1600" dirty="0">
+                <a:solidFill>
+                  <a:schemeClr val="tx1"/>
+                </a:solidFill>
+                <a:latin typeface="Times New Roman" panose="02020603050405020304" pitchFamily="18" charset="0"/>
+                <a:ea typeface="標楷體" panose="03000509000000000000" pitchFamily="65" charset="-120"/>
+                <a:cs typeface="Times New Roman" panose="02020603050405020304" pitchFamily="18" charset="0"/>
+              </a:rPr>
+              <a:t>  </a:t>
+            </a:r>
+            <a:r>
+              <a:rPr lang="en-US" altLang="zh-TW" sz="1600" dirty="0">
+                <a:solidFill>
+                  <a:schemeClr val="tx1"/>
+                </a:solidFill>
+                <a:latin typeface="Times New Roman" panose="02020603050405020304" pitchFamily="18" charset="0"/>
+                <a:ea typeface="標楷體" panose="03000509000000000000" pitchFamily="65" charset="-120"/>
+                <a:cs typeface="Times New Roman" panose="02020603050405020304" pitchFamily="18" charset="0"/>
+              </a:rPr>
+              <a:t>2.6</a:t>
+            </a:r>
+            <a:r>
+              <a:rPr lang="zh-TW" altLang="en-US" sz="1600" dirty="0">
+                <a:solidFill>
+                  <a:schemeClr val="tx1"/>
+                </a:solidFill>
+                <a:latin typeface="Times New Roman" panose="02020603050405020304" pitchFamily="18" charset="0"/>
+                <a:ea typeface="標楷體" panose="03000509000000000000" pitchFamily="65" charset="-120"/>
+                <a:cs typeface="Times New Roman" panose="02020603050405020304" pitchFamily="18" charset="0"/>
+              </a:rPr>
+              <a:t>，搭配三組色溫進行測試</a:t>
+            </a:r>
+            <a:endParaRPr lang="en-US" altLang="zh-TW" sz="1200" dirty="0">
+              <a:solidFill>
+                <a:schemeClr val="tx1"/>
+              </a:solidFill>
+              <a:latin typeface="Times New Roman" panose="02020603050405020304" pitchFamily="18" charset="0"/>
+              <a:ea typeface="標楷體" panose="03000509000000000000" pitchFamily="65" charset="-120"/>
+              <a:cs typeface="Times New Roman" panose="02020603050405020304" pitchFamily="18" charset="0"/>
+            </a:endParaRPr>
+          </a:p>
+          <a:p>
+            <a:pPr lvl="1">
+              <a:lnSpc>
+                <a:spcPts val="3000"/>
+              </a:lnSpc>
+            </a:pPr>
+            <a:r>
+              <a:rPr lang="zh-TW" altLang="en-US" sz="1600" dirty="0">
+                <a:solidFill>
+                  <a:schemeClr val="tx1"/>
+                </a:solidFill>
+                <a:latin typeface="Times New Roman" panose="02020603050405020304" pitchFamily="18" charset="0"/>
+                <a:ea typeface="標楷體" panose="03000509000000000000" pitchFamily="65" charset="-120"/>
+                <a:cs typeface="Times New Roman" panose="02020603050405020304" pitchFamily="18" charset="0"/>
+              </a:rPr>
+              <a:t>量測標準</a:t>
+            </a:r>
+            <a:r>
+              <a:rPr lang="en-US" altLang="zh-TW" sz="1600" dirty="0">
+                <a:solidFill>
+                  <a:schemeClr val="tx1"/>
+                </a:solidFill>
+                <a:latin typeface="Times New Roman" panose="02020603050405020304" pitchFamily="18" charset="0"/>
+                <a:ea typeface="標楷體" panose="03000509000000000000" pitchFamily="65" charset="-120"/>
+                <a:cs typeface="Times New Roman" panose="02020603050405020304" pitchFamily="18" charset="0"/>
+              </a:rPr>
+              <a:t>:</a:t>
+            </a:r>
+            <a:r>
+              <a:rPr lang="zh-TW" altLang="en-US" sz="1600" dirty="0">
+                <a:solidFill>
+                  <a:schemeClr val="tx1"/>
+                </a:solidFill>
+                <a:latin typeface="Times New Roman" panose="02020603050405020304" pitchFamily="18" charset="0"/>
+                <a:ea typeface="標楷體" panose="03000509000000000000" pitchFamily="65" charset="-120"/>
+                <a:cs typeface="Times New Roman" panose="02020603050405020304" pitchFamily="18" charset="0"/>
+              </a:rPr>
+              <a:t> </a:t>
+            </a:r>
+            <a:r>
+              <a:rPr lang="en-US" altLang="zh-TW" sz="1600" dirty="0">
+                <a:solidFill>
+                  <a:schemeClr val="tx1"/>
+                </a:solidFill>
+                <a:latin typeface="Times New Roman" panose="02020603050405020304" pitchFamily="18" charset="0"/>
+                <a:ea typeface="標楷體" panose="03000509000000000000" pitchFamily="65" charset="-120"/>
+                <a:cs typeface="Times New Roman" panose="02020603050405020304" pitchFamily="18" charset="0"/>
+              </a:rPr>
+              <a:t>Gamma Target </a:t>
+            </a:r>
+            <a:r>
+              <a:rPr lang="zh-TW" altLang="en-US" sz="1600" dirty="0">
+                <a:solidFill>
+                  <a:schemeClr val="tx1"/>
+                </a:solidFill>
+                <a:latin typeface="Times New Roman" panose="02020603050405020304" pitchFamily="18" charset="0"/>
+                <a:ea typeface="標楷體" panose="03000509000000000000" pitchFamily="65" charset="-120"/>
+                <a:cs typeface="Times New Roman" panose="02020603050405020304" pitchFamily="18" charset="0"/>
+              </a:rPr>
+              <a:t>誤差為 </a:t>
+            </a:r>
+            <a:r>
+              <a:rPr lang="en-US" altLang="zh-TW" sz="1600" dirty="0">
+                <a:solidFill>
+                  <a:schemeClr val="tx1"/>
+                </a:solidFill>
+                <a:latin typeface="Times New Roman" panose="02020603050405020304" pitchFamily="18" charset="0"/>
+                <a:ea typeface="標楷體" panose="03000509000000000000" pitchFamily="65" charset="-120"/>
+                <a:cs typeface="Times New Roman" panose="02020603050405020304" pitchFamily="18" charset="0"/>
+              </a:rPr>
+              <a:t>± 0.05</a:t>
+            </a:r>
+            <a:r>
+              <a:rPr lang="zh-TW" altLang="en-US" sz="1600" dirty="0">
+                <a:solidFill>
+                  <a:schemeClr val="tx1"/>
+                </a:solidFill>
+                <a:latin typeface="Times New Roman" panose="02020603050405020304" pitchFamily="18" charset="0"/>
+                <a:ea typeface="標楷體" panose="03000509000000000000" pitchFamily="65" charset="-120"/>
+                <a:cs typeface="Times New Roman" panose="02020603050405020304" pitchFamily="18" charset="0"/>
+              </a:rPr>
+              <a:t>、色溫誤差為 </a:t>
+            </a:r>
+            <a:r>
+              <a:rPr lang="en-US" altLang="zh-TW" sz="1600" dirty="0">
+                <a:solidFill>
+                  <a:schemeClr val="tx1"/>
+                </a:solidFill>
+                <a:latin typeface="Times New Roman" panose="02020603050405020304" pitchFamily="18" charset="0"/>
+                <a:ea typeface="標楷體" panose="03000509000000000000" pitchFamily="65" charset="-120"/>
+                <a:cs typeface="Times New Roman" panose="02020603050405020304" pitchFamily="18" charset="0"/>
+              </a:rPr>
+              <a:t>± 1000k</a:t>
+            </a:r>
+          </a:p>
+          <a:p>
+            <a:pPr lvl="1">
+              <a:lnSpc>
+                <a:spcPct val="150000"/>
+              </a:lnSpc>
+            </a:pPr>
+            <a:endParaRPr lang="en-US" altLang="zh-TW" sz="1600" dirty="0">
+              <a:solidFill>
+                <a:schemeClr val="tx1"/>
+              </a:solidFill>
+              <a:latin typeface="Times New Roman" panose="02020603050405020304" pitchFamily="18" charset="0"/>
+              <a:ea typeface="標楷體" panose="03000509000000000000" pitchFamily="65" charset="-120"/>
+              <a:cs typeface="Times New Roman" panose="02020603050405020304" pitchFamily="18" charset="0"/>
+            </a:endParaRPr>
+          </a:p>
+        </p:txBody>
+      </p:sp>
     </p:spTree>
     <p:extLst>
       <p:ext uri="{BB962C8B-B14F-4D97-AF65-F5344CB8AC3E}">
         <p14:creationId xmlns:p14="http://schemas.microsoft.com/office/powerpoint/2010/main" val="2501487523"/>
+      </p:ext>
+    </p:extLst>
+  </p:cSld>
+  <p:clrMapOvr>
+    <a:masterClrMapping/>
+  </p:clrMapOvr>
+</p:sld>
+</file>
+
+<file path=ppt/slides/slide2.xml><?xml version="1.0" encoding="utf-8"?>
+<p:sld xmlns:a="http://schemas.openxmlformats.org/drawingml/2006/main" xmlns:r="http://schemas.openxmlformats.org/officeDocument/2006/relationships" xmlns:p="http://schemas.openxmlformats.org/presentationml/2006/main">
+  <p:cSld>
+    <p:spTree>
+      <p:nvGrpSpPr>
+        <p:cNvPr id="1" name="">
+          <a:extLst>
+            <a:ext uri="{FF2B5EF4-FFF2-40B4-BE49-F238E27FC236}">
+              <a16:creationId xmlns:a16="http://schemas.microsoft.com/office/drawing/2014/main" id="{C25E9AAA-7E36-1E17-83F9-FD3A18A28BE9}"/>
+            </a:ext>
+          </a:extLst>
+        </p:cNvPr>
+        <p:cNvGrpSpPr/>
+        <p:nvPr/>
+      </p:nvGrpSpPr>
+      <p:grpSpPr>
+        <a:xfrm>
+          <a:off x="0" y="0"/>
+          <a:ext cx="0" cy="0"/>
+          <a:chOff x="0" y="0"/>
+          <a:chExt cx="0" cy="0"/>
+        </a:xfrm>
+      </p:grpSpPr>
+      <p:sp>
+        <p:nvSpPr>
+          <p:cNvPr id="15" name="標題 1">
+            <a:extLst>
+              <a:ext uri="{FF2B5EF4-FFF2-40B4-BE49-F238E27FC236}">
+                <a16:creationId xmlns:a16="http://schemas.microsoft.com/office/drawing/2014/main" id="{142C8726-E890-9988-40FC-8984FDA21FEE}"/>
+              </a:ext>
+            </a:extLst>
+          </p:cNvPr>
+          <p:cNvSpPr>
+            <a:spLocks noGrp="1"/>
+          </p:cNvSpPr>
+          <p:nvPr>
+            <p:ph type="title"/>
+          </p:nvPr>
+        </p:nvSpPr>
+        <p:spPr>
+          <a:xfrm>
+            <a:off x="609602" y="609600"/>
+            <a:ext cx="8077200" cy="533400"/>
+          </a:xfrm>
+          <a:ln>
+            <a:noFill/>
+          </a:ln>
+        </p:spPr>
+        <p:txBody>
+          <a:bodyPr/>
+          <a:lstStyle/>
+          <a:p>
+            <a:r>
+              <a:rPr lang="zh-TW" altLang="en-US" dirty="0">
+                <a:latin typeface="Times New Roman" panose="02020603050405020304" pitchFamily="18" charset="0"/>
+                <a:ea typeface="標楷體" panose="03000509000000000000" pitchFamily="65" charset="-120"/>
+                <a:cs typeface="Times New Roman" panose="02020603050405020304" pitchFamily="18" charset="0"/>
+              </a:rPr>
+              <a:t>本次進度</a:t>
+            </a:r>
+            <a:r>
+              <a:rPr lang="en-US" altLang="zh-TW" dirty="0">
+                <a:latin typeface="Times New Roman" panose="02020603050405020304" pitchFamily="18" charset="0"/>
+                <a:ea typeface="標楷體" panose="03000509000000000000" pitchFamily="65" charset="-120"/>
+                <a:cs typeface="Times New Roman" panose="02020603050405020304" pitchFamily="18" charset="0"/>
+              </a:rPr>
+              <a:t>:</a:t>
+            </a:r>
+            <a:r>
+              <a:rPr lang="zh-TW" altLang="en-US" dirty="0">
+                <a:latin typeface="Times New Roman" panose="02020603050405020304" pitchFamily="18" charset="0"/>
+                <a:ea typeface="標楷體" panose="03000509000000000000" pitchFamily="65" charset="-120"/>
+                <a:cs typeface="Times New Roman" panose="02020603050405020304" pitchFamily="18" charset="0"/>
+              </a:rPr>
+              <a:t> </a:t>
+            </a:r>
+            <a:r>
+              <a:rPr lang="en-US" altLang="zh-TW" dirty="0" err="1">
+                <a:latin typeface="Times New Roman" panose="02020603050405020304" pitchFamily="18" charset="0"/>
+                <a:ea typeface="標楷體" panose="03000509000000000000" pitchFamily="65" charset="-120"/>
+                <a:cs typeface="Times New Roman" panose="02020603050405020304" pitchFamily="18" charset="0"/>
+              </a:rPr>
+              <a:t>DisplayCAL</a:t>
+            </a:r>
+            <a:endParaRPr lang="zh-TW" altLang="en-US" dirty="0">
+              <a:latin typeface="Times New Roman" panose="02020603050405020304" pitchFamily="18" charset="0"/>
+              <a:ea typeface="標楷體" panose="03000509000000000000" pitchFamily="65" charset="-120"/>
+              <a:cs typeface="Times New Roman" panose="02020603050405020304" pitchFamily="18" charset="0"/>
+            </a:endParaRPr>
+          </a:p>
+        </p:txBody>
+      </p:sp>
+      <p:pic>
+        <p:nvPicPr>
+          <p:cNvPr id="3" name="圖片 2">
+            <a:extLst>
+              <a:ext uri="{FF2B5EF4-FFF2-40B4-BE49-F238E27FC236}">
+                <a16:creationId xmlns:a16="http://schemas.microsoft.com/office/drawing/2014/main" id="{F659FC18-5835-84BA-E507-82D126A8BE9D}"/>
+              </a:ext>
+            </a:extLst>
+          </p:cNvPr>
+          <p:cNvPicPr>
+            <a:picLocks noChangeAspect="1"/>
+          </p:cNvPicPr>
+          <p:nvPr/>
+        </p:nvPicPr>
+        <p:blipFill>
+          <a:blip r:embed="rId3"/>
+          <a:stretch>
+            <a:fillRect/>
+          </a:stretch>
+        </p:blipFill>
+        <p:spPr>
+          <a:xfrm>
+            <a:off x="429952" y="1430866"/>
+            <a:ext cx="9046096" cy="4621880"/>
+          </a:xfrm>
+          <a:prstGeom prst="rect">
+            <a:avLst/>
+          </a:prstGeom>
+        </p:spPr>
+      </p:pic>
+    </p:spTree>
+    <p:extLst>
+      <p:ext uri="{BB962C8B-B14F-4D97-AF65-F5344CB8AC3E}">
+        <p14:creationId xmlns:p14="http://schemas.microsoft.com/office/powerpoint/2010/main" val="2009003809"/>
+      </p:ext>
+    </p:extLst>
+  </p:cSld>
+  <p:clrMapOvr>
+    <a:masterClrMapping/>
+  </p:clrMapOvr>
+</p:sld>
+</file>
+
+<file path=ppt/slides/slide3.xml><?xml version="1.0" encoding="utf-8"?>
+<p:sld xmlns:a="http://schemas.openxmlformats.org/drawingml/2006/main" xmlns:r="http://schemas.openxmlformats.org/officeDocument/2006/relationships" xmlns:p="http://schemas.openxmlformats.org/presentationml/2006/main">
+  <p:cSld>
+    <p:spTree>
+      <p:nvGrpSpPr>
+        <p:cNvPr id="1" name="">
+          <a:extLst>
+            <a:ext uri="{FF2B5EF4-FFF2-40B4-BE49-F238E27FC236}">
+              <a16:creationId xmlns:a16="http://schemas.microsoft.com/office/drawing/2014/main" id="{C25E9AAA-7E36-1E17-83F9-FD3A18A28BE9}"/>
+            </a:ext>
+          </a:extLst>
+        </p:cNvPr>
+        <p:cNvGrpSpPr/>
+        <p:nvPr/>
+      </p:nvGrpSpPr>
+      <p:grpSpPr>
+        <a:xfrm>
+          <a:off x="0" y="0"/>
+          <a:ext cx="0" cy="0"/>
+          <a:chOff x="0" y="0"/>
+          <a:chExt cx="0" cy="0"/>
+        </a:xfrm>
+      </p:grpSpPr>
+      <p:sp>
+        <p:nvSpPr>
+          <p:cNvPr id="15" name="標題 1">
+            <a:extLst>
+              <a:ext uri="{FF2B5EF4-FFF2-40B4-BE49-F238E27FC236}">
+                <a16:creationId xmlns:a16="http://schemas.microsoft.com/office/drawing/2014/main" id="{142C8726-E890-9988-40FC-8984FDA21FEE}"/>
+              </a:ext>
+            </a:extLst>
+          </p:cNvPr>
+          <p:cNvSpPr>
+            <a:spLocks noGrp="1"/>
+          </p:cNvSpPr>
+          <p:nvPr>
+            <p:ph type="title"/>
+          </p:nvPr>
+        </p:nvSpPr>
+        <p:spPr>
+          <a:xfrm>
+            <a:off x="609602" y="609600"/>
+            <a:ext cx="8077200" cy="533400"/>
+          </a:xfrm>
+          <a:ln>
+            <a:noFill/>
+          </a:ln>
+        </p:spPr>
+        <p:txBody>
+          <a:bodyPr/>
+          <a:lstStyle/>
+          <a:p>
+            <a:r>
+              <a:rPr lang="zh-TW" altLang="en-US" dirty="0">
+                <a:latin typeface="Times New Roman" panose="02020603050405020304" pitchFamily="18" charset="0"/>
+                <a:ea typeface="標楷體" panose="03000509000000000000" pitchFamily="65" charset="-120"/>
+                <a:cs typeface="Times New Roman" panose="02020603050405020304" pitchFamily="18" charset="0"/>
+              </a:rPr>
+              <a:t>本次進度</a:t>
+            </a:r>
+            <a:r>
+              <a:rPr lang="en-US" altLang="zh-TW" dirty="0">
+                <a:latin typeface="Times New Roman" panose="02020603050405020304" pitchFamily="18" charset="0"/>
+                <a:ea typeface="標楷體" panose="03000509000000000000" pitchFamily="65" charset="-120"/>
+                <a:cs typeface="Times New Roman" panose="02020603050405020304" pitchFamily="18" charset="0"/>
+              </a:rPr>
+              <a:t>:</a:t>
+            </a:r>
+            <a:r>
+              <a:rPr lang="zh-TW" altLang="en-US" dirty="0">
+                <a:latin typeface="Times New Roman" panose="02020603050405020304" pitchFamily="18" charset="0"/>
+                <a:ea typeface="標楷體" panose="03000509000000000000" pitchFamily="65" charset="-120"/>
+                <a:cs typeface="Times New Roman" panose="02020603050405020304" pitchFamily="18" charset="0"/>
+              </a:rPr>
+              <a:t> </a:t>
+            </a:r>
+            <a:r>
+              <a:rPr lang="en-US" altLang="zh-TW" dirty="0" err="1">
+                <a:latin typeface="Times New Roman" panose="02020603050405020304" pitchFamily="18" charset="0"/>
+                <a:ea typeface="標楷體" panose="03000509000000000000" pitchFamily="65" charset="-120"/>
+                <a:cs typeface="Times New Roman" panose="02020603050405020304" pitchFamily="18" charset="0"/>
+              </a:rPr>
+              <a:t>DisplayCAL</a:t>
+            </a:r>
+            <a:endParaRPr lang="zh-TW" altLang="en-US" dirty="0">
+              <a:latin typeface="Times New Roman" panose="02020603050405020304" pitchFamily="18" charset="0"/>
+              <a:ea typeface="標楷體" panose="03000509000000000000" pitchFamily="65" charset="-120"/>
+              <a:cs typeface="Times New Roman" panose="02020603050405020304" pitchFamily="18" charset="0"/>
+            </a:endParaRPr>
+          </a:p>
+        </p:txBody>
+      </p:sp>
+      <p:pic>
+        <p:nvPicPr>
+          <p:cNvPr id="10" name="圖片 9">
+            <a:extLst>
+              <a:ext uri="{FF2B5EF4-FFF2-40B4-BE49-F238E27FC236}">
+                <a16:creationId xmlns:a16="http://schemas.microsoft.com/office/drawing/2014/main" id="{40843149-7062-BFDD-E31E-041AF4BEDB92}"/>
+              </a:ext>
+            </a:extLst>
+          </p:cNvPr>
+          <p:cNvPicPr>
+            <a:picLocks noChangeAspect="1"/>
+          </p:cNvPicPr>
+          <p:nvPr/>
+        </p:nvPicPr>
+        <p:blipFill>
+          <a:blip r:embed="rId3"/>
+          <a:stretch>
+            <a:fillRect/>
+          </a:stretch>
+        </p:blipFill>
+        <p:spPr>
+          <a:xfrm>
+            <a:off x="1521611" y="1312692"/>
+            <a:ext cx="6862778" cy="5011907"/>
+          </a:xfrm>
+          <a:prstGeom prst="rect">
+            <a:avLst/>
+          </a:prstGeom>
+        </p:spPr>
+      </p:pic>
+    </p:spTree>
+    <p:extLst>
+      <p:ext uri="{BB962C8B-B14F-4D97-AF65-F5344CB8AC3E}">
+        <p14:creationId xmlns:p14="http://schemas.microsoft.com/office/powerpoint/2010/main" val="2446612204"/>
       </p:ext>
     </p:extLst>
   </p:cSld>

--- a/temp.pptx
+++ b/temp.pptx
@@ -5,12 +5,13 @@
     <p:sldMasterId id="2147483658" r:id="rId1"/>
   </p:sldMasterIdLst>
   <p:notesMasterIdLst>
-    <p:notesMasterId r:id="rId5"/>
+    <p:notesMasterId r:id="rId6"/>
   </p:notesMasterIdLst>
   <p:sldIdLst>
     <p:sldId id="2014" r:id="rId2"/>
-    <p:sldId id="2017" r:id="rId3"/>
-    <p:sldId id="2018" r:id="rId4"/>
+    <p:sldId id="2019" r:id="rId3"/>
+    <p:sldId id="2017" r:id="rId4"/>
+    <p:sldId id="2018" r:id="rId5"/>
   </p:sldIdLst>
   <p:sldSz cx="9906000" cy="6858000" type="A4"/>
   <p:notesSz cx="7315200" cy="9601200"/>
@@ -1657,6 +1658,158 @@
         <p:cNvPr id="1" name="">
           <a:extLst>
             <a:ext uri="{FF2B5EF4-FFF2-40B4-BE49-F238E27FC236}">
+              <a16:creationId xmlns:a16="http://schemas.microsoft.com/office/drawing/2014/main" id="{EAFF0F47-4E0C-C518-B8CA-C9751D907624}"/>
+            </a:ext>
+          </a:extLst>
+        </p:cNvPr>
+        <p:cNvGrpSpPr/>
+        <p:nvPr/>
+      </p:nvGrpSpPr>
+      <p:grpSpPr>
+        <a:xfrm>
+          <a:off x="0" y="0"/>
+          <a:ext cx="0" cy="0"/>
+          <a:chOff x="0" y="0"/>
+          <a:chExt cx="0" cy="0"/>
+        </a:xfrm>
+      </p:grpSpPr>
+      <p:sp>
+        <p:nvSpPr>
+          <p:cNvPr id="2" name="投影片影像版面配置區 1">
+            <a:extLst>
+              <a:ext uri="{FF2B5EF4-FFF2-40B4-BE49-F238E27FC236}">
+                <a16:creationId xmlns:a16="http://schemas.microsoft.com/office/drawing/2014/main" id="{97A2912A-AAD5-05D7-5039-F4FA56EAF9A0}"/>
+              </a:ext>
+            </a:extLst>
+          </p:cNvPr>
+          <p:cNvSpPr>
+            <a:spLocks noGrp="1" noRot="1" noChangeAspect="1"/>
+          </p:cNvSpPr>
+          <p:nvPr>
+            <p:ph type="sldImg"/>
+          </p:nvPr>
+        </p:nvSpPr>
+        <p:spPr/>
+      </p:sp>
+      <p:sp>
+        <p:nvSpPr>
+          <p:cNvPr id="3" name="備忘稿版面配置區 2">
+            <a:extLst>
+              <a:ext uri="{FF2B5EF4-FFF2-40B4-BE49-F238E27FC236}">
+                <a16:creationId xmlns:a16="http://schemas.microsoft.com/office/drawing/2014/main" id="{97563CC0-E200-230A-997F-9174AD9E380C}"/>
+              </a:ext>
+            </a:extLst>
+          </p:cNvPr>
+          <p:cNvSpPr>
+            <a:spLocks noGrp="1"/>
+          </p:cNvSpPr>
+          <p:nvPr>
+            <p:ph type="body" idx="1"/>
+          </p:nvPr>
+        </p:nvSpPr>
+        <p:spPr/>
+        <p:txBody>
+          <a:bodyPr/>
+          <a:lstStyle/>
+          <a:p>
+            <a:pPr marL="0" marR="0" lvl="0" indent="0" algn="l" defTabSz="914400" rtl="0" eaLnBrk="1" fontAlgn="auto" latinLnBrk="0" hangingPunct="1">
+              <a:lnSpc>
+                <a:spcPct val="100000"/>
+              </a:lnSpc>
+              <a:spcBef>
+                <a:spcPts val="360"/>
+              </a:spcBef>
+              <a:spcAft>
+                <a:spcPts val="0"/>
+              </a:spcAft>
+              <a:buClr>
+                <a:srgbClr val="000000"/>
+              </a:buClr>
+              <a:buSzPts val="1400"/>
+              <a:buFont typeface="Arial"/>
+              <a:buNone/>
+              <a:tabLst/>
+              <a:defRPr/>
+            </a:pPr>
+            <a:endParaRPr lang="en-US" altLang="zh-TW" sz="1200" dirty="0"/>
+          </a:p>
+        </p:txBody>
+      </p:sp>
+      <p:sp>
+        <p:nvSpPr>
+          <p:cNvPr id="4" name="投影片編號版面配置區 3">
+            <a:extLst>
+              <a:ext uri="{FF2B5EF4-FFF2-40B4-BE49-F238E27FC236}">
+                <a16:creationId xmlns:a16="http://schemas.microsoft.com/office/drawing/2014/main" id="{B917299A-C350-46BE-0DCD-28B41AD997B8}"/>
+              </a:ext>
+            </a:extLst>
+          </p:cNvPr>
+          <p:cNvSpPr>
+            <a:spLocks noGrp="1"/>
+          </p:cNvSpPr>
+          <p:nvPr>
+            <p:ph type="sldNum" idx="12"/>
+          </p:nvPr>
+        </p:nvSpPr>
+        <p:spPr/>
+        <p:txBody>
+          <a:bodyPr/>
+          <a:lstStyle/>
+          <a:p>
+            <a:pPr marL="0" marR="0" lvl="0" indent="0" algn="r" rtl="0">
+              <a:spcBef>
+                <a:spcPts val="0"/>
+              </a:spcBef>
+              <a:spcAft>
+                <a:spcPts val="0"/>
+              </a:spcAft>
+              <a:buNone/>
+            </a:pPr>
+            <a:fld id="{00000000-1234-1234-1234-123412341234}" type="slidenum">
+              <a:rPr lang="en-US" sz="2000" b="0" i="0" u="none" strike="noStrike" cap="none" smtClean="0">
+                <a:solidFill>
+                  <a:schemeClr val="dk1"/>
+                </a:solidFill>
+                <a:latin typeface="Times New Roman"/>
+                <a:ea typeface="Times New Roman"/>
+                <a:cs typeface="Times New Roman"/>
+                <a:sym typeface="Times New Roman"/>
+              </a:rPr>
+              <a:t>2</a:t>
+            </a:fld>
+            <a:endParaRPr lang="en-US" sz="2000" b="0" i="0" u="none" strike="noStrike" cap="none" dirty="0">
+              <a:solidFill>
+                <a:schemeClr val="dk1"/>
+              </a:solidFill>
+              <a:latin typeface="Times New Roman"/>
+              <a:ea typeface="Times New Roman"/>
+              <a:cs typeface="Times New Roman"/>
+              <a:sym typeface="Times New Roman"/>
+            </a:endParaRPr>
+          </a:p>
+        </p:txBody>
+      </p:sp>
+    </p:spTree>
+    <p:extLst>
+      <p:ext uri="{BB962C8B-B14F-4D97-AF65-F5344CB8AC3E}">
+        <p14:creationId xmlns:p14="http://schemas.microsoft.com/office/powerpoint/2010/main" val="1831766850"/>
+      </p:ext>
+    </p:extLst>
+  </p:cSld>
+  <p:clrMapOvr>
+    <a:masterClrMapping/>
+  </p:clrMapOvr>
+</p:notes>
+</file>
+
+<file path=ppt/notesSlides/notesSlide3.xml><?xml version="1.0" encoding="utf-8"?>
+<p:notes xmlns:a="http://schemas.openxmlformats.org/drawingml/2006/main" xmlns:r="http://schemas.openxmlformats.org/officeDocument/2006/relationships" xmlns:p="http://schemas.openxmlformats.org/presentationml/2006/main">
+  <p:cSld>
+    <p:spTree>
+      <p:nvGrpSpPr>
+        <p:cNvPr id="1" name="">
+          <a:extLst>
+            <a:ext uri="{FF2B5EF4-FFF2-40B4-BE49-F238E27FC236}">
               <a16:creationId xmlns:a16="http://schemas.microsoft.com/office/drawing/2014/main" id="{9A851A70-D7FF-B69E-2F1F-5276D7F44C59}"/>
             </a:ext>
           </a:extLst>
@@ -1756,7 +1909,7 @@
                 <a:cs typeface="Times New Roman"/>
                 <a:sym typeface="Times New Roman"/>
               </a:rPr>
-              <a:t>2</a:t>
+              <a:t>3</a:t>
             </a:fld>
             <a:endParaRPr lang="en-US" sz="2000" b="0" i="0" u="none" strike="noStrike" cap="none" dirty="0">
               <a:solidFill>
@@ -1783,7 +1936,7 @@
 </p:notes>
 </file>
 
-<file path=ppt/notesSlides/notesSlide3.xml><?xml version="1.0" encoding="utf-8"?>
+<file path=ppt/notesSlides/notesSlide4.xml><?xml version="1.0" encoding="utf-8"?>
 <p:notes xmlns:a="http://schemas.openxmlformats.org/drawingml/2006/main" xmlns:r="http://schemas.openxmlformats.org/officeDocument/2006/relationships" xmlns:p="http://schemas.openxmlformats.org/presentationml/2006/main">
   <p:cSld>
     <p:spTree>
@@ -1930,7 +2083,7 @@
                 <a:cs typeface="Times New Roman"/>
                 <a:sym typeface="Times New Roman"/>
               </a:rPr>
-              <a:t>3</a:t>
+              <a:t>4</a:t>
             </a:fld>
             <a:endParaRPr lang="en-US" sz="2000" b="0" i="0" u="none" strike="noStrike" cap="none" dirty="0">
               <a:solidFill>
@@ -5503,13 +5656,18 @@
           <a:lstStyle/>
           <a:p>
             <a:r>
-              <a:rPr lang="zh-TW" altLang="en-US" dirty="0">
+              <a:rPr lang="en-US" altLang="zh-TW" dirty="0">
                 <a:latin typeface="Times New Roman" panose="02020603050405020304" pitchFamily="18" charset="0"/>
                 <a:ea typeface="標楷體" panose="03000509000000000000" pitchFamily="65" charset="-120"/>
                 <a:cs typeface="Times New Roman" panose="02020603050405020304" pitchFamily="18" charset="0"/>
               </a:rPr>
-              <a:t>未來方向</a:t>
+              <a:t>0</a:t>
             </a:r>
+            <a:endParaRPr lang="zh-TW" altLang="en-US" dirty="0">
+              <a:latin typeface="Times New Roman" panose="02020603050405020304" pitchFamily="18" charset="0"/>
+              <a:ea typeface="標楷體" panose="03000509000000000000" pitchFamily="65" charset="-120"/>
+              <a:cs typeface="Times New Roman" panose="02020603050405020304" pitchFamily="18" charset="0"/>
+            </a:endParaRPr>
           </a:p>
         </p:txBody>
       </p:sp>
@@ -5889,6 +6047,478 @@
                 <a:ea typeface="標楷體" panose="03000509000000000000" pitchFamily="65" charset="-120"/>
                 <a:cs typeface="Times New Roman" panose="02020603050405020304" pitchFamily="18" charset="0"/>
               </a:rPr>
+              <a:t>0</a:t>
+            </a:r>
+          </a:p>
+          <a:p>
+            <a:pPr lvl="1">
+              <a:lnSpc>
+                <a:spcPct val="150000"/>
+              </a:lnSpc>
+            </a:pPr>
+            <a:r>
+              <a:rPr lang="en-US" altLang="zh-TW" sz="1600" dirty="0">
+                <a:solidFill>
+                  <a:schemeClr val="tx1"/>
+                </a:solidFill>
+                <a:latin typeface="Times New Roman" panose="02020603050405020304" pitchFamily="18" charset="0"/>
+                <a:ea typeface="標楷體" panose="03000509000000000000" pitchFamily="65" charset="-120"/>
+                <a:cs typeface="Times New Roman" panose="02020603050405020304" pitchFamily="18" charset="0"/>
+              </a:rPr>
+              <a:t>0</a:t>
+            </a:r>
+          </a:p>
+        </p:txBody>
+      </p:sp>
+    </p:spTree>
+    <p:extLst>
+      <p:ext uri="{BB962C8B-B14F-4D97-AF65-F5344CB8AC3E}">
+        <p14:creationId xmlns:p14="http://schemas.microsoft.com/office/powerpoint/2010/main" val="2501487523"/>
+      </p:ext>
+    </p:extLst>
+  </p:cSld>
+  <p:clrMapOvr>
+    <a:masterClrMapping/>
+  </p:clrMapOvr>
+</p:sld>
+</file>
+
+<file path=ppt/slides/slide2.xml><?xml version="1.0" encoding="utf-8"?>
+<p:sld xmlns:a="http://schemas.openxmlformats.org/drawingml/2006/main" xmlns:r="http://schemas.openxmlformats.org/officeDocument/2006/relationships" xmlns:p="http://schemas.openxmlformats.org/presentationml/2006/main">
+  <p:cSld>
+    <p:spTree>
+      <p:nvGrpSpPr>
+        <p:cNvPr id="1" name="">
+          <a:extLst>
+            <a:ext uri="{FF2B5EF4-FFF2-40B4-BE49-F238E27FC236}">
+              <a16:creationId xmlns:a16="http://schemas.microsoft.com/office/drawing/2014/main" id="{755DC9CF-A393-1D36-E322-DC4F9AF9207C}"/>
+            </a:ext>
+          </a:extLst>
+        </p:cNvPr>
+        <p:cNvGrpSpPr/>
+        <p:nvPr/>
+      </p:nvGrpSpPr>
+      <p:grpSpPr>
+        <a:xfrm>
+          <a:off x="0" y="0"/>
+          <a:ext cx="0" cy="0"/>
+          <a:chOff x="0" y="0"/>
+          <a:chExt cx="0" cy="0"/>
+        </a:xfrm>
+      </p:grpSpPr>
+      <p:sp>
+        <p:nvSpPr>
+          <p:cNvPr id="5" name="標題 1">
+            <a:extLst>
+              <a:ext uri="{FF2B5EF4-FFF2-40B4-BE49-F238E27FC236}">
+                <a16:creationId xmlns:a16="http://schemas.microsoft.com/office/drawing/2014/main" id="{2572336A-60D1-DD70-73B5-1485FE00A8B9}"/>
+              </a:ext>
+            </a:extLst>
+          </p:cNvPr>
+          <p:cNvSpPr>
+            <a:spLocks noGrp="1"/>
+          </p:cNvSpPr>
+          <p:nvPr>
+            <p:ph type="title"/>
+          </p:nvPr>
+        </p:nvSpPr>
+        <p:spPr>
+          <a:xfrm>
+            <a:off x="609602" y="609600"/>
+            <a:ext cx="8077200" cy="533400"/>
+          </a:xfrm>
+        </p:spPr>
+        <p:txBody>
+          <a:bodyPr/>
+          <a:lstStyle/>
+          <a:p>
+            <a:r>
+              <a:rPr lang="zh-TW" altLang="en-US" dirty="0">
+                <a:latin typeface="Times New Roman" panose="02020603050405020304" pitchFamily="18" charset="0"/>
+                <a:ea typeface="標楷體" panose="03000509000000000000" pitchFamily="65" charset="-120"/>
+                <a:cs typeface="Times New Roman" panose="02020603050405020304" pitchFamily="18" charset="0"/>
+              </a:rPr>
+              <a:t>未來方向</a:t>
+            </a:r>
+          </a:p>
+        </p:txBody>
+      </p:sp>
+      <p:sp>
+        <p:nvSpPr>
+          <p:cNvPr id="37" name="文字方塊 36">
+            <a:extLst>
+              <a:ext uri="{FF2B5EF4-FFF2-40B4-BE49-F238E27FC236}">
+                <a16:creationId xmlns:a16="http://schemas.microsoft.com/office/drawing/2014/main" id="{AC8D5544-9594-45AE-C2B4-BBF9D8F65A2A}"/>
+              </a:ext>
+            </a:extLst>
+          </p:cNvPr>
+          <p:cNvSpPr txBox="1"/>
+          <p:nvPr/>
+        </p:nvSpPr>
+        <p:spPr>
+          <a:xfrm>
+            <a:off x="1734818" y="6361271"/>
+            <a:ext cx="7980682" cy="461665"/>
+          </a:xfrm>
+          <a:prstGeom prst="rect">
+            <a:avLst/>
+          </a:prstGeom>
+          <a:noFill/>
+        </p:spPr>
+        <p:txBody>
+          <a:bodyPr wrap="square">
+            <a:spAutoFit/>
+          </a:bodyPr>
+          <a:lstStyle/>
+          <a:p>
+            <a:r>
+              <a:rPr lang="zh-TW" altLang="zh-TW" sz="1200" dirty="0">
+                <a:latin typeface="Times New Roman" panose="02020603050405020304" pitchFamily="18" charset="0"/>
+                <a:ea typeface="標楷體" panose="03000509000000000000" pitchFamily="65" charset="-120"/>
+                <a:cs typeface="Times New Roman" panose="02020603050405020304" pitchFamily="18" charset="0"/>
+              </a:rPr>
+              <a:t>[</a:t>
+            </a:r>
+            <a:r>
+              <a:rPr lang="en-US" altLang="zh-TW" sz="1200" dirty="0">
+                <a:latin typeface="Times New Roman" panose="02020603050405020304" pitchFamily="18" charset="0"/>
+                <a:ea typeface="標楷體" panose="03000509000000000000" pitchFamily="65" charset="-120"/>
+                <a:cs typeface="Times New Roman" panose="02020603050405020304" pitchFamily="18" charset="0"/>
+              </a:rPr>
+              <a:t>4</a:t>
+            </a:r>
+            <a:r>
+              <a:rPr lang="zh-TW" altLang="zh-TW" sz="1200" dirty="0">
+                <a:latin typeface="Times New Roman" panose="02020603050405020304" pitchFamily="18" charset="0"/>
+                <a:ea typeface="標楷體" panose="03000509000000000000" pitchFamily="65" charset="-120"/>
+                <a:cs typeface="Times New Roman" panose="02020603050405020304" pitchFamily="18" charset="0"/>
+              </a:rPr>
+              <a:t>] E. Ö. Yılmaz, “DisplayCAL Python 3 Project,” </a:t>
+            </a:r>
+            <a:r>
+              <a:rPr lang="zh-TW" altLang="zh-TW" sz="1200" i="1" dirty="0">
+                <a:latin typeface="Times New Roman" panose="02020603050405020304" pitchFamily="18" charset="0"/>
+                <a:ea typeface="標楷體" panose="03000509000000000000" pitchFamily="65" charset="-120"/>
+                <a:cs typeface="Times New Roman" panose="02020603050405020304" pitchFamily="18" charset="0"/>
+              </a:rPr>
+              <a:t>GitHub</a:t>
+            </a:r>
+            <a:r>
+              <a:rPr lang="zh-TW" altLang="zh-TW" sz="1200" dirty="0">
+                <a:latin typeface="Times New Roman" panose="02020603050405020304" pitchFamily="18" charset="0"/>
+                <a:ea typeface="標楷體" panose="03000509000000000000" pitchFamily="65" charset="-120"/>
+                <a:cs typeface="Times New Roman" panose="02020603050405020304" pitchFamily="18" charset="0"/>
+              </a:rPr>
+              <a:t>, 2026. [Online]. Available: </a:t>
+            </a:r>
+            <a:r>
+              <a:rPr lang="zh-TW" altLang="zh-TW" sz="1200" dirty="0">
+                <a:latin typeface="Times New Roman" panose="02020603050405020304" pitchFamily="18" charset="0"/>
+                <a:ea typeface="標楷體" panose="03000509000000000000" pitchFamily="65" charset="-120"/>
+                <a:cs typeface="Times New Roman" panose="02020603050405020304" pitchFamily="18" charset="0"/>
+                <a:hlinkClick r:id="rId3"/>
+              </a:rPr>
+              <a:t>https://github.com/eoyilmaz/displaycal-py3</a:t>
+            </a:r>
+            <a:endParaRPr lang="zh-TW" altLang="en-US" sz="1200" dirty="0">
+              <a:latin typeface="Times New Roman" panose="02020603050405020304" pitchFamily="18" charset="0"/>
+              <a:ea typeface="標楷體" panose="03000509000000000000" pitchFamily="65" charset="-120"/>
+              <a:cs typeface="Times New Roman" panose="02020603050405020304" pitchFamily="18" charset="0"/>
+            </a:endParaRPr>
+          </a:p>
+        </p:txBody>
+      </p:sp>
+      <p:sp>
+        <p:nvSpPr>
+          <p:cNvPr id="7" name="文字版面配置區 6">
+            <a:extLst>
+              <a:ext uri="{FF2B5EF4-FFF2-40B4-BE49-F238E27FC236}">
+                <a16:creationId xmlns:a16="http://schemas.microsoft.com/office/drawing/2014/main" id="{52713C2D-410D-C7DB-1444-59709EF3DCA8}"/>
+              </a:ext>
+            </a:extLst>
+          </p:cNvPr>
+          <p:cNvSpPr txBox="1"/>
+          <p:nvPr/>
+        </p:nvSpPr>
+        <p:spPr>
+          <a:xfrm>
+            <a:off x="609602" y="935857"/>
+            <a:ext cx="8686796" cy="4700685"/>
+          </a:xfrm>
+          <a:prstGeom prst="rect">
+            <a:avLst/>
+          </a:prstGeom>
+          <a:noFill/>
+          <a:ln>
+            <a:noFill/>
+          </a:ln>
+        </p:spPr>
+        <p:txBody>
+          <a:bodyPr spcFirstLastPara="1" wrap="square" lIns="91425" tIns="45700" rIns="91425" bIns="45700" anchor="t" anchorCtr="0">
+            <a:noAutofit/>
+          </a:bodyPr>
+          <a:lstStyle>
+            <a:defPPr marR="0" lvl="0" algn="l" rtl="0">
+              <a:lnSpc>
+                <a:spcPct val="100000"/>
+              </a:lnSpc>
+              <a:spcBef>
+                <a:spcPts val="0"/>
+              </a:spcBef>
+              <a:spcAft>
+                <a:spcPts val="0"/>
+              </a:spcAft>
+            </a:defPPr>
+            <a:lvl1pPr marL="457200" marR="0" lvl="0" indent="-406400" algn="l" rtl="0">
+              <a:lnSpc>
+                <a:spcPct val="100000"/>
+              </a:lnSpc>
+              <a:spcBef>
+                <a:spcPts val="560"/>
+              </a:spcBef>
+              <a:spcAft>
+                <a:spcPts val="0"/>
+              </a:spcAft>
+              <a:buClr>
+                <a:schemeClr val="accent2"/>
+              </a:buClr>
+              <a:buSzPts val="2800"/>
+              <a:buFont typeface="Noto Sans Symbols"/>
+              <a:buChar char="❖"/>
+              <a:defRPr sz="2800" b="0" i="0" u="none" strike="noStrike" cap="none">
+                <a:solidFill>
+                  <a:schemeClr val="dk1"/>
+                </a:solidFill>
+                <a:latin typeface="Times New Roman"/>
+                <a:ea typeface="Times New Roman"/>
+                <a:cs typeface="Times New Roman"/>
+                <a:sym typeface="Times New Roman"/>
+              </a:defRPr>
+            </a:lvl1pPr>
+            <a:lvl2pPr marL="914400" marR="0" lvl="1" indent="-381000" algn="l" rtl="0">
+              <a:lnSpc>
+                <a:spcPct val="100000"/>
+              </a:lnSpc>
+              <a:spcBef>
+                <a:spcPts val="480"/>
+              </a:spcBef>
+              <a:spcAft>
+                <a:spcPts val="0"/>
+              </a:spcAft>
+              <a:buClr>
+                <a:srgbClr val="FF5050"/>
+              </a:buClr>
+              <a:buSzPts val="2400"/>
+              <a:buFont typeface="Noto Sans Symbols"/>
+              <a:buChar char="▪"/>
+              <a:defRPr sz="2400" b="0" i="0" u="none" strike="noStrike" cap="none">
+                <a:solidFill>
+                  <a:schemeClr val="dk1"/>
+                </a:solidFill>
+                <a:latin typeface="Times New Roman"/>
+                <a:ea typeface="Times New Roman"/>
+                <a:cs typeface="Times New Roman"/>
+                <a:sym typeface="Times New Roman"/>
+              </a:defRPr>
+            </a:lvl2pPr>
+            <a:lvl3pPr marL="1371600" marR="0" lvl="2" indent="-355600" algn="l" rtl="0">
+              <a:lnSpc>
+                <a:spcPct val="100000"/>
+              </a:lnSpc>
+              <a:spcBef>
+                <a:spcPts val="400"/>
+              </a:spcBef>
+              <a:spcAft>
+                <a:spcPts val="0"/>
+              </a:spcAft>
+              <a:buClr>
+                <a:srgbClr val="6699FF"/>
+              </a:buClr>
+              <a:buSzPts val="2000"/>
+              <a:buFont typeface="Times New Roman"/>
+              <a:buChar char="•"/>
+              <a:defRPr sz="2000" b="0" i="0" u="none" strike="noStrike" cap="none">
+                <a:solidFill>
+                  <a:schemeClr val="dk1"/>
+                </a:solidFill>
+                <a:latin typeface="Times New Roman"/>
+                <a:ea typeface="Times New Roman"/>
+                <a:cs typeface="Times New Roman"/>
+                <a:sym typeface="Times New Roman"/>
+              </a:defRPr>
+            </a:lvl3pPr>
+            <a:lvl4pPr marL="1828800" marR="0" lvl="3" indent="-355600" algn="l" rtl="0">
+              <a:lnSpc>
+                <a:spcPct val="100000"/>
+              </a:lnSpc>
+              <a:spcBef>
+                <a:spcPts val="400"/>
+              </a:spcBef>
+              <a:spcAft>
+                <a:spcPts val="0"/>
+              </a:spcAft>
+              <a:buClr>
+                <a:srgbClr val="FF5050"/>
+              </a:buClr>
+              <a:buSzPts val="2000"/>
+              <a:buFont typeface="Times New Roman"/>
+              <a:buChar char="o"/>
+              <a:defRPr sz="2000" b="0" i="0" u="none" strike="noStrike" cap="none">
+                <a:solidFill>
+                  <a:schemeClr val="dk1"/>
+                </a:solidFill>
+                <a:latin typeface="Times New Roman"/>
+                <a:ea typeface="Times New Roman"/>
+                <a:cs typeface="Times New Roman"/>
+                <a:sym typeface="Times New Roman"/>
+              </a:defRPr>
+            </a:lvl4pPr>
+            <a:lvl5pPr marL="2286000" marR="0" lvl="4" indent="-355600" algn="l" rtl="0">
+              <a:lnSpc>
+                <a:spcPct val="100000"/>
+              </a:lnSpc>
+              <a:spcBef>
+                <a:spcPts val="400"/>
+              </a:spcBef>
+              <a:spcAft>
+                <a:spcPts val="0"/>
+              </a:spcAft>
+              <a:buClr>
+                <a:srgbClr val="FF5050"/>
+              </a:buClr>
+              <a:buSzPts val="2000"/>
+              <a:buFont typeface="Times New Roman"/>
+              <a:buChar char="o"/>
+              <a:defRPr sz="2000" b="0" i="0" u="none" strike="noStrike" cap="none">
+                <a:solidFill>
+                  <a:schemeClr val="dk1"/>
+                </a:solidFill>
+                <a:latin typeface="Times New Roman"/>
+                <a:ea typeface="Times New Roman"/>
+                <a:cs typeface="Times New Roman"/>
+                <a:sym typeface="Times New Roman"/>
+              </a:defRPr>
+            </a:lvl5pPr>
+            <a:lvl6pPr marL="2743200" marR="0" lvl="5" indent="-355600" algn="l" rtl="0">
+              <a:lnSpc>
+                <a:spcPct val="100000"/>
+              </a:lnSpc>
+              <a:spcBef>
+                <a:spcPts val="400"/>
+              </a:spcBef>
+              <a:spcAft>
+                <a:spcPts val="0"/>
+              </a:spcAft>
+              <a:buClr>
+                <a:srgbClr val="FF5050"/>
+              </a:buClr>
+              <a:buSzPts val="2000"/>
+              <a:buFont typeface="Times New Roman"/>
+              <a:buChar char="o"/>
+              <a:defRPr sz="2000" b="0" i="0" u="none" strike="noStrike" cap="none">
+                <a:solidFill>
+                  <a:schemeClr val="dk1"/>
+                </a:solidFill>
+                <a:latin typeface="Times New Roman"/>
+                <a:ea typeface="Times New Roman"/>
+                <a:cs typeface="Times New Roman"/>
+                <a:sym typeface="Times New Roman"/>
+              </a:defRPr>
+            </a:lvl6pPr>
+            <a:lvl7pPr marL="3200400" marR="0" lvl="6" indent="-355600" algn="l" rtl="0">
+              <a:lnSpc>
+                <a:spcPct val="100000"/>
+              </a:lnSpc>
+              <a:spcBef>
+                <a:spcPts val="400"/>
+              </a:spcBef>
+              <a:spcAft>
+                <a:spcPts val="0"/>
+              </a:spcAft>
+              <a:buClr>
+                <a:srgbClr val="FF5050"/>
+              </a:buClr>
+              <a:buSzPts val="2000"/>
+              <a:buFont typeface="Times New Roman"/>
+              <a:buChar char="o"/>
+              <a:defRPr sz="2000" b="0" i="0" u="none" strike="noStrike" cap="none">
+                <a:solidFill>
+                  <a:schemeClr val="dk1"/>
+                </a:solidFill>
+                <a:latin typeface="Times New Roman"/>
+                <a:ea typeface="Times New Roman"/>
+                <a:cs typeface="Times New Roman"/>
+                <a:sym typeface="Times New Roman"/>
+              </a:defRPr>
+            </a:lvl7pPr>
+            <a:lvl8pPr marL="3657600" marR="0" lvl="7" indent="-355600" algn="l" rtl="0">
+              <a:lnSpc>
+                <a:spcPct val="100000"/>
+              </a:lnSpc>
+              <a:spcBef>
+                <a:spcPts val="400"/>
+              </a:spcBef>
+              <a:spcAft>
+                <a:spcPts val="0"/>
+              </a:spcAft>
+              <a:buClr>
+                <a:srgbClr val="FF5050"/>
+              </a:buClr>
+              <a:buSzPts val="2000"/>
+              <a:buFont typeface="Times New Roman"/>
+              <a:buChar char="o"/>
+              <a:defRPr sz="2000" b="0" i="0" u="none" strike="noStrike" cap="none">
+                <a:solidFill>
+                  <a:schemeClr val="dk1"/>
+                </a:solidFill>
+                <a:latin typeface="Times New Roman"/>
+                <a:ea typeface="Times New Roman"/>
+                <a:cs typeface="Times New Roman"/>
+                <a:sym typeface="Times New Roman"/>
+              </a:defRPr>
+            </a:lvl8pPr>
+            <a:lvl9pPr marL="4114800" marR="0" lvl="8" indent="-355600" algn="l" rtl="0">
+              <a:lnSpc>
+                <a:spcPct val="100000"/>
+              </a:lnSpc>
+              <a:spcBef>
+                <a:spcPts val="400"/>
+              </a:spcBef>
+              <a:spcAft>
+                <a:spcPts val="0"/>
+              </a:spcAft>
+              <a:buClr>
+                <a:srgbClr val="FF5050"/>
+              </a:buClr>
+              <a:buSzPts val="2000"/>
+              <a:buFont typeface="Times New Roman"/>
+              <a:buChar char="o"/>
+              <a:defRPr sz="2000" b="0" i="0" u="none" strike="noStrike" cap="none">
+                <a:solidFill>
+                  <a:schemeClr val="dk1"/>
+                </a:solidFill>
+                <a:latin typeface="Times New Roman"/>
+                <a:ea typeface="Times New Roman"/>
+                <a:cs typeface="Times New Roman"/>
+                <a:sym typeface="Times New Roman"/>
+              </a:defRPr>
+            </a:lvl9pPr>
+          </a:lstStyle>
+          <a:p>
+            <a:pPr>
+              <a:lnSpc>
+                <a:spcPct val="150000"/>
+              </a:lnSpc>
+            </a:pPr>
+            <a:r>
+              <a:rPr lang="en-US" altLang="zh-TW" sz="2000" dirty="0">
+                <a:solidFill>
+                  <a:schemeClr val="tx1"/>
+                </a:solidFill>
+                <a:latin typeface="Times New Roman" panose="02020603050405020304" pitchFamily="18" charset="0"/>
+                <a:ea typeface="標楷體" panose="03000509000000000000" pitchFamily="65" charset="-120"/>
+                <a:cs typeface="Times New Roman" panose="02020603050405020304" pitchFamily="18" charset="0"/>
+              </a:rPr>
               <a:t>ICC </a:t>
             </a:r>
             <a:r>
@@ -6184,142 +6814,7 @@
     </p:spTree>
     <p:extLst>
       <p:ext uri="{BB962C8B-B14F-4D97-AF65-F5344CB8AC3E}">
-        <p14:creationId xmlns:p14="http://schemas.microsoft.com/office/powerpoint/2010/main" val="2501487523"/>
-      </p:ext>
-    </p:extLst>
-  </p:cSld>
-  <p:clrMapOvr>
-    <a:masterClrMapping/>
-  </p:clrMapOvr>
-</p:sld>
-</file>
-
-<file path=ppt/slides/slide2.xml><?xml version="1.0" encoding="utf-8"?>
-<p:sld xmlns:a="http://schemas.openxmlformats.org/drawingml/2006/main" xmlns:r="http://schemas.openxmlformats.org/officeDocument/2006/relationships" xmlns:p="http://schemas.openxmlformats.org/presentationml/2006/main">
-  <p:cSld>
-    <p:spTree>
-      <p:nvGrpSpPr>
-        <p:cNvPr id="1" name="">
-          <a:extLst>
-            <a:ext uri="{FF2B5EF4-FFF2-40B4-BE49-F238E27FC236}">
-              <a16:creationId xmlns:a16="http://schemas.microsoft.com/office/drawing/2014/main" id="{C25E9AAA-7E36-1E17-83F9-FD3A18A28BE9}"/>
-            </a:ext>
-          </a:extLst>
-        </p:cNvPr>
-        <p:cNvGrpSpPr/>
-        <p:nvPr/>
-      </p:nvGrpSpPr>
-      <p:grpSpPr>
-        <a:xfrm>
-          <a:off x="0" y="0"/>
-          <a:ext cx="0" cy="0"/>
-          <a:chOff x="0" y="0"/>
-          <a:chExt cx="0" cy="0"/>
-        </a:xfrm>
-      </p:grpSpPr>
-      <p:sp>
-        <p:nvSpPr>
-          <p:cNvPr id="15" name="標題 1">
-            <a:extLst>
-              <a:ext uri="{FF2B5EF4-FFF2-40B4-BE49-F238E27FC236}">
-                <a16:creationId xmlns:a16="http://schemas.microsoft.com/office/drawing/2014/main" id="{142C8726-E890-9988-40FC-8984FDA21FEE}"/>
-              </a:ext>
-            </a:extLst>
-          </p:cNvPr>
-          <p:cNvSpPr>
-            <a:spLocks noGrp="1"/>
-          </p:cNvSpPr>
-          <p:nvPr>
-            <p:ph type="title"/>
-          </p:nvPr>
-        </p:nvSpPr>
-        <p:spPr>
-          <a:xfrm>
-            <a:off x="609602" y="609600"/>
-            <a:ext cx="8077200" cy="533400"/>
-          </a:xfrm>
-          <a:ln>
-            <a:noFill/>
-          </a:ln>
-        </p:spPr>
-        <p:txBody>
-          <a:bodyPr/>
-          <a:lstStyle/>
-          <a:p>
-            <a:r>
-              <a:rPr lang="zh-TW" altLang="en-US" dirty="0">
-                <a:latin typeface="Times New Roman" panose="02020603050405020304" pitchFamily="18" charset="0"/>
-                <a:ea typeface="標楷體" panose="03000509000000000000" pitchFamily="65" charset="-120"/>
-                <a:cs typeface="Times New Roman" panose="02020603050405020304" pitchFamily="18" charset="0"/>
-              </a:rPr>
-              <a:t>本次進度</a:t>
-            </a:r>
-            <a:r>
-              <a:rPr lang="en-US" altLang="zh-TW" dirty="0">
-                <a:latin typeface="Times New Roman" panose="02020603050405020304" pitchFamily="18" charset="0"/>
-                <a:ea typeface="標楷體" panose="03000509000000000000" pitchFamily="65" charset="-120"/>
-                <a:cs typeface="Times New Roman" panose="02020603050405020304" pitchFamily="18" charset="0"/>
-              </a:rPr>
-              <a:t>:</a:t>
-            </a:r>
-            <a:r>
-              <a:rPr lang="zh-TW" altLang="en-US" dirty="0">
-                <a:latin typeface="Times New Roman" panose="02020603050405020304" pitchFamily="18" charset="0"/>
-                <a:ea typeface="標楷體" panose="03000509000000000000" pitchFamily="65" charset="-120"/>
-                <a:cs typeface="Times New Roman" panose="02020603050405020304" pitchFamily="18" charset="0"/>
-              </a:rPr>
-              <a:t> </a:t>
-            </a:r>
-            <a:r>
-              <a:rPr lang="en-US" altLang="zh-TW" dirty="0" err="1">
-                <a:latin typeface="Times New Roman" panose="02020603050405020304" pitchFamily="18" charset="0"/>
-                <a:ea typeface="標楷體" panose="03000509000000000000" pitchFamily="65" charset="-120"/>
-                <a:cs typeface="Times New Roman" panose="02020603050405020304" pitchFamily="18" charset="0"/>
-              </a:rPr>
-              <a:t>DisplayCAL</a:t>
-            </a:r>
-            <a:endParaRPr lang="zh-TW" altLang="en-US" dirty="0">
-              <a:latin typeface="Times New Roman" panose="02020603050405020304" pitchFamily="18" charset="0"/>
-              <a:ea typeface="標楷體" panose="03000509000000000000" pitchFamily="65" charset="-120"/>
-              <a:cs typeface="Times New Roman" panose="02020603050405020304" pitchFamily="18" charset="0"/>
-            </a:endParaRPr>
-          </a:p>
-        </p:txBody>
-      </p:sp>
-      <p:pic>
-        <p:nvPicPr>
-          <p:cNvPr id="3" name="圖片 2">
-            <a:extLst>
-              <a:ext uri="{FF2B5EF4-FFF2-40B4-BE49-F238E27FC236}">
-                <a16:creationId xmlns:a16="http://schemas.microsoft.com/office/drawing/2014/main" id="{F659FC18-5835-84BA-E507-82D126A8BE9D}"/>
-              </a:ext>
-            </a:extLst>
-          </p:cNvPr>
-          <p:cNvPicPr>
-            <a:picLocks noChangeAspect="1"/>
-          </p:cNvPicPr>
-          <p:nvPr/>
-        </p:nvPicPr>
-        <p:blipFill>
-          <a:blip r:embed="rId3"/>
-          <a:stretch>
-            <a:fillRect/>
-          </a:stretch>
-        </p:blipFill>
-        <p:spPr>
-          <a:xfrm>
-            <a:off x="429952" y="1430866"/>
-            <a:ext cx="9046096" cy="4621880"/>
-          </a:xfrm>
-          <a:prstGeom prst="rect">
-            <a:avLst/>
-          </a:prstGeom>
-        </p:spPr>
-      </p:pic>
-    </p:spTree>
-    <p:extLst>
-      <p:ext uri="{BB962C8B-B14F-4D97-AF65-F5344CB8AC3E}">
-        <p14:creationId xmlns:p14="http://schemas.microsoft.com/office/powerpoint/2010/main" val="2009003809"/>
+        <p14:creationId xmlns:p14="http://schemas.microsoft.com/office/powerpoint/2010/main" val="2535957150"/>
       </p:ext>
     </p:extLst>
   </p:cSld>
@@ -6406,18 +6901,159 @@
               <a:t> </a:t>
             </a:r>
             <a:r>
-              <a:rPr lang="en-US" altLang="zh-TW" dirty="0" err="1">
+              <a:rPr lang="en-US" altLang="zh-TW" dirty="0">
                 <a:latin typeface="Times New Roman" panose="02020603050405020304" pitchFamily="18" charset="0"/>
                 <a:ea typeface="標楷體" panose="03000509000000000000" pitchFamily="65" charset="-120"/>
                 <a:cs typeface="Times New Roman" panose="02020603050405020304" pitchFamily="18" charset="0"/>
               </a:rPr>
-              <a:t>DisplayCAL</a:t>
+              <a:t>GUI</a:t>
             </a:r>
-            <a:endParaRPr lang="zh-TW" altLang="en-US" dirty="0">
-              <a:latin typeface="Times New Roman" panose="02020603050405020304" pitchFamily="18" charset="0"/>
-              <a:ea typeface="標楷體" panose="03000509000000000000" pitchFamily="65" charset="-120"/>
-              <a:cs typeface="Times New Roman" panose="02020603050405020304" pitchFamily="18" charset="0"/>
-            </a:endParaRPr>
+            <a:r>
+              <a:rPr lang="zh-TW" altLang="en-US" dirty="0">
+                <a:latin typeface="Times New Roman" panose="02020603050405020304" pitchFamily="18" charset="0"/>
+                <a:ea typeface="標楷體" panose="03000509000000000000" pitchFamily="65" charset="-120"/>
+                <a:cs typeface="Times New Roman" panose="02020603050405020304" pitchFamily="18" charset="0"/>
+              </a:rPr>
+              <a:t> 設計</a:t>
+            </a:r>
+          </a:p>
+        </p:txBody>
+      </p:sp>
+      <p:pic>
+        <p:nvPicPr>
+          <p:cNvPr id="3" name="圖片 2">
+            <a:extLst>
+              <a:ext uri="{FF2B5EF4-FFF2-40B4-BE49-F238E27FC236}">
+                <a16:creationId xmlns:a16="http://schemas.microsoft.com/office/drawing/2014/main" id="{F659FC18-5835-84BA-E507-82D126A8BE9D}"/>
+              </a:ext>
+            </a:extLst>
+          </p:cNvPr>
+          <p:cNvPicPr>
+            <a:picLocks noChangeAspect="1"/>
+          </p:cNvPicPr>
+          <p:nvPr/>
+        </p:nvPicPr>
+        <p:blipFill>
+          <a:blip r:embed="rId3"/>
+          <a:stretch>
+            <a:fillRect/>
+          </a:stretch>
+        </p:blipFill>
+        <p:spPr>
+          <a:xfrm>
+            <a:off x="429952" y="1430866"/>
+            <a:ext cx="9046096" cy="4621880"/>
+          </a:xfrm>
+          <a:prstGeom prst="rect">
+            <a:avLst/>
+          </a:prstGeom>
+        </p:spPr>
+      </p:pic>
+    </p:spTree>
+    <p:extLst>
+      <p:ext uri="{BB962C8B-B14F-4D97-AF65-F5344CB8AC3E}">
+        <p14:creationId xmlns:p14="http://schemas.microsoft.com/office/powerpoint/2010/main" val="2009003809"/>
+      </p:ext>
+    </p:extLst>
+  </p:cSld>
+  <p:clrMapOvr>
+    <a:masterClrMapping/>
+  </p:clrMapOvr>
+</p:sld>
+</file>
+
+<file path=ppt/slides/slide4.xml><?xml version="1.0" encoding="utf-8"?>
+<p:sld xmlns:a="http://schemas.openxmlformats.org/drawingml/2006/main" xmlns:r="http://schemas.openxmlformats.org/officeDocument/2006/relationships" xmlns:p="http://schemas.openxmlformats.org/presentationml/2006/main">
+  <p:cSld>
+    <p:spTree>
+      <p:nvGrpSpPr>
+        <p:cNvPr id="1" name="">
+          <a:extLst>
+            <a:ext uri="{FF2B5EF4-FFF2-40B4-BE49-F238E27FC236}">
+              <a16:creationId xmlns:a16="http://schemas.microsoft.com/office/drawing/2014/main" id="{C25E9AAA-7E36-1E17-83F9-FD3A18A28BE9}"/>
+            </a:ext>
+          </a:extLst>
+        </p:cNvPr>
+        <p:cNvGrpSpPr/>
+        <p:nvPr/>
+      </p:nvGrpSpPr>
+      <p:grpSpPr>
+        <a:xfrm>
+          <a:off x="0" y="0"/>
+          <a:ext cx="0" cy="0"/>
+          <a:chOff x="0" y="0"/>
+          <a:chExt cx="0" cy="0"/>
+        </a:xfrm>
+      </p:grpSpPr>
+      <p:sp>
+        <p:nvSpPr>
+          <p:cNvPr id="15" name="標題 1">
+            <a:extLst>
+              <a:ext uri="{FF2B5EF4-FFF2-40B4-BE49-F238E27FC236}">
+                <a16:creationId xmlns:a16="http://schemas.microsoft.com/office/drawing/2014/main" id="{142C8726-E890-9988-40FC-8984FDA21FEE}"/>
+              </a:ext>
+            </a:extLst>
+          </p:cNvPr>
+          <p:cNvSpPr>
+            <a:spLocks noGrp="1"/>
+          </p:cNvSpPr>
+          <p:nvPr>
+            <p:ph type="title"/>
+          </p:nvPr>
+        </p:nvSpPr>
+        <p:spPr>
+          <a:xfrm>
+            <a:off x="609602" y="609600"/>
+            <a:ext cx="8077200" cy="533400"/>
+          </a:xfrm>
+          <a:ln>
+            <a:noFill/>
+          </a:ln>
+        </p:spPr>
+        <p:txBody>
+          <a:bodyPr/>
+          <a:lstStyle/>
+          <a:p>
+            <a:r>
+              <a:rPr lang="zh-TW" altLang="en-US" dirty="0">
+                <a:latin typeface="Times New Roman" panose="02020603050405020304" pitchFamily="18" charset="0"/>
+                <a:ea typeface="標楷體" panose="03000509000000000000" pitchFamily="65" charset="-120"/>
+                <a:cs typeface="Times New Roman" panose="02020603050405020304" pitchFamily="18" charset="0"/>
+              </a:rPr>
+              <a:t>本次進度</a:t>
+            </a:r>
+            <a:r>
+              <a:rPr lang="en-US" altLang="zh-TW" dirty="0">
+                <a:latin typeface="Times New Roman" panose="02020603050405020304" pitchFamily="18" charset="0"/>
+                <a:ea typeface="標楷體" panose="03000509000000000000" pitchFamily="65" charset="-120"/>
+                <a:cs typeface="Times New Roman" panose="02020603050405020304" pitchFamily="18" charset="0"/>
+              </a:rPr>
+              <a:t>:</a:t>
+            </a:r>
+            <a:r>
+              <a:rPr lang="zh-TW" altLang="en-US" dirty="0">
+                <a:latin typeface="Times New Roman" panose="02020603050405020304" pitchFamily="18" charset="0"/>
+                <a:ea typeface="標楷體" panose="03000509000000000000" pitchFamily="65" charset="-120"/>
+                <a:cs typeface="Times New Roman" panose="02020603050405020304" pitchFamily="18" charset="0"/>
+              </a:rPr>
+              <a:t> </a:t>
+            </a:r>
+            <a:r>
+              <a:rPr lang="en-US" altLang="zh-TW" dirty="0">
+                <a:latin typeface="Times New Roman" panose="02020603050405020304" pitchFamily="18" charset="0"/>
+                <a:ea typeface="標楷體" panose="03000509000000000000" pitchFamily="65" charset="-120"/>
+                <a:cs typeface="Times New Roman" panose="02020603050405020304" pitchFamily="18" charset="0"/>
+              </a:rPr>
+              <a:t>GUI</a:t>
+            </a:r>
+            <a:r>
+              <a:rPr lang="zh-TW" altLang="en-US" dirty="0">
+                <a:latin typeface="Times New Roman" panose="02020603050405020304" pitchFamily="18" charset="0"/>
+                <a:ea typeface="標楷體" panose="03000509000000000000" pitchFamily="65" charset="-120"/>
+                <a:cs typeface="Times New Roman" panose="02020603050405020304" pitchFamily="18" charset="0"/>
+              </a:rPr>
+              <a:t> 設計</a:t>
+            </a:r>
           </a:p>
         </p:txBody>
       </p:sp>

--- a/temp.pptx
+++ b/temp.pptx
@@ -6892,30 +6892,11 @@
               </a:rPr>
               <a:t>:</a:t>
             </a:r>
-            <a:r>
-              <a:rPr lang="zh-TW" altLang="en-US" dirty="0">
-                <a:latin typeface="Times New Roman" panose="02020603050405020304" pitchFamily="18" charset="0"/>
-                <a:ea typeface="標楷體" panose="03000509000000000000" pitchFamily="65" charset="-120"/>
-                <a:cs typeface="Times New Roman" panose="02020603050405020304" pitchFamily="18" charset="0"/>
-              </a:rPr>
-              <a:t> </a:t>
-            </a:r>
-            <a:r>
-              <a:rPr lang="en-US" altLang="zh-TW" dirty="0">
-                <a:latin typeface="Times New Roman" panose="02020603050405020304" pitchFamily="18" charset="0"/>
-                <a:ea typeface="標楷體" panose="03000509000000000000" pitchFamily="65" charset="-120"/>
-                <a:cs typeface="Times New Roman" panose="02020603050405020304" pitchFamily="18" charset="0"/>
-              </a:rPr>
-              <a:t>GUI</a:t>
-            </a:r>
-            <a:r>
-              <a:rPr lang="zh-TW" altLang="en-US" dirty="0">
-                <a:latin typeface="Times New Roman" panose="02020603050405020304" pitchFamily="18" charset="0"/>
-                <a:ea typeface="標楷體" panose="03000509000000000000" pitchFamily="65" charset="-120"/>
-                <a:cs typeface="Times New Roman" panose="02020603050405020304" pitchFamily="18" charset="0"/>
-              </a:rPr>
-              <a:t> 設計</a:t>
-            </a:r>
+            <a:endParaRPr lang="zh-TW" altLang="en-US" dirty="0">
+              <a:latin typeface="Times New Roman" panose="02020603050405020304" pitchFamily="18" charset="0"/>
+              <a:ea typeface="標楷體" panose="03000509000000000000" pitchFamily="65" charset="-120"/>
+              <a:cs typeface="Times New Roman" panose="02020603050405020304" pitchFamily="18" charset="0"/>
+            </a:endParaRPr>
           </a:p>
         </p:txBody>
       </p:sp>
@@ -7030,30 +7011,11 @@
               </a:rPr>
               <a:t>:</a:t>
             </a:r>
-            <a:r>
-              <a:rPr lang="zh-TW" altLang="en-US" dirty="0">
-                <a:latin typeface="Times New Roman" panose="02020603050405020304" pitchFamily="18" charset="0"/>
-                <a:ea typeface="標楷體" panose="03000509000000000000" pitchFamily="65" charset="-120"/>
-                <a:cs typeface="Times New Roman" panose="02020603050405020304" pitchFamily="18" charset="0"/>
-              </a:rPr>
-              <a:t> </a:t>
-            </a:r>
-            <a:r>
-              <a:rPr lang="en-US" altLang="zh-TW" dirty="0">
-                <a:latin typeface="Times New Roman" panose="02020603050405020304" pitchFamily="18" charset="0"/>
-                <a:ea typeface="標楷體" panose="03000509000000000000" pitchFamily="65" charset="-120"/>
-                <a:cs typeface="Times New Roman" panose="02020603050405020304" pitchFamily="18" charset="0"/>
-              </a:rPr>
-              <a:t>GUI</a:t>
-            </a:r>
-            <a:r>
-              <a:rPr lang="zh-TW" altLang="en-US" dirty="0">
-                <a:latin typeface="Times New Roman" panose="02020603050405020304" pitchFamily="18" charset="0"/>
-                <a:ea typeface="標楷體" panose="03000509000000000000" pitchFamily="65" charset="-120"/>
-                <a:cs typeface="Times New Roman" panose="02020603050405020304" pitchFamily="18" charset="0"/>
-              </a:rPr>
-              <a:t> 設計</a:t>
-            </a:r>
+            <a:endParaRPr lang="zh-TW" altLang="en-US" dirty="0">
+              <a:latin typeface="Times New Roman" panose="02020603050405020304" pitchFamily="18" charset="0"/>
+              <a:ea typeface="標楷體" panose="03000509000000000000" pitchFamily="65" charset="-120"/>
+              <a:cs typeface="Times New Roman" panose="02020603050405020304" pitchFamily="18" charset="0"/>
+            </a:endParaRPr>
           </a:p>
         </p:txBody>
       </p:sp>

--- a/temp.pptx
+++ b/temp.pptx
@@ -6039,7 +6039,7 @@
               </a:lnSpc>
             </a:pPr>
             <a:r>
-              <a:rPr lang="en-US" altLang="zh-TW" sz="2000" dirty="0">
+              <a:rPr lang="en-US" altLang="zh-TW" sz="2000">
                 <a:solidFill>
                   <a:schemeClr val="tx1"/>
                 </a:solidFill>
@@ -6057,7 +6057,7 @@
               </a:lnSpc>
             </a:pPr>
             <a:r>
-              <a:rPr lang="en-US" altLang="zh-TW" sz="1600" dirty="0">
+              <a:rPr lang="en-US" altLang="zh-TW" sz="1600">
                 <a:solidFill>
                   <a:schemeClr val="tx1"/>
                 </a:solidFill>
@@ -6067,9 +6067,1563 @@
               </a:rPr>
               <a:t>0</a:t>
             </a:r>
+            <a:endParaRPr lang="en-US" altLang="zh-TW" sz="1600" dirty="0">
+              <a:solidFill>
+                <a:schemeClr val="tx1"/>
+              </a:solidFill>
+              <a:latin typeface="Times New Roman" panose="02020603050405020304" pitchFamily="18" charset="0"/>
+              <a:ea typeface="標楷體" panose="03000509000000000000" pitchFamily="65" charset="-120"/>
+              <a:cs typeface="Times New Roman" panose="02020603050405020304" pitchFamily="18" charset="0"/>
+            </a:endParaRPr>
           </a:p>
         </p:txBody>
       </p:sp>
+      <p:graphicFrame>
+        <p:nvGraphicFramePr>
+          <p:cNvPr id="2" name="表格 24">
+            <a:extLst>
+              <a:ext uri="{FF2B5EF4-FFF2-40B4-BE49-F238E27FC236}">
+                <a16:creationId xmlns:a16="http://schemas.microsoft.com/office/drawing/2014/main" id="{E214378B-28D3-B7BC-A356-73CC173297E1}"/>
+              </a:ext>
+            </a:extLst>
+          </p:cNvPr>
+          <p:cNvGraphicFramePr>
+            <a:graphicFrameLocks noGrp="1"/>
+          </p:cNvGraphicFramePr>
+          <p:nvPr>
+            <p:extLst>
+              <p:ext uri="{D42A27DB-BD31-4B8C-83A1-F6EECF244321}">
+                <p14:modId xmlns:p14="http://schemas.microsoft.com/office/powerpoint/2010/main" val="71759531"/>
+              </p:ext>
+            </p:extLst>
+          </p:nvPr>
+        </p:nvGraphicFramePr>
+        <p:xfrm>
+          <a:off x="2308861" y="2085530"/>
+          <a:ext cx="5288277" cy="4003090"/>
+        </p:xfrm>
+        <a:graphic>
+          <a:graphicData uri="http://schemas.openxmlformats.org/drawingml/2006/table">
+            <a:tbl>
+              <a:tblPr firstRow="1" bandRow="1">
+                <a:tableStyleId>{21E4AEA4-8DFA-4A89-87EB-49C32662AFE0}</a:tableStyleId>
+              </a:tblPr>
+              <a:tblGrid>
+                <a:gridCol w="890530">
+                  <a:extLst>
+                    <a:ext uri="{9D8B030D-6E8A-4147-A177-3AD203B41FA5}">
+                      <a16:colId xmlns:a16="http://schemas.microsoft.com/office/drawing/2014/main" val="58910734"/>
+                    </a:ext>
+                  </a:extLst>
+                </a:gridCol>
+                <a:gridCol w="890530">
+                  <a:extLst>
+                    <a:ext uri="{9D8B030D-6E8A-4147-A177-3AD203B41FA5}">
+                      <a16:colId xmlns:a16="http://schemas.microsoft.com/office/drawing/2014/main" val="1964622646"/>
+                    </a:ext>
+                  </a:extLst>
+                </a:gridCol>
+                <a:gridCol w="1024717">
+                  <a:extLst>
+                    <a:ext uri="{9D8B030D-6E8A-4147-A177-3AD203B41FA5}">
+                      <a16:colId xmlns:a16="http://schemas.microsoft.com/office/drawing/2014/main" val="2217758771"/>
+                    </a:ext>
+                  </a:extLst>
+                </a:gridCol>
+                <a:gridCol w="1010079">
+                  <a:extLst>
+                    <a:ext uri="{9D8B030D-6E8A-4147-A177-3AD203B41FA5}">
+                      <a16:colId xmlns:a16="http://schemas.microsoft.com/office/drawing/2014/main" val="3439045141"/>
+                    </a:ext>
+                  </a:extLst>
+                </a:gridCol>
+                <a:gridCol w="1472421">
+                  <a:extLst>
+                    <a:ext uri="{9D8B030D-6E8A-4147-A177-3AD203B41FA5}">
+                      <a16:colId xmlns:a16="http://schemas.microsoft.com/office/drawing/2014/main" val="3036497903"/>
+                    </a:ext>
+                  </a:extLst>
+                </a:gridCol>
+              </a:tblGrid>
+              <a:tr h="307930">
+                <a:tc>
+                  <a:txBody>
+                    <a:bodyPr/>
+                    <a:lstStyle/>
+                    <a:p>
+                      <a:pPr algn="ctr" fontAlgn="ctr"/>
+                      <a:r>
+                        <a:rPr lang="en-US" sz="1600" b="0" i="0" u="none" strike="noStrike" dirty="0">
+                          <a:solidFill>
+                            <a:schemeClr val="bg1"/>
+                          </a:solidFill>
+                          <a:effectLst/>
+                          <a:latin typeface="Times New Roman" panose="02020603050405020304" pitchFamily="18" charset="0"/>
+                          <a:ea typeface="新細明體" panose="02020500000000000000" pitchFamily="18" charset="-120"/>
+                        </a:rPr>
+                        <a:t>Gamma</a:t>
+                      </a:r>
+                    </a:p>
+                  </a:txBody>
+                  <a:tcPr marL="7017" marR="7017" marT="7017" marB="0" anchor="ctr"/>
+                </a:tc>
+                <a:tc>
+                  <a:txBody>
+                    <a:bodyPr/>
+                    <a:lstStyle/>
+                    <a:p>
+                      <a:pPr algn="ctr" fontAlgn="ctr"/>
+                      <a:r>
+                        <a:rPr lang="zh-TW" altLang="en-US" sz="1600" b="0" i="0" u="none" strike="noStrike">
+                          <a:solidFill>
+                            <a:schemeClr val="bg1"/>
+                          </a:solidFill>
+                          <a:effectLst/>
+                          <a:latin typeface="標楷體" panose="03000509000000000000" pitchFamily="65" charset="-120"/>
+                          <a:ea typeface="標楷體" panose="03000509000000000000" pitchFamily="65" charset="-120"/>
+                        </a:rPr>
+                        <a:t>色溫</a:t>
+                      </a:r>
+                      <a:endParaRPr lang="zh-TW" altLang="en-US" sz="1600" b="0" i="0" u="none" strike="noStrike">
+                        <a:solidFill>
+                          <a:schemeClr val="bg1"/>
+                        </a:solidFill>
+                        <a:effectLst/>
+                        <a:latin typeface="Times New Roman" panose="02020603050405020304" pitchFamily="18" charset="0"/>
+                        <a:ea typeface="新細明體" panose="02020500000000000000" pitchFamily="18" charset="-120"/>
+                      </a:endParaRPr>
+                    </a:p>
+                  </a:txBody>
+                  <a:tcPr marL="7017" marR="7017" marT="7017" marB="0" anchor="ctr"/>
+                </a:tc>
+                <a:tc>
+                  <a:txBody>
+                    <a:bodyPr/>
+                    <a:lstStyle/>
+                    <a:p>
+                      <a:pPr algn="ctr" fontAlgn="ctr"/>
+                      <a:r>
+                        <a:rPr lang="zh-TW" altLang="en-US" sz="1600" b="0" i="0" u="none" strike="noStrike">
+                          <a:solidFill>
+                            <a:schemeClr val="bg1"/>
+                          </a:solidFill>
+                          <a:effectLst/>
+                          <a:latin typeface="標楷體" panose="03000509000000000000" pitchFamily="65" charset="-120"/>
+                          <a:ea typeface="標楷體" panose="03000509000000000000" pitchFamily="65" charset="-120"/>
+                        </a:rPr>
+                        <a:t>量測色溫</a:t>
+                      </a:r>
+                      <a:endParaRPr lang="zh-TW" altLang="en-US" sz="1600" b="0" i="0" u="none" strike="noStrike">
+                        <a:solidFill>
+                          <a:schemeClr val="bg1"/>
+                        </a:solidFill>
+                        <a:effectLst/>
+                        <a:latin typeface="Times New Roman" panose="02020603050405020304" pitchFamily="18" charset="0"/>
+                        <a:ea typeface="新細明體" panose="02020500000000000000" pitchFamily="18" charset="-120"/>
+                      </a:endParaRPr>
+                    </a:p>
+                  </a:txBody>
+                  <a:tcPr marL="7017" marR="7017" marT="7017" marB="0" anchor="ctr"/>
+                </a:tc>
+                <a:tc>
+                  <a:txBody>
+                    <a:bodyPr/>
+                    <a:lstStyle/>
+                    <a:p>
+                      <a:pPr algn="ctr" fontAlgn="ctr"/>
+                      <a:r>
+                        <a:rPr lang="en-US" altLang="zh-TW" sz="1600" b="0" i="0" u="none" strike="noStrike">
+                          <a:solidFill>
+                            <a:schemeClr val="bg1"/>
+                          </a:solidFill>
+                          <a:effectLst/>
+                          <a:latin typeface="Times New Roman" panose="02020603050405020304" pitchFamily="18" charset="0"/>
+                          <a:ea typeface="新細明體" panose="02020500000000000000" pitchFamily="18" charset="-120"/>
+                        </a:rPr>
+                        <a:t>256</a:t>
+                      </a:r>
+                      <a:r>
+                        <a:rPr lang="zh-TW" altLang="en-US" sz="1600" b="0" i="0" u="none" strike="noStrike">
+                          <a:solidFill>
+                            <a:schemeClr val="bg1"/>
+                          </a:solidFill>
+                          <a:effectLst/>
+                          <a:latin typeface="標楷體" panose="03000509000000000000" pitchFamily="65" charset="-120"/>
+                          <a:ea typeface="標楷體" panose="03000509000000000000" pitchFamily="65" charset="-120"/>
+                        </a:rPr>
+                        <a:t>階</a:t>
+                      </a:r>
+                      <a:endParaRPr lang="zh-TW" altLang="en-US" sz="1600" b="0" i="0" u="none" strike="noStrike">
+                        <a:solidFill>
+                          <a:schemeClr val="bg1"/>
+                        </a:solidFill>
+                        <a:effectLst/>
+                        <a:latin typeface="Times New Roman" panose="02020603050405020304" pitchFamily="18" charset="0"/>
+                        <a:ea typeface="新細明體" panose="02020500000000000000" pitchFamily="18" charset="-120"/>
+                      </a:endParaRPr>
+                    </a:p>
+                  </a:txBody>
+                  <a:tcPr marL="7017" marR="7017" marT="7017" marB="0" anchor="ctr"/>
+                </a:tc>
+                <a:tc>
+                  <a:txBody>
+                    <a:bodyPr/>
+                    <a:lstStyle/>
+                    <a:p>
+                      <a:pPr algn="ctr" fontAlgn="ctr"/>
+                      <a:r>
+                        <a:rPr lang="zh-TW" altLang="en-US" sz="1600" b="0" i="0" u="none" strike="noStrike" dirty="0">
+                          <a:solidFill>
+                            <a:schemeClr val="bg1"/>
+                          </a:solidFill>
+                          <a:effectLst/>
+                          <a:latin typeface="標楷體" panose="03000509000000000000" pitchFamily="65" charset="-120"/>
+                          <a:ea typeface="標楷體" panose="03000509000000000000" pitchFamily="65" charset="-120"/>
+                        </a:rPr>
+                        <a:t>時間</a:t>
+                      </a:r>
+                      <a:endParaRPr lang="zh-TW" altLang="en-US" sz="1600" b="0" i="0" u="none" strike="noStrike" dirty="0">
+                        <a:solidFill>
+                          <a:schemeClr val="bg1"/>
+                        </a:solidFill>
+                        <a:effectLst/>
+                        <a:latin typeface="Times New Roman" panose="02020603050405020304" pitchFamily="18" charset="0"/>
+                        <a:ea typeface="新細明體" panose="02020500000000000000" pitchFamily="18" charset="-120"/>
+                      </a:endParaRPr>
+                    </a:p>
+                  </a:txBody>
+                  <a:tcPr marL="7017" marR="7017" marT="7017" marB="0" anchor="ctr"/>
+                </a:tc>
+                <a:extLst>
+                  <a:ext uri="{0D108BD9-81ED-4DB2-BD59-A6C34878D82A}">
+                    <a16:rowId xmlns:a16="http://schemas.microsoft.com/office/drawing/2014/main" val="4047486063"/>
+                  </a:ext>
+                </a:extLst>
+              </a:tr>
+              <a:tr h="307930">
+                <a:tc>
+                  <a:txBody>
+                    <a:bodyPr/>
+                    <a:lstStyle/>
+                    <a:p>
+                      <a:pPr algn="ctr" fontAlgn="ctr"/>
+                      <a:r>
+                        <a:rPr lang="en-US" altLang="zh-TW" sz="1600" b="0" i="0" u="none" strike="noStrike" dirty="0">
+                          <a:solidFill>
+                            <a:srgbClr val="FF0000"/>
+                          </a:solidFill>
+                          <a:effectLst/>
+                          <a:latin typeface="Times New Roman" panose="02020603050405020304" pitchFamily="18" charset="0"/>
+                          <a:ea typeface="新細明體" panose="02020500000000000000" pitchFamily="18" charset="-120"/>
+                        </a:rPr>
+                        <a:t>1.8</a:t>
+                      </a:r>
+                    </a:p>
+                  </a:txBody>
+                  <a:tcPr marL="7017" marR="7017" marT="7017" marB="0" anchor="ctr"/>
+                </a:tc>
+                <a:tc>
+                  <a:txBody>
+                    <a:bodyPr/>
+                    <a:lstStyle/>
+                    <a:p>
+                      <a:pPr algn="ctr" fontAlgn="ctr"/>
+                      <a:r>
+                        <a:rPr lang="en-US" altLang="zh-TW" sz="1600" b="0" i="0" u="none" strike="noStrike">
+                          <a:solidFill>
+                            <a:srgbClr val="000000"/>
+                          </a:solidFill>
+                          <a:effectLst/>
+                          <a:latin typeface="Times New Roman" panose="02020603050405020304" pitchFamily="18" charset="0"/>
+                          <a:ea typeface="新細明體" panose="02020500000000000000" pitchFamily="18" charset="-120"/>
+                        </a:rPr>
+                        <a:t>5400</a:t>
+                      </a:r>
+                    </a:p>
+                  </a:txBody>
+                  <a:tcPr marL="7017" marR="7017" marT="7017" marB="0" anchor="ctr"/>
+                </a:tc>
+                <a:tc>
+                  <a:txBody>
+                    <a:bodyPr/>
+                    <a:lstStyle/>
+                    <a:p>
+                      <a:pPr algn="ctr" fontAlgn="ctr"/>
+                      <a:r>
+                        <a:rPr lang="en-US" altLang="zh-TW" sz="1600" b="0" i="0" u="none" strike="noStrike">
+                          <a:solidFill>
+                            <a:srgbClr val="000000"/>
+                          </a:solidFill>
+                          <a:effectLst/>
+                          <a:latin typeface="Times New Roman" panose="02020603050405020304" pitchFamily="18" charset="0"/>
+                          <a:ea typeface="新細明體" panose="02020500000000000000" pitchFamily="18" charset="-120"/>
+                        </a:rPr>
+                        <a:t>5346</a:t>
+                      </a:r>
+                    </a:p>
+                  </a:txBody>
+                  <a:tcPr marL="7017" marR="7017" marT="7017" marB="0" anchor="ctr"/>
+                </a:tc>
+                <a:tc>
+                  <a:txBody>
+                    <a:bodyPr/>
+                    <a:lstStyle/>
+                    <a:p>
+                      <a:pPr algn="ctr" fontAlgn="ctr"/>
+                      <a:r>
+                        <a:rPr lang="en-US" altLang="zh-TW" sz="1600" b="0" i="0" u="none" strike="noStrike">
+                          <a:solidFill>
+                            <a:srgbClr val="000000"/>
+                          </a:solidFill>
+                          <a:effectLst/>
+                          <a:latin typeface="Times New Roman" panose="02020603050405020304" pitchFamily="18" charset="0"/>
+                          <a:ea typeface="新細明體" panose="02020500000000000000" pitchFamily="18" charset="-120"/>
+                        </a:rPr>
+                        <a:t>1.82 </a:t>
+                      </a:r>
+                    </a:p>
+                  </a:txBody>
+                  <a:tcPr marL="7017" marR="7017" marT="7017" marB="0" anchor="ctr"/>
+                </a:tc>
+                <a:tc>
+                  <a:txBody>
+                    <a:bodyPr/>
+                    <a:lstStyle/>
+                    <a:p>
+                      <a:pPr algn="ctr" fontAlgn="ctr"/>
+                      <a:r>
+                        <a:rPr lang="en-US" altLang="zh-TW" sz="1600" b="0" i="0" u="none" strike="noStrike">
+                          <a:solidFill>
+                            <a:srgbClr val="000000"/>
+                          </a:solidFill>
+                          <a:effectLst/>
+                          <a:latin typeface="Times New Roman" panose="02020603050405020304" pitchFamily="18" charset="0"/>
+                          <a:ea typeface="新細明體" panose="02020500000000000000" pitchFamily="18" charset="-120"/>
+                        </a:rPr>
+                        <a:t>11:38</a:t>
+                      </a:r>
+                    </a:p>
+                  </a:txBody>
+                  <a:tcPr marL="6350" marR="6350" marT="6350" marB="0" anchor="ctr"/>
+                </a:tc>
+                <a:extLst>
+                  <a:ext uri="{0D108BD9-81ED-4DB2-BD59-A6C34878D82A}">
+                    <a16:rowId xmlns:a16="http://schemas.microsoft.com/office/drawing/2014/main" val="100759405"/>
+                  </a:ext>
+                </a:extLst>
+              </a:tr>
+              <a:tr h="307930">
+                <a:tc>
+                  <a:txBody>
+                    <a:bodyPr/>
+                    <a:lstStyle/>
+                    <a:p>
+                      <a:pPr algn="ctr" fontAlgn="ctr"/>
+                      <a:endParaRPr lang="zh-TW" altLang="en-US" sz="1600" b="0" i="0" u="none" strike="noStrike" dirty="0">
+                        <a:solidFill>
+                          <a:srgbClr val="FF0000"/>
+                        </a:solidFill>
+                        <a:effectLst/>
+                        <a:latin typeface="Times New Roman" panose="02020603050405020304" pitchFamily="18" charset="0"/>
+                        <a:ea typeface="新細明體" panose="02020500000000000000" pitchFamily="18" charset="-120"/>
+                      </a:endParaRPr>
+                    </a:p>
+                  </a:txBody>
+                  <a:tcPr marL="7017" marR="7017" marT="7017" marB="0" anchor="ctr"/>
+                </a:tc>
+                <a:tc>
+                  <a:txBody>
+                    <a:bodyPr/>
+                    <a:lstStyle/>
+                    <a:p>
+                      <a:pPr algn="ctr" fontAlgn="ctr"/>
+                      <a:r>
+                        <a:rPr lang="en-US" altLang="zh-TW" sz="1600" b="0" i="0" u="none" strike="noStrike">
+                          <a:solidFill>
+                            <a:srgbClr val="000000"/>
+                          </a:solidFill>
+                          <a:effectLst/>
+                          <a:latin typeface="Times New Roman" panose="02020603050405020304" pitchFamily="18" charset="0"/>
+                          <a:ea typeface="新細明體" panose="02020500000000000000" pitchFamily="18" charset="-120"/>
+                        </a:rPr>
+                        <a:t>6500</a:t>
+                      </a:r>
+                    </a:p>
+                  </a:txBody>
+                  <a:tcPr marL="7017" marR="7017" marT="7017" marB="0" anchor="ctr"/>
+                </a:tc>
+                <a:tc>
+                  <a:txBody>
+                    <a:bodyPr/>
+                    <a:lstStyle/>
+                    <a:p>
+                      <a:pPr algn="ctr" fontAlgn="ctr"/>
+                      <a:r>
+                        <a:rPr lang="en-US" altLang="zh-TW" sz="1600" b="0" i="0" u="none" strike="noStrike">
+                          <a:solidFill>
+                            <a:srgbClr val="000000"/>
+                          </a:solidFill>
+                          <a:effectLst/>
+                          <a:latin typeface="Times New Roman" panose="02020603050405020304" pitchFamily="18" charset="0"/>
+                          <a:ea typeface="新細明體" panose="02020500000000000000" pitchFamily="18" charset="-120"/>
+                        </a:rPr>
+                        <a:t>6628</a:t>
+                      </a:r>
+                    </a:p>
+                  </a:txBody>
+                  <a:tcPr marL="7017" marR="7017" marT="7017" marB="0" anchor="ctr"/>
+                </a:tc>
+                <a:tc>
+                  <a:txBody>
+                    <a:bodyPr/>
+                    <a:lstStyle/>
+                    <a:p>
+                      <a:pPr algn="ctr" fontAlgn="ctr"/>
+                      <a:r>
+                        <a:rPr lang="en-US" altLang="zh-TW" sz="1600" b="0" i="0" u="none" strike="noStrike">
+                          <a:solidFill>
+                            <a:srgbClr val="000000"/>
+                          </a:solidFill>
+                          <a:effectLst/>
+                          <a:latin typeface="Times New Roman" panose="02020603050405020304" pitchFamily="18" charset="0"/>
+                          <a:ea typeface="新細明體" panose="02020500000000000000" pitchFamily="18" charset="-120"/>
+                        </a:rPr>
+                        <a:t>1.83 </a:t>
+                      </a:r>
+                    </a:p>
+                  </a:txBody>
+                  <a:tcPr marL="7017" marR="7017" marT="7017" marB="0" anchor="ctr"/>
+                </a:tc>
+                <a:tc>
+                  <a:txBody>
+                    <a:bodyPr/>
+                    <a:lstStyle/>
+                    <a:p>
+                      <a:pPr algn="ctr" fontAlgn="ctr"/>
+                      <a:r>
+                        <a:rPr lang="en-US" altLang="zh-TW" sz="1600" b="0" i="0" u="none" strike="noStrike">
+                          <a:solidFill>
+                            <a:srgbClr val="000000"/>
+                          </a:solidFill>
+                          <a:effectLst/>
+                          <a:latin typeface="Times New Roman" panose="02020603050405020304" pitchFamily="18" charset="0"/>
+                          <a:ea typeface="新細明體" panose="02020500000000000000" pitchFamily="18" charset="-120"/>
+                        </a:rPr>
+                        <a:t>10:31</a:t>
+                      </a:r>
+                    </a:p>
+                  </a:txBody>
+                  <a:tcPr marL="6350" marR="6350" marT="6350" marB="0" anchor="ctr"/>
+                </a:tc>
+                <a:extLst>
+                  <a:ext uri="{0D108BD9-81ED-4DB2-BD59-A6C34878D82A}">
+                    <a16:rowId xmlns:a16="http://schemas.microsoft.com/office/drawing/2014/main" val="4097251436"/>
+                  </a:ext>
+                </a:extLst>
+              </a:tr>
+              <a:tr h="307930">
+                <a:tc>
+                  <a:txBody>
+                    <a:bodyPr/>
+                    <a:lstStyle/>
+                    <a:p>
+                      <a:pPr algn="ctr" fontAlgn="ctr"/>
+                      <a:endParaRPr lang="zh-TW" altLang="en-US" sz="1600" b="0" i="0" u="none" strike="noStrike" dirty="0">
+                        <a:solidFill>
+                          <a:srgbClr val="FF0000"/>
+                        </a:solidFill>
+                        <a:effectLst/>
+                        <a:latin typeface="Times New Roman" panose="02020603050405020304" pitchFamily="18" charset="0"/>
+                        <a:ea typeface="新細明體" panose="02020500000000000000" pitchFamily="18" charset="-120"/>
+                      </a:endParaRPr>
+                    </a:p>
+                  </a:txBody>
+                  <a:tcPr marL="7017" marR="7017" marT="7017" marB="0" anchor="ctr"/>
+                </a:tc>
+                <a:tc>
+                  <a:txBody>
+                    <a:bodyPr/>
+                    <a:lstStyle/>
+                    <a:p>
+                      <a:pPr algn="ctr" fontAlgn="ctr"/>
+                      <a:r>
+                        <a:rPr lang="en-US" altLang="zh-TW" sz="1600" b="0" i="0" u="none" strike="noStrike">
+                          <a:solidFill>
+                            <a:srgbClr val="000000"/>
+                          </a:solidFill>
+                          <a:effectLst/>
+                          <a:latin typeface="Times New Roman" panose="02020603050405020304" pitchFamily="18" charset="0"/>
+                          <a:ea typeface="新細明體" panose="02020500000000000000" pitchFamily="18" charset="-120"/>
+                        </a:rPr>
+                        <a:t>9300</a:t>
+                      </a:r>
+                    </a:p>
+                  </a:txBody>
+                  <a:tcPr marL="7017" marR="7017" marT="7017" marB="0" anchor="ctr"/>
+                </a:tc>
+                <a:tc>
+                  <a:txBody>
+                    <a:bodyPr/>
+                    <a:lstStyle/>
+                    <a:p>
+                      <a:pPr algn="ctr" fontAlgn="ctr"/>
+                      <a:r>
+                        <a:rPr lang="en-US" altLang="zh-TW" sz="1600" b="0" i="0" u="none" strike="noStrike">
+                          <a:solidFill>
+                            <a:srgbClr val="000000"/>
+                          </a:solidFill>
+                          <a:effectLst/>
+                          <a:latin typeface="Times New Roman" panose="02020603050405020304" pitchFamily="18" charset="0"/>
+                          <a:ea typeface="新細明體" panose="02020500000000000000" pitchFamily="18" charset="-120"/>
+                        </a:rPr>
+                        <a:t>9090</a:t>
+                      </a:r>
+                    </a:p>
+                  </a:txBody>
+                  <a:tcPr marL="7017" marR="7017" marT="7017" marB="0" anchor="ctr"/>
+                </a:tc>
+                <a:tc>
+                  <a:txBody>
+                    <a:bodyPr/>
+                    <a:lstStyle/>
+                    <a:p>
+                      <a:pPr algn="ctr" fontAlgn="ctr"/>
+                      <a:r>
+                        <a:rPr lang="en-US" altLang="zh-TW" sz="1600" b="0" i="0" u="none" strike="noStrike">
+                          <a:solidFill>
+                            <a:srgbClr val="000000"/>
+                          </a:solidFill>
+                          <a:effectLst/>
+                          <a:latin typeface="Times New Roman" panose="02020603050405020304" pitchFamily="18" charset="0"/>
+                          <a:ea typeface="新細明體" panose="02020500000000000000" pitchFamily="18" charset="-120"/>
+                        </a:rPr>
+                        <a:t>1.82 </a:t>
+                      </a:r>
+                    </a:p>
+                  </a:txBody>
+                  <a:tcPr marL="7017" marR="7017" marT="7017" marB="0" anchor="ctr"/>
+                </a:tc>
+                <a:tc>
+                  <a:txBody>
+                    <a:bodyPr/>
+                    <a:lstStyle/>
+                    <a:p>
+                      <a:pPr algn="ctr" fontAlgn="ctr"/>
+                      <a:r>
+                        <a:rPr lang="en-US" altLang="zh-TW" sz="1600" b="0" i="0" u="none" strike="noStrike">
+                          <a:solidFill>
+                            <a:srgbClr val="000000"/>
+                          </a:solidFill>
+                          <a:effectLst/>
+                          <a:latin typeface="Times New Roman" panose="02020603050405020304" pitchFamily="18" charset="0"/>
+                          <a:ea typeface="新細明體" panose="02020500000000000000" pitchFamily="18" charset="-120"/>
+                        </a:rPr>
+                        <a:t>10:57</a:t>
+                      </a:r>
+                    </a:p>
+                  </a:txBody>
+                  <a:tcPr marL="6350" marR="6350" marT="6350" marB="0" anchor="ctr"/>
+                </a:tc>
+                <a:extLst>
+                  <a:ext uri="{0D108BD9-81ED-4DB2-BD59-A6C34878D82A}">
+                    <a16:rowId xmlns:a16="http://schemas.microsoft.com/office/drawing/2014/main" val="4244588434"/>
+                  </a:ext>
+                </a:extLst>
+              </a:tr>
+              <a:tr h="307930">
+                <a:tc>
+                  <a:txBody>
+                    <a:bodyPr/>
+                    <a:lstStyle/>
+                    <a:p>
+                      <a:pPr algn="ctr" fontAlgn="ctr"/>
+                      <a:r>
+                        <a:rPr lang="en-US" altLang="zh-TW" sz="1600" b="0" i="0" u="none" strike="noStrike">
+                          <a:solidFill>
+                            <a:srgbClr val="FF0000"/>
+                          </a:solidFill>
+                          <a:effectLst/>
+                          <a:latin typeface="Times New Roman" panose="02020603050405020304" pitchFamily="18" charset="0"/>
+                          <a:ea typeface="新細明體" panose="02020500000000000000" pitchFamily="18" charset="-120"/>
+                        </a:rPr>
+                        <a:t>2.0 </a:t>
+                      </a:r>
+                    </a:p>
+                  </a:txBody>
+                  <a:tcPr marL="7017" marR="7017" marT="7017" marB="0" anchor="ctr"/>
+                </a:tc>
+                <a:tc>
+                  <a:txBody>
+                    <a:bodyPr/>
+                    <a:lstStyle/>
+                    <a:p>
+                      <a:pPr algn="ctr" fontAlgn="ctr"/>
+                      <a:r>
+                        <a:rPr lang="en-US" altLang="zh-TW" sz="1600" b="0" i="0" u="none" strike="noStrike">
+                          <a:solidFill>
+                            <a:srgbClr val="000000"/>
+                          </a:solidFill>
+                          <a:effectLst/>
+                          <a:latin typeface="Times New Roman" panose="02020603050405020304" pitchFamily="18" charset="0"/>
+                          <a:ea typeface="新細明體" panose="02020500000000000000" pitchFamily="18" charset="-120"/>
+                        </a:rPr>
+                        <a:t>5400</a:t>
+                      </a:r>
+                    </a:p>
+                  </a:txBody>
+                  <a:tcPr marL="7017" marR="7017" marT="7017" marB="0" anchor="ctr"/>
+                </a:tc>
+                <a:tc>
+                  <a:txBody>
+                    <a:bodyPr/>
+                    <a:lstStyle/>
+                    <a:p>
+                      <a:pPr algn="ctr" fontAlgn="ctr"/>
+                      <a:r>
+                        <a:rPr lang="en-US" altLang="zh-TW" sz="1600" b="0" i="0" u="none" strike="noStrike">
+                          <a:solidFill>
+                            <a:srgbClr val="000000"/>
+                          </a:solidFill>
+                          <a:effectLst/>
+                          <a:latin typeface="Times New Roman" panose="02020603050405020304" pitchFamily="18" charset="0"/>
+                          <a:ea typeface="新細明體" panose="02020500000000000000" pitchFamily="18" charset="-120"/>
+                        </a:rPr>
+                        <a:t>5374</a:t>
+                      </a:r>
+                    </a:p>
+                  </a:txBody>
+                  <a:tcPr marL="7017" marR="7017" marT="7017" marB="0" anchor="ctr"/>
+                </a:tc>
+                <a:tc>
+                  <a:txBody>
+                    <a:bodyPr/>
+                    <a:lstStyle/>
+                    <a:p>
+                      <a:pPr algn="ctr" fontAlgn="ctr"/>
+                      <a:r>
+                        <a:rPr lang="en-US" altLang="zh-TW" sz="1600" b="0" i="0" u="none" strike="noStrike">
+                          <a:solidFill>
+                            <a:srgbClr val="000000"/>
+                          </a:solidFill>
+                          <a:effectLst/>
+                          <a:latin typeface="Times New Roman" panose="02020603050405020304" pitchFamily="18" charset="0"/>
+                          <a:ea typeface="新細明體" panose="02020500000000000000" pitchFamily="18" charset="-120"/>
+                        </a:rPr>
+                        <a:t>2.00 </a:t>
+                      </a:r>
+                    </a:p>
+                  </a:txBody>
+                  <a:tcPr marL="7017" marR="7017" marT="7017" marB="0" anchor="ctr"/>
+                </a:tc>
+                <a:tc>
+                  <a:txBody>
+                    <a:bodyPr/>
+                    <a:lstStyle/>
+                    <a:p>
+                      <a:pPr algn="ctr" fontAlgn="ctr"/>
+                      <a:r>
+                        <a:rPr lang="en-US" altLang="zh-TW" sz="1600" b="0" i="0" u="none" strike="noStrike">
+                          <a:solidFill>
+                            <a:srgbClr val="000000"/>
+                          </a:solidFill>
+                          <a:effectLst/>
+                          <a:latin typeface="Times New Roman" panose="02020603050405020304" pitchFamily="18" charset="0"/>
+                          <a:ea typeface="新細明體" panose="02020500000000000000" pitchFamily="18" charset="-120"/>
+                        </a:rPr>
+                        <a:t>10:22</a:t>
+                      </a:r>
+                    </a:p>
+                  </a:txBody>
+                  <a:tcPr marL="6350" marR="6350" marT="6350" marB="0" anchor="ctr"/>
+                </a:tc>
+                <a:extLst>
+                  <a:ext uri="{0D108BD9-81ED-4DB2-BD59-A6C34878D82A}">
+                    <a16:rowId xmlns:a16="http://schemas.microsoft.com/office/drawing/2014/main" val="4100677602"/>
+                  </a:ext>
+                </a:extLst>
+              </a:tr>
+              <a:tr h="307930">
+                <a:tc>
+                  <a:txBody>
+                    <a:bodyPr/>
+                    <a:lstStyle/>
+                    <a:p>
+                      <a:pPr algn="ctr" fontAlgn="ctr"/>
+                      <a:endParaRPr lang="zh-TW" altLang="en-US" sz="1600" b="0" i="0" u="none" strike="noStrike" dirty="0">
+                        <a:solidFill>
+                          <a:srgbClr val="FF0000"/>
+                        </a:solidFill>
+                        <a:effectLst/>
+                        <a:latin typeface="Times New Roman" panose="02020603050405020304" pitchFamily="18" charset="0"/>
+                        <a:ea typeface="新細明體" panose="02020500000000000000" pitchFamily="18" charset="-120"/>
+                      </a:endParaRPr>
+                    </a:p>
+                  </a:txBody>
+                  <a:tcPr marL="7017" marR="7017" marT="7017" marB="0" anchor="ctr"/>
+                </a:tc>
+                <a:tc>
+                  <a:txBody>
+                    <a:bodyPr/>
+                    <a:lstStyle/>
+                    <a:p>
+                      <a:pPr algn="ctr" fontAlgn="ctr"/>
+                      <a:r>
+                        <a:rPr lang="en-US" altLang="zh-TW" sz="1600" b="0" i="0" u="none" strike="noStrike">
+                          <a:solidFill>
+                            <a:srgbClr val="000000"/>
+                          </a:solidFill>
+                          <a:effectLst/>
+                          <a:latin typeface="Times New Roman" panose="02020603050405020304" pitchFamily="18" charset="0"/>
+                          <a:ea typeface="新細明體" panose="02020500000000000000" pitchFamily="18" charset="-120"/>
+                        </a:rPr>
+                        <a:t>6500</a:t>
+                      </a:r>
+                    </a:p>
+                  </a:txBody>
+                  <a:tcPr marL="7017" marR="7017" marT="7017" marB="0" anchor="ctr"/>
+                </a:tc>
+                <a:tc>
+                  <a:txBody>
+                    <a:bodyPr/>
+                    <a:lstStyle/>
+                    <a:p>
+                      <a:pPr algn="ctr" fontAlgn="ctr"/>
+                      <a:r>
+                        <a:rPr lang="en-US" altLang="zh-TW" sz="1600" b="0" i="0" u="none" strike="noStrike">
+                          <a:solidFill>
+                            <a:srgbClr val="000000"/>
+                          </a:solidFill>
+                          <a:effectLst/>
+                          <a:latin typeface="Times New Roman" panose="02020603050405020304" pitchFamily="18" charset="0"/>
+                          <a:ea typeface="新細明體" panose="02020500000000000000" pitchFamily="18" charset="-120"/>
+                        </a:rPr>
+                        <a:t>6587</a:t>
+                      </a:r>
+                    </a:p>
+                  </a:txBody>
+                  <a:tcPr marL="7017" marR="7017" marT="7017" marB="0" anchor="ctr"/>
+                </a:tc>
+                <a:tc>
+                  <a:txBody>
+                    <a:bodyPr/>
+                    <a:lstStyle/>
+                    <a:p>
+                      <a:pPr algn="ctr" fontAlgn="ctr"/>
+                      <a:r>
+                        <a:rPr lang="en-US" altLang="zh-TW" sz="1600" b="0" i="0" u="none" strike="noStrike">
+                          <a:solidFill>
+                            <a:srgbClr val="000000"/>
+                          </a:solidFill>
+                          <a:effectLst/>
+                          <a:latin typeface="Times New Roman" panose="02020603050405020304" pitchFamily="18" charset="0"/>
+                          <a:ea typeface="新細明體" panose="02020500000000000000" pitchFamily="18" charset="-120"/>
+                        </a:rPr>
+                        <a:t>2.00 </a:t>
+                      </a:r>
+                    </a:p>
+                  </a:txBody>
+                  <a:tcPr marL="7017" marR="7017" marT="7017" marB="0" anchor="ctr"/>
+                </a:tc>
+                <a:tc>
+                  <a:txBody>
+                    <a:bodyPr/>
+                    <a:lstStyle/>
+                    <a:p>
+                      <a:pPr algn="ctr" fontAlgn="ctr"/>
+                      <a:r>
+                        <a:rPr lang="en-US" altLang="zh-TW" sz="1600" b="0" i="0" u="none" strike="noStrike">
+                          <a:solidFill>
+                            <a:srgbClr val="000000"/>
+                          </a:solidFill>
+                          <a:effectLst/>
+                          <a:latin typeface="Times New Roman" panose="02020603050405020304" pitchFamily="18" charset="0"/>
+                          <a:ea typeface="新細明體" panose="02020500000000000000" pitchFamily="18" charset="-120"/>
+                        </a:rPr>
+                        <a:t>12:01</a:t>
+                      </a:r>
+                    </a:p>
+                  </a:txBody>
+                  <a:tcPr marL="6350" marR="6350" marT="6350" marB="0" anchor="ctr"/>
+                </a:tc>
+                <a:extLst>
+                  <a:ext uri="{0D108BD9-81ED-4DB2-BD59-A6C34878D82A}">
+                    <a16:rowId xmlns:a16="http://schemas.microsoft.com/office/drawing/2014/main" val="4090125723"/>
+                  </a:ext>
+                </a:extLst>
+              </a:tr>
+              <a:tr h="307930">
+                <a:tc>
+                  <a:txBody>
+                    <a:bodyPr/>
+                    <a:lstStyle/>
+                    <a:p>
+                      <a:pPr algn="ctr" fontAlgn="ctr"/>
+                      <a:endParaRPr lang="zh-TW" altLang="en-US" sz="1600" b="0" i="0" u="none" strike="noStrike" dirty="0">
+                        <a:solidFill>
+                          <a:srgbClr val="FF0000"/>
+                        </a:solidFill>
+                        <a:effectLst/>
+                        <a:latin typeface="Times New Roman" panose="02020603050405020304" pitchFamily="18" charset="0"/>
+                        <a:ea typeface="新細明體" panose="02020500000000000000" pitchFamily="18" charset="-120"/>
+                      </a:endParaRPr>
+                    </a:p>
+                  </a:txBody>
+                  <a:tcPr marL="7017" marR="7017" marT="7017" marB="0" anchor="ctr"/>
+                </a:tc>
+                <a:tc>
+                  <a:txBody>
+                    <a:bodyPr/>
+                    <a:lstStyle/>
+                    <a:p>
+                      <a:pPr algn="ctr" fontAlgn="ctr"/>
+                      <a:r>
+                        <a:rPr lang="en-US" altLang="zh-TW" sz="1600" b="0" i="0" u="none" strike="noStrike">
+                          <a:solidFill>
+                            <a:srgbClr val="000000"/>
+                          </a:solidFill>
+                          <a:effectLst/>
+                          <a:latin typeface="Times New Roman" panose="02020603050405020304" pitchFamily="18" charset="0"/>
+                          <a:ea typeface="新細明體" panose="02020500000000000000" pitchFamily="18" charset="-120"/>
+                        </a:rPr>
+                        <a:t>9300</a:t>
+                      </a:r>
+                    </a:p>
+                  </a:txBody>
+                  <a:tcPr marL="7017" marR="7017" marT="7017" marB="0" anchor="ctr"/>
+                </a:tc>
+                <a:tc>
+                  <a:txBody>
+                    <a:bodyPr/>
+                    <a:lstStyle/>
+                    <a:p>
+                      <a:pPr algn="ctr" fontAlgn="ctr"/>
+                      <a:r>
+                        <a:rPr lang="en-US" altLang="zh-TW" sz="1600" b="0" i="0" u="none" strike="noStrike">
+                          <a:solidFill>
+                            <a:srgbClr val="000000"/>
+                          </a:solidFill>
+                          <a:effectLst/>
+                          <a:latin typeface="Times New Roman" panose="02020603050405020304" pitchFamily="18" charset="0"/>
+                          <a:ea typeface="新細明體" panose="02020500000000000000" pitchFamily="18" charset="-120"/>
+                        </a:rPr>
+                        <a:t>9094</a:t>
+                      </a:r>
+                    </a:p>
+                  </a:txBody>
+                  <a:tcPr marL="7017" marR="7017" marT="7017" marB="0" anchor="ctr"/>
+                </a:tc>
+                <a:tc>
+                  <a:txBody>
+                    <a:bodyPr/>
+                    <a:lstStyle/>
+                    <a:p>
+                      <a:pPr algn="ctr" fontAlgn="ctr"/>
+                      <a:r>
+                        <a:rPr lang="en-US" altLang="zh-TW" sz="1600" b="0" i="0" u="none" strike="noStrike">
+                          <a:solidFill>
+                            <a:srgbClr val="000000"/>
+                          </a:solidFill>
+                          <a:effectLst/>
+                          <a:latin typeface="Times New Roman" panose="02020603050405020304" pitchFamily="18" charset="0"/>
+                          <a:ea typeface="新細明體" panose="02020500000000000000" pitchFamily="18" charset="-120"/>
+                        </a:rPr>
+                        <a:t>1.98 </a:t>
+                      </a:r>
+                    </a:p>
+                  </a:txBody>
+                  <a:tcPr marL="7017" marR="7017" marT="7017" marB="0" anchor="ctr"/>
+                </a:tc>
+                <a:tc>
+                  <a:txBody>
+                    <a:bodyPr/>
+                    <a:lstStyle/>
+                    <a:p>
+                      <a:pPr algn="ctr" fontAlgn="ctr"/>
+                      <a:r>
+                        <a:rPr lang="en-US" altLang="zh-TW" sz="1600" b="0" i="0" u="none" strike="noStrike">
+                          <a:solidFill>
+                            <a:srgbClr val="000000"/>
+                          </a:solidFill>
+                          <a:effectLst/>
+                          <a:latin typeface="Times New Roman" panose="02020603050405020304" pitchFamily="18" charset="0"/>
+                          <a:ea typeface="新細明體" panose="02020500000000000000" pitchFamily="18" charset="-120"/>
+                        </a:rPr>
+                        <a:t>11:07</a:t>
+                      </a:r>
+                    </a:p>
+                  </a:txBody>
+                  <a:tcPr marL="6350" marR="6350" marT="6350" marB="0" anchor="ctr"/>
+                </a:tc>
+                <a:extLst>
+                  <a:ext uri="{0D108BD9-81ED-4DB2-BD59-A6C34878D82A}">
+                    <a16:rowId xmlns:a16="http://schemas.microsoft.com/office/drawing/2014/main" val="189583938"/>
+                  </a:ext>
+                </a:extLst>
+              </a:tr>
+              <a:tr h="307930">
+                <a:tc>
+                  <a:txBody>
+                    <a:bodyPr/>
+                    <a:lstStyle/>
+                    <a:p>
+                      <a:pPr algn="ctr" fontAlgn="ctr"/>
+                      <a:r>
+                        <a:rPr lang="en-US" altLang="zh-TW" sz="1600" b="0" i="0" u="none" strike="noStrike">
+                          <a:solidFill>
+                            <a:srgbClr val="FF0000"/>
+                          </a:solidFill>
+                          <a:effectLst/>
+                          <a:latin typeface="Times New Roman" panose="02020603050405020304" pitchFamily="18" charset="0"/>
+                          <a:ea typeface="新細明體" panose="02020500000000000000" pitchFamily="18" charset="-120"/>
+                        </a:rPr>
+                        <a:t>2.2</a:t>
+                      </a:r>
+                    </a:p>
+                  </a:txBody>
+                  <a:tcPr marL="7017" marR="7017" marT="7017" marB="0" anchor="ctr"/>
+                </a:tc>
+                <a:tc>
+                  <a:txBody>
+                    <a:bodyPr/>
+                    <a:lstStyle/>
+                    <a:p>
+                      <a:pPr algn="ctr" fontAlgn="ctr"/>
+                      <a:r>
+                        <a:rPr lang="en-US" altLang="zh-TW" sz="1600" b="0" i="0" u="none" strike="noStrike">
+                          <a:solidFill>
+                            <a:srgbClr val="000000"/>
+                          </a:solidFill>
+                          <a:effectLst/>
+                          <a:latin typeface="Times New Roman" panose="02020603050405020304" pitchFamily="18" charset="0"/>
+                          <a:ea typeface="新細明體" panose="02020500000000000000" pitchFamily="18" charset="-120"/>
+                        </a:rPr>
+                        <a:t>5400</a:t>
+                      </a:r>
+                    </a:p>
+                  </a:txBody>
+                  <a:tcPr marL="7017" marR="7017" marT="7017" marB="0" anchor="ctr"/>
+                </a:tc>
+                <a:tc>
+                  <a:txBody>
+                    <a:bodyPr/>
+                    <a:lstStyle/>
+                    <a:p>
+                      <a:pPr algn="ctr" fontAlgn="ctr"/>
+                      <a:r>
+                        <a:rPr lang="en-US" altLang="zh-TW" sz="1600" b="0" i="0" u="none" strike="noStrike">
+                          <a:solidFill>
+                            <a:srgbClr val="000000"/>
+                          </a:solidFill>
+                          <a:effectLst/>
+                          <a:latin typeface="Times New Roman" panose="02020603050405020304" pitchFamily="18" charset="0"/>
+                          <a:ea typeface="新細明體" panose="02020500000000000000" pitchFamily="18" charset="-120"/>
+                        </a:rPr>
+                        <a:t>5381</a:t>
+                      </a:r>
+                    </a:p>
+                  </a:txBody>
+                  <a:tcPr marL="7017" marR="7017" marT="7017" marB="0" anchor="ctr"/>
+                </a:tc>
+                <a:tc>
+                  <a:txBody>
+                    <a:bodyPr/>
+                    <a:lstStyle/>
+                    <a:p>
+                      <a:pPr algn="ctr" fontAlgn="ctr"/>
+                      <a:r>
+                        <a:rPr lang="en-US" altLang="zh-TW" sz="1600" b="0" i="0" u="none" strike="noStrike">
+                          <a:solidFill>
+                            <a:srgbClr val="000000"/>
+                          </a:solidFill>
+                          <a:effectLst/>
+                          <a:latin typeface="Times New Roman" panose="02020603050405020304" pitchFamily="18" charset="0"/>
+                          <a:ea typeface="新細明體" panose="02020500000000000000" pitchFamily="18" charset="-120"/>
+                        </a:rPr>
+                        <a:t>2.24 </a:t>
+                      </a:r>
+                    </a:p>
+                  </a:txBody>
+                  <a:tcPr marL="7017" marR="7017" marT="7017" marB="0" anchor="ctr"/>
+                </a:tc>
+                <a:tc>
+                  <a:txBody>
+                    <a:bodyPr/>
+                    <a:lstStyle/>
+                    <a:p>
+                      <a:pPr algn="ctr" fontAlgn="ctr"/>
+                      <a:r>
+                        <a:rPr lang="en-US" altLang="zh-TW" sz="1600" b="0" i="0" u="none" strike="noStrike">
+                          <a:solidFill>
+                            <a:srgbClr val="000000"/>
+                          </a:solidFill>
+                          <a:effectLst/>
+                          <a:latin typeface="Times New Roman" panose="02020603050405020304" pitchFamily="18" charset="0"/>
+                          <a:ea typeface="新細明體" panose="02020500000000000000" pitchFamily="18" charset="-120"/>
+                        </a:rPr>
+                        <a:t>12:37</a:t>
+                      </a:r>
+                    </a:p>
+                  </a:txBody>
+                  <a:tcPr marL="6350" marR="6350" marT="6350" marB="0" anchor="ctr"/>
+                </a:tc>
+                <a:extLst>
+                  <a:ext uri="{0D108BD9-81ED-4DB2-BD59-A6C34878D82A}">
+                    <a16:rowId xmlns:a16="http://schemas.microsoft.com/office/drawing/2014/main" val="1098664419"/>
+                  </a:ext>
+                </a:extLst>
+              </a:tr>
+              <a:tr h="307930">
+                <a:tc>
+                  <a:txBody>
+                    <a:bodyPr/>
+                    <a:lstStyle/>
+                    <a:p>
+                      <a:pPr algn="ctr" fontAlgn="ctr"/>
+                      <a:endParaRPr lang="zh-TW" altLang="en-US" sz="1600" b="0" i="0" u="none" strike="noStrike" dirty="0">
+                        <a:solidFill>
+                          <a:srgbClr val="FF0000"/>
+                        </a:solidFill>
+                        <a:effectLst/>
+                        <a:latin typeface="Times New Roman" panose="02020603050405020304" pitchFamily="18" charset="0"/>
+                        <a:ea typeface="新細明體" panose="02020500000000000000" pitchFamily="18" charset="-120"/>
+                      </a:endParaRPr>
+                    </a:p>
+                  </a:txBody>
+                  <a:tcPr marL="7017" marR="7017" marT="7017" marB="0" anchor="ctr"/>
+                </a:tc>
+                <a:tc>
+                  <a:txBody>
+                    <a:bodyPr/>
+                    <a:lstStyle/>
+                    <a:p>
+                      <a:pPr algn="ctr" fontAlgn="ctr"/>
+                      <a:r>
+                        <a:rPr lang="en-US" altLang="zh-TW" sz="1600" b="0" i="0" u="none" strike="noStrike">
+                          <a:solidFill>
+                            <a:srgbClr val="000000"/>
+                          </a:solidFill>
+                          <a:effectLst/>
+                          <a:latin typeface="Times New Roman" panose="02020603050405020304" pitchFamily="18" charset="0"/>
+                          <a:ea typeface="新細明體" panose="02020500000000000000" pitchFamily="18" charset="-120"/>
+                        </a:rPr>
+                        <a:t>6500</a:t>
+                      </a:r>
+                    </a:p>
+                  </a:txBody>
+                  <a:tcPr marL="7017" marR="7017" marT="7017" marB="0" anchor="ctr"/>
+                </a:tc>
+                <a:tc>
+                  <a:txBody>
+                    <a:bodyPr/>
+                    <a:lstStyle/>
+                    <a:p>
+                      <a:pPr algn="ctr" fontAlgn="ctr"/>
+                      <a:r>
+                        <a:rPr lang="en-US" altLang="zh-TW" sz="1600" b="0" i="0" u="none" strike="noStrike">
+                          <a:solidFill>
+                            <a:srgbClr val="000000"/>
+                          </a:solidFill>
+                          <a:effectLst/>
+                          <a:latin typeface="Times New Roman" panose="02020603050405020304" pitchFamily="18" charset="0"/>
+                          <a:ea typeface="新細明體" panose="02020500000000000000" pitchFamily="18" charset="-120"/>
+                        </a:rPr>
+                        <a:t>6472</a:t>
+                      </a:r>
+                    </a:p>
+                  </a:txBody>
+                  <a:tcPr marL="7017" marR="7017" marT="7017" marB="0" anchor="ctr"/>
+                </a:tc>
+                <a:tc>
+                  <a:txBody>
+                    <a:bodyPr/>
+                    <a:lstStyle/>
+                    <a:p>
+                      <a:pPr algn="ctr" fontAlgn="ctr"/>
+                      <a:r>
+                        <a:rPr lang="en-US" altLang="zh-TW" sz="1600" b="0" i="0" u="none" strike="noStrike">
+                          <a:solidFill>
+                            <a:srgbClr val="000000"/>
+                          </a:solidFill>
+                          <a:effectLst/>
+                          <a:latin typeface="Times New Roman" panose="02020603050405020304" pitchFamily="18" charset="0"/>
+                          <a:ea typeface="新細明體" panose="02020500000000000000" pitchFamily="18" charset="-120"/>
+                        </a:rPr>
+                        <a:t>2.19 </a:t>
+                      </a:r>
+                    </a:p>
+                  </a:txBody>
+                  <a:tcPr marL="7017" marR="7017" marT="7017" marB="0" anchor="ctr"/>
+                </a:tc>
+                <a:tc>
+                  <a:txBody>
+                    <a:bodyPr/>
+                    <a:lstStyle/>
+                    <a:p>
+                      <a:pPr algn="ctr" fontAlgn="ctr"/>
+                      <a:r>
+                        <a:rPr lang="en-US" altLang="zh-TW" sz="1600" b="0" i="0" u="none" strike="noStrike">
+                          <a:solidFill>
+                            <a:srgbClr val="000000"/>
+                          </a:solidFill>
+                          <a:effectLst/>
+                          <a:latin typeface="Times New Roman" panose="02020603050405020304" pitchFamily="18" charset="0"/>
+                          <a:ea typeface="新細明體" panose="02020500000000000000" pitchFamily="18" charset="-120"/>
+                        </a:rPr>
+                        <a:t>11:01</a:t>
+                      </a:r>
+                    </a:p>
+                  </a:txBody>
+                  <a:tcPr marL="6350" marR="6350" marT="6350" marB="0" anchor="ctr"/>
+                </a:tc>
+                <a:extLst>
+                  <a:ext uri="{0D108BD9-81ED-4DB2-BD59-A6C34878D82A}">
+                    <a16:rowId xmlns:a16="http://schemas.microsoft.com/office/drawing/2014/main" val="1683948243"/>
+                  </a:ext>
+                </a:extLst>
+              </a:tr>
+              <a:tr h="307930">
+                <a:tc>
+                  <a:txBody>
+                    <a:bodyPr/>
+                    <a:lstStyle/>
+                    <a:p>
+                      <a:pPr algn="ctr" fontAlgn="ctr"/>
+                      <a:endParaRPr lang="zh-TW" altLang="en-US" sz="1600" b="0" i="0" u="none" strike="noStrike" dirty="0">
+                        <a:solidFill>
+                          <a:srgbClr val="FF0000"/>
+                        </a:solidFill>
+                        <a:effectLst/>
+                        <a:latin typeface="Times New Roman" panose="02020603050405020304" pitchFamily="18" charset="0"/>
+                        <a:ea typeface="新細明體" panose="02020500000000000000" pitchFamily="18" charset="-120"/>
+                      </a:endParaRPr>
+                    </a:p>
+                  </a:txBody>
+                  <a:tcPr marL="7017" marR="7017" marT="7017" marB="0" anchor="ctr"/>
+                </a:tc>
+                <a:tc>
+                  <a:txBody>
+                    <a:bodyPr/>
+                    <a:lstStyle/>
+                    <a:p>
+                      <a:pPr algn="ctr" fontAlgn="ctr"/>
+                      <a:r>
+                        <a:rPr lang="en-US" altLang="zh-TW" sz="1600" b="0" i="0" u="none" strike="noStrike">
+                          <a:solidFill>
+                            <a:srgbClr val="000000"/>
+                          </a:solidFill>
+                          <a:effectLst/>
+                          <a:latin typeface="Times New Roman" panose="02020603050405020304" pitchFamily="18" charset="0"/>
+                          <a:ea typeface="新細明體" panose="02020500000000000000" pitchFamily="18" charset="-120"/>
+                        </a:rPr>
+                        <a:t>9300</a:t>
+                      </a:r>
+                    </a:p>
+                  </a:txBody>
+                  <a:tcPr marL="7017" marR="7017" marT="7017" marB="0" anchor="ctr"/>
+                </a:tc>
+                <a:tc>
+                  <a:txBody>
+                    <a:bodyPr/>
+                    <a:lstStyle/>
+                    <a:p>
+                      <a:pPr algn="ctr" fontAlgn="ctr"/>
+                      <a:r>
+                        <a:rPr lang="en-US" altLang="zh-TW" sz="1600" b="0" i="0" u="none" strike="noStrike">
+                          <a:solidFill>
+                            <a:srgbClr val="000000"/>
+                          </a:solidFill>
+                          <a:effectLst/>
+                          <a:latin typeface="Times New Roman" panose="02020603050405020304" pitchFamily="18" charset="0"/>
+                          <a:ea typeface="新細明體" panose="02020500000000000000" pitchFamily="18" charset="-120"/>
+                        </a:rPr>
+                        <a:t>9103</a:t>
+                      </a:r>
+                    </a:p>
+                  </a:txBody>
+                  <a:tcPr marL="7017" marR="7017" marT="7017" marB="0" anchor="ctr"/>
+                </a:tc>
+                <a:tc>
+                  <a:txBody>
+                    <a:bodyPr/>
+                    <a:lstStyle/>
+                    <a:p>
+                      <a:pPr algn="ctr" fontAlgn="ctr"/>
+                      <a:r>
+                        <a:rPr lang="en-US" altLang="zh-TW" sz="1600" b="0" i="0" u="none" strike="noStrike">
+                          <a:solidFill>
+                            <a:srgbClr val="000000"/>
+                          </a:solidFill>
+                          <a:effectLst/>
+                          <a:latin typeface="Times New Roman" panose="02020603050405020304" pitchFamily="18" charset="0"/>
+                          <a:ea typeface="新細明體" panose="02020500000000000000" pitchFamily="18" charset="-120"/>
+                        </a:rPr>
+                        <a:t>2.19 </a:t>
+                      </a:r>
+                    </a:p>
+                  </a:txBody>
+                  <a:tcPr marL="7017" marR="7017" marT="7017" marB="0" anchor="ctr"/>
+                </a:tc>
+                <a:tc>
+                  <a:txBody>
+                    <a:bodyPr/>
+                    <a:lstStyle/>
+                    <a:p>
+                      <a:pPr algn="ctr" fontAlgn="ctr"/>
+                      <a:r>
+                        <a:rPr lang="en-US" altLang="zh-TW" sz="1600" b="0" i="0" u="none" strike="noStrike">
+                          <a:solidFill>
+                            <a:srgbClr val="000000"/>
+                          </a:solidFill>
+                          <a:effectLst/>
+                          <a:latin typeface="Times New Roman" panose="02020603050405020304" pitchFamily="18" charset="0"/>
+                          <a:ea typeface="新細明體" panose="02020500000000000000" pitchFamily="18" charset="-120"/>
+                        </a:rPr>
+                        <a:t>11:08</a:t>
+                      </a:r>
+                    </a:p>
+                  </a:txBody>
+                  <a:tcPr marL="6350" marR="6350" marT="6350" marB="0" anchor="ctr"/>
+                </a:tc>
+                <a:extLst>
+                  <a:ext uri="{0D108BD9-81ED-4DB2-BD59-A6C34878D82A}">
+                    <a16:rowId xmlns:a16="http://schemas.microsoft.com/office/drawing/2014/main" val="785709647"/>
+                  </a:ext>
+                </a:extLst>
+              </a:tr>
+              <a:tr h="307930">
+                <a:tc>
+                  <a:txBody>
+                    <a:bodyPr/>
+                    <a:lstStyle/>
+                    <a:p>
+                      <a:pPr algn="ctr" fontAlgn="ctr"/>
+                      <a:r>
+                        <a:rPr lang="en-US" altLang="zh-TW" sz="1600" b="0" i="0" u="none" strike="noStrike" dirty="0">
+                          <a:solidFill>
+                            <a:srgbClr val="FF0000"/>
+                          </a:solidFill>
+                          <a:effectLst/>
+                          <a:latin typeface="Times New Roman" panose="02020603050405020304" pitchFamily="18" charset="0"/>
+                          <a:ea typeface="新細明體" panose="02020500000000000000" pitchFamily="18" charset="-120"/>
+                        </a:rPr>
+                        <a:t>2.6</a:t>
+                      </a:r>
+                    </a:p>
+                  </a:txBody>
+                  <a:tcPr marL="7017" marR="7017" marT="7017" marB="0" anchor="ctr"/>
+                </a:tc>
+                <a:tc>
+                  <a:txBody>
+                    <a:bodyPr/>
+                    <a:lstStyle/>
+                    <a:p>
+                      <a:pPr algn="ctr" fontAlgn="ctr"/>
+                      <a:r>
+                        <a:rPr lang="en-US" altLang="zh-TW" sz="1600" b="0" i="0" u="none" strike="noStrike">
+                          <a:solidFill>
+                            <a:srgbClr val="000000"/>
+                          </a:solidFill>
+                          <a:effectLst/>
+                          <a:latin typeface="Times New Roman" panose="02020603050405020304" pitchFamily="18" charset="0"/>
+                          <a:ea typeface="新細明體" panose="02020500000000000000" pitchFamily="18" charset="-120"/>
+                        </a:rPr>
+                        <a:t>5400</a:t>
+                      </a:r>
+                    </a:p>
+                  </a:txBody>
+                  <a:tcPr marL="7017" marR="7017" marT="7017" marB="0" anchor="ctr"/>
+                </a:tc>
+                <a:tc>
+                  <a:txBody>
+                    <a:bodyPr/>
+                    <a:lstStyle/>
+                    <a:p>
+                      <a:pPr algn="ctr" fontAlgn="ctr"/>
+                      <a:r>
+                        <a:rPr lang="en-US" altLang="zh-TW" sz="1600" b="0" i="0" u="none" strike="noStrike">
+                          <a:solidFill>
+                            <a:srgbClr val="000000"/>
+                          </a:solidFill>
+                          <a:effectLst/>
+                          <a:latin typeface="Times New Roman" panose="02020603050405020304" pitchFamily="18" charset="0"/>
+                          <a:ea typeface="新細明體" panose="02020500000000000000" pitchFamily="18" charset="-120"/>
+                        </a:rPr>
+                        <a:t>5373</a:t>
+                      </a:r>
+                    </a:p>
+                  </a:txBody>
+                  <a:tcPr marL="7017" marR="7017" marT="7017" marB="0" anchor="ctr"/>
+                </a:tc>
+                <a:tc>
+                  <a:txBody>
+                    <a:bodyPr/>
+                    <a:lstStyle/>
+                    <a:p>
+                      <a:pPr algn="ctr" fontAlgn="ctr"/>
+                      <a:r>
+                        <a:rPr lang="en-US" altLang="zh-TW" sz="1600" b="0" i="0" u="none" strike="noStrike">
+                          <a:solidFill>
+                            <a:srgbClr val="000000"/>
+                          </a:solidFill>
+                          <a:effectLst/>
+                          <a:latin typeface="Times New Roman" panose="02020603050405020304" pitchFamily="18" charset="0"/>
+                          <a:ea typeface="新細明體" panose="02020500000000000000" pitchFamily="18" charset="-120"/>
+                        </a:rPr>
+                        <a:t>2.57 </a:t>
+                      </a:r>
+                    </a:p>
+                  </a:txBody>
+                  <a:tcPr marL="7017" marR="7017" marT="7017" marB="0" anchor="ctr"/>
+                </a:tc>
+                <a:tc>
+                  <a:txBody>
+                    <a:bodyPr/>
+                    <a:lstStyle/>
+                    <a:p>
+                      <a:pPr algn="ctr" fontAlgn="ctr"/>
+                      <a:r>
+                        <a:rPr lang="en-US" altLang="zh-TW" sz="1600" b="0" i="0" u="none" strike="noStrike">
+                          <a:solidFill>
+                            <a:srgbClr val="000000"/>
+                          </a:solidFill>
+                          <a:effectLst/>
+                          <a:latin typeface="Times New Roman" panose="02020603050405020304" pitchFamily="18" charset="0"/>
+                          <a:ea typeface="新細明體" panose="02020500000000000000" pitchFamily="18" charset="-120"/>
+                        </a:rPr>
+                        <a:t>15:07</a:t>
+                      </a:r>
+                    </a:p>
+                  </a:txBody>
+                  <a:tcPr marL="6350" marR="6350" marT="6350" marB="0" anchor="ctr"/>
+                </a:tc>
+                <a:extLst>
+                  <a:ext uri="{0D108BD9-81ED-4DB2-BD59-A6C34878D82A}">
+                    <a16:rowId xmlns:a16="http://schemas.microsoft.com/office/drawing/2014/main" val="559488585"/>
+                  </a:ext>
+                </a:extLst>
+              </a:tr>
+              <a:tr h="307930">
+                <a:tc>
+                  <a:txBody>
+                    <a:bodyPr/>
+                    <a:lstStyle/>
+                    <a:p>
+                      <a:pPr algn="ctr" fontAlgn="ctr"/>
+                      <a:endParaRPr lang="zh-TW" altLang="en-US" sz="1600" b="0" i="0" u="none" strike="noStrike" dirty="0">
+                        <a:solidFill>
+                          <a:srgbClr val="FF0000"/>
+                        </a:solidFill>
+                        <a:effectLst/>
+                        <a:latin typeface="Times New Roman" panose="02020603050405020304" pitchFamily="18" charset="0"/>
+                        <a:ea typeface="新細明體" panose="02020500000000000000" pitchFamily="18" charset="-120"/>
+                      </a:endParaRPr>
+                    </a:p>
+                  </a:txBody>
+                  <a:tcPr marL="7017" marR="7017" marT="7017" marB="0" anchor="ctr"/>
+                </a:tc>
+                <a:tc>
+                  <a:txBody>
+                    <a:bodyPr/>
+                    <a:lstStyle/>
+                    <a:p>
+                      <a:pPr algn="ctr" fontAlgn="ctr"/>
+                      <a:r>
+                        <a:rPr lang="en-US" altLang="zh-TW" sz="1600" b="0" i="0" u="none" strike="noStrike">
+                          <a:solidFill>
+                            <a:srgbClr val="000000"/>
+                          </a:solidFill>
+                          <a:effectLst/>
+                          <a:latin typeface="Times New Roman" panose="02020603050405020304" pitchFamily="18" charset="0"/>
+                          <a:ea typeface="新細明體" panose="02020500000000000000" pitchFamily="18" charset="-120"/>
+                        </a:rPr>
+                        <a:t>6500</a:t>
+                      </a:r>
+                    </a:p>
+                  </a:txBody>
+                  <a:tcPr marL="7017" marR="7017" marT="7017" marB="0" anchor="ctr"/>
+                </a:tc>
+                <a:tc>
+                  <a:txBody>
+                    <a:bodyPr/>
+                    <a:lstStyle/>
+                    <a:p>
+                      <a:pPr algn="ctr" fontAlgn="ctr"/>
+                      <a:r>
+                        <a:rPr lang="en-US" altLang="zh-TW" sz="1600" b="0" i="0" u="none" strike="noStrike">
+                          <a:solidFill>
+                            <a:srgbClr val="000000"/>
+                          </a:solidFill>
+                          <a:effectLst/>
+                          <a:latin typeface="Times New Roman" panose="02020603050405020304" pitchFamily="18" charset="0"/>
+                          <a:ea typeface="新細明體" panose="02020500000000000000" pitchFamily="18" charset="-120"/>
+                        </a:rPr>
+                        <a:t>6608</a:t>
+                      </a:r>
+                    </a:p>
+                  </a:txBody>
+                  <a:tcPr marL="7017" marR="7017" marT="7017" marB="0" anchor="ctr"/>
+                </a:tc>
+                <a:tc>
+                  <a:txBody>
+                    <a:bodyPr/>
+                    <a:lstStyle/>
+                    <a:p>
+                      <a:pPr algn="ctr" fontAlgn="ctr"/>
+                      <a:r>
+                        <a:rPr lang="en-US" altLang="zh-TW" sz="1600" b="0" i="0" u="none" strike="noStrike">
+                          <a:solidFill>
+                            <a:srgbClr val="000000"/>
+                          </a:solidFill>
+                          <a:effectLst/>
+                          <a:latin typeface="Times New Roman" panose="02020603050405020304" pitchFamily="18" charset="0"/>
+                          <a:ea typeface="新細明體" panose="02020500000000000000" pitchFamily="18" charset="-120"/>
+                        </a:rPr>
+                        <a:t>2.59 </a:t>
+                      </a:r>
+                    </a:p>
+                  </a:txBody>
+                  <a:tcPr marL="7017" marR="7017" marT="7017" marB="0" anchor="ctr"/>
+                </a:tc>
+                <a:tc>
+                  <a:txBody>
+                    <a:bodyPr/>
+                    <a:lstStyle/>
+                    <a:p>
+                      <a:pPr algn="ctr" fontAlgn="ctr"/>
+                      <a:r>
+                        <a:rPr lang="en-US" altLang="zh-TW" sz="1600" b="0" i="0" u="none" strike="noStrike">
+                          <a:solidFill>
+                            <a:srgbClr val="000000"/>
+                          </a:solidFill>
+                          <a:effectLst/>
+                          <a:latin typeface="Times New Roman" panose="02020603050405020304" pitchFamily="18" charset="0"/>
+                          <a:ea typeface="新細明體" panose="02020500000000000000" pitchFamily="18" charset="-120"/>
+                        </a:rPr>
+                        <a:t>12:23</a:t>
+                      </a:r>
+                    </a:p>
+                  </a:txBody>
+                  <a:tcPr marL="6350" marR="6350" marT="6350" marB="0" anchor="ctr"/>
+                </a:tc>
+                <a:extLst>
+                  <a:ext uri="{0D108BD9-81ED-4DB2-BD59-A6C34878D82A}">
+                    <a16:rowId xmlns:a16="http://schemas.microsoft.com/office/drawing/2014/main" val="3354390549"/>
+                  </a:ext>
+                </a:extLst>
+              </a:tr>
+              <a:tr h="307930">
+                <a:tc>
+                  <a:txBody>
+                    <a:bodyPr/>
+                    <a:lstStyle/>
+                    <a:p>
+                      <a:pPr algn="ctr" fontAlgn="ctr"/>
+                      <a:endParaRPr lang="zh-TW" altLang="en-US" sz="1600" b="0" i="0" u="none" strike="noStrike" dirty="0">
+                        <a:solidFill>
+                          <a:srgbClr val="FF0000"/>
+                        </a:solidFill>
+                        <a:effectLst/>
+                        <a:latin typeface="Times New Roman" panose="02020603050405020304" pitchFamily="18" charset="0"/>
+                        <a:ea typeface="新細明體" panose="02020500000000000000" pitchFamily="18" charset="-120"/>
+                      </a:endParaRPr>
+                    </a:p>
+                  </a:txBody>
+                  <a:tcPr marL="7017" marR="7017" marT="7017" marB="0" anchor="ctr"/>
+                </a:tc>
+                <a:tc>
+                  <a:txBody>
+                    <a:bodyPr/>
+                    <a:lstStyle/>
+                    <a:p>
+                      <a:pPr algn="ctr" fontAlgn="ctr"/>
+                      <a:r>
+                        <a:rPr lang="en-US" altLang="zh-TW" sz="1600" b="0" i="0" u="none" strike="noStrike">
+                          <a:solidFill>
+                            <a:srgbClr val="000000"/>
+                          </a:solidFill>
+                          <a:effectLst/>
+                          <a:latin typeface="Times New Roman" panose="02020603050405020304" pitchFamily="18" charset="0"/>
+                          <a:ea typeface="新細明體" panose="02020500000000000000" pitchFamily="18" charset="-120"/>
+                        </a:rPr>
+                        <a:t>9300</a:t>
+                      </a:r>
+                    </a:p>
+                  </a:txBody>
+                  <a:tcPr marL="7017" marR="7017" marT="7017" marB="0" anchor="ctr"/>
+                </a:tc>
+                <a:tc>
+                  <a:txBody>
+                    <a:bodyPr/>
+                    <a:lstStyle/>
+                    <a:p>
+                      <a:pPr algn="ctr" fontAlgn="ctr"/>
+                      <a:r>
+                        <a:rPr lang="en-US" altLang="zh-TW" sz="1600" b="0" i="0" u="none" strike="noStrike">
+                          <a:solidFill>
+                            <a:srgbClr val="000000"/>
+                          </a:solidFill>
+                          <a:effectLst/>
+                          <a:latin typeface="Times New Roman" panose="02020603050405020304" pitchFamily="18" charset="0"/>
+                          <a:ea typeface="新細明體" panose="02020500000000000000" pitchFamily="18" charset="-120"/>
+                        </a:rPr>
+                        <a:t>9103</a:t>
+                      </a:r>
+                    </a:p>
+                  </a:txBody>
+                  <a:tcPr marL="7017" marR="7017" marT="7017" marB="0" anchor="ctr"/>
+                </a:tc>
+                <a:tc>
+                  <a:txBody>
+                    <a:bodyPr/>
+                    <a:lstStyle/>
+                    <a:p>
+                      <a:pPr algn="ctr" fontAlgn="ctr"/>
+                      <a:r>
+                        <a:rPr lang="en-US" altLang="zh-TW" sz="1600" b="0" i="0" u="none" strike="noStrike">
+                          <a:solidFill>
+                            <a:srgbClr val="000000"/>
+                          </a:solidFill>
+                          <a:effectLst/>
+                          <a:latin typeface="Times New Roman" panose="02020603050405020304" pitchFamily="18" charset="0"/>
+                          <a:ea typeface="新細明體" panose="02020500000000000000" pitchFamily="18" charset="-120"/>
+                        </a:rPr>
+                        <a:t>2.61 </a:t>
+                      </a:r>
+                    </a:p>
+                  </a:txBody>
+                  <a:tcPr marL="7017" marR="7017" marT="7017" marB="0" anchor="ctr"/>
+                </a:tc>
+                <a:tc>
+                  <a:txBody>
+                    <a:bodyPr/>
+                    <a:lstStyle/>
+                    <a:p>
+                      <a:pPr algn="ctr" fontAlgn="ctr"/>
+                      <a:r>
+                        <a:rPr lang="en-US" altLang="zh-TW" sz="1600" b="0" i="0" u="none" strike="noStrike" dirty="0">
+                          <a:solidFill>
+                            <a:srgbClr val="000000"/>
+                          </a:solidFill>
+                          <a:effectLst/>
+                          <a:latin typeface="Times New Roman" panose="02020603050405020304" pitchFamily="18" charset="0"/>
+                          <a:ea typeface="新細明體" panose="02020500000000000000" pitchFamily="18" charset="-120"/>
+                        </a:rPr>
+                        <a:t>12:19</a:t>
+                      </a:r>
+                    </a:p>
+                  </a:txBody>
+                  <a:tcPr marL="6350" marR="6350" marT="6350" marB="0" anchor="ctr"/>
+                </a:tc>
+                <a:extLst>
+                  <a:ext uri="{0D108BD9-81ED-4DB2-BD59-A6C34878D82A}">
+                    <a16:rowId xmlns:a16="http://schemas.microsoft.com/office/drawing/2014/main" val="682335884"/>
+                  </a:ext>
+                </a:extLst>
+              </a:tr>
+            </a:tbl>
+          </a:graphicData>
+        </a:graphic>
+      </p:graphicFrame>
     </p:spTree>
     <p:extLst>
       <p:ext uri="{BB962C8B-B14F-4D97-AF65-F5344CB8AC3E}">

--- a/temp.pptx
+++ b/temp.pptx
@@ -5,13 +5,18 @@
     <p:sldMasterId id="2147483658" r:id="rId1"/>
   </p:sldMasterIdLst>
   <p:notesMasterIdLst>
-    <p:notesMasterId r:id="rId6"/>
+    <p:notesMasterId r:id="rId11"/>
   </p:notesMasterIdLst>
   <p:sldIdLst>
-    <p:sldId id="2014" r:id="rId2"/>
-    <p:sldId id="2019" r:id="rId3"/>
-    <p:sldId id="2017" r:id="rId4"/>
-    <p:sldId id="2018" r:id="rId5"/>
+    <p:sldId id="2025" r:id="rId2"/>
+    <p:sldId id="2034" r:id="rId3"/>
+    <p:sldId id="2039" r:id="rId4"/>
+    <p:sldId id="2040" r:id="rId5"/>
+    <p:sldId id="2041" r:id="rId6"/>
+    <p:sldId id="2014" r:id="rId7"/>
+    <p:sldId id="2019" r:id="rId8"/>
+    <p:sldId id="2017" r:id="rId9"/>
+    <p:sldId id="2018" r:id="rId10"/>
   </p:sldIdLst>
   <p:sldSz cx="9906000" cy="6858000" type="A4"/>
   <p:notesSz cx="7315200" cy="9601200"/>
@@ -1506,7 +1511,7 @@
         <p:cNvPr id="1" name="">
           <a:extLst>
             <a:ext uri="{FF2B5EF4-FFF2-40B4-BE49-F238E27FC236}">
-              <a16:creationId xmlns:a16="http://schemas.microsoft.com/office/drawing/2014/main" id="{BEAAB6D5-993E-26F5-9C44-C5D525DA7DDC}"/>
+              <a16:creationId xmlns:a16="http://schemas.microsoft.com/office/drawing/2014/main" id="{9A851A70-D7FF-B69E-2F1F-5276D7F44C59}"/>
             </a:ext>
           </a:extLst>
         </p:cNvPr>
@@ -1526,7 +1531,7 @@
           <p:cNvPr id="2" name="投影片影像版面配置區 1">
             <a:extLst>
               <a:ext uri="{FF2B5EF4-FFF2-40B4-BE49-F238E27FC236}">
-                <a16:creationId xmlns:a16="http://schemas.microsoft.com/office/drawing/2014/main" id="{1B5F2A66-F24A-A462-6F12-218184B02EBB}"/>
+                <a16:creationId xmlns:a16="http://schemas.microsoft.com/office/drawing/2014/main" id="{4FB2E1DE-40DE-B1BA-7135-64BFFB1631B9}"/>
               </a:ext>
             </a:extLst>
           </p:cNvPr>
@@ -1544,7 +1549,7 @@
           <p:cNvPr id="3" name="備忘稿版面配置區 2">
             <a:extLst>
               <a:ext uri="{FF2B5EF4-FFF2-40B4-BE49-F238E27FC236}">
-                <a16:creationId xmlns:a16="http://schemas.microsoft.com/office/drawing/2014/main" id="{26FDBCF0-B4E1-DC68-FF31-D0F8D4C04ACF}"/>
+                <a16:creationId xmlns:a16="http://schemas.microsoft.com/office/drawing/2014/main" id="{C4F8DB8E-F5F1-21EB-D41F-2C635FB715D5}"/>
               </a:ext>
             </a:extLst>
           </p:cNvPr>
@@ -1560,26 +1565,98 @@
           <a:bodyPr/>
           <a:lstStyle/>
           <a:p>
-            <a:pPr marL="0" marR="0" lvl="0" indent="0" algn="l" defTabSz="914400" rtl="0" eaLnBrk="1" fontAlgn="auto" latinLnBrk="0" hangingPunct="1">
-              <a:lnSpc>
-                <a:spcPct val="100000"/>
-              </a:lnSpc>
-              <a:spcBef>
-                <a:spcPts val="360"/>
-              </a:spcBef>
-              <a:spcAft>
-                <a:spcPts val="0"/>
-              </a:spcAft>
-              <a:buClr>
-                <a:srgbClr val="000000"/>
-              </a:buClr>
-              <a:buSzPts val="1400"/>
-              <a:buFont typeface="Arial"/>
-              <a:buNone/>
-              <a:tabLst/>
-              <a:defRPr/>
-            </a:pPr>
-            <a:endParaRPr lang="en-US" altLang="zh-TW" sz="1200" dirty="0"/>
+            <a:pPr marL="0" indent="0"/>
+            <a:r>
+              <a:rPr lang="en-US" altLang="zh-TW" dirty="0"/>
+              <a:t>FPGA HDMI RX</a:t>
+            </a:r>
+            <a:r>
+              <a:rPr lang="zh-TW" altLang="en-US" dirty="0"/>
+              <a:t>：</a:t>
+            </a:r>
+            <a:r>
+              <a:rPr lang="en-US" altLang="zh-TW" dirty="0"/>
+              <a:t>TMDS </a:t>
+            </a:r>
+            <a:r>
+              <a:rPr lang="zh-TW" altLang="en-US" dirty="0"/>
+              <a:t>解碼、辨識有效像素、輸出標準像素資料</a:t>
+            </a:r>
+            <a:r>
+              <a:rPr lang="en-US" altLang="zh-TW" dirty="0"/>
+              <a:t>(pixel data</a:t>
+            </a:r>
+            <a:r>
+              <a:rPr lang="zh-TW" altLang="en-US" dirty="0"/>
+              <a:t>、</a:t>
+            </a:r>
+            <a:r>
+              <a:rPr lang="en-US" altLang="zh-TW" dirty="0"/>
+              <a:t>HSYNC</a:t>
+            </a:r>
+            <a:r>
+              <a:rPr lang="zh-TW" altLang="en-US" dirty="0"/>
+              <a:t>、</a:t>
+            </a:r>
+            <a:r>
+              <a:rPr lang="en-US" altLang="zh-TW" dirty="0"/>
+              <a:t>VSYNC)</a:t>
+            </a:r>
+          </a:p>
+          <a:p>
+            <a:pPr marL="0" indent="0"/>
+            <a:r>
+              <a:rPr lang="en-US" altLang="zh-TW" dirty="0"/>
+              <a:t>FIFO</a:t>
+            </a:r>
+            <a:r>
+              <a:rPr lang="zh-TW" altLang="en-US" dirty="0"/>
+              <a:t>／</a:t>
+            </a:r>
+            <a:r>
+              <a:rPr lang="en-US" altLang="zh-TW" dirty="0"/>
+              <a:t>DDR Frame Buffer</a:t>
+            </a:r>
+            <a:r>
+              <a:rPr lang="zh-TW" altLang="en-US" dirty="0"/>
+              <a:t>：跨時脈、影像緩衝</a:t>
+            </a:r>
+            <a:endParaRPr lang="en-US" altLang="zh-TW" dirty="0"/>
+          </a:p>
+          <a:p>
+            <a:pPr marL="0" indent="0"/>
+            <a:r>
+              <a:rPr lang="en-US" altLang="zh-TW" dirty="0"/>
+              <a:t>PCIe Endpoint</a:t>
+            </a:r>
+            <a:r>
+              <a:rPr lang="zh-TW" altLang="en-US" dirty="0"/>
+              <a:t>：讓 </a:t>
+            </a:r>
+            <a:r>
+              <a:rPr lang="en-US" altLang="zh-TW" dirty="0"/>
+              <a:t>FPGA </a:t>
+            </a:r>
+            <a:r>
+              <a:rPr lang="zh-TW" altLang="en-US" dirty="0"/>
+              <a:t>成為 </a:t>
+            </a:r>
+            <a:r>
+              <a:rPr lang="en-US" altLang="zh-TW" dirty="0"/>
+              <a:t>PC </a:t>
+            </a:r>
+            <a:r>
+              <a:rPr lang="zh-TW" altLang="en-US" dirty="0"/>
+              <a:t>可以辨識與存取的 </a:t>
+            </a:r>
+            <a:r>
+              <a:rPr lang="en-US" altLang="zh-TW" dirty="0"/>
+              <a:t>PCIe </a:t>
+            </a:r>
+            <a:r>
+              <a:rPr lang="zh-TW" altLang="en-US" dirty="0"/>
+              <a:t>裝置</a:t>
+            </a:r>
           </a:p>
         </p:txBody>
       </p:sp>
@@ -1588,7 +1665,7 @@
           <p:cNvPr id="4" name="投影片編號版面配置區 3">
             <a:extLst>
               <a:ext uri="{FF2B5EF4-FFF2-40B4-BE49-F238E27FC236}">
-                <a16:creationId xmlns:a16="http://schemas.microsoft.com/office/drawing/2014/main" id="{9B8DA5A3-1BB6-F49D-76B7-392A3D01E52A}"/>
+                <a16:creationId xmlns:a16="http://schemas.microsoft.com/office/drawing/2014/main" id="{A81AD260-1FA1-46D2-EEFC-6CE390861C06}"/>
               </a:ext>
             </a:extLst>
           </p:cNvPr>
@@ -1640,7 +1717,7 @@
     </p:spTree>
     <p:extLst>
       <p:ext uri="{BB962C8B-B14F-4D97-AF65-F5344CB8AC3E}">
-        <p14:creationId xmlns:p14="http://schemas.microsoft.com/office/powerpoint/2010/main" val="3039280848"/>
+        <p14:creationId xmlns:p14="http://schemas.microsoft.com/office/powerpoint/2010/main" val="3275490434"/>
       </p:ext>
     </p:extLst>
   </p:cSld>
@@ -1658,7 +1735,7 @@
         <p:cNvPr id="1" name="">
           <a:extLst>
             <a:ext uri="{FF2B5EF4-FFF2-40B4-BE49-F238E27FC236}">
-              <a16:creationId xmlns:a16="http://schemas.microsoft.com/office/drawing/2014/main" id="{EAFF0F47-4E0C-C518-B8CA-C9751D907624}"/>
+              <a16:creationId xmlns:a16="http://schemas.microsoft.com/office/drawing/2014/main" id="{9A851A70-D7FF-B69E-2F1F-5276D7F44C59}"/>
             </a:ext>
           </a:extLst>
         </p:cNvPr>
@@ -1678,7 +1755,7 @@
           <p:cNvPr id="2" name="投影片影像版面配置區 1">
             <a:extLst>
               <a:ext uri="{FF2B5EF4-FFF2-40B4-BE49-F238E27FC236}">
-                <a16:creationId xmlns:a16="http://schemas.microsoft.com/office/drawing/2014/main" id="{97A2912A-AAD5-05D7-5039-F4FA56EAF9A0}"/>
+                <a16:creationId xmlns:a16="http://schemas.microsoft.com/office/drawing/2014/main" id="{4FB2E1DE-40DE-B1BA-7135-64BFFB1631B9}"/>
               </a:ext>
             </a:extLst>
           </p:cNvPr>
@@ -1696,7 +1773,7 @@
           <p:cNvPr id="3" name="備忘稿版面配置區 2">
             <a:extLst>
               <a:ext uri="{FF2B5EF4-FFF2-40B4-BE49-F238E27FC236}">
-                <a16:creationId xmlns:a16="http://schemas.microsoft.com/office/drawing/2014/main" id="{97563CC0-E200-230A-997F-9174AD9E380C}"/>
+                <a16:creationId xmlns:a16="http://schemas.microsoft.com/office/drawing/2014/main" id="{C4F8DB8E-F5F1-21EB-D41F-2C635FB715D5}"/>
               </a:ext>
             </a:extLst>
           </p:cNvPr>
@@ -1712,26 +1789,8 @@
           <a:bodyPr/>
           <a:lstStyle/>
           <a:p>
-            <a:pPr marL="0" marR="0" lvl="0" indent="0" algn="l" defTabSz="914400" rtl="0" eaLnBrk="1" fontAlgn="auto" latinLnBrk="0" hangingPunct="1">
-              <a:lnSpc>
-                <a:spcPct val="100000"/>
-              </a:lnSpc>
-              <a:spcBef>
-                <a:spcPts val="360"/>
-              </a:spcBef>
-              <a:spcAft>
-                <a:spcPts val="0"/>
-              </a:spcAft>
-              <a:buClr>
-                <a:srgbClr val="000000"/>
-              </a:buClr>
-              <a:buSzPts val="1400"/>
-              <a:buFont typeface="Arial"/>
-              <a:buNone/>
-              <a:tabLst/>
-              <a:defRPr/>
-            </a:pPr>
-            <a:endParaRPr lang="en-US" altLang="zh-TW" sz="1200" dirty="0"/>
+            <a:pPr marL="0" indent="0"/>
+            <a:endParaRPr lang="zh-TW" altLang="en-US" dirty="0"/>
           </a:p>
         </p:txBody>
       </p:sp>
@@ -1740,7 +1799,7 @@
           <p:cNvPr id="4" name="投影片編號版面配置區 3">
             <a:extLst>
               <a:ext uri="{FF2B5EF4-FFF2-40B4-BE49-F238E27FC236}">
-                <a16:creationId xmlns:a16="http://schemas.microsoft.com/office/drawing/2014/main" id="{B917299A-C350-46BE-0DCD-28B41AD997B8}"/>
+                <a16:creationId xmlns:a16="http://schemas.microsoft.com/office/drawing/2014/main" id="{A81AD260-1FA1-46D2-EEFC-6CE390861C06}"/>
               </a:ext>
             </a:extLst>
           </p:cNvPr>
@@ -1792,7 +1851,7 @@
     </p:spTree>
     <p:extLst>
       <p:ext uri="{BB962C8B-B14F-4D97-AF65-F5344CB8AC3E}">
-        <p14:creationId xmlns:p14="http://schemas.microsoft.com/office/powerpoint/2010/main" val="1831766850"/>
+        <p14:creationId xmlns:p14="http://schemas.microsoft.com/office/powerpoint/2010/main" val="3960645603"/>
       </p:ext>
     </p:extLst>
   </p:cSld>
@@ -1926,7 +1985,7 @@
     </p:spTree>
     <p:extLst>
       <p:ext uri="{BB962C8B-B14F-4D97-AF65-F5344CB8AC3E}">
-        <p14:creationId xmlns:p14="http://schemas.microsoft.com/office/powerpoint/2010/main" val="3805465276"/>
+        <p14:creationId xmlns:p14="http://schemas.microsoft.com/office/powerpoint/2010/main" val="131158438"/>
       </p:ext>
     </p:extLst>
   </p:cSld>
@@ -2000,45 +2059,643 @@
           <a:p>
             <a:pPr marL="0" indent="0"/>
             <a:r>
+              <a:rPr lang="en-US" altLang="zh-TW" dirty="0" err="1"/>
+              <a:t>LiteX</a:t>
+            </a:r>
+            <a:r>
               <a:rPr lang="zh-TW" altLang="en-US" dirty="0"/>
-              <a:t>沒有</a:t>
+              <a:t>：可利用其提供的互連架構及匯流排機制，整合符合其介面規範的模組。可利用 </a:t>
+            </a:r>
+            <a:r>
+              <a:rPr lang="en-US" altLang="zh-TW" dirty="0"/>
+              <a:t>CSR</a:t>
+            </a:r>
+            <a:r>
+              <a:rPr lang="zh-TW" altLang="en-US" dirty="0"/>
+              <a:t> 等機制建立控制介面，並整合到系統中。</a:t>
+            </a:r>
+          </a:p>
+        </p:txBody>
+      </p:sp>
+      <p:sp>
+        <p:nvSpPr>
+          <p:cNvPr id="4" name="投影片編號版面配置區 3">
+            <a:extLst>
+              <a:ext uri="{FF2B5EF4-FFF2-40B4-BE49-F238E27FC236}">
+                <a16:creationId xmlns:a16="http://schemas.microsoft.com/office/drawing/2014/main" id="{A81AD260-1FA1-46D2-EEFC-6CE390861C06}"/>
+              </a:ext>
+            </a:extLst>
+          </p:cNvPr>
+          <p:cNvSpPr>
+            <a:spLocks noGrp="1"/>
+          </p:cNvSpPr>
+          <p:nvPr>
+            <p:ph type="sldNum" idx="12"/>
+          </p:nvPr>
+        </p:nvSpPr>
+        <p:spPr/>
+        <p:txBody>
+          <a:bodyPr/>
+          <a:lstStyle/>
+          <a:p>
+            <a:pPr marL="0" marR="0" lvl="0" indent="0" algn="r" rtl="0">
+              <a:spcBef>
+                <a:spcPts val="0"/>
+              </a:spcBef>
+              <a:spcAft>
+                <a:spcPts val="0"/>
+              </a:spcAft>
+              <a:buNone/>
+            </a:pPr>
+            <a:fld id="{00000000-1234-1234-1234-123412341234}" type="slidenum">
+              <a:rPr lang="en-US" sz="2000" b="0" i="0" u="none" strike="noStrike" cap="none" smtClean="0">
+                <a:solidFill>
+                  <a:schemeClr val="dk1"/>
+                </a:solidFill>
+                <a:latin typeface="Times New Roman"/>
+                <a:ea typeface="Times New Roman"/>
+                <a:cs typeface="Times New Roman"/>
+                <a:sym typeface="Times New Roman"/>
+              </a:rPr>
+              <a:t>4</a:t>
+            </a:fld>
+            <a:endParaRPr lang="en-US" sz="2000" b="0" i="0" u="none" strike="noStrike" cap="none" dirty="0">
+              <a:solidFill>
+                <a:schemeClr val="dk1"/>
+              </a:solidFill>
+              <a:latin typeface="Times New Roman"/>
+              <a:ea typeface="Times New Roman"/>
+              <a:cs typeface="Times New Roman"/>
+              <a:sym typeface="Times New Roman"/>
+            </a:endParaRPr>
+          </a:p>
+        </p:txBody>
+      </p:sp>
+    </p:spTree>
+    <p:extLst>
+      <p:ext uri="{BB962C8B-B14F-4D97-AF65-F5344CB8AC3E}">
+        <p14:creationId xmlns:p14="http://schemas.microsoft.com/office/powerpoint/2010/main" val="2117558636"/>
+      </p:ext>
+    </p:extLst>
+  </p:cSld>
+  <p:clrMapOvr>
+    <a:masterClrMapping/>
+  </p:clrMapOvr>
+</p:notes>
+</file>
+
+<file path=ppt/notesSlides/notesSlide5.xml><?xml version="1.0" encoding="utf-8"?>
+<p:notes xmlns:a="http://schemas.openxmlformats.org/drawingml/2006/main" xmlns:r="http://schemas.openxmlformats.org/officeDocument/2006/relationships" xmlns:p="http://schemas.openxmlformats.org/presentationml/2006/main">
+  <p:cSld>
+    <p:spTree>
+      <p:nvGrpSpPr>
+        <p:cNvPr id="1" name="">
+          <a:extLst>
+            <a:ext uri="{FF2B5EF4-FFF2-40B4-BE49-F238E27FC236}">
+              <a16:creationId xmlns:a16="http://schemas.microsoft.com/office/drawing/2014/main" id="{9A851A70-D7FF-B69E-2F1F-5276D7F44C59}"/>
+            </a:ext>
+          </a:extLst>
+        </p:cNvPr>
+        <p:cNvGrpSpPr/>
+        <p:nvPr/>
+      </p:nvGrpSpPr>
+      <p:grpSpPr>
+        <a:xfrm>
+          <a:off x="0" y="0"/>
+          <a:ext cx="0" cy="0"/>
+          <a:chOff x="0" y="0"/>
+          <a:chExt cx="0" cy="0"/>
+        </a:xfrm>
+      </p:grpSpPr>
+      <p:sp>
+        <p:nvSpPr>
+          <p:cNvPr id="2" name="投影片影像版面配置區 1">
+            <a:extLst>
+              <a:ext uri="{FF2B5EF4-FFF2-40B4-BE49-F238E27FC236}">
+                <a16:creationId xmlns:a16="http://schemas.microsoft.com/office/drawing/2014/main" id="{4FB2E1DE-40DE-B1BA-7135-64BFFB1631B9}"/>
+              </a:ext>
+            </a:extLst>
+          </p:cNvPr>
+          <p:cNvSpPr>
+            <a:spLocks noGrp="1" noRot="1" noChangeAspect="1"/>
+          </p:cNvSpPr>
+          <p:nvPr>
+            <p:ph type="sldImg"/>
+          </p:nvPr>
+        </p:nvSpPr>
+        <p:spPr/>
+      </p:sp>
+      <p:sp>
+        <p:nvSpPr>
+          <p:cNvPr id="3" name="備忘稿版面配置區 2">
+            <a:extLst>
+              <a:ext uri="{FF2B5EF4-FFF2-40B4-BE49-F238E27FC236}">
+                <a16:creationId xmlns:a16="http://schemas.microsoft.com/office/drawing/2014/main" id="{C4F8DB8E-F5F1-21EB-D41F-2C635FB715D5}"/>
+              </a:ext>
+            </a:extLst>
+          </p:cNvPr>
+          <p:cNvSpPr>
+            <a:spLocks noGrp="1"/>
+          </p:cNvSpPr>
+          <p:nvPr>
+            <p:ph type="body" idx="1"/>
+          </p:nvPr>
+        </p:nvSpPr>
+        <p:spPr/>
+        <p:txBody>
+          <a:bodyPr/>
+          <a:lstStyle/>
+          <a:p>
+            <a:pPr marL="0" indent="0"/>
+            <a:r>
+              <a:rPr lang="zh-TW" altLang="en-US" dirty="0"/>
+              <a:t>混用：需要先克服工具鏈與建置流程的不同。</a:t>
             </a:r>
             <a:r>
               <a:rPr lang="en-US" altLang="zh-TW" dirty="0" err="1"/>
-              <a:t>vcgt</a:t>
+              <a:t>LiteX</a:t>
+            </a:r>
+            <a:r>
+              <a:rPr lang="en-US" altLang="zh-TW" dirty="0"/>
+              <a:t> </a:t>
+            </a:r>
+            <a:r>
+              <a:rPr lang="zh-TW" altLang="en-US" dirty="0"/>
+              <a:t>通常透過 </a:t>
+            </a:r>
+            <a:r>
+              <a:rPr lang="en-US" altLang="zh-TW" dirty="0"/>
+              <a:t>Python</a:t>
             </a:r>
             <a:r>
               <a:rPr lang="zh-TW" altLang="en-US" dirty="0"/>
               <a:t>、</a:t>
             </a:r>
             <a:r>
+              <a:rPr lang="en-US" altLang="zh-TW" dirty="0" err="1"/>
+              <a:t>Migen</a:t>
+            </a:r>
+            <a:r>
+              <a:rPr lang="zh-TW" altLang="en-US" dirty="0"/>
+              <a:t>建構硬體；</a:t>
+            </a:r>
+            <a:r>
               <a:rPr lang="en-US" altLang="zh-TW" dirty="0"/>
-              <a:t>MS00</a:t>
+              <a:t>Xilinx </a:t>
             </a:r>
             <a:r>
               <a:rPr lang="zh-TW" altLang="en-US" dirty="0"/>
-              <a:t>、</a:t>
+              <a:t>通常依賴 </a:t>
+            </a:r>
+            <a:r>
+              <a:rPr lang="en-US" altLang="zh-TW" dirty="0" err="1"/>
+              <a:t>Vivado</a:t>
             </a:r>
             <a:r>
               <a:rPr lang="en-US" altLang="zh-TW" dirty="0"/>
-              <a:t>MCH2</a:t>
+              <a:t> IP</a:t>
             </a:r>
             <a:r>
               <a:rPr lang="zh-TW" altLang="en-US" dirty="0"/>
-              <a:t>等</a:t>
-            </a:r>
-            <a:r>
-              <a:rPr lang="en-US" altLang="zh-TW" dirty="0"/>
-              <a:t>tag</a:t>
-            </a:r>
-            <a:r>
-              <a:rPr lang="zh-TW" altLang="en-US" dirty="0"/>
-              <a:t>，所以他這只能生成純粹色彩描述檔的</a:t>
-            </a:r>
-            <a:r>
-              <a:rPr lang="en-US" altLang="zh-TW" dirty="0"/>
-              <a:t>ICC Profile</a:t>
-            </a:r>
+              <a:t>，當然混用的優勢也很明顯可以選擇各生態系最符合需求的模組，不受單一生態系的模組選擇限制</a:t>
+            </a:r>
+          </a:p>
+        </p:txBody>
+      </p:sp>
+      <p:sp>
+        <p:nvSpPr>
+          <p:cNvPr id="4" name="投影片編號版面配置區 3">
+            <a:extLst>
+              <a:ext uri="{FF2B5EF4-FFF2-40B4-BE49-F238E27FC236}">
+                <a16:creationId xmlns:a16="http://schemas.microsoft.com/office/drawing/2014/main" id="{A81AD260-1FA1-46D2-EEFC-6CE390861C06}"/>
+              </a:ext>
+            </a:extLst>
+          </p:cNvPr>
+          <p:cNvSpPr>
+            <a:spLocks noGrp="1"/>
+          </p:cNvSpPr>
+          <p:nvPr>
+            <p:ph type="sldNum" idx="12"/>
+          </p:nvPr>
+        </p:nvSpPr>
+        <p:spPr/>
+        <p:txBody>
+          <a:bodyPr/>
+          <a:lstStyle/>
+          <a:p>
+            <a:pPr marL="0" marR="0" lvl="0" indent="0" algn="r" rtl="0">
+              <a:spcBef>
+                <a:spcPts val="0"/>
+              </a:spcBef>
+              <a:spcAft>
+                <a:spcPts val="0"/>
+              </a:spcAft>
+              <a:buNone/>
+            </a:pPr>
+            <a:fld id="{00000000-1234-1234-1234-123412341234}" type="slidenum">
+              <a:rPr lang="en-US" sz="2000" b="0" i="0" u="none" strike="noStrike" cap="none" smtClean="0">
+                <a:solidFill>
+                  <a:schemeClr val="dk1"/>
+                </a:solidFill>
+                <a:latin typeface="Times New Roman"/>
+                <a:ea typeface="Times New Roman"/>
+                <a:cs typeface="Times New Roman"/>
+                <a:sym typeface="Times New Roman"/>
+              </a:rPr>
+              <a:t>5</a:t>
+            </a:fld>
+            <a:endParaRPr lang="en-US" sz="2000" b="0" i="0" u="none" strike="noStrike" cap="none" dirty="0">
+              <a:solidFill>
+                <a:schemeClr val="dk1"/>
+              </a:solidFill>
+              <a:latin typeface="Times New Roman"/>
+              <a:ea typeface="Times New Roman"/>
+              <a:cs typeface="Times New Roman"/>
+              <a:sym typeface="Times New Roman"/>
+            </a:endParaRPr>
+          </a:p>
+        </p:txBody>
+      </p:sp>
+    </p:spTree>
+    <p:extLst>
+      <p:ext uri="{BB962C8B-B14F-4D97-AF65-F5344CB8AC3E}">
+        <p14:creationId xmlns:p14="http://schemas.microsoft.com/office/powerpoint/2010/main" val="222586321"/>
+      </p:ext>
+    </p:extLst>
+  </p:cSld>
+  <p:clrMapOvr>
+    <a:masterClrMapping/>
+  </p:clrMapOvr>
+</p:notes>
+</file>
+
+<file path=ppt/notesSlides/notesSlide6.xml><?xml version="1.0" encoding="utf-8"?>
+<p:notes xmlns:a="http://schemas.openxmlformats.org/drawingml/2006/main" xmlns:r="http://schemas.openxmlformats.org/officeDocument/2006/relationships" xmlns:p="http://schemas.openxmlformats.org/presentationml/2006/main">
+  <p:cSld>
+    <p:spTree>
+      <p:nvGrpSpPr>
+        <p:cNvPr id="1" name="">
+          <a:extLst>
+            <a:ext uri="{FF2B5EF4-FFF2-40B4-BE49-F238E27FC236}">
+              <a16:creationId xmlns:a16="http://schemas.microsoft.com/office/drawing/2014/main" id="{BEAAB6D5-993E-26F5-9C44-C5D525DA7DDC}"/>
+            </a:ext>
+          </a:extLst>
+        </p:cNvPr>
+        <p:cNvGrpSpPr/>
+        <p:nvPr/>
+      </p:nvGrpSpPr>
+      <p:grpSpPr>
+        <a:xfrm>
+          <a:off x="0" y="0"/>
+          <a:ext cx="0" cy="0"/>
+          <a:chOff x="0" y="0"/>
+          <a:chExt cx="0" cy="0"/>
+        </a:xfrm>
+      </p:grpSpPr>
+      <p:sp>
+        <p:nvSpPr>
+          <p:cNvPr id="2" name="投影片影像版面配置區 1">
+            <a:extLst>
+              <a:ext uri="{FF2B5EF4-FFF2-40B4-BE49-F238E27FC236}">
+                <a16:creationId xmlns:a16="http://schemas.microsoft.com/office/drawing/2014/main" id="{1B5F2A66-F24A-A462-6F12-218184B02EBB}"/>
+              </a:ext>
+            </a:extLst>
+          </p:cNvPr>
+          <p:cNvSpPr>
+            <a:spLocks noGrp="1" noRot="1" noChangeAspect="1"/>
+          </p:cNvSpPr>
+          <p:nvPr>
+            <p:ph type="sldImg"/>
+          </p:nvPr>
+        </p:nvSpPr>
+        <p:spPr/>
+      </p:sp>
+      <p:sp>
+        <p:nvSpPr>
+          <p:cNvPr id="3" name="備忘稿版面配置區 2">
+            <a:extLst>
+              <a:ext uri="{FF2B5EF4-FFF2-40B4-BE49-F238E27FC236}">
+                <a16:creationId xmlns:a16="http://schemas.microsoft.com/office/drawing/2014/main" id="{26FDBCF0-B4E1-DC68-FF31-D0F8D4C04ACF}"/>
+              </a:ext>
+            </a:extLst>
+          </p:cNvPr>
+          <p:cNvSpPr>
+            <a:spLocks noGrp="1"/>
+          </p:cNvSpPr>
+          <p:nvPr>
+            <p:ph type="body" idx="1"/>
+          </p:nvPr>
+        </p:nvSpPr>
+        <p:spPr/>
+        <p:txBody>
+          <a:bodyPr/>
+          <a:lstStyle/>
+          <a:p>
+            <a:pPr marL="0" marR="0" lvl="0" indent="0" algn="l" defTabSz="914400" rtl="0" eaLnBrk="1" fontAlgn="auto" latinLnBrk="0" hangingPunct="1">
+              <a:lnSpc>
+                <a:spcPct val="100000"/>
+              </a:lnSpc>
+              <a:spcBef>
+                <a:spcPts val="360"/>
+              </a:spcBef>
+              <a:spcAft>
+                <a:spcPts val="0"/>
+              </a:spcAft>
+              <a:buClr>
+                <a:srgbClr val="000000"/>
+              </a:buClr>
+              <a:buSzPts val="1400"/>
+              <a:buFont typeface="Arial"/>
+              <a:buNone/>
+              <a:tabLst/>
+              <a:defRPr/>
+            </a:pPr>
+            <a:endParaRPr lang="en-US" altLang="zh-TW" sz="1200" dirty="0"/>
+          </a:p>
+        </p:txBody>
+      </p:sp>
+      <p:sp>
+        <p:nvSpPr>
+          <p:cNvPr id="4" name="投影片編號版面配置區 3">
+            <a:extLst>
+              <a:ext uri="{FF2B5EF4-FFF2-40B4-BE49-F238E27FC236}">
+                <a16:creationId xmlns:a16="http://schemas.microsoft.com/office/drawing/2014/main" id="{9B8DA5A3-1BB6-F49D-76B7-392A3D01E52A}"/>
+              </a:ext>
+            </a:extLst>
+          </p:cNvPr>
+          <p:cNvSpPr>
+            <a:spLocks noGrp="1"/>
+          </p:cNvSpPr>
+          <p:nvPr>
+            <p:ph type="sldNum" idx="12"/>
+          </p:nvPr>
+        </p:nvSpPr>
+        <p:spPr/>
+        <p:txBody>
+          <a:bodyPr/>
+          <a:lstStyle/>
+          <a:p>
+            <a:pPr marL="0" marR="0" lvl="0" indent="0" algn="r" rtl="0">
+              <a:spcBef>
+                <a:spcPts val="0"/>
+              </a:spcBef>
+              <a:spcAft>
+                <a:spcPts val="0"/>
+              </a:spcAft>
+              <a:buNone/>
+            </a:pPr>
+            <a:fld id="{00000000-1234-1234-1234-123412341234}" type="slidenum">
+              <a:rPr lang="en-US" sz="2000" b="0" i="0" u="none" strike="noStrike" cap="none" smtClean="0">
+                <a:solidFill>
+                  <a:schemeClr val="dk1"/>
+                </a:solidFill>
+                <a:latin typeface="Times New Roman"/>
+                <a:ea typeface="Times New Roman"/>
+                <a:cs typeface="Times New Roman"/>
+                <a:sym typeface="Times New Roman"/>
+              </a:rPr>
+              <a:t>6</a:t>
+            </a:fld>
+            <a:endParaRPr lang="en-US" sz="2000" b="0" i="0" u="none" strike="noStrike" cap="none" dirty="0">
+              <a:solidFill>
+                <a:schemeClr val="dk1"/>
+              </a:solidFill>
+              <a:latin typeface="Times New Roman"/>
+              <a:ea typeface="Times New Roman"/>
+              <a:cs typeface="Times New Roman"/>
+              <a:sym typeface="Times New Roman"/>
+            </a:endParaRPr>
+          </a:p>
+        </p:txBody>
+      </p:sp>
+    </p:spTree>
+    <p:extLst>
+      <p:ext uri="{BB962C8B-B14F-4D97-AF65-F5344CB8AC3E}">
+        <p14:creationId xmlns:p14="http://schemas.microsoft.com/office/powerpoint/2010/main" val="3039280848"/>
+      </p:ext>
+    </p:extLst>
+  </p:cSld>
+  <p:clrMapOvr>
+    <a:masterClrMapping/>
+  </p:clrMapOvr>
+</p:notes>
+</file>
+
+<file path=ppt/notesSlides/notesSlide7.xml><?xml version="1.0" encoding="utf-8"?>
+<p:notes xmlns:a="http://schemas.openxmlformats.org/drawingml/2006/main" xmlns:r="http://schemas.openxmlformats.org/officeDocument/2006/relationships" xmlns:p="http://schemas.openxmlformats.org/presentationml/2006/main">
+  <p:cSld>
+    <p:spTree>
+      <p:nvGrpSpPr>
+        <p:cNvPr id="1" name="">
+          <a:extLst>
+            <a:ext uri="{FF2B5EF4-FFF2-40B4-BE49-F238E27FC236}">
+              <a16:creationId xmlns:a16="http://schemas.microsoft.com/office/drawing/2014/main" id="{EAFF0F47-4E0C-C518-B8CA-C9751D907624}"/>
+            </a:ext>
+          </a:extLst>
+        </p:cNvPr>
+        <p:cNvGrpSpPr/>
+        <p:nvPr/>
+      </p:nvGrpSpPr>
+      <p:grpSpPr>
+        <a:xfrm>
+          <a:off x="0" y="0"/>
+          <a:ext cx="0" cy="0"/>
+          <a:chOff x="0" y="0"/>
+          <a:chExt cx="0" cy="0"/>
+        </a:xfrm>
+      </p:grpSpPr>
+      <p:sp>
+        <p:nvSpPr>
+          <p:cNvPr id="2" name="投影片影像版面配置區 1">
+            <a:extLst>
+              <a:ext uri="{FF2B5EF4-FFF2-40B4-BE49-F238E27FC236}">
+                <a16:creationId xmlns:a16="http://schemas.microsoft.com/office/drawing/2014/main" id="{97A2912A-AAD5-05D7-5039-F4FA56EAF9A0}"/>
+              </a:ext>
+            </a:extLst>
+          </p:cNvPr>
+          <p:cNvSpPr>
+            <a:spLocks noGrp="1" noRot="1" noChangeAspect="1"/>
+          </p:cNvSpPr>
+          <p:nvPr>
+            <p:ph type="sldImg"/>
+          </p:nvPr>
+        </p:nvSpPr>
+        <p:spPr/>
+      </p:sp>
+      <p:sp>
+        <p:nvSpPr>
+          <p:cNvPr id="3" name="備忘稿版面配置區 2">
+            <a:extLst>
+              <a:ext uri="{FF2B5EF4-FFF2-40B4-BE49-F238E27FC236}">
+                <a16:creationId xmlns:a16="http://schemas.microsoft.com/office/drawing/2014/main" id="{97563CC0-E200-230A-997F-9174AD9E380C}"/>
+              </a:ext>
+            </a:extLst>
+          </p:cNvPr>
+          <p:cNvSpPr>
+            <a:spLocks noGrp="1"/>
+          </p:cNvSpPr>
+          <p:nvPr>
+            <p:ph type="body" idx="1"/>
+          </p:nvPr>
+        </p:nvSpPr>
+        <p:spPr/>
+        <p:txBody>
+          <a:bodyPr/>
+          <a:lstStyle/>
+          <a:p>
+            <a:pPr marL="0" marR="0" lvl="0" indent="0" algn="l" defTabSz="914400" rtl="0" eaLnBrk="1" fontAlgn="auto" latinLnBrk="0" hangingPunct="1">
+              <a:lnSpc>
+                <a:spcPct val="100000"/>
+              </a:lnSpc>
+              <a:spcBef>
+                <a:spcPts val="360"/>
+              </a:spcBef>
+              <a:spcAft>
+                <a:spcPts val="0"/>
+              </a:spcAft>
+              <a:buClr>
+                <a:srgbClr val="000000"/>
+              </a:buClr>
+              <a:buSzPts val="1400"/>
+              <a:buFont typeface="Arial"/>
+              <a:buNone/>
+              <a:tabLst/>
+              <a:defRPr/>
+            </a:pPr>
+            <a:endParaRPr lang="en-US" altLang="zh-TW" sz="1200" dirty="0"/>
+          </a:p>
+        </p:txBody>
+      </p:sp>
+      <p:sp>
+        <p:nvSpPr>
+          <p:cNvPr id="4" name="投影片編號版面配置區 3">
+            <a:extLst>
+              <a:ext uri="{FF2B5EF4-FFF2-40B4-BE49-F238E27FC236}">
+                <a16:creationId xmlns:a16="http://schemas.microsoft.com/office/drawing/2014/main" id="{B917299A-C350-46BE-0DCD-28B41AD997B8}"/>
+              </a:ext>
+            </a:extLst>
+          </p:cNvPr>
+          <p:cNvSpPr>
+            <a:spLocks noGrp="1"/>
+          </p:cNvSpPr>
+          <p:nvPr>
+            <p:ph type="sldNum" idx="12"/>
+          </p:nvPr>
+        </p:nvSpPr>
+        <p:spPr/>
+        <p:txBody>
+          <a:bodyPr/>
+          <a:lstStyle/>
+          <a:p>
+            <a:pPr marL="0" marR="0" lvl="0" indent="0" algn="r" rtl="0">
+              <a:spcBef>
+                <a:spcPts val="0"/>
+              </a:spcBef>
+              <a:spcAft>
+                <a:spcPts val="0"/>
+              </a:spcAft>
+              <a:buNone/>
+            </a:pPr>
+            <a:fld id="{00000000-1234-1234-1234-123412341234}" type="slidenum">
+              <a:rPr lang="en-US" sz="2000" b="0" i="0" u="none" strike="noStrike" cap="none" smtClean="0">
+                <a:solidFill>
+                  <a:schemeClr val="dk1"/>
+                </a:solidFill>
+                <a:latin typeface="Times New Roman"/>
+                <a:ea typeface="Times New Roman"/>
+                <a:cs typeface="Times New Roman"/>
+                <a:sym typeface="Times New Roman"/>
+              </a:rPr>
+              <a:t>7</a:t>
+            </a:fld>
+            <a:endParaRPr lang="en-US" sz="2000" b="0" i="0" u="none" strike="noStrike" cap="none" dirty="0">
+              <a:solidFill>
+                <a:schemeClr val="dk1"/>
+              </a:solidFill>
+              <a:latin typeface="Times New Roman"/>
+              <a:ea typeface="Times New Roman"/>
+              <a:cs typeface="Times New Roman"/>
+              <a:sym typeface="Times New Roman"/>
+            </a:endParaRPr>
+          </a:p>
+        </p:txBody>
+      </p:sp>
+    </p:spTree>
+    <p:extLst>
+      <p:ext uri="{BB962C8B-B14F-4D97-AF65-F5344CB8AC3E}">
+        <p14:creationId xmlns:p14="http://schemas.microsoft.com/office/powerpoint/2010/main" val="1831766850"/>
+      </p:ext>
+    </p:extLst>
+  </p:cSld>
+  <p:clrMapOvr>
+    <a:masterClrMapping/>
+  </p:clrMapOvr>
+</p:notes>
+</file>
+
+<file path=ppt/notesSlides/notesSlide8.xml><?xml version="1.0" encoding="utf-8"?>
+<p:notes xmlns:a="http://schemas.openxmlformats.org/drawingml/2006/main" xmlns:r="http://schemas.openxmlformats.org/officeDocument/2006/relationships" xmlns:p="http://schemas.openxmlformats.org/presentationml/2006/main">
+  <p:cSld>
+    <p:spTree>
+      <p:nvGrpSpPr>
+        <p:cNvPr id="1" name="">
+          <a:extLst>
+            <a:ext uri="{FF2B5EF4-FFF2-40B4-BE49-F238E27FC236}">
+              <a16:creationId xmlns:a16="http://schemas.microsoft.com/office/drawing/2014/main" id="{9A851A70-D7FF-B69E-2F1F-5276D7F44C59}"/>
+            </a:ext>
+          </a:extLst>
+        </p:cNvPr>
+        <p:cNvGrpSpPr/>
+        <p:nvPr/>
+      </p:nvGrpSpPr>
+      <p:grpSpPr>
+        <a:xfrm>
+          <a:off x="0" y="0"/>
+          <a:ext cx="0" cy="0"/>
+          <a:chOff x="0" y="0"/>
+          <a:chExt cx="0" cy="0"/>
+        </a:xfrm>
+      </p:grpSpPr>
+      <p:sp>
+        <p:nvSpPr>
+          <p:cNvPr id="2" name="投影片影像版面配置區 1">
+            <a:extLst>
+              <a:ext uri="{FF2B5EF4-FFF2-40B4-BE49-F238E27FC236}">
+                <a16:creationId xmlns:a16="http://schemas.microsoft.com/office/drawing/2014/main" id="{4FB2E1DE-40DE-B1BA-7135-64BFFB1631B9}"/>
+              </a:ext>
+            </a:extLst>
+          </p:cNvPr>
+          <p:cNvSpPr>
+            <a:spLocks noGrp="1" noRot="1" noChangeAspect="1"/>
+          </p:cNvSpPr>
+          <p:nvPr>
+            <p:ph type="sldImg"/>
+          </p:nvPr>
+        </p:nvSpPr>
+        <p:spPr/>
+      </p:sp>
+      <p:sp>
+        <p:nvSpPr>
+          <p:cNvPr id="3" name="備忘稿版面配置區 2">
+            <a:extLst>
+              <a:ext uri="{FF2B5EF4-FFF2-40B4-BE49-F238E27FC236}">
+                <a16:creationId xmlns:a16="http://schemas.microsoft.com/office/drawing/2014/main" id="{C4F8DB8E-F5F1-21EB-D41F-2C635FB715D5}"/>
+              </a:ext>
+            </a:extLst>
+          </p:cNvPr>
+          <p:cNvSpPr>
+            <a:spLocks noGrp="1"/>
+          </p:cNvSpPr>
+          <p:nvPr>
+            <p:ph type="body" idx="1"/>
+          </p:nvPr>
+        </p:nvSpPr>
+        <p:spPr/>
+        <p:txBody>
+          <a:bodyPr/>
+          <a:lstStyle/>
+          <a:p>
+            <a:pPr marL="0" indent="0"/>
             <a:endParaRPr lang="zh-TW" altLang="en-US" dirty="0"/>
           </a:p>
         </p:txBody>
@@ -2083,7 +2740,181 @@
                 <a:cs typeface="Times New Roman"/>
                 <a:sym typeface="Times New Roman"/>
               </a:rPr>
-              <a:t>4</a:t>
+              <a:t>8</a:t>
+            </a:fld>
+            <a:endParaRPr lang="en-US" sz="2000" b="0" i="0" u="none" strike="noStrike" cap="none" dirty="0">
+              <a:solidFill>
+                <a:schemeClr val="dk1"/>
+              </a:solidFill>
+              <a:latin typeface="Times New Roman"/>
+              <a:ea typeface="Times New Roman"/>
+              <a:cs typeface="Times New Roman"/>
+              <a:sym typeface="Times New Roman"/>
+            </a:endParaRPr>
+          </a:p>
+        </p:txBody>
+      </p:sp>
+    </p:spTree>
+    <p:extLst>
+      <p:ext uri="{BB962C8B-B14F-4D97-AF65-F5344CB8AC3E}">
+        <p14:creationId xmlns:p14="http://schemas.microsoft.com/office/powerpoint/2010/main" val="3805465276"/>
+      </p:ext>
+    </p:extLst>
+  </p:cSld>
+  <p:clrMapOvr>
+    <a:masterClrMapping/>
+  </p:clrMapOvr>
+</p:notes>
+</file>
+
+<file path=ppt/notesSlides/notesSlide9.xml><?xml version="1.0" encoding="utf-8"?>
+<p:notes xmlns:a="http://schemas.openxmlformats.org/drawingml/2006/main" xmlns:r="http://schemas.openxmlformats.org/officeDocument/2006/relationships" xmlns:p="http://schemas.openxmlformats.org/presentationml/2006/main">
+  <p:cSld>
+    <p:spTree>
+      <p:nvGrpSpPr>
+        <p:cNvPr id="1" name="">
+          <a:extLst>
+            <a:ext uri="{FF2B5EF4-FFF2-40B4-BE49-F238E27FC236}">
+              <a16:creationId xmlns:a16="http://schemas.microsoft.com/office/drawing/2014/main" id="{9A851A70-D7FF-B69E-2F1F-5276D7F44C59}"/>
+            </a:ext>
+          </a:extLst>
+        </p:cNvPr>
+        <p:cNvGrpSpPr/>
+        <p:nvPr/>
+      </p:nvGrpSpPr>
+      <p:grpSpPr>
+        <a:xfrm>
+          <a:off x="0" y="0"/>
+          <a:ext cx="0" cy="0"/>
+          <a:chOff x="0" y="0"/>
+          <a:chExt cx="0" cy="0"/>
+        </a:xfrm>
+      </p:grpSpPr>
+      <p:sp>
+        <p:nvSpPr>
+          <p:cNvPr id="2" name="投影片影像版面配置區 1">
+            <a:extLst>
+              <a:ext uri="{FF2B5EF4-FFF2-40B4-BE49-F238E27FC236}">
+                <a16:creationId xmlns:a16="http://schemas.microsoft.com/office/drawing/2014/main" id="{4FB2E1DE-40DE-B1BA-7135-64BFFB1631B9}"/>
+              </a:ext>
+            </a:extLst>
+          </p:cNvPr>
+          <p:cNvSpPr>
+            <a:spLocks noGrp="1" noRot="1" noChangeAspect="1"/>
+          </p:cNvSpPr>
+          <p:nvPr>
+            <p:ph type="sldImg"/>
+          </p:nvPr>
+        </p:nvSpPr>
+        <p:spPr/>
+      </p:sp>
+      <p:sp>
+        <p:nvSpPr>
+          <p:cNvPr id="3" name="備忘稿版面配置區 2">
+            <a:extLst>
+              <a:ext uri="{FF2B5EF4-FFF2-40B4-BE49-F238E27FC236}">
+                <a16:creationId xmlns:a16="http://schemas.microsoft.com/office/drawing/2014/main" id="{C4F8DB8E-F5F1-21EB-D41F-2C635FB715D5}"/>
+              </a:ext>
+            </a:extLst>
+          </p:cNvPr>
+          <p:cNvSpPr>
+            <a:spLocks noGrp="1"/>
+          </p:cNvSpPr>
+          <p:nvPr>
+            <p:ph type="body" idx="1"/>
+          </p:nvPr>
+        </p:nvSpPr>
+        <p:spPr/>
+        <p:txBody>
+          <a:bodyPr/>
+          <a:lstStyle/>
+          <a:p>
+            <a:pPr marL="0" indent="0"/>
+            <a:r>
+              <a:rPr lang="zh-TW" altLang="en-US" dirty="0"/>
+              <a:t>沒有</a:t>
+            </a:r>
+            <a:r>
+              <a:rPr lang="en-US" altLang="zh-TW" dirty="0" err="1"/>
+              <a:t>vcgt</a:t>
+            </a:r>
+            <a:r>
+              <a:rPr lang="zh-TW" altLang="en-US" dirty="0"/>
+              <a:t>、</a:t>
+            </a:r>
+            <a:r>
+              <a:rPr lang="en-US" altLang="zh-TW" dirty="0"/>
+              <a:t>MS00</a:t>
+            </a:r>
+            <a:r>
+              <a:rPr lang="zh-TW" altLang="en-US" dirty="0"/>
+              <a:t>、</a:t>
+            </a:r>
+            <a:r>
+              <a:rPr lang="en-US" altLang="zh-TW" dirty="0"/>
+              <a:t>MCH2</a:t>
+            </a:r>
+            <a:r>
+              <a:rPr lang="zh-TW" altLang="en-US" dirty="0"/>
+              <a:t>等</a:t>
+            </a:r>
+            <a:r>
+              <a:rPr lang="en-US" altLang="zh-TW" dirty="0"/>
+              <a:t>tag</a:t>
+            </a:r>
+            <a:r>
+              <a:rPr lang="zh-TW" altLang="en-US" dirty="0"/>
+              <a:t>，所以他這只能生成純粹色彩描述檔的</a:t>
+            </a:r>
+            <a:r>
+              <a:rPr lang="en-US" altLang="zh-TW" dirty="0"/>
+              <a:t>ICC Profile</a:t>
+            </a:r>
+            <a:endParaRPr lang="zh-TW" altLang="en-US" dirty="0"/>
+          </a:p>
+        </p:txBody>
+      </p:sp>
+      <p:sp>
+        <p:nvSpPr>
+          <p:cNvPr id="4" name="投影片編號版面配置區 3">
+            <a:extLst>
+              <a:ext uri="{FF2B5EF4-FFF2-40B4-BE49-F238E27FC236}">
+                <a16:creationId xmlns:a16="http://schemas.microsoft.com/office/drawing/2014/main" id="{A81AD260-1FA1-46D2-EEFC-6CE390861C06}"/>
+              </a:ext>
+            </a:extLst>
+          </p:cNvPr>
+          <p:cNvSpPr>
+            <a:spLocks noGrp="1"/>
+          </p:cNvSpPr>
+          <p:nvPr>
+            <p:ph type="sldNum" idx="12"/>
+          </p:nvPr>
+        </p:nvSpPr>
+        <p:spPr/>
+        <p:txBody>
+          <a:bodyPr/>
+          <a:lstStyle/>
+          <a:p>
+            <a:pPr marL="0" marR="0" lvl="0" indent="0" algn="r" rtl="0">
+              <a:spcBef>
+                <a:spcPts val="0"/>
+              </a:spcBef>
+              <a:spcAft>
+                <a:spcPts val="0"/>
+              </a:spcAft>
+              <a:buNone/>
+            </a:pPr>
+            <a:fld id="{00000000-1234-1234-1234-123412341234}" type="slidenum">
+              <a:rPr lang="en-US" sz="2000" b="0" i="0" u="none" strike="noStrike" cap="none" smtClean="0">
+                <a:solidFill>
+                  <a:schemeClr val="dk1"/>
+                </a:solidFill>
+                <a:latin typeface="Times New Roman"/>
+                <a:ea typeface="Times New Roman"/>
+                <a:cs typeface="Times New Roman"/>
+                <a:sym typeface="Times New Roman"/>
+              </a:rPr>
+              <a:t>9</a:t>
             </a:fld>
             <a:endParaRPr lang="en-US" sz="2000" b="0" i="0" u="none" strike="noStrike" cap="none" dirty="0">
               <a:solidFill>
@@ -5607,6 +6438,3897 @@
 </file>
 
 <file path=ppt/slides/slide1.xml><?xml version="1.0" encoding="utf-8"?>
+<p:sld xmlns:a="http://schemas.openxmlformats.org/drawingml/2006/main" xmlns:r="http://schemas.openxmlformats.org/officeDocument/2006/relationships" xmlns:p="http://schemas.openxmlformats.org/presentationml/2006/main">
+  <p:cSld>
+    <p:spTree>
+      <p:nvGrpSpPr>
+        <p:cNvPr id="1" name="">
+          <a:extLst>
+            <a:ext uri="{FF2B5EF4-FFF2-40B4-BE49-F238E27FC236}">
+              <a16:creationId xmlns:a16="http://schemas.microsoft.com/office/drawing/2014/main" id="{C25E9AAA-7E36-1E17-83F9-FD3A18A28BE9}"/>
+            </a:ext>
+          </a:extLst>
+        </p:cNvPr>
+        <p:cNvGrpSpPr/>
+        <p:nvPr/>
+      </p:nvGrpSpPr>
+      <p:grpSpPr>
+        <a:xfrm>
+          <a:off x="0" y="0"/>
+          <a:ext cx="0" cy="0"/>
+          <a:chOff x="0" y="0"/>
+          <a:chExt cx="0" cy="0"/>
+        </a:xfrm>
+      </p:grpSpPr>
+      <p:sp>
+        <p:nvSpPr>
+          <p:cNvPr id="15" name="標題 1">
+            <a:extLst>
+              <a:ext uri="{FF2B5EF4-FFF2-40B4-BE49-F238E27FC236}">
+                <a16:creationId xmlns:a16="http://schemas.microsoft.com/office/drawing/2014/main" id="{142C8726-E890-9988-40FC-8984FDA21FEE}"/>
+              </a:ext>
+            </a:extLst>
+          </p:cNvPr>
+          <p:cNvSpPr>
+            <a:spLocks noGrp="1"/>
+          </p:cNvSpPr>
+          <p:nvPr>
+            <p:ph type="title"/>
+          </p:nvPr>
+        </p:nvSpPr>
+        <p:spPr>
+          <a:xfrm>
+            <a:off x="609602" y="609600"/>
+            <a:ext cx="8077200" cy="533400"/>
+          </a:xfrm>
+          <a:ln>
+            <a:noFill/>
+          </a:ln>
+        </p:spPr>
+        <p:txBody>
+          <a:bodyPr/>
+          <a:lstStyle/>
+          <a:p>
+            <a:r>
+              <a:rPr lang="zh-TW" altLang="en-US" dirty="0">
+                <a:latin typeface="Times New Roman" panose="02020603050405020304" pitchFamily="18" charset="0"/>
+                <a:ea typeface="標楷體" panose="03000509000000000000" pitchFamily="65" charset="-120"/>
+                <a:cs typeface="Times New Roman" panose="02020603050405020304" pitchFamily="18" charset="0"/>
+              </a:rPr>
+              <a:t>本次進度</a:t>
+            </a:r>
+            <a:r>
+              <a:rPr lang="en-US" altLang="zh-TW" dirty="0">
+                <a:latin typeface="Times New Roman" panose="02020603050405020304" pitchFamily="18" charset="0"/>
+                <a:ea typeface="標楷體" panose="03000509000000000000" pitchFamily="65" charset="-120"/>
+                <a:cs typeface="Times New Roman" panose="02020603050405020304" pitchFamily="18" charset="0"/>
+              </a:rPr>
+              <a:t>: </a:t>
+            </a:r>
+            <a:r>
+              <a:rPr lang="en-US" altLang="zh-TW" dirty="0"/>
+              <a:t>Video Capture Card</a:t>
+            </a:r>
+            <a:endParaRPr lang="zh-TW" altLang="en-US" dirty="0">
+              <a:latin typeface="Times New Roman" panose="02020603050405020304" pitchFamily="18" charset="0"/>
+              <a:ea typeface="標楷體" panose="03000509000000000000" pitchFamily="65" charset="-120"/>
+              <a:cs typeface="Times New Roman" panose="02020603050405020304" pitchFamily="18" charset="0"/>
+            </a:endParaRPr>
+          </a:p>
+        </p:txBody>
+      </p:sp>
+      <p:sp>
+        <p:nvSpPr>
+          <p:cNvPr id="2" name="文字版面配置區 6">
+            <a:extLst>
+              <a:ext uri="{FF2B5EF4-FFF2-40B4-BE49-F238E27FC236}">
+                <a16:creationId xmlns:a16="http://schemas.microsoft.com/office/drawing/2014/main" id="{033F0CBC-B216-A52F-8C2C-837CAED2E514}"/>
+              </a:ext>
+            </a:extLst>
+          </p:cNvPr>
+          <p:cNvSpPr txBox="1"/>
+          <p:nvPr/>
+        </p:nvSpPr>
+        <p:spPr>
+          <a:xfrm>
+            <a:off x="609602" y="935857"/>
+            <a:ext cx="8686796" cy="4700685"/>
+          </a:xfrm>
+          <a:prstGeom prst="rect">
+            <a:avLst/>
+          </a:prstGeom>
+          <a:noFill/>
+          <a:ln>
+            <a:noFill/>
+          </a:ln>
+        </p:spPr>
+        <p:txBody>
+          <a:bodyPr spcFirstLastPara="1" wrap="square" lIns="91425" tIns="45700" rIns="91425" bIns="45700" anchor="t" anchorCtr="0">
+            <a:noAutofit/>
+          </a:bodyPr>
+          <a:lstStyle>
+            <a:defPPr marR="0" lvl="0" algn="l" rtl="0">
+              <a:lnSpc>
+                <a:spcPct val="100000"/>
+              </a:lnSpc>
+              <a:spcBef>
+                <a:spcPts val="0"/>
+              </a:spcBef>
+              <a:spcAft>
+                <a:spcPts val="0"/>
+              </a:spcAft>
+            </a:defPPr>
+            <a:lvl1pPr marL="457200" marR="0" lvl="0" indent="-406400" algn="l" rtl="0">
+              <a:lnSpc>
+                <a:spcPct val="100000"/>
+              </a:lnSpc>
+              <a:spcBef>
+                <a:spcPts val="560"/>
+              </a:spcBef>
+              <a:spcAft>
+                <a:spcPts val="0"/>
+              </a:spcAft>
+              <a:buClr>
+                <a:schemeClr val="accent2"/>
+              </a:buClr>
+              <a:buSzPts val="2800"/>
+              <a:buFont typeface="Noto Sans Symbols"/>
+              <a:buChar char="❖"/>
+              <a:defRPr sz="2800" b="0" i="0" u="none" strike="noStrike" cap="none">
+                <a:solidFill>
+                  <a:schemeClr val="dk1"/>
+                </a:solidFill>
+                <a:latin typeface="Times New Roman"/>
+                <a:ea typeface="Times New Roman"/>
+                <a:cs typeface="Times New Roman"/>
+                <a:sym typeface="Times New Roman"/>
+              </a:defRPr>
+            </a:lvl1pPr>
+            <a:lvl2pPr marL="914400" marR="0" lvl="1" indent="-381000" algn="l" rtl="0">
+              <a:lnSpc>
+                <a:spcPct val="100000"/>
+              </a:lnSpc>
+              <a:spcBef>
+                <a:spcPts val="480"/>
+              </a:spcBef>
+              <a:spcAft>
+                <a:spcPts val="0"/>
+              </a:spcAft>
+              <a:buClr>
+                <a:srgbClr val="FF5050"/>
+              </a:buClr>
+              <a:buSzPts val="2400"/>
+              <a:buFont typeface="Noto Sans Symbols"/>
+              <a:buChar char="▪"/>
+              <a:defRPr sz="2400" b="0" i="0" u="none" strike="noStrike" cap="none">
+                <a:solidFill>
+                  <a:schemeClr val="dk1"/>
+                </a:solidFill>
+                <a:latin typeface="Times New Roman"/>
+                <a:ea typeface="Times New Roman"/>
+                <a:cs typeface="Times New Roman"/>
+                <a:sym typeface="Times New Roman"/>
+              </a:defRPr>
+            </a:lvl2pPr>
+            <a:lvl3pPr marL="1371600" marR="0" lvl="2" indent="-355600" algn="l" rtl="0">
+              <a:lnSpc>
+                <a:spcPct val="100000"/>
+              </a:lnSpc>
+              <a:spcBef>
+                <a:spcPts val="400"/>
+              </a:spcBef>
+              <a:spcAft>
+                <a:spcPts val="0"/>
+              </a:spcAft>
+              <a:buClr>
+                <a:srgbClr val="6699FF"/>
+              </a:buClr>
+              <a:buSzPts val="2000"/>
+              <a:buFont typeface="Times New Roman"/>
+              <a:buChar char="•"/>
+              <a:defRPr sz="2000" b="0" i="0" u="none" strike="noStrike" cap="none">
+                <a:solidFill>
+                  <a:schemeClr val="dk1"/>
+                </a:solidFill>
+                <a:latin typeface="Times New Roman"/>
+                <a:ea typeface="Times New Roman"/>
+                <a:cs typeface="Times New Roman"/>
+                <a:sym typeface="Times New Roman"/>
+              </a:defRPr>
+            </a:lvl3pPr>
+            <a:lvl4pPr marL="1828800" marR="0" lvl="3" indent="-355600" algn="l" rtl="0">
+              <a:lnSpc>
+                <a:spcPct val="100000"/>
+              </a:lnSpc>
+              <a:spcBef>
+                <a:spcPts val="400"/>
+              </a:spcBef>
+              <a:spcAft>
+                <a:spcPts val="0"/>
+              </a:spcAft>
+              <a:buClr>
+                <a:srgbClr val="FF5050"/>
+              </a:buClr>
+              <a:buSzPts val="2000"/>
+              <a:buFont typeface="Times New Roman"/>
+              <a:buChar char="o"/>
+              <a:defRPr sz="2000" b="0" i="0" u="none" strike="noStrike" cap="none">
+                <a:solidFill>
+                  <a:schemeClr val="dk1"/>
+                </a:solidFill>
+                <a:latin typeface="Times New Roman"/>
+                <a:ea typeface="Times New Roman"/>
+                <a:cs typeface="Times New Roman"/>
+                <a:sym typeface="Times New Roman"/>
+              </a:defRPr>
+            </a:lvl4pPr>
+            <a:lvl5pPr marL="2286000" marR="0" lvl="4" indent="-355600" algn="l" rtl="0">
+              <a:lnSpc>
+                <a:spcPct val="100000"/>
+              </a:lnSpc>
+              <a:spcBef>
+                <a:spcPts val="400"/>
+              </a:spcBef>
+              <a:spcAft>
+                <a:spcPts val="0"/>
+              </a:spcAft>
+              <a:buClr>
+                <a:srgbClr val="FF5050"/>
+              </a:buClr>
+              <a:buSzPts val="2000"/>
+              <a:buFont typeface="Times New Roman"/>
+              <a:buChar char="o"/>
+              <a:defRPr sz="2000" b="0" i="0" u="none" strike="noStrike" cap="none">
+                <a:solidFill>
+                  <a:schemeClr val="dk1"/>
+                </a:solidFill>
+                <a:latin typeface="Times New Roman"/>
+                <a:ea typeface="Times New Roman"/>
+                <a:cs typeface="Times New Roman"/>
+                <a:sym typeface="Times New Roman"/>
+              </a:defRPr>
+            </a:lvl5pPr>
+            <a:lvl6pPr marL="2743200" marR="0" lvl="5" indent="-355600" algn="l" rtl="0">
+              <a:lnSpc>
+                <a:spcPct val="100000"/>
+              </a:lnSpc>
+              <a:spcBef>
+                <a:spcPts val="400"/>
+              </a:spcBef>
+              <a:spcAft>
+                <a:spcPts val="0"/>
+              </a:spcAft>
+              <a:buClr>
+                <a:srgbClr val="FF5050"/>
+              </a:buClr>
+              <a:buSzPts val="2000"/>
+              <a:buFont typeface="Times New Roman"/>
+              <a:buChar char="o"/>
+              <a:defRPr sz="2000" b="0" i="0" u="none" strike="noStrike" cap="none">
+                <a:solidFill>
+                  <a:schemeClr val="dk1"/>
+                </a:solidFill>
+                <a:latin typeface="Times New Roman"/>
+                <a:ea typeface="Times New Roman"/>
+                <a:cs typeface="Times New Roman"/>
+                <a:sym typeface="Times New Roman"/>
+              </a:defRPr>
+            </a:lvl6pPr>
+            <a:lvl7pPr marL="3200400" marR="0" lvl="6" indent="-355600" algn="l" rtl="0">
+              <a:lnSpc>
+                <a:spcPct val="100000"/>
+              </a:lnSpc>
+              <a:spcBef>
+                <a:spcPts val="400"/>
+              </a:spcBef>
+              <a:spcAft>
+                <a:spcPts val="0"/>
+              </a:spcAft>
+              <a:buClr>
+                <a:srgbClr val="FF5050"/>
+              </a:buClr>
+              <a:buSzPts val="2000"/>
+              <a:buFont typeface="Times New Roman"/>
+              <a:buChar char="o"/>
+              <a:defRPr sz="2000" b="0" i="0" u="none" strike="noStrike" cap="none">
+                <a:solidFill>
+                  <a:schemeClr val="dk1"/>
+                </a:solidFill>
+                <a:latin typeface="Times New Roman"/>
+                <a:ea typeface="Times New Roman"/>
+                <a:cs typeface="Times New Roman"/>
+                <a:sym typeface="Times New Roman"/>
+              </a:defRPr>
+            </a:lvl7pPr>
+            <a:lvl8pPr marL="3657600" marR="0" lvl="7" indent="-355600" algn="l" rtl="0">
+              <a:lnSpc>
+                <a:spcPct val="100000"/>
+              </a:lnSpc>
+              <a:spcBef>
+                <a:spcPts val="400"/>
+              </a:spcBef>
+              <a:spcAft>
+                <a:spcPts val="0"/>
+              </a:spcAft>
+              <a:buClr>
+                <a:srgbClr val="FF5050"/>
+              </a:buClr>
+              <a:buSzPts val="2000"/>
+              <a:buFont typeface="Times New Roman"/>
+              <a:buChar char="o"/>
+              <a:defRPr sz="2000" b="0" i="0" u="none" strike="noStrike" cap="none">
+                <a:solidFill>
+                  <a:schemeClr val="dk1"/>
+                </a:solidFill>
+                <a:latin typeface="Times New Roman"/>
+                <a:ea typeface="Times New Roman"/>
+                <a:cs typeface="Times New Roman"/>
+                <a:sym typeface="Times New Roman"/>
+              </a:defRPr>
+            </a:lvl8pPr>
+            <a:lvl9pPr marL="4114800" marR="0" lvl="8" indent="-355600" algn="l" rtl="0">
+              <a:lnSpc>
+                <a:spcPct val="100000"/>
+              </a:lnSpc>
+              <a:spcBef>
+                <a:spcPts val="400"/>
+              </a:spcBef>
+              <a:spcAft>
+                <a:spcPts val="0"/>
+              </a:spcAft>
+              <a:buClr>
+                <a:srgbClr val="FF5050"/>
+              </a:buClr>
+              <a:buSzPts val="2000"/>
+              <a:buFont typeface="Times New Roman"/>
+              <a:buChar char="o"/>
+              <a:defRPr sz="2000" b="0" i="0" u="none" strike="noStrike" cap="none">
+                <a:solidFill>
+                  <a:schemeClr val="dk1"/>
+                </a:solidFill>
+                <a:latin typeface="Times New Roman"/>
+                <a:ea typeface="Times New Roman"/>
+                <a:cs typeface="Times New Roman"/>
+                <a:sym typeface="Times New Roman"/>
+              </a:defRPr>
+            </a:lvl9pPr>
+          </a:lstStyle>
+          <a:p>
+            <a:pPr>
+              <a:lnSpc>
+                <a:spcPct val="150000"/>
+              </a:lnSpc>
+            </a:pPr>
+            <a:r>
+              <a:rPr lang="zh-TW" altLang="en-US" sz="2000" dirty="0">
+                <a:solidFill>
+                  <a:schemeClr val="tx1"/>
+                </a:solidFill>
+                <a:latin typeface="Times New Roman" panose="02020603050405020304" pitchFamily="18" charset="0"/>
+                <a:ea typeface="標楷體" panose="03000509000000000000" pitchFamily="65" charset="-120"/>
+                <a:cs typeface="Times New Roman" panose="02020603050405020304" pitchFamily="18" charset="0"/>
+              </a:rPr>
+              <a:t>研究目的</a:t>
+            </a:r>
+            <a:endParaRPr lang="en-US" altLang="zh-TW" sz="2000" dirty="0">
+              <a:solidFill>
+                <a:schemeClr val="tx1"/>
+              </a:solidFill>
+              <a:latin typeface="Times New Roman" panose="02020603050405020304" pitchFamily="18" charset="0"/>
+              <a:ea typeface="標楷體" panose="03000509000000000000" pitchFamily="65" charset="-120"/>
+              <a:cs typeface="Times New Roman" panose="02020603050405020304" pitchFamily="18" charset="0"/>
+            </a:endParaRPr>
+          </a:p>
+          <a:p>
+            <a:pPr lvl="1">
+              <a:lnSpc>
+                <a:spcPts val="3000"/>
+              </a:lnSpc>
+            </a:pPr>
+            <a:r>
+              <a:rPr lang="zh-TW" altLang="en-US" sz="1600" dirty="0">
+                <a:solidFill>
+                  <a:schemeClr val="tx1"/>
+                </a:solidFill>
+                <a:latin typeface="Times New Roman" panose="02020603050405020304" pitchFamily="18" charset="0"/>
+                <a:ea typeface="標楷體" panose="03000509000000000000" pitchFamily="65" charset="-120"/>
+                <a:cs typeface="Times New Roman" panose="02020603050405020304" pitchFamily="18" charset="0"/>
+              </a:rPr>
+              <a:t>尋找相關開源專案，了解現有技術與實作成果</a:t>
+            </a:r>
+            <a:endParaRPr lang="en-US" altLang="zh-TW" sz="1600" dirty="0">
+              <a:solidFill>
+                <a:schemeClr val="tx1"/>
+              </a:solidFill>
+              <a:latin typeface="Times New Roman" panose="02020603050405020304" pitchFamily="18" charset="0"/>
+              <a:ea typeface="標楷體" panose="03000509000000000000" pitchFamily="65" charset="-120"/>
+              <a:cs typeface="Times New Roman" panose="02020603050405020304" pitchFamily="18" charset="0"/>
+            </a:endParaRPr>
+          </a:p>
+          <a:p>
+            <a:pPr lvl="1">
+              <a:lnSpc>
+                <a:spcPts val="3000"/>
+              </a:lnSpc>
+            </a:pPr>
+            <a:r>
+              <a:rPr lang="zh-TW" altLang="en-US" sz="1600" dirty="0">
+                <a:solidFill>
+                  <a:schemeClr val="tx1"/>
+                </a:solidFill>
+                <a:latin typeface="Times New Roman" panose="02020603050405020304" pitchFamily="18" charset="0"/>
+                <a:ea typeface="標楷體" panose="03000509000000000000" pitchFamily="65" charset="-120"/>
+                <a:cs typeface="Times New Roman" panose="02020603050405020304" pitchFamily="18" charset="0"/>
+              </a:rPr>
+              <a:t>調查各專案使用的 </a:t>
+            </a:r>
+            <a:r>
+              <a:rPr lang="en-US" altLang="zh-TW" sz="1600" dirty="0">
+                <a:solidFill>
+                  <a:schemeClr val="tx1"/>
+                </a:solidFill>
+                <a:latin typeface="Times New Roman" panose="02020603050405020304" pitchFamily="18" charset="0"/>
+                <a:ea typeface="標楷體" panose="03000509000000000000" pitchFamily="65" charset="-120"/>
+                <a:cs typeface="Times New Roman" panose="02020603050405020304" pitchFamily="18" charset="0"/>
+              </a:rPr>
+              <a:t>FPGA</a:t>
+            </a:r>
+            <a:r>
+              <a:rPr lang="zh-TW" altLang="en-US" sz="1600" dirty="0">
+                <a:solidFill>
+                  <a:schemeClr val="tx1"/>
+                </a:solidFill>
+                <a:latin typeface="Times New Roman" panose="02020603050405020304" pitchFamily="18" charset="0"/>
+                <a:ea typeface="標楷體" panose="03000509000000000000" pitchFamily="65" charset="-120"/>
+                <a:cs typeface="Times New Roman" panose="02020603050405020304" pitchFamily="18" charset="0"/>
+              </a:rPr>
+              <a:t>、開發板、框架與 </a:t>
+            </a:r>
+            <a:r>
+              <a:rPr lang="en-US" altLang="zh-TW" sz="1600" dirty="0">
+                <a:solidFill>
+                  <a:schemeClr val="tx1"/>
+                </a:solidFill>
+                <a:latin typeface="Times New Roman" panose="02020603050405020304" pitchFamily="18" charset="0"/>
+                <a:ea typeface="標楷體" panose="03000509000000000000" pitchFamily="65" charset="-120"/>
+                <a:cs typeface="Times New Roman" panose="02020603050405020304" pitchFamily="18" charset="0"/>
+              </a:rPr>
+              <a:t>IP</a:t>
+            </a:r>
+          </a:p>
+          <a:p>
+            <a:pPr lvl="1">
+              <a:lnSpc>
+                <a:spcPts val="3000"/>
+              </a:lnSpc>
+            </a:pPr>
+            <a:r>
+              <a:rPr lang="zh-TW" altLang="en-US" sz="1600" dirty="0">
+                <a:solidFill>
+                  <a:schemeClr val="tx1"/>
+                </a:solidFill>
+                <a:latin typeface="Times New Roman" panose="02020603050405020304" pitchFamily="18" charset="0"/>
+                <a:ea typeface="標楷體" panose="03000509000000000000" pitchFamily="65" charset="-120"/>
+                <a:cs typeface="Times New Roman" panose="02020603050405020304" pitchFamily="18" charset="0"/>
+              </a:rPr>
+              <a:t>比較不同開源生態，作為後續技術選型的依據</a:t>
+            </a:r>
+            <a:endParaRPr lang="en-US" altLang="zh-TW" sz="1600" dirty="0">
+              <a:solidFill>
+                <a:schemeClr val="tx1"/>
+              </a:solidFill>
+              <a:latin typeface="Times New Roman" panose="02020603050405020304" pitchFamily="18" charset="0"/>
+              <a:ea typeface="標楷體" panose="03000509000000000000" pitchFamily="65" charset="-120"/>
+              <a:cs typeface="Times New Roman" panose="02020603050405020304" pitchFamily="18" charset="0"/>
+            </a:endParaRPr>
+          </a:p>
+          <a:p>
+            <a:pPr>
+              <a:lnSpc>
+                <a:spcPts val="3000"/>
+              </a:lnSpc>
+            </a:pPr>
+            <a:r>
+              <a:rPr lang="zh-TW" altLang="en-US" sz="2000" dirty="0">
+                <a:solidFill>
+                  <a:schemeClr val="tx1"/>
+                </a:solidFill>
+                <a:latin typeface="Times New Roman" panose="02020603050405020304" pitchFamily="18" charset="0"/>
+                <a:ea typeface="標楷體" panose="03000509000000000000" pitchFamily="65" charset="-120"/>
+                <a:cs typeface="Times New Roman" panose="02020603050405020304" pitchFamily="18" charset="0"/>
+              </a:rPr>
+              <a:t>目標架構概念</a:t>
+            </a:r>
+            <a:endParaRPr lang="en-US" altLang="zh-TW" sz="2000" dirty="0">
+              <a:solidFill>
+                <a:schemeClr val="tx1"/>
+              </a:solidFill>
+              <a:latin typeface="Times New Roman" panose="02020603050405020304" pitchFamily="18" charset="0"/>
+              <a:ea typeface="標楷體" panose="03000509000000000000" pitchFamily="65" charset="-120"/>
+              <a:cs typeface="Times New Roman" panose="02020603050405020304" pitchFamily="18" charset="0"/>
+            </a:endParaRPr>
+          </a:p>
+        </p:txBody>
+      </p:sp>
+      <p:pic>
+        <p:nvPicPr>
+          <p:cNvPr id="4" name="圖片 3">
+            <a:extLst>
+              <a:ext uri="{FF2B5EF4-FFF2-40B4-BE49-F238E27FC236}">
+                <a16:creationId xmlns:a16="http://schemas.microsoft.com/office/drawing/2014/main" id="{711D2EBC-D008-B0EE-7DBE-BC7E1A01383F}"/>
+              </a:ext>
+            </a:extLst>
+          </p:cNvPr>
+          <p:cNvPicPr>
+            <a:picLocks noChangeAspect="1"/>
+          </p:cNvPicPr>
+          <p:nvPr/>
+        </p:nvPicPr>
+        <p:blipFill>
+          <a:blip r:embed="rId3"/>
+          <a:stretch>
+            <a:fillRect/>
+          </a:stretch>
+        </p:blipFill>
+        <p:spPr>
+          <a:xfrm>
+            <a:off x="440871" y="3509911"/>
+            <a:ext cx="9024257" cy="942654"/>
+          </a:xfrm>
+          <a:prstGeom prst="rect">
+            <a:avLst/>
+          </a:prstGeom>
+        </p:spPr>
+      </p:pic>
+    </p:spTree>
+    <p:extLst>
+      <p:ext uri="{BB962C8B-B14F-4D97-AF65-F5344CB8AC3E}">
+        <p14:creationId xmlns:p14="http://schemas.microsoft.com/office/powerpoint/2010/main" val="1137652450"/>
+      </p:ext>
+    </p:extLst>
+  </p:cSld>
+  <p:clrMapOvr>
+    <a:masterClrMapping/>
+  </p:clrMapOvr>
+</p:sld>
+</file>
+
+<file path=ppt/slides/slide2.xml><?xml version="1.0" encoding="utf-8"?>
+<p:sld xmlns:a="http://schemas.openxmlformats.org/drawingml/2006/main" xmlns:r="http://schemas.openxmlformats.org/officeDocument/2006/relationships" xmlns:p="http://schemas.openxmlformats.org/presentationml/2006/main">
+  <p:cSld>
+    <p:spTree>
+      <p:nvGrpSpPr>
+        <p:cNvPr id="1" name="">
+          <a:extLst>
+            <a:ext uri="{FF2B5EF4-FFF2-40B4-BE49-F238E27FC236}">
+              <a16:creationId xmlns:a16="http://schemas.microsoft.com/office/drawing/2014/main" id="{C25E9AAA-7E36-1E17-83F9-FD3A18A28BE9}"/>
+            </a:ext>
+          </a:extLst>
+        </p:cNvPr>
+        <p:cNvGrpSpPr/>
+        <p:nvPr/>
+      </p:nvGrpSpPr>
+      <p:grpSpPr>
+        <a:xfrm>
+          <a:off x="0" y="0"/>
+          <a:ext cx="0" cy="0"/>
+          <a:chOff x="0" y="0"/>
+          <a:chExt cx="0" cy="0"/>
+        </a:xfrm>
+      </p:grpSpPr>
+      <p:sp>
+        <p:nvSpPr>
+          <p:cNvPr id="15" name="標題 1">
+            <a:extLst>
+              <a:ext uri="{FF2B5EF4-FFF2-40B4-BE49-F238E27FC236}">
+                <a16:creationId xmlns:a16="http://schemas.microsoft.com/office/drawing/2014/main" id="{142C8726-E890-9988-40FC-8984FDA21FEE}"/>
+              </a:ext>
+            </a:extLst>
+          </p:cNvPr>
+          <p:cNvSpPr>
+            <a:spLocks noGrp="1"/>
+          </p:cNvSpPr>
+          <p:nvPr>
+            <p:ph type="title"/>
+          </p:nvPr>
+        </p:nvSpPr>
+        <p:spPr>
+          <a:xfrm>
+            <a:off x="609602" y="609600"/>
+            <a:ext cx="8077200" cy="533400"/>
+          </a:xfrm>
+          <a:ln>
+            <a:noFill/>
+          </a:ln>
+        </p:spPr>
+        <p:txBody>
+          <a:bodyPr/>
+          <a:lstStyle/>
+          <a:p>
+            <a:r>
+              <a:rPr lang="zh-TW" altLang="en-US" dirty="0">
+                <a:latin typeface="Times New Roman" panose="02020603050405020304" pitchFamily="18" charset="0"/>
+                <a:ea typeface="標楷體" panose="03000509000000000000" pitchFamily="65" charset="-120"/>
+                <a:cs typeface="Times New Roman" panose="02020603050405020304" pitchFamily="18" charset="0"/>
+              </a:rPr>
+              <a:t>本次進度</a:t>
+            </a:r>
+            <a:r>
+              <a:rPr lang="en-US" altLang="zh-TW" dirty="0">
+                <a:latin typeface="Times New Roman" panose="02020603050405020304" pitchFamily="18" charset="0"/>
+                <a:ea typeface="標楷體" panose="03000509000000000000" pitchFamily="65" charset="-120"/>
+                <a:cs typeface="Times New Roman" panose="02020603050405020304" pitchFamily="18" charset="0"/>
+              </a:rPr>
+              <a:t>: </a:t>
+            </a:r>
+            <a:r>
+              <a:rPr lang="en-US" altLang="zh-TW" dirty="0" err="1">
+                <a:latin typeface="Times New Roman" panose="02020603050405020304" pitchFamily="18" charset="0"/>
+                <a:ea typeface="標楷體" panose="03000509000000000000" pitchFamily="65" charset="-120"/>
+                <a:cs typeface="Times New Roman" panose="02020603050405020304" pitchFamily="18" charset="0"/>
+              </a:rPr>
+              <a:t>LitePCIe</a:t>
+            </a:r>
+            <a:endParaRPr lang="zh-TW" altLang="en-US" dirty="0">
+              <a:latin typeface="Times New Roman" panose="02020603050405020304" pitchFamily="18" charset="0"/>
+              <a:ea typeface="標楷體" panose="03000509000000000000" pitchFamily="65" charset="-120"/>
+              <a:cs typeface="Times New Roman" panose="02020603050405020304" pitchFamily="18" charset="0"/>
+            </a:endParaRPr>
+          </a:p>
+        </p:txBody>
+      </p:sp>
+      <p:sp>
+        <p:nvSpPr>
+          <p:cNvPr id="2" name="文字版面配置區 6">
+            <a:extLst>
+              <a:ext uri="{FF2B5EF4-FFF2-40B4-BE49-F238E27FC236}">
+                <a16:creationId xmlns:a16="http://schemas.microsoft.com/office/drawing/2014/main" id="{D929304B-5341-8BBF-E71F-AF5F2FE7268A}"/>
+              </a:ext>
+            </a:extLst>
+          </p:cNvPr>
+          <p:cNvSpPr txBox="1"/>
+          <p:nvPr/>
+        </p:nvSpPr>
+        <p:spPr>
+          <a:xfrm>
+            <a:off x="609602" y="935857"/>
+            <a:ext cx="8686796" cy="4700685"/>
+          </a:xfrm>
+          <a:prstGeom prst="rect">
+            <a:avLst/>
+          </a:prstGeom>
+          <a:noFill/>
+          <a:ln>
+            <a:noFill/>
+          </a:ln>
+        </p:spPr>
+        <p:txBody>
+          <a:bodyPr spcFirstLastPara="1" wrap="square" lIns="91425" tIns="45700" rIns="91425" bIns="45700" anchor="t" anchorCtr="0">
+            <a:noAutofit/>
+          </a:bodyPr>
+          <a:lstStyle>
+            <a:defPPr marR="0" lvl="0" algn="l" rtl="0">
+              <a:lnSpc>
+                <a:spcPct val="100000"/>
+              </a:lnSpc>
+              <a:spcBef>
+                <a:spcPts val="0"/>
+              </a:spcBef>
+              <a:spcAft>
+                <a:spcPts val="0"/>
+              </a:spcAft>
+            </a:defPPr>
+            <a:lvl1pPr marL="457200" marR="0" lvl="0" indent="-406400" algn="l" rtl="0">
+              <a:lnSpc>
+                <a:spcPct val="100000"/>
+              </a:lnSpc>
+              <a:spcBef>
+                <a:spcPts val="560"/>
+              </a:spcBef>
+              <a:spcAft>
+                <a:spcPts val="0"/>
+              </a:spcAft>
+              <a:buClr>
+                <a:schemeClr val="accent2"/>
+              </a:buClr>
+              <a:buSzPts val="2800"/>
+              <a:buFont typeface="Noto Sans Symbols"/>
+              <a:buChar char="❖"/>
+              <a:defRPr sz="2800" b="0" i="0" u="none" strike="noStrike" cap="none">
+                <a:solidFill>
+                  <a:schemeClr val="dk1"/>
+                </a:solidFill>
+                <a:latin typeface="Times New Roman"/>
+                <a:ea typeface="Times New Roman"/>
+                <a:cs typeface="Times New Roman"/>
+                <a:sym typeface="Times New Roman"/>
+              </a:defRPr>
+            </a:lvl1pPr>
+            <a:lvl2pPr marL="914400" marR="0" lvl="1" indent="-381000" algn="l" rtl="0">
+              <a:lnSpc>
+                <a:spcPct val="100000"/>
+              </a:lnSpc>
+              <a:spcBef>
+                <a:spcPts val="480"/>
+              </a:spcBef>
+              <a:spcAft>
+                <a:spcPts val="0"/>
+              </a:spcAft>
+              <a:buClr>
+                <a:srgbClr val="FF5050"/>
+              </a:buClr>
+              <a:buSzPts val="2400"/>
+              <a:buFont typeface="Noto Sans Symbols"/>
+              <a:buChar char="▪"/>
+              <a:defRPr sz="2400" b="0" i="0" u="none" strike="noStrike" cap="none">
+                <a:solidFill>
+                  <a:schemeClr val="dk1"/>
+                </a:solidFill>
+                <a:latin typeface="Times New Roman"/>
+                <a:ea typeface="Times New Roman"/>
+                <a:cs typeface="Times New Roman"/>
+                <a:sym typeface="Times New Roman"/>
+              </a:defRPr>
+            </a:lvl2pPr>
+            <a:lvl3pPr marL="1371600" marR="0" lvl="2" indent="-355600" algn="l" rtl="0">
+              <a:lnSpc>
+                <a:spcPct val="100000"/>
+              </a:lnSpc>
+              <a:spcBef>
+                <a:spcPts val="400"/>
+              </a:spcBef>
+              <a:spcAft>
+                <a:spcPts val="0"/>
+              </a:spcAft>
+              <a:buClr>
+                <a:srgbClr val="6699FF"/>
+              </a:buClr>
+              <a:buSzPts val="2000"/>
+              <a:buFont typeface="Times New Roman"/>
+              <a:buChar char="•"/>
+              <a:defRPr sz="2000" b="0" i="0" u="none" strike="noStrike" cap="none">
+                <a:solidFill>
+                  <a:schemeClr val="dk1"/>
+                </a:solidFill>
+                <a:latin typeface="Times New Roman"/>
+                <a:ea typeface="Times New Roman"/>
+                <a:cs typeface="Times New Roman"/>
+                <a:sym typeface="Times New Roman"/>
+              </a:defRPr>
+            </a:lvl3pPr>
+            <a:lvl4pPr marL="1828800" marR="0" lvl="3" indent="-355600" algn="l" rtl="0">
+              <a:lnSpc>
+                <a:spcPct val="100000"/>
+              </a:lnSpc>
+              <a:spcBef>
+                <a:spcPts val="400"/>
+              </a:spcBef>
+              <a:spcAft>
+                <a:spcPts val="0"/>
+              </a:spcAft>
+              <a:buClr>
+                <a:srgbClr val="FF5050"/>
+              </a:buClr>
+              <a:buSzPts val="2000"/>
+              <a:buFont typeface="Times New Roman"/>
+              <a:buChar char="o"/>
+              <a:defRPr sz="2000" b="0" i="0" u="none" strike="noStrike" cap="none">
+                <a:solidFill>
+                  <a:schemeClr val="dk1"/>
+                </a:solidFill>
+                <a:latin typeface="Times New Roman"/>
+                <a:ea typeface="Times New Roman"/>
+                <a:cs typeface="Times New Roman"/>
+                <a:sym typeface="Times New Roman"/>
+              </a:defRPr>
+            </a:lvl4pPr>
+            <a:lvl5pPr marL="2286000" marR="0" lvl="4" indent="-355600" algn="l" rtl="0">
+              <a:lnSpc>
+                <a:spcPct val="100000"/>
+              </a:lnSpc>
+              <a:spcBef>
+                <a:spcPts val="400"/>
+              </a:spcBef>
+              <a:spcAft>
+                <a:spcPts val="0"/>
+              </a:spcAft>
+              <a:buClr>
+                <a:srgbClr val="FF5050"/>
+              </a:buClr>
+              <a:buSzPts val="2000"/>
+              <a:buFont typeface="Times New Roman"/>
+              <a:buChar char="o"/>
+              <a:defRPr sz="2000" b="0" i="0" u="none" strike="noStrike" cap="none">
+                <a:solidFill>
+                  <a:schemeClr val="dk1"/>
+                </a:solidFill>
+                <a:latin typeface="Times New Roman"/>
+                <a:ea typeface="Times New Roman"/>
+                <a:cs typeface="Times New Roman"/>
+                <a:sym typeface="Times New Roman"/>
+              </a:defRPr>
+            </a:lvl5pPr>
+            <a:lvl6pPr marL="2743200" marR="0" lvl="5" indent="-355600" algn="l" rtl="0">
+              <a:lnSpc>
+                <a:spcPct val="100000"/>
+              </a:lnSpc>
+              <a:spcBef>
+                <a:spcPts val="400"/>
+              </a:spcBef>
+              <a:spcAft>
+                <a:spcPts val="0"/>
+              </a:spcAft>
+              <a:buClr>
+                <a:srgbClr val="FF5050"/>
+              </a:buClr>
+              <a:buSzPts val="2000"/>
+              <a:buFont typeface="Times New Roman"/>
+              <a:buChar char="o"/>
+              <a:defRPr sz="2000" b="0" i="0" u="none" strike="noStrike" cap="none">
+                <a:solidFill>
+                  <a:schemeClr val="dk1"/>
+                </a:solidFill>
+                <a:latin typeface="Times New Roman"/>
+                <a:ea typeface="Times New Roman"/>
+                <a:cs typeface="Times New Roman"/>
+                <a:sym typeface="Times New Roman"/>
+              </a:defRPr>
+            </a:lvl6pPr>
+            <a:lvl7pPr marL="3200400" marR="0" lvl="6" indent="-355600" algn="l" rtl="0">
+              <a:lnSpc>
+                <a:spcPct val="100000"/>
+              </a:lnSpc>
+              <a:spcBef>
+                <a:spcPts val="400"/>
+              </a:spcBef>
+              <a:spcAft>
+                <a:spcPts val="0"/>
+              </a:spcAft>
+              <a:buClr>
+                <a:srgbClr val="FF5050"/>
+              </a:buClr>
+              <a:buSzPts val="2000"/>
+              <a:buFont typeface="Times New Roman"/>
+              <a:buChar char="o"/>
+              <a:defRPr sz="2000" b="0" i="0" u="none" strike="noStrike" cap="none">
+                <a:solidFill>
+                  <a:schemeClr val="dk1"/>
+                </a:solidFill>
+                <a:latin typeface="Times New Roman"/>
+                <a:ea typeface="Times New Roman"/>
+                <a:cs typeface="Times New Roman"/>
+                <a:sym typeface="Times New Roman"/>
+              </a:defRPr>
+            </a:lvl7pPr>
+            <a:lvl8pPr marL="3657600" marR="0" lvl="7" indent="-355600" algn="l" rtl="0">
+              <a:lnSpc>
+                <a:spcPct val="100000"/>
+              </a:lnSpc>
+              <a:spcBef>
+                <a:spcPts val="400"/>
+              </a:spcBef>
+              <a:spcAft>
+                <a:spcPts val="0"/>
+              </a:spcAft>
+              <a:buClr>
+                <a:srgbClr val="FF5050"/>
+              </a:buClr>
+              <a:buSzPts val="2000"/>
+              <a:buFont typeface="Times New Roman"/>
+              <a:buChar char="o"/>
+              <a:defRPr sz="2000" b="0" i="0" u="none" strike="noStrike" cap="none">
+                <a:solidFill>
+                  <a:schemeClr val="dk1"/>
+                </a:solidFill>
+                <a:latin typeface="Times New Roman"/>
+                <a:ea typeface="Times New Roman"/>
+                <a:cs typeface="Times New Roman"/>
+                <a:sym typeface="Times New Roman"/>
+              </a:defRPr>
+            </a:lvl8pPr>
+            <a:lvl9pPr marL="4114800" marR="0" lvl="8" indent="-355600" algn="l" rtl="0">
+              <a:lnSpc>
+                <a:spcPct val="100000"/>
+              </a:lnSpc>
+              <a:spcBef>
+                <a:spcPts val="400"/>
+              </a:spcBef>
+              <a:spcAft>
+                <a:spcPts val="0"/>
+              </a:spcAft>
+              <a:buClr>
+                <a:srgbClr val="FF5050"/>
+              </a:buClr>
+              <a:buSzPts val="2000"/>
+              <a:buFont typeface="Times New Roman"/>
+              <a:buChar char="o"/>
+              <a:defRPr sz="2000" b="0" i="0" u="none" strike="noStrike" cap="none">
+                <a:solidFill>
+                  <a:schemeClr val="dk1"/>
+                </a:solidFill>
+                <a:latin typeface="Times New Roman"/>
+                <a:ea typeface="Times New Roman"/>
+                <a:cs typeface="Times New Roman"/>
+                <a:sym typeface="Times New Roman"/>
+              </a:defRPr>
+            </a:lvl9pPr>
+          </a:lstStyle>
+          <a:p>
+            <a:pPr>
+              <a:lnSpc>
+                <a:spcPct val="150000"/>
+              </a:lnSpc>
+            </a:pPr>
+            <a:r>
+              <a:rPr lang="zh-TW" altLang="en-US" sz="2000" dirty="0">
+                <a:solidFill>
+                  <a:schemeClr val="tx1"/>
+                </a:solidFill>
+                <a:latin typeface="Times New Roman" panose="02020603050405020304" pitchFamily="18" charset="0"/>
+                <a:ea typeface="標楷體" panose="03000509000000000000" pitchFamily="65" charset="-120"/>
+                <a:cs typeface="Times New Roman" panose="02020603050405020304" pitchFamily="18" charset="0"/>
+              </a:rPr>
+              <a:t>功能</a:t>
+            </a:r>
+            <a:endParaRPr lang="en-US" altLang="zh-TW" sz="2000" dirty="0">
+              <a:solidFill>
+                <a:schemeClr val="tx1"/>
+              </a:solidFill>
+              <a:latin typeface="Times New Roman" panose="02020603050405020304" pitchFamily="18" charset="0"/>
+              <a:ea typeface="標楷體" panose="03000509000000000000" pitchFamily="65" charset="-120"/>
+              <a:cs typeface="Times New Roman" panose="02020603050405020304" pitchFamily="18" charset="0"/>
+            </a:endParaRPr>
+          </a:p>
+          <a:p>
+            <a:pPr lvl="1">
+              <a:lnSpc>
+                <a:spcPct val="150000"/>
+              </a:lnSpc>
+            </a:pPr>
+            <a:r>
+              <a:rPr lang="zh-TW" altLang="en-US" sz="1600" dirty="0">
+                <a:latin typeface="Times New Roman" panose="02020603050405020304" pitchFamily="18" charset="0"/>
+                <a:ea typeface="標楷體" panose="03000509000000000000" pitchFamily="65" charset="-120"/>
+                <a:cs typeface="Times New Roman" panose="02020603050405020304" pitchFamily="18" charset="0"/>
+              </a:rPr>
+              <a:t>透過 </a:t>
+            </a:r>
+            <a:r>
+              <a:rPr lang="en-US" altLang="zh-TW" sz="1600" dirty="0">
+                <a:latin typeface="Times New Roman" panose="02020603050405020304" pitchFamily="18" charset="0"/>
+                <a:ea typeface="標楷體" panose="03000509000000000000" pitchFamily="65" charset="-120"/>
+                <a:cs typeface="Times New Roman" panose="02020603050405020304" pitchFamily="18" charset="0"/>
+              </a:rPr>
+              <a:t>DMA Writer </a:t>
+            </a:r>
+            <a:r>
+              <a:rPr lang="zh-TW" altLang="en-US" sz="1600" dirty="0">
+                <a:latin typeface="Times New Roman" panose="02020603050405020304" pitchFamily="18" charset="0"/>
+                <a:ea typeface="標楷體" panose="03000509000000000000" pitchFamily="65" charset="-120"/>
+                <a:cs typeface="Times New Roman" panose="02020603050405020304" pitchFamily="18" charset="0"/>
+              </a:rPr>
+              <a:t>將 </a:t>
+            </a:r>
+            <a:r>
+              <a:rPr lang="en-US" altLang="zh-TW" sz="1600" dirty="0">
+                <a:latin typeface="Times New Roman" panose="02020603050405020304" pitchFamily="18" charset="0"/>
+                <a:ea typeface="標楷體" panose="03000509000000000000" pitchFamily="65" charset="-120"/>
+                <a:cs typeface="Times New Roman" panose="02020603050405020304" pitchFamily="18" charset="0"/>
+              </a:rPr>
+              <a:t>FPGA </a:t>
+            </a:r>
+            <a:r>
+              <a:rPr lang="zh-TW" altLang="en-US" sz="1600" dirty="0">
+                <a:latin typeface="Times New Roman" panose="02020603050405020304" pitchFamily="18" charset="0"/>
+                <a:ea typeface="標楷體" panose="03000509000000000000" pitchFamily="65" charset="-120"/>
+                <a:cs typeface="Times New Roman" panose="02020603050405020304" pitchFamily="18" charset="0"/>
+              </a:rPr>
+              <a:t>資料寫入 </a:t>
+            </a:r>
+            <a:r>
+              <a:rPr lang="en-US" altLang="zh-TW" sz="1600" dirty="0">
+                <a:latin typeface="Times New Roman" panose="02020603050405020304" pitchFamily="18" charset="0"/>
+                <a:ea typeface="標楷體" panose="03000509000000000000" pitchFamily="65" charset="-120"/>
+                <a:cs typeface="Times New Roman" panose="02020603050405020304" pitchFamily="18" charset="0"/>
+              </a:rPr>
+              <a:t>PC </a:t>
+            </a:r>
+            <a:r>
+              <a:rPr lang="zh-TW" altLang="en-US" sz="1600" dirty="0">
+                <a:latin typeface="Times New Roman" panose="02020603050405020304" pitchFamily="18" charset="0"/>
+                <a:ea typeface="標楷體" panose="03000509000000000000" pitchFamily="65" charset="-120"/>
+                <a:cs typeface="Times New Roman" panose="02020603050405020304" pitchFamily="18" charset="0"/>
+              </a:rPr>
+              <a:t>主機記憶體</a:t>
+            </a:r>
+          </a:p>
+          <a:p>
+            <a:pPr lvl="1">
+              <a:lnSpc>
+                <a:spcPct val="150000"/>
+              </a:lnSpc>
+            </a:pPr>
+            <a:r>
+              <a:rPr lang="en-US" altLang="zh-TW" sz="1600" dirty="0">
+                <a:latin typeface="Times New Roman" panose="02020603050405020304" pitchFamily="18" charset="0"/>
+                <a:ea typeface="標楷體" panose="03000509000000000000" pitchFamily="65" charset="-120"/>
+                <a:cs typeface="Times New Roman" panose="02020603050405020304" pitchFamily="18" charset="0"/>
+              </a:rPr>
+              <a:t>PCIe Endpoint </a:t>
+            </a:r>
+            <a:r>
+              <a:rPr lang="zh-TW" altLang="en-US" sz="1600" dirty="0">
+                <a:latin typeface="Times New Roman" panose="02020603050405020304" pitchFamily="18" charset="0"/>
+                <a:ea typeface="標楷體" panose="03000509000000000000" pitchFamily="65" charset="-120"/>
+                <a:cs typeface="Times New Roman" panose="02020603050405020304" pitchFamily="18" charset="0"/>
+              </a:rPr>
+              <a:t>與傳輸架構</a:t>
+            </a:r>
+            <a:endParaRPr lang="en-US" altLang="zh-TW" sz="1600" dirty="0">
+              <a:latin typeface="Times New Roman" panose="02020603050405020304" pitchFamily="18" charset="0"/>
+              <a:ea typeface="標楷體" panose="03000509000000000000" pitchFamily="65" charset="-120"/>
+              <a:cs typeface="Times New Roman" panose="02020603050405020304" pitchFamily="18" charset="0"/>
+            </a:endParaRPr>
+          </a:p>
+          <a:p>
+            <a:pPr lvl="1">
+              <a:lnSpc>
+                <a:spcPts val="3000"/>
+              </a:lnSpc>
+            </a:pPr>
+            <a:r>
+              <a:rPr lang="zh-TW" altLang="en-US" sz="1600" dirty="0">
+                <a:latin typeface="Times New Roman" panose="02020603050405020304" pitchFamily="18" charset="0"/>
+                <a:ea typeface="標楷體" panose="03000509000000000000" pitchFamily="65" charset="-120"/>
+                <a:cs typeface="Times New Roman" panose="02020603050405020304" pitchFamily="18" charset="0"/>
+              </a:rPr>
+              <a:t>提供 </a:t>
+            </a:r>
+            <a:r>
+              <a:rPr lang="en-US" altLang="zh-TW" sz="1600" dirty="0">
+                <a:latin typeface="Times New Roman" panose="02020603050405020304" pitchFamily="18" charset="0"/>
+                <a:ea typeface="標楷體" panose="03000509000000000000" pitchFamily="65" charset="-120"/>
+                <a:cs typeface="Times New Roman" panose="02020603050405020304" pitchFamily="18" charset="0"/>
+              </a:rPr>
+              <a:t>PC </a:t>
+            </a:r>
+            <a:r>
+              <a:rPr lang="zh-TW" altLang="en-US" sz="1600" dirty="0">
+                <a:latin typeface="Times New Roman" panose="02020603050405020304" pitchFamily="18" charset="0"/>
+                <a:ea typeface="標楷體" panose="03000509000000000000" pitchFamily="65" charset="-120"/>
+                <a:cs typeface="Times New Roman" panose="02020603050405020304" pitchFamily="18" charset="0"/>
+              </a:rPr>
+              <a:t>端 </a:t>
+            </a:r>
+            <a:r>
+              <a:rPr lang="en-US" altLang="zh-TW" sz="1600" dirty="0">
+                <a:latin typeface="Times New Roman" panose="02020603050405020304" pitchFamily="18" charset="0"/>
+                <a:ea typeface="標楷體" panose="03000509000000000000" pitchFamily="65" charset="-120"/>
+                <a:cs typeface="Times New Roman" panose="02020603050405020304" pitchFamily="18" charset="0"/>
+              </a:rPr>
+              <a:t>Linux Driver</a:t>
+            </a:r>
+          </a:p>
+          <a:p>
+            <a:pPr>
+              <a:lnSpc>
+                <a:spcPts val="3000"/>
+              </a:lnSpc>
+            </a:pPr>
+            <a:r>
+              <a:rPr lang="zh-TW" altLang="en-US" sz="2000" dirty="0">
+                <a:latin typeface="Times New Roman" panose="02020603050405020304" pitchFamily="18" charset="0"/>
+                <a:ea typeface="標楷體" panose="03000509000000000000" pitchFamily="65" charset="-120"/>
+                <a:cs typeface="Times New Roman" panose="02020603050405020304" pitchFamily="18" charset="0"/>
+              </a:rPr>
+              <a:t>對 </a:t>
+            </a:r>
+            <a:r>
+              <a:rPr lang="en-US" altLang="zh-TW" sz="2000" dirty="0">
+                <a:latin typeface="Times New Roman" panose="02020603050405020304" pitchFamily="18" charset="0"/>
+                <a:ea typeface="標楷體" panose="03000509000000000000" pitchFamily="65" charset="-120"/>
+                <a:cs typeface="Times New Roman" panose="02020603050405020304" pitchFamily="18" charset="0"/>
+              </a:rPr>
+              <a:t>FPGA </a:t>
+            </a:r>
+            <a:r>
+              <a:rPr lang="zh-TW" altLang="en-US" sz="2000" dirty="0">
+                <a:latin typeface="Times New Roman" panose="02020603050405020304" pitchFamily="18" charset="0"/>
+                <a:ea typeface="標楷體" panose="03000509000000000000" pitchFamily="65" charset="-120"/>
+                <a:cs typeface="Times New Roman" panose="02020603050405020304" pitchFamily="18" charset="0"/>
+              </a:rPr>
+              <a:t>擷取卡的幫助</a:t>
+            </a:r>
+          </a:p>
+          <a:p>
+            <a:pPr lvl="1">
+              <a:lnSpc>
+                <a:spcPts val="3000"/>
+              </a:lnSpc>
+            </a:pPr>
+            <a:r>
+              <a:rPr lang="zh-TW" altLang="en-US" sz="1600" dirty="0">
+                <a:solidFill>
+                  <a:schemeClr val="tx1"/>
+                </a:solidFill>
+                <a:latin typeface="Times New Roman" panose="02020603050405020304" pitchFamily="18" charset="0"/>
+                <a:ea typeface="標楷體" panose="03000509000000000000" pitchFamily="65" charset="-120"/>
+                <a:cs typeface="Times New Roman" panose="02020603050405020304" pitchFamily="18" charset="0"/>
+              </a:rPr>
+              <a:t>可將研究重點集中在 </a:t>
+            </a:r>
+            <a:r>
+              <a:rPr lang="en-US" altLang="zh-TW" sz="1600" dirty="0">
+                <a:solidFill>
+                  <a:schemeClr val="tx1"/>
+                </a:solidFill>
+                <a:latin typeface="Times New Roman" panose="02020603050405020304" pitchFamily="18" charset="0"/>
+                <a:ea typeface="標楷體" panose="03000509000000000000" pitchFamily="65" charset="-120"/>
+                <a:cs typeface="Times New Roman" panose="02020603050405020304" pitchFamily="18" charset="0"/>
+              </a:rPr>
+              <a:t>HDMI </a:t>
+            </a:r>
+            <a:r>
+              <a:rPr lang="zh-TW" altLang="en-US" sz="1600" dirty="0">
+                <a:solidFill>
+                  <a:schemeClr val="tx1"/>
+                </a:solidFill>
+                <a:latin typeface="Times New Roman" panose="02020603050405020304" pitchFamily="18" charset="0"/>
+                <a:ea typeface="標楷體" panose="03000509000000000000" pitchFamily="65" charset="-120"/>
+                <a:cs typeface="Times New Roman" panose="02020603050405020304" pitchFamily="18" charset="0"/>
+              </a:rPr>
+              <a:t>影像串流與 </a:t>
+            </a:r>
+            <a:r>
+              <a:rPr lang="en-US" altLang="zh-TW" sz="1600" dirty="0">
+                <a:solidFill>
+                  <a:schemeClr val="tx1"/>
+                </a:solidFill>
+                <a:latin typeface="Times New Roman" panose="02020603050405020304" pitchFamily="18" charset="0"/>
+                <a:ea typeface="標楷體" panose="03000509000000000000" pitchFamily="65" charset="-120"/>
+                <a:cs typeface="Times New Roman" panose="02020603050405020304" pitchFamily="18" charset="0"/>
+              </a:rPr>
+              <a:t>DMA </a:t>
+            </a:r>
+            <a:r>
+              <a:rPr lang="zh-TW" altLang="en-US" sz="1600" dirty="0">
+                <a:solidFill>
+                  <a:schemeClr val="tx1"/>
+                </a:solidFill>
+                <a:latin typeface="Times New Roman" panose="02020603050405020304" pitchFamily="18" charset="0"/>
+                <a:ea typeface="標楷體" panose="03000509000000000000" pitchFamily="65" charset="-120"/>
+                <a:cs typeface="Times New Roman" panose="02020603050405020304" pitchFamily="18" charset="0"/>
+              </a:rPr>
+              <a:t>的整合</a:t>
+            </a:r>
+          </a:p>
+          <a:p>
+            <a:pPr lvl="1">
+              <a:lnSpc>
+                <a:spcPts val="3000"/>
+              </a:lnSpc>
+            </a:pPr>
+            <a:r>
+              <a:rPr lang="zh-TW" altLang="en-US" sz="1600" dirty="0">
+                <a:solidFill>
+                  <a:schemeClr val="tx1"/>
+                </a:solidFill>
+                <a:latin typeface="Times New Roman" panose="02020603050405020304" pitchFamily="18" charset="0"/>
+                <a:ea typeface="標楷體" panose="03000509000000000000" pitchFamily="65" charset="-120"/>
+                <a:cs typeface="Times New Roman" panose="02020603050405020304" pitchFamily="18" charset="0"/>
+              </a:rPr>
+              <a:t>可參考既有 </a:t>
+            </a:r>
+            <a:r>
+              <a:rPr lang="en-US" altLang="zh-TW" sz="1600" dirty="0">
+                <a:solidFill>
+                  <a:schemeClr val="tx1"/>
+                </a:solidFill>
+                <a:latin typeface="Times New Roman" panose="02020603050405020304" pitchFamily="18" charset="0"/>
+                <a:ea typeface="標楷體" panose="03000509000000000000" pitchFamily="65" charset="-120"/>
+                <a:cs typeface="Times New Roman" panose="02020603050405020304" pitchFamily="18" charset="0"/>
+              </a:rPr>
+              <a:t>Linux Driver</a:t>
+            </a:r>
+            <a:r>
+              <a:rPr lang="zh-TW" altLang="en-US" sz="1600" dirty="0">
+                <a:solidFill>
+                  <a:schemeClr val="tx1"/>
+                </a:solidFill>
+                <a:latin typeface="Times New Roman" panose="02020603050405020304" pitchFamily="18" charset="0"/>
+                <a:ea typeface="標楷體" panose="03000509000000000000" pitchFamily="65" charset="-120"/>
+                <a:cs typeface="Times New Roman" panose="02020603050405020304" pitchFamily="18" charset="0"/>
+              </a:rPr>
+              <a:t>，</a:t>
+            </a:r>
+            <a:r>
+              <a:rPr lang="zh-TW" altLang="en-US" sz="1600" dirty="0">
+                <a:latin typeface="Times New Roman" panose="02020603050405020304" pitchFamily="18" charset="0"/>
+                <a:ea typeface="標楷體" panose="03000509000000000000" pitchFamily="65" charset="-120"/>
+                <a:cs typeface="Times New Roman" panose="02020603050405020304" pitchFamily="18" charset="0"/>
+              </a:rPr>
+              <a:t>有助於降低 </a:t>
+            </a:r>
+            <a:r>
+              <a:rPr lang="en-US" altLang="zh-TW" sz="1600" dirty="0">
+                <a:solidFill>
+                  <a:schemeClr val="tx1"/>
+                </a:solidFill>
+                <a:latin typeface="Times New Roman" panose="02020603050405020304" pitchFamily="18" charset="0"/>
+                <a:ea typeface="標楷體" panose="03000509000000000000" pitchFamily="65" charset="-120"/>
+                <a:cs typeface="Times New Roman" panose="02020603050405020304" pitchFamily="18" charset="0"/>
+              </a:rPr>
+              <a:t>PC </a:t>
+            </a:r>
+            <a:r>
+              <a:rPr lang="zh-TW" altLang="en-US" sz="1600" dirty="0">
+                <a:solidFill>
+                  <a:schemeClr val="tx1"/>
+                </a:solidFill>
+                <a:latin typeface="Times New Roman" panose="02020603050405020304" pitchFamily="18" charset="0"/>
+                <a:ea typeface="標楷體" panose="03000509000000000000" pitchFamily="65" charset="-120"/>
+                <a:cs typeface="Times New Roman" panose="02020603050405020304" pitchFamily="18" charset="0"/>
+              </a:rPr>
+              <a:t>端驅動程式的開發負擔</a:t>
+            </a:r>
+            <a:endParaRPr lang="en-US" altLang="zh-TW" sz="1600" dirty="0">
+              <a:solidFill>
+                <a:schemeClr val="tx1"/>
+              </a:solidFill>
+              <a:latin typeface="Times New Roman" panose="02020603050405020304" pitchFamily="18" charset="0"/>
+              <a:ea typeface="標楷體" panose="03000509000000000000" pitchFamily="65" charset="-120"/>
+              <a:cs typeface="Times New Roman" panose="02020603050405020304" pitchFamily="18" charset="0"/>
+            </a:endParaRPr>
+          </a:p>
+          <a:p>
+            <a:pPr>
+              <a:lnSpc>
+                <a:spcPts val="3000"/>
+              </a:lnSpc>
+            </a:pPr>
+            <a:endParaRPr lang="en-US" altLang="zh-TW" sz="2000" dirty="0">
+              <a:latin typeface="Times New Roman" panose="02020603050405020304" pitchFamily="18" charset="0"/>
+              <a:ea typeface="標楷體" panose="03000509000000000000" pitchFamily="65" charset="-120"/>
+              <a:cs typeface="Times New Roman" panose="02020603050405020304" pitchFamily="18" charset="0"/>
+            </a:endParaRPr>
+          </a:p>
+          <a:p>
+            <a:pPr>
+              <a:lnSpc>
+                <a:spcPts val="3000"/>
+              </a:lnSpc>
+            </a:pPr>
+            <a:endParaRPr lang="en-US" altLang="zh-TW" sz="2000" dirty="0">
+              <a:latin typeface="Times New Roman" panose="02020603050405020304" pitchFamily="18" charset="0"/>
+              <a:ea typeface="標楷體" panose="03000509000000000000" pitchFamily="65" charset="-120"/>
+              <a:cs typeface="Times New Roman" panose="02020603050405020304" pitchFamily="18" charset="0"/>
+            </a:endParaRPr>
+          </a:p>
+        </p:txBody>
+      </p:sp>
+      <p:sp>
+        <p:nvSpPr>
+          <p:cNvPr id="13" name="文字方塊 12">
+            <a:extLst>
+              <a:ext uri="{FF2B5EF4-FFF2-40B4-BE49-F238E27FC236}">
+                <a16:creationId xmlns:a16="http://schemas.microsoft.com/office/drawing/2014/main" id="{17EF7B95-B380-F6CA-F173-DA760D763252}"/>
+              </a:ext>
+            </a:extLst>
+          </p:cNvPr>
+          <p:cNvSpPr txBox="1"/>
+          <p:nvPr/>
+        </p:nvSpPr>
+        <p:spPr>
+          <a:xfrm>
+            <a:off x="1787236" y="6384072"/>
+            <a:ext cx="5802283" cy="276999"/>
+          </a:xfrm>
+          <a:prstGeom prst="rect">
+            <a:avLst/>
+          </a:prstGeom>
+          <a:noFill/>
+        </p:spPr>
+        <p:txBody>
+          <a:bodyPr wrap="square">
+            <a:spAutoFit/>
+          </a:bodyPr>
+          <a:lstStyle/>
+          <a:p>
+            <a:r>
+              <a:rPr lang="en-US" altLang="zh-TW" sz="1200" dirty="0">
+                <a:latin typeface="Times New Roman" panose="02020603050405020304" pitchFamily="18" charset="0"/>
+                <a:cs typeface="Times New Roman" panose="02020603050405020304" pitchFamily="18" charset="0"/>
+              </a:rPr>
+              <a:t>[2] </a:t>
+            </a:r>
+            <a:r>
+              <a:rPr lang="zh-TW" altLang="en-US" sz="1200" dirty="0">
+                <a:latin typeface="Times New Roman" panose="02020603050405020304" pitchFamily="18" charset="0"/>
+                <a:cs typeface="Times New Roman" panose="02020603050405020304" pitchFamily="18" charset="0"/>
+              </a:rPr>
+              <a:t>https://github.com/enjoy-digital/litepcie</a:t>
+            </a:r>
+          </a:p>
+        </p:txBody>
+      </p:sp>
+      <p:pic>
+        <p:nvPicPr>
+          <p:cNvPr id="22" name="圖片 21">
+            <a:extLst>
+              <a:ext uri="{FF2B5EF4-FFF2-40B4-BE49-F238E27FC236}">
+                <a16:creationId xmlns:a16="http://schemas.microsoft.com/office/drawing/2014/main" id="{7C9DEB2B-F85F-1C98-F138-BF7DBF812B04}"/>
+              </a:ext>
+            </a:extLst>
+          </p:cNvPr>
+          <p:cNvPicPr>
+            <a:picLocks noChangeAspect="1"/>
+          </p:cNvPicPr>
+          <p:nvPr/>
+        </p:nvPicPr>
+        <p:blipFill>
+          <a:blip r:embed="rId3"/>
+          <a:stretch>
+            <a:fillRect/>
+          </a:stretch>
+        </p:blipFill>
+        <p:spPr>
+          <a:xfrm>
+            <a:off x="609602" y="4410680"/>
+            <a:ext cx="8686796" cy="962180"/>
+          </a:xfrm>
+          <a:prstGeom prst="rect">
+            <a:avLst/>
+          </a:prstGeom>
+        </p:spPr>
+      </p:pic>
+    </p:spTree>
+    <p:extLst>
+      <p:ext uri="{BB962C8B-B14F-4D97-AF65-F5344CB8AC3E}">
+        <p14:creationId xmlns:p14="http://schemas.microsoft.com/office/powerpoint/2010/main" val="2696284170"/>
+      </p:ext>
+    </p:extLst>
+  </p:cSld>
+  <p:clrMapOvr>
+    <a:masterClrMapping/>
+  </p:clrMapOvr>
+</p:sld>
+</file>
+
+<file path=ppt/slides/slide3.xml><?xml version="1.0" encoding="utf-8"?>
+<p:sld xmlns:a="http://schemas.openxmlformats.org/drawingml/2006/main" xmlns:r="http://schemas.openxmlformats.org/officeDocument/2006/relationships" xmlns:p="http://schemas.openxmlformats.org/presentationml/2006/main">
+  <p:cSld>
+    <p:spTree>
+      <p:nvGrpSpPr>
+        <p:cNvPr id="1" name="">
+          <a:extLst>
+            <a:ext uri="{FF2B5EF4-FFF2-40B4-BE49-F238E27FC236}">
+              <a16:creationId xmlns:a16="http://schemas.microsoft.com/office/drawing/2014/main" id="{C25E9AAA-7E36-1E17-83F9-FD3A18A28BE9}"/>
+            </a:ext>
+          </a:extLst>
+        </p:cNvPr>
+        <p:cNvGrpSpPr/>
+        <p:nvPr/>
+      </p:nvGrpSpPr>
+      <p:grpSpPr>
+        <a:xfrm>
+          <a:off x="0" y="0"/>
+          <a:ext cx="0" cy="0"/>
+          <a:chOff x="0" y="0"/>
+          <a:chExt cx="0" cy="0"/>
+        </a:xfrm>
+      </p:grpSpPr>
+      <p:sp>
+        <p:nvSpPr>
+          <p:cNvPr id="15" name="標題 1">
+            <a:extLst>
+              <a:ext uri="{FF2B5EF4-FFF2-40B4-BE49-F238E27FC236}">
+                <a16:creationId xmlns:a16="http://schemas.microsoft.com/office/drawing/2014/main" id="{142C8726-E890-9988-40FC-8984FDA21FEE}"/>
+              </a:ext>
+            </a:extLst>
+          </p:cNvPr>
+          <p:cNvSpPr>
+            <a:spLocks noGrp="1"/>
+          </p:cNvSpPr>
+          <p:nvPr>
+            <p:ph type="title"/>
+          </p:nvPr>
+        </p:nvSpPr>
+        <p:spPr>
+          <a:xfrm>
+            <a:off x="609602" y="609600"/>
+            <a:ext cx="8077200" cy="533400"/>
+          </a:xfrm>
+          <a:ln>
+            <a:noFill/>
+          </a:ln>
+        </p:spPr>
+        <p:txBody>
+          <a:bodyPr/>
+          <a:lstStyle/>
+          <a:p>
+            <a:pPr algn="l" fontAlgn="t"/>
+            <a:r>
+              <a:rPr lang="zh-TW" altLang="en-US" dirty="0">
+                <a:latin typeface="Times New Roman" panose="02020603050405020304" pitchFamily="18" charset="0"/>
+                <a:ea typeface="標楷體" panose="03000509000000000000" pitchFamily="65" charset="-120"/>
+                <a:cs typeface="Times New Roman" panose="02020603050405020304" pitchFamily="18" charset="0"/>
+              </a:rPr>
+              <a:t>本次進度</a:t>
+            </a:r>
+            <a:r>
+              <a:rPr lang="en-US" altLang="zh-TW" dirty="0">
+                <a:latin typeface="Times New Roman" panose="02020603050405020304" pitchFamily="18" charset="0"/>
+                <a:ea typeface="標楷體" panose="03000509000000000000" pitchFamily="65" charset="-120"/>
+                <a:cs typeface="Times New Roman" panose="02020603050405020304" pitchFamily="18" charset="0"/>
+              </a:rPr>
+              <a:t>: Xilinx</a:t>
+            </a:r>
+            <a:r>
+              <a:rPr lang="zh-TW" altLang="en-US" dirty="0">
+                <a:latin typeface="Times New Roman" panose="02020603050405020304" pitchFamily="18" charset="0"/>
+                <a:ea typeface="標楷體" panose="03000509000000000000" pitchFamily="65" charset="-120"/>
+                <a:cs typeface="Times New Roman" panose="02020603050405020304" pitchFamily="18" charset="0"/>
+              </a:rPr>
+              <a:t> </a:t>
+            </a:r>
+            <a:r>
+              <a:rPr lang="en-US" altLang="zh-TW" dirty="0">
+                <a:latin typeface="Times New Roman" panose="02020603050405020304" pitchFamily="18" charset="0"/>
+                <a:ea typeface="標楷體" panose="03000509000000000000" pitchFamily="65" charset="-120"/>
+                <a:cs typeface="Times New Roman" panose="02020603050405020304" pitchFamily="18" charset="0"/>
+              </a:rPr>
+              <a:t>/</a:t>
+            </a:r>
+            <a:r>
+              <a:rPr lang="zh-TW" altLang="en-US" dirty="0">
+                <a:latin typeface="Times New Roman" panose="02020603050405020304" pitchFamily="18" charset="0"/>
+                <a:ea typeface="標楷體" panose="03000509000000000000" pitchFamily="65" charset="-120"/>
+                <a:cs typeface="Times New Roman" panose="02020603050405020304" pitchFamily="18" charset="0"/>
+              </a:rPr>
+              <a:t> </a:t>
+            </a:r>
+            <a:r>
+              <a:rPr lang="en-US" altLang="zh-TW" dirty="0" err="1">
+                <a:latin typeface="Times New Roman" panose="02020603050405020304" pitchFamily="18" charset="0"/>
+                <a:ea typeface="標楷體" panose="03000509000000000000" pitchFamily="65" charset="-120"/>
+                <a:cs typeface="Times New Roman" panose="02020603050405020304" pitchFamily="18" charset="0"/>
+              </a:rPr>
+              <a:t>DMA_IP_Drivers</a:t>
+            </a:r>
+            <a:endParaRPr lang="zh-TW" altLang="en-US" dirty="0">
+              <a:latin typeface="Times New Roman" panose="02020603050405020304" pitchFamily="18" charset="0"/>
+              <a:ea typeface="標楷體" panose="03000509000000000000" pitchFamily="65" charset="-120"/>
+              <a:cs typeface="Times New Roman" panose="02020603050405020304" pitchFamily="18" charset="0"/>
+            </a:endParaRPr>
+          </a:p>
+        </p:txBody>
+      </p:sp>
+      <p:sp>
+        <p:nvSpPr>
+          <p:cNvPr id="2" name="文字版面配置區 6">
+            <a:extLst>
+              <a:ext uri="{FF2B5EF4-FFF2-40B4-BE49-F238E27FC236}">
+                <a16:creationId xmlns:a16="http://schemas.microsoft.com/office/drawing/2014/main" id="{D929304B-5341-8BBF-E71F-AF5F2FE7268A}"/>
+              </a:ext>
+            </a:extLst>
+          </p:cNvPr>
+          <p:cNvSpPr txBox="1"/>
+          <p:nvPr/>
+        </p:nvSpPr>
+        <p:spPr>
+          <a:xfrm>
+            <a:off x="609602" y="935857"/>
+            <a:ext cx="8686796" cy="4700685"/>
+          </a:xfrm>
+          <a:prstGeom prst="rect">
+            <a:avLst/>
+          </a:prstGeom>
+          <a:noFill/>
+          <a:ln>
+            <a:noFill/>
+          </a:ln>
+        </p:spPr>
+        <p:txBody>
+          <a:bodyPr spcFirstLastPara="1" wrap="square" lIns="91425" tIns="45700" rIns="91425" bIns="45700" anchor="t" anchorCtr="0">
+            <a:noAutofit/>
+          </a:bodyPr>
+          <a:lstStyle>
+            <a:defPPr marR="0" lvl="0" algn="l" rtl="0">
+              <a:lnSpc>
+                <a:spcPct val="100000"/>
+              </a:lnSpc>
+              <a:spcBef>
+                <a:spcPts val="0"/>
+              </a:spcBef>
+              <a:spcAft>
+                <a:spcPts val="0"/>
+              </a:spcAft>
+            </a:defPPr>
+            <a:lvl1pPr marL="457200" marR="0" lvl="0" indent="-406400" algn="l" rtl="0">
+              <a:lnSpc>
+                <a:spcPct val="100000"/>
+              </a:lnSpc>
+              <a:spcBef>
+                <a:spcPts val="560"/>
+              </a:spcBef>
+              <a:spcAft>
+                <a:spcPts val="0"/>
+              </a:spcAft>
+              <a:buClr>
+                <a:schemeClr val="accent2"/>
+              </a:buClr>
+              <a:buSzPts val="2800"/>
+              <a:buFont typeface="Noto Sans Symbols"/>
+              <a:buChar char="❖"/>
+              <a:defRPr sz="2800" b="0" i="0" u="none" strike="noStrike" cap="none">
+                <a:solidFill>
+                  <a:schemeClr val="dk1"/>
+                </a:solidFill>
+                <a:latin typeface="Times New Roman"/>
+                <a:ea typeface="Times New Roman"/>
+                <a:cs typeface="Times New Roman"/>
+                <a:sym typeface="Times New Roman"/>
+              </a:defRPr>
+            </a:lvl1pPr>
+            <a:lvl2pPr marL="914400" marR="0" lvl="1" indent="-381000" algn="l" rtl="0">
+              <a:lnSpc>
+                <a:spcPct val="100000"/>
+              </a:lnSpc>
+              <a:spcBef>
+                <a:spcPts val="480"/>
+              </a:spcBef>
+              <a:spcAft>
+                <a:spcPts val="0"/>
+              </a:spcAft>
+              <a:buClr>
+                <a:srgbClr val="FF5050"/>
+              </a:buClr>
+              <a:buSzPts val="2400"/>
+              <a:buFont typeface="Noto Sans Symbols"/>
+              <a:buChar char="▪"/>
+              <a:defRPr sz="2400" b="0" i="0" u="none" strike="noStrike" cap="none">
+                <a:solidFill>
+                  <a:schemeClr val="dk1"/>
+                </a:solidFill>
+                <a:latin typeface="Times New Roman"/>
+                <a:ea typeface="Times New Roman"/>
+                <a:cs typeface="Times New Roman"/>
+                <a:sym typeface="Times New Roman"/>
+              </a:defRPr>
+            </a:lvl2pPr>
+            <a:lvl3pPr marL="1371600" marR="0" lvl="2" indent="-355600" algn="l" rtl="0">
+              <a:lnSpc>
+                <a:spcPct val="100000"/>
+              </a:lnSpc>
+              <a:spcBef>
+                <a:spcPts val="400"/>
+              </a:spcBef>
+              <a:spcAft>
+                <a:spcPts val="0"/>
+              </a:spcAft>
+              <a:buClr>
+                <a:srgbClr val="6699FF"/>
+              </a:buClr>
+              <a:buSzPts val="2000"/>
+              <a:buFont typeface="Times New Roman"/>
+              <a:buChar char="•"/>
+              <a:defRPr sz="2000" b="0" i="0" u="none" strike="noStrike" cap="none">
+                <a:solidFill>
+                  <a:schemeClr val="dk1"/>
+                </a:solidFill>
+                <a:latin typeface="Times New Roman"/>
+                <a:ea typeface="Times New Roman"/>
+                <a:cs typeface="Times New Roman"/>
+                <a:sym typeface="Times New Roman"/>
+              </a:defRPr>
+            </a:lvl3pPr>
+            <a:lvl4pPr marL="1828800" marR="0" lvl="3" indent="-355600" algn="l" rtl="0">
+              <a:lnSpc>
+                <a:spcPct val="100000"/>
+              </a:lnSpc>
+              <a:spcBef>
+                <a:spcPts val="400"/>
+              </a:spcBef>
+              <a:spcAft>
+                <a:spcPts val="0"/>
+              </a:spcAft>
+              <a:buClr>
+                <a:srgbClr val="FF5050"/>
+              </a:buClr>
+              <a:buSzPts val="2000"/>
+              <a:buFont typeface="Times New Roman"/>
+              <a:buChar char="o"/>
+              <a:defRPr sz="2000" b="0" i="0" u="none" strike="noStrike" cap="none">
+                <a:solidFill>
+                  <a:schemeClr val="dk1"/>
+                </a:solidFill>
+                <a:latin typeface="Times New Roman"/>
+                <a:ea typeface="Times New Roman"/>
+                <a:cs typeface="Times New Roman"/>
+                <a:sym typeface="Times New Roman"/>
+              </a:defRPr>
+            </a:lvl4pPr>
+            <a:lvl5pPr marL="2286000" marR="0" lvl="4" indent="-355600" algn="l" rtl="0">
+              <a:lnSpc>
+                <a:spcPct val="100000"/>
+              </a:lnSpc>
+              <a:spcBef>
+                <a:spcPts val="400"/>
+              </a:spcBef>
+              <a:spcAft>
+                <a:spcPts val="0"/>
+              </a:spcAft>
+              <a:buClr>
+                <a:srgbClr val="FF5050"/>
+              </a:buClr>
+              <a:buSzPts val="2000"/>
+              <a:buFont typeface="Times New Roman"/>
+              <a:buChar char="o"/>
+              <a:defRPr sz="2000" b="0" i="0" u="none" strike="noStrike" cap="none">
+                <a:solidFill>
+                  <a:schemeClr val="dk1"/>
+                </a:solidFill>
+                <a:latin typeface="Times New Roman"/>
+                <a:ea typeface="Times New Roman"/>
+                <a:cs typeface="Times New Roman"/>
+                <a:sym typeface="Times New Roman"/>
+              </a:defRPr>
+            </a:lvl5pPr>
+            <a:lvl6pPr marL="2743200" marR="0" lvl="5" indent="-355600" algn="l" rtl="0">
+              <a:lnSpc>
+                <a:spcPct val="100000"/>
+              </a:lnSpc>
+              <a:spcBef>
+                <a:spcPts val="400"/>
+              </a:spcBef>
+              <a:spcAft>
+                <a:spcPts val="0"/>
+              </a:spcAft>
+              <a:buClr>
+                <a:srgbClr val="FF5050"/>
+              </a:buClr>
+              <a:buSzPts val="2000"/>
+              <a:buFont typeface="Times New Roman"/>
+              <a:buChar char="o"/>
+              <a:defRPr sz="2000" b="0" i="0" u="none" strike="noStrike" cap="none">
+                <a:solidFill>
+                  <a:schemeClr val="dk1"/>
+                </a:solidFill>
+                <a:latin typeface="Times New Roman"/>
+                <a:ea typeface="Times New Roman"/>
+                <a:cs typeface="Times New Roman"/>
+                <a:sym typeface="Times New Roman"/>
+              </a:defRPr>
+            </a:lvl6pPr>
+            <a:lvl7pPr marL="3200400" marR="0" lvl="6" indent="-355600" algn="l" rtl="0">
+              <a:lnSpc>
+                <a:spcPct val="100000"/>
+              </a:lnSpc>
+              <a:spcBef>
+                <a:spcPts val="400"/>
+              </a:spcBef>
+              <a:spcAft>
+                <a:spcPts val="0"/>
+              </a:spcAft>
+              <a:buClr>
+                <a:srgbClr val="FF5050"/>
+              </a:buClr>
+              <a:buSzPts val="2000"/>
+              <a:buFont typeface="Times New Roman"/>
+              <a:buChar char="o"/>
+              <a:defRPr sz="2000" b="0" i="0" u="none" strike="noStrike" cap="none">
+                <a:solidFill>
+                  <a:schemeClr val="dk1"/>
+                </a:solidFill>
+                <a:latin typeface="Times New Roman"/>
+                <a:ea typeface="Times New Roman"/>
+                <a:cs typeface="Times New Roman"/>
+                <a:sym typeface="Times New Roman"/>
+              </a:defRPr>
+            </a:lvl7pPr>
+            <a:lvl8pPr marL="3657600" marR="0" lvl="7" indent="-355600" algn="l" rtl="0">
+              <a:lnSpc>
+                <a:spcPct val="100000"/>
+              </a:lnSpc>
+              <a:spcBef>
+                <a:spcPts val="400"/>
+              </a:spcBef>
+              <a:spcAft>
+                <a:spcPts val="0"/>
+              </a:spcAft>
+              <a:buClr>
+                <a:srgbClr val="FF5050"/>
+              </a:buClr>
+              <a:buSzPts val="2000"/>
+              <a:buFont typeface="Times New Roman"/>
+              <a:buChar char="o"/>
+              <a:defRPr sz="2000" b="0" i="0" u="none" strike="noStrike" cap="none">
+                <a:solidFill>
+                  <a:schemeClr val="dk1"/>
+                </a:solidFill>
+                <a:latin typeface="Times New Roman"/>
+                <a:ea typeface="Times New Roman"/>
+                <a:cs typeface="Times New Roman"/>
+                <a:sym typeface="Times New Roman"/>
+              </a:defRPr>
+            </a:lvl8pPr>
+            <a:lvl9pPr marL="4114800" marR="0" lvl="8" indent="-355600" algn="l" rtl="0">
+              <a:lnSpc>
+                <a:spcPct val="100000"/>
+              </a:lnSpc>
+              <a:spcBef>
+                <a:spcPts val="400"/>
+              </a:spcBef>
+              <a:spcAft>
+                <a:spcPts val="0"/>
+              </a:spcAft>
+              <a:buClr>
+                <a:srgbClr val="FF5050"/>
+              </a:buClr>
+              <a:buSzPts val="2000"/>
+              <a:buFont typeface="Times New Roman"/>
+              <a:buChar char="o"/>
+              <a:defRPr sz="2000" b="0" i="0" u="none" strike="noStrike" cap="none">
+                <a:solidFill>
+                  <a:schemeClr val="dk1"/>
+                </a:solidFill>
+                <a:latin typeface="Times New Roman"/>
+                <a:ea typeface="Times New Roman"/>
+                <a:cs typeface="Times New Roman"/>
+                <a:sym typeface="Times New Roman"/>
+              </a:defRPr>
+            </a:lvl9pPr>
+          </a:lstStyle>
+          <a:p>
+            <a:pPr>
+              <a:lnSpc>
+                <a:spcPct val="150000"/>
+              </a:lnSpc>
+            </a:pPr>
+            <a:r>
+              <a:rPr lang="zh-TW" altLang="en-US" sz="2000" dirty="0">
+                <a:solidFill>
+                  <a:schemeClr val="tx1"/>
+                </a:solidFill>
+                <a:latin typeface="Times New Roman" panose="02020603050405020304" pitchFamily="18" charset="0"/>
+                <a:ea typeface="標楷體" panose="03000509000000000000" pitchFamily="65" charset="-120"/>
+                <a:cs typeface="Times New Roman" panose="02020603050405020304" pitchFamily="18" charset="0"/>
+              </a:rPr>
+              <a:t>定位</a:t>
+            </a:r>
+            <a:endParaRPr lang="en-US" altLang="zh-TW" sz="2000" dirty="0">
+              <a:solidFill>
+                <a:schemeClr val="tx1"/>
+              </a:solidFill>
+              <a:latin typeface="Times New Roman" panose="02020603050405020304" pitchFamily="18" charset="0"/>
+              <a:ea typeface="標楷體" panose="03000509000000000000" pitchFamily="65" charset="-120"/>
+              <a:cs typeface="Times New Roman" panose="02020603050405020304" pitchFamily="18" charset="0"/>
+            </a:endParaRPr>
+          </a:p>
+          <a:p>
+            <a:pPr lvl="1">
+              <a:lnSpc>
+                <a:spcPts val="3000"/>
+              </a:lnSpc>
+            </a:pPr>
+            <a:r>
+              <a:rPr lang="zh-TW" altLang="en-US" sz="1600" dirty="0">
+                <a:latin typeface="Times New Roman" panose="02020603050405020304" pitchFamily="18" charset="0"/>
+                <a:ea typeface="標楷體" panose="03000509000000000000" pitchFamily="65" charset="-120"/>
+                <a:cs typeface="Times New Roman" panose="02020603050405020304" pitchFamily="18" charset="0"/>
+              </a:rPr>
+              <a:t>由 </a:t>
+            </a:r>
+            <a:r>
+              <a:rPr lang="en-US" altLang="zh-TW" sz="1600" dirty="0">
+                <a:latin typeface="Times New Roman" panose="02020603050405020304" pitchFamily="18" charset="0"/>
+                <a:ea typeface="標楷體" panose="03000509000000000000" pitchFamily="65" charset="-120"/>
+                <a:cs typeface="Times New Roman" panose="02020603050405020304" pitchFamily="18" charset="0"/>
+              </a:rPr>
+              <a:t>AMD/Xilinx </a:t>
+            </a:r>
+            <a:r>
+              <a:rPr lang="zh-TW" altLang="en-US" sz="1600" dirty="0">
+                <a:latin typeface="Times New Roman" panose="02020603050405020304" pitchFamily="18" charset="0"/>
+                <a:ea typeface="標楷體" panose="03000509000000000000" pitchFamily="65" charset="-120"/>
+                <a:cs typeface="Times New Roman" panose="02020603050405020304" pitchFamily="18" charset="0"/>
+              </a:rPr>
+              <a:t>提供的 </a:t>
+            </a:r>
+            <a:r>
+              <a:rPr lang="en-US" altLang="zh-TW" sz="1600" dirty="0">
+                <a:latin typeface="Times New Roman" panose="02020603050405020304" pitchFamily="18" charset="0"/>
+                <a:ea typeface="標楷體" panose="03000509000000000000" pitchFamily="65" charset="-120"/>
+                <a:cs typeface="Times New Roman" panose="02020603050405020304" pitchFamily="18" charset="0"/>
+              </a:rPr>
+              <a:t>PCIe DMA </a:t>
+            </a:r>
+            <a:r>
+              <a:rPr lang="zh-TW" altLang="en-US" sz="1600" dirty="0">
+                <a:latin typeface="Times New Roman" panose="02020603050405020304" pitchFamily="18" charset="0"/>
+                <a:ea typeface="標楷體" panose="03000509000000000000" pitchFamily="65" charset="-120"/>
+                <a:cs typeface="Times New Roman" panose="02020603050405020304" pitchFamily="18" charset="0"/>
+              </a:rPr>
+              <a:t>驅動程式與軟體工具集合，主要負責 </a:t>
+            </a:r>
+            <a:r>
+              <a:rPr lang="en-US" altLang="zh-TW" sz="1600" dirty="0">
+                <a:latin typeface="Times New Roman" panose="02020603050405020304" pitchFamily="18" charset="0"/>
+                <a:ea typeface="標楷體" panose="03000509000000000000" pitchFamily="65" charset="-120"/>
+                <a:cs typeface="Times New Roman" panose="02020603050405020304" pitchFamily="18" charset="0"/>
+              </a:rPr>
+              <a:t>PC </a:t>
+            </a:r>
+            <a:r>
+              <a:rPr lang="zh-TW" altLang="en-US" sz="1600" dirty="0">
+                <a:latin typeface="Times New Roman" panose="02020603050405020304" pitchFamily="18" charset="0"/>
+                <a:ea typeface="標楷體" panose="03000509000000000000" pitchFamily="65" charset="-120"/>
+                <a:cs typeface="Times New Roman" panose="02020603050405020304" pitchFamily="18" charset="0"/>
+              </a:rPr>
+              <a:t>端與 </a:t>
+            </a:r>
+            <a:r>
+              <a:rPr lang="en-US" altLang="zh-TW" sz="1600" dirty="0">
+                <a:latin typeface="Times New Roman" panose="02020603050405020304" pitchFamily="18" charset="0"/>
+                <a:ea typeface="標楷體" panose="03000509000000000000" pitchFamily="65" charset="-120"/>
+                <a:cs typeface="Times New Roman" panose="02020603050405020304" pitchFamily="18" charset="0"/>
+              </a:rPr>
+              <a:t>FPGA PCIe DMA IP </a:t>
+            </a:r>
+            <a:r>
+              <a:rPr lang="zh-TW" altLang="en-US" sz="1600" dirty="0">
+                <a:latin typeface="Times New Roman" panose="02020603050405020304" pitchFamily="18" charset="0"/>
+                <a:ea typeface="標楷體" panose="03000509000000000000" pitchFamily="65" charset="-120"/>
+                <a:cs typeface="Times New Roman" panose="02020603050405020304" pitchFamily="18" charset="0"/>
+              </a:rPr>
+              <a:t>的溝通，讓主機能操作裝置、管理 </a:t>
+            </a:r>
+            <a:r>
+              <a:rPr lang="en-US" altLang="zh-TW" sz="1600" dirty="0">
+                <a:latin typeface="Times New Roman" panose="02020603050405020304" pitchFamily="18" charset="0"/>
+                <a:ea typeface="標楷體" panose="03000509000000000000" pitchFamily="65" charset="-120"/>
+                <a:cs typeface="Times New Roman" panose="02020603050405020304" pitchFamily="18" charset="0"/>
+              </a:rPr>
+              <a:t>DMA </a:t>
+            </a:r>
+            <a:r>
+              <a:rPr lang="zh-TW" altLang="en-US" sz="1600" dirty="0">
+                <a:latin typeface="Times New Roman" panose="02020603050405020304" pitchFamily="18" charset="0"/>
+                <a:ea typeface="標楷體" panose="03000509000000000000" pitchFamily="65" charset="-120"/>
+                <a:cs typeface="Times New Roman" panose="02020603050405020304" pitchFamily="18" charset="0"/>
+              </a:rPr>
+              <a:t>傳輸並測試資料收發</a:t>
+            </a:r>
+            <a:endParaRPr lang="en-US" altLang="zh-TW" sz="1600" dirty="0">
+              <a:latin typeface="Times New Roman" panose="02020603050405020304" pitchFamily="18" charset="0"/>
+              <a:ea typeface="標楷體" panose="03000509000000000000" pitchFamily="65" charset="-120"/>
+              <a:cs typeface="Times New Roman" panose="02020603050405020304" pitchFamily="18" charset="0"/>
+            </a:endParaRPr>
+          </a:p>
+          <a:p>
+            <a:pPr>
+              <a:lnSpc>
+                <a:spcPct val="150000"/>
+              </a:lnSpc>
+            </a:pPr>
+            <a:r>
+              <a:rPr lang="zh-TW" altLang="en-US" sz="2000" dirty="0">
+                <a:solidFill>
+                  <a:schemeClr val="tx1"/>
+                </a:solidFill>
+                <a:latin typeface="Times New Roman" panose="02020603050405020304" pitchFamily="18" charset="0"/>
+                <a:ea typeface="標楷體" panose="03000509000000000000" pitchFamily="65" charset="-120"/>
+                <a:cs typeface="Times New Roman" panose="02020603050405020304" pitchFamily="18" charset="0"/>
+              </a:rPr>
+              <a:t>功能</a:t>
+            </a:r>
+            <a:endParaRPr lang="en-US" altLang="zh-TW" sz="2000" dirty="0">
+              <a:solidFill>
+                <a:schemeClr val="tx1"/>
+              </a:solidFill>
+              <a:latin typeface="Times New Roman" panose="02020603050405020304" pitchFamily="18" charset="0"/>
+              <a:ea typeface="標楷體" panose="03000509000000000000" pitchFamily="65" charset="-120"/>
+              <a:cs typeface="Times New Roman" panose="02020603050405020304" pitchFamily="18" charset="0"/>
+            </a:endParaRPr>
+          </a:p>
+          <a:p>
+            <a:pPr lvl="1">
+              <a:lnSpc>
+                <a:spcPts val="3000"/>
+              </a:lnSpc>
+            </a:pPr>
+            <a:r>
+              <a:rPr lang="zh-TW" altLang="en-US" sz="1600" dirty="0">
+                <a:latin typeface="Times New Roman" panose="02020603050405020304" pitchFamily="18" charset="0"/>
+                <a:ea typeface="標楷體" panose="03000509000000000000" pitchFamily="65" charset="-120"/>
+                <a:cs typeface="Times New Roman" panose="02020603050405020304" pitchFamily="18" charset="0"/>
+              </a:rPr>
+              <a:t>提供多種的 </a:t>
+            </a:r>
+            <a:r>
+              <a:rPr lang="en-US" altLang="zh-TW" sz="1600" dirty="0">
+                <a:latin typeface="Times New Roman" panose="02020603050405020304" pitchFamily="18" charset="0"/>
+                <a:ea typeface="標楷體" panose="03000509000000000000" pitchFamily="65" charset="-120"/>
+                <a:cs typeface="Times New Roman" panose="02020603050405020304" pitchFamily="18" charset="0"/>
+              </a:rPr>
+              <a:t>PC </a:t>
+            </a:r>
+            <a:r>
+              <a:rPr lang="zh-TW" altLang="en-US" sz="1600" dirty="0">
+                <a:latin typeface="Times New Roman" panose="02020603050405020304" pitchFamily="18" charset="0"/>
+                <a:ea typeface="標楷體" panose="03000509000000000000" pitchFamily="65" charset="-120"/>
+                <a:cs typeface="Times New Roman" panose="02020603050405020304" pitchFamily="18" charset="0"/>
+              </a:rPr>
+              <a:t>驅動程式，使電腦能與相容的 </a:t>
+            </a:r>
+            <a:r>
+              <a:rPr lang="en-US" altLang="zh-TW" sz="1600" dirty="0">
+                <a:latin typeface="Times New Roman" panose="02020603050405020304" pitchFamily="18" charset="0"/>
+                <a:ea typeface="標楷體" panose="03000509000000000000" pitchFamily="65" charset="-120"/>
+                <a:cs typeface="Times New Roman" panose="02020603050405020304" pitchFamily="18" charset="0"/>
+              </a:rPr>
+              <a:t>FPGA DMA IP </a:t>
+            </a:r>
+            <a:r>
+              <a:rPr lang="zh-TW" altLang="en-US" sz="1600" dirty="0">
+                <a:latin typeface="Times New Roman" panose="02020603050405020304" pitchFamily="18" charset="0"/>
+                <a:ea typeface="標楷體" panose="03000509000000000000" pitchFamily="65" charset="-120"/>
+                <a:cs typeface="Times New Roman" panose="02020603050405020304" pitchFamily="18" charset="0"/>
+              </a:rPr>
+              <a:t>溝通</a:t>
+            </a:r>
+            <a:endParaRPr lang="en-US" altLang="zh-TW" sz="1600" dirty="0">
+              <a:latin typeface="Times New Roman" panose="02020603050405020304" pitchFamily="18" charset="0"/>
+              <a:ea typeface="標楷體" panose="03000509000000000000" pitchFamily="65" charset="-120"/>
+              <a:cs typeface="Times New Roman" panose="02020603050405020304" pitchFamily="18" charset="0"/>
+            </a:endParaRPr>
+          </a:p>
+          <a:p>
+            <a:pPr lvl="1">
+              <a:lnSpc>
+                <a:spcPts val="3000"/>
+              </a:lnSpc>
+            </a:pPr>
+            <a:r>
+              <a:rPr lang="zh-TW" altLang="en-US" sz="1600" dirty="0">
+                <a:latin typeface="Times New Roman" panose="02020603050405020304" pitchFamily="18" charset="0"/>
+                <a:ea typeface="標楷體" panose="03000509000000000000" pitchFamily="65" charset="-120"/>
+                <a:cs typeface="Times New Roman" panose="02020603050405020304" pitchFamily="18" charset="0"/>
+              </a:rPr>
+              <a:t>提供相關工具，協助執行資料傳輸、裝置資源存取與 </a:t>
+            </a:r>
+            <a:r>
+              <a:rPr lang="en-US" altLang="zh-TW" sz="1600" dirty="0">
+                <a:latin typeface="Times New Roman" panose="02020603050405020304" pitchFamily="18" charset="0"/>
+                <a:ea typeface="標楷體" panose="03000509000000000000" pitchFamily="65" charset="-120"/>
+                <a:cs typeface="Times New Roman" panose="02020603050405020304" pitchFamily="18" charset="0"/>
+              </a:rPr>
+              <a:t>DMA </a:t>
+            </a:r>
+            <a:r>
+              <a:rPr lang="zh-TW" altLang="en-US" sz="1600" dirty="0">
+                <a:latin typeface="Times New Roman" panose="02020603050405020304" pitchFamily="18" charset="0"/>
+                <a:ea typeface="標楷體" panose="03000509000000000000" pitchFamily="65" charset="-120"/>
+                <a:cs typeface="Times New Roman" panose="02020603050405020304" pitchFamily="18" charset="0"/>
+              </a:rPr>
+              <a:t>功能測試</a:t>
+            </a:r>
+            <a:endParaRPr lang="en-US" altLang="zh-TW" sz="1600" dirty="0">
+              <a:latin typeface="Times New Roman" panose="02020603050405020304" pitchFamily="18" charset="0"/>
+              <a:ea typeface="標楷體" panose="03000509000000000000" pitchFamily="65" charset="-120"/>
+              <a:cs typeface="Times New Roman" panose="02020603050405020304" pitchFamily="18" charset="0"/>
+            </a:endParaRPr>
+          </a:p>
+          <a:p>
+            <a:pPr>
+              <a:lnSpc>
+                <a:spcPts val="3000"/>
+              </a:lnSpc>
+            </a:pPr>
+            <a:r>
+              <a:rPr lang="zh-TW" altLang="en-US" sz="2000" dirty="0">
+                <a:latin typeface="Times New Roman" panose="02020603050405020304" pitchFamily="18" charset="0"/>
+                <a:ea typeface="標楷體" panose="03000509000000000000" pitchFamily="65" charset="-120"/>
+                <a:cs typeface="Times New Roman" panose="02020603050405020304" pitchFamily="18" charset="0"/>
+              </a:rPr>
+              <a:t>對 </a:t>
+            </a:r>
+            <a:r>
+              <a:rPr lang="en-US" altLang="zh-TW" sz="2000" dirty="0">
+                <a:latin typeface="Times New Roman" panose="02020603050405020304" pitchFamily="18" charset="0"/>
+                <a:ea typeface="標楷體" panose="03000509000000000000" pitchFamily="65" charset="-120"/>
+                <a:cs typeface="Times New Roman" panose="02020603050405020304" pitchFamily="18" charset="0"/>
+              </a:rPr>
+              <a:t>FPGA </a:t>
+            </a:r>
+            <a:r>
+              <a:rPr lang="zh-TW" altLang="en-US" sz="2000" dirty="0">
+                <a:latin typeface="Times New Roman" panose="02020603050405020304" pitchFamily="18" charset="0"/>
+                <a:ea typeface="標楷體" panose="03000509000000000000" pitchFamily="65" charset="-120"/>
+                <a:cs typeface="Times New Roman" panose="02020603050405020304" pitchFamily="18" charset="0"/>
+              </a:rPr>
+              <a:t>擷取卡的幫助</a:t>
+            </a:r>
+          </a:p>
+          <a:p>
+            <a:pPr lvl="1">
+              <a:lnSpc>
+                <a:spcPts val="3000"/>
+              </a:lnSpc>
+            </a:pPr>
+            <a:r>
+              <a:rPr lang="zh-TW" altLang="en-US" sz="1600" dirty="0">
+                <a:latin typeface="Times New Roman" panose="02020603050405020304" pitchFamily="18" charset="0"/>
+                <a:ea typeface="標楷體" panose="03000509000000000000" pitchFamily="65" charset="-120"/>
+                <a:cs typeface="Times New Roman" panose="02020603050405020304" pitchFamily="18" charset="0"/>
+              </a:rPr>
+              <a:t>可作為擷取卡的 </a:t>
+            </a:r>
+            <a:r>
+              <a:rPr lang="en-US" altLang="zh-TW" sz="1600" dirty="0">
+                <a:latin typeface="Times New Roman" panose="02020603050405020304" pitchFamily="18" charset="0"/>
+                <a:ea typeface="標楷體" panose="03000509000000000000" pitchFamily="65" charset="-120"/>
+                <a:cs typeface="Times New Roman" panose="02020603050405020304" pitchFamily="18" charset="0"/>
+              </a:rPr>
+              <a:t>PC </a:t>
+            </a:r>
+            <a:r>
+              <a:rPr lang="zh-TW" altLang="en-US" sz="1600" dirty="0">
+                <a:latin typeface="Times New Roman" panose="02020603050405020304" pitchFamily="18" charset="0"/>
+                <a:ea typeface="標楷體" panose="03000509000000000000" pitchFamily="65" charset="-120"/>
+                <a:cs typeface="Times New Roman" panose="02020603050405020304" pitchFamily="18" charset="0"/>
+              </a:rPr>
+              <a:t>端驅動程式基礎，協助 </a:t>
+            </a:r>
+            <a:r>
+              <a:rPr lang="en-US" altLang="zh-TW" sz="1600" dirty="0">
+                <a:latin typeface="Times New Roman" panose="02020603050405020304" pitchFamily="18" charset="0"/>
+                <a:ea typeface="標楷體" panose="03000509000000000000" pitchFamily="65" charset="-120"/>
+                <a:cs typeface="Times New Roman" panose="02020603050405020304" pitchFamily="18" charset="0"/>
+              </a:rPr>
+              <a:t>FPGA </a:t>
+            </a:r>
+            <a:r>
+              <a:rPr lang="zh-TW" altLang="en-US" sz="1600" dirty="0">
+                <a:latin typeface="Times New Roman" panose="02020603050405020304" pitchFamily="18" charset="0"/>
+                <a:ea typeface="標楷體" panose="03000509000000000000" pitchFamily="65" charset="-120"/>
+                <a:cs typeface="Times New Roman" panose="02020603050405020304" pitchFamily="18" charset="0"/>
+              </a:rPr>
+              <a:t>將影像資料透過 </a:t>
+            </a:r>
+            <a:r>
+              <a:rPr lang="en-US" altLang="zh-TW" sz="1600" dirty="0">
+                <a:latin typeface="Times New Roman" panose="02020603050405020304" pitchFamily="18" charset="0"/>
+                <a:ea typeface="標楷體" panose="03000509000000000000" pitchFamily="65" charset="-120"/>
+                <a:cs typeface="Times New Roman" panose="02020603050405020304" pitchFamily="18" charset="0"/>
+              </a:rPr>
+              <a:t>PCIe DMA </a:t>
+            </a:r>
+            <a:r>
+              <a:rPr lang="zh-TW" altLang="en-US" sz="1600" dirty="0">
+                <a:latin typeface="Times New Roman" panose="02020603050405020304" pitchFamily="18" charset="0"/>
+                <a:ea typeface="標楷體" panose="03000509000000000000" pitchFamily="65" charset="-120"/>
+                <a:cs typeface="Times New Roman" panose="02020603050405020304" pitchFamily="18" charset="0"/>
+              </a:rPr>
+              <a:t>傳送至 </a:t>
+            </a:r>
+            <a:r>
+              <a:rPr lang="en-US" altLang="zh-TW" sz="1600" dirty="0">
+                <a:latin typeface="Times New Roman" panose="02020603050405020304" pitchFamily="18" charset="0"/>
+                <a:ea typeface="標楷體" panose="03000509000000000000" pitchFamily="65" charset="-120"/>
+                <a:cs typeface="Times New Roman" panose="02020603050405020304" pitchFamily="18" charset="0"/>
+              </a:rPr>
+              <a:t>PC </a:t>
+            </a:r>
+            <a:r>
+              <a:rPr lang="zh-TW" altLang="en-US" sz="1600" dirty="0">
+                <a:latin typeface="Times New Roman" panose="02020603050405020304" pitchFamily="18" charset="0"/>
+                <a:ea typeface="標楷體" panose="03000509000000000000" pitchFamily="65" charset="-120"/>
+                <a:cs typeface="Times New Roman" panose="02020603050405020304" pitchFamily="18" charset="0"/>
+              </a:rPr>
+              <a:t>記憶體</a:t>
+            </a:r>
+            <a:endParaRPr lang="en-US" altLang="zh-TW" sz="1600" dirty="0">
+              <a:solidFill>
+                <a:schemeClr val="tx1"/>
+              </a:solidFill>
+              <a:latin typeface="Times New Roman" panose="02020603050405020304" pitchFamily="18" charset="0"/>
+              <a:ea typeface="標楷體" panose="03000509000000000000" pitchFamily="65" charset="-120"/>
+              <a:cs typeface="Times New Roman" panose="02020603050405020304" pitchFamily="18" charset="0"/>
+            </a:endParaRPr>
+          </a:p>
+          <a:p>
+            <a:pPr lvl="1">
+              <a:lnSpc>
+                <a:spcPts val="3000"/>
+              </a:lnSpc>
+            </a:pPr>
+            <a:endParaRPr lang="zh-TW" altLang="en-US" sz="1600" dirty="0">
+              <a:latin typeface="Times New Roman" panose="02020603050405020304" pitchFamily="18" charset="0"/>
+              <a:ea typeface="標楷體" panose="03000509000000000000" pitchFamily="65" charset="-120"/>
+              <a:cs typeface="Times New Roman" panose="02020603050405020304" pitchFamily="18" charset="0"/>
+            </a:endParaRPr>
+          </a:p>
+          <a:p>
+            <a:pPr lvl="1">
+              <a:lnSpc>
+                <a:spcPts val="3000"/>
+              </a:lnSpc>
+            </a:pPr>
+            <a:endParaRPr lang="en-US" altLang="zh-TW" sz="1600" dirty="0">
+              <a:solidFill>
+                <a:schemeClr val="tx1"/>
+              </a:solidFill>
+              <a:latin typeface="Times New Roman" panose="02020603050405020304" pitchFamily="18" charset="0"/>
+              <a:ea typeface="標楷體" panose="03000509000000000000" pitchFamily="65" charset="-120"/>
+              <a:cs typeface="Times New Roman" panose="02020603050405020304" pitchFamily="18" charset="0"/>
+            </a:endParaRPr>
+          </a:p>
+        </p:txBody>
+      </p:sp>
+      <p:pic>
+        <p:nvPicPr>
+          <p:cNvPr id="6" name="圖片 5">
+            <a:extLst>
+              <a:ext uri="{FF2B5EF4-FFF2-40B4-BE49-F238E27FC236}">
+                <a16:creationId xmlns:a16="http://schemas.microsoft.com/office/drawing/2014/main" id="{F6AE91BC-F373-E0EA-784E-FE965295B26D}"/>
+              </a:ext>
+            </a:extLst>
+          </p:cNvPr>
+          <p:cNvPicPr>
+            <a:picLocks noChangeAspect="1"/>
+          </p:cNvPicPr>
+          <p:nvPr/>
+        </p:nvPicPr>
+        <p:blipFill>
+          <a:blip r:embed="rId3"/>
+          <a:stretch>
+            <a:fillRect/>
+          </a:stretch>
+        </p:blipFill>
+        <p:spPr>
+          <a:xfrm>
+            <a:off x="432707" y="5153297"/>
+            <a:ext cx="9040586" cy="966490"/>
+          </a:xfrm>
+          <a:prstGeom prst="rect">
+            <a:avLst/>
+          </a:prstGeom>
+        </p:spPr>
+      </p:pic>
+      <p:sp>
+        <p:nvSpPr>
+          <p:cNvPr id="7" name="文字方塊 6">
+            <a:extLst>
+              <a:ext uri="{FF2B5EF4-FFF2-40B4-BE49-F238E27FC236}">
+                <a16:creationId xmlns:a16="http://schemas.microsoft.com/office/drawing/2014/main" id="{3B045C83-0B0C-2CBF-81C8-166EB12F11E6}"/>
+              </a:ext>
+            </a:extLst>
+          </p:cNvPr>
+          <p:cNvSpPr txBox="1"/>
+          <p:nvPr/>
+        </p:nvSpPr>
+        <p:spPr>
+          <a:xfrm>
+            <a:off x="1787236" y="6384072"/>
+            <a:ext cx="5802283" cy="276999"/>
+          </a:xfrm>
+          <a:prstGeom prst="rect">
+            <a:avLst/>
+          </a:prstGeom>
+          <a:noFill/>
+        </p:spPr>
+        <p:txBody>
+          <a:bodyPr wrap="square">
+            <a:spAutoFit/>
+          </a:bodyPr>
+          <a:lstStyle/>
+          <a:p>
+            <a:r>
+              <a:rPr lang="en-US" altLang="zh-TW" sz="1200" dirty="0">
+                <a:latin typeface="Times New Roman" panose="02020603050405020304" pitchFamily="18" charset="0"/>
+                <a:cs typeface="Times New Roman" panose="02020603050405020304" pitchFamily="18" charset="0"/>
+              </a:rPr>
+              <a:t>[5] https://github.com/Xilinx/dma_ip_drivers</a:t>
+            </a:r>
+            <a:endParaRPr lang="zh-TW" altLang="en-US" sz="1200" dirty="0">
+              <a:latin typeface="Times New Roman" panose="02020603050405020304" pitchFamily="18" charset="0"/>
+              <a:cs typeface="Times New Roman" panose="02020603050405020304" pitchFamily="18" charset="0"/>
+            </a:endParaRPr>
+          </a:p>
+        </p:txBody>
+      </p:sp>
+    </p:spTree>
+    <p:extLst>
+      <p:ext uri="{BB962C8B-B14F-4D97-AF65-F5344CB8AC3E}">
+        <p14:creationId xmlns:p14="http://schemas.microsoft.com/office/powerpoint/2010/main" val="2172022747"/>
+      </p:ext>
+    </p:extLst>
+  </p:cSld>
+  <p:clrMapOvr>
+    <a:masterClrMapping/>
+  </p:clrMapOvr>
+</p:sld>
+</file>
+
+<file path=ppt/slides/slide4.xml><?xml version="1.0" encoding="utf-8"?>
+<p:sld xmlns:a="http://schemas.openxmlformats.org/drawingml/2006/main" xmlns:r="http://schemas.openxmlformats.org/officeDocument/2006/relationships" xmlns:p="http://schemas.openxmlformats.org/presentationml/2006/main">
+  <p:cSld>
+    <p:spTree>
+      <p:nvGrpSpPr>
+        <p:cNvPr id="1" name="">
+          <a:extLst>
+            <a:ext uri="{FF2B5EF4-FFF2-40B4-BE49-F238E27FC236}">
+              <a16:creationId xmlns:a16="http://schemas.microsoft.com/office/drawing/2014/main" id="{C25E9AAA-7E36-1E17-83F9-FD3A18A28BE9}"/>
+            </a:ext>
+          </a:extLst>
+        </p:cNvPr>
+        <p:cNvGrpSpPr/>
+        <p:nvPr/>
+      </p:nvGrpSpPr>
+      <p:grpSpPr>
+        <a:xfrm>
+          <a:off x="0" y="0"/>
+          <a:ext cx="0" cy="0"/>
+          <a:chOff x="0" y="0"/>
+          <a:chExt cx="0" cy="0"/>
+        </a:xfrm>
+      </p:grpSpPr>
+      <p:sp>
+        <p:nvSpPr>
+          <p:cNvPr id="15" name="標題 1">
+            <a:extLst>
+              <a:ext uri="{FF2B5EF4-FFF2-40B4-BE49-F238E27FC236}">
+                <a16:creationId xmlns:a16="http://schemas.microsoft.com/office/drawing/2014/main" id="{142C8726-E890-9988-40FC-8984FDA21FEE}"/>
+              </a:ext>
+            </a:extLst>
+          </p:cNvPr>
+          <p:cNvSpPr>
+            <a:spLocks noGrp="1"/>
+          </p:cNvSpPr>
+          <p:nvPr>
+            <p:ph type="title"/>
+          </p:nvPr>
+        </p:nvSpPr>
+        <p:spPr>
+          <a:xfrm>
+            <a:off x="609602" y="609600"/>
+            <a:ext cx="8077200" cy="533400"/>
+          </a:xfrm>
+          <a:ln>
+            <a:noFill/>
+          </a:ln>
+        </p:spPr>
+        <p:txBody>
+          <a:bodyPr/>
+          <a:lstStyle/>
+          <a:p>
+            <a:pPr algn="l" fontAlgn="t"/>
+            <a:r>
+              <a:rPr lang="zh-TW" altLang="en-US" dirty="0">
+                <a:latin typeface="Times New Roman" panose="02020603050405020304" pitchFamily="18" charset="0"/>
+                <a:ea typeface="標楷體" panose="03000509000000000000" pitchFamily="65" charset="-120"/>
+                <a:cs typeface="Times New Roman" panose="02020603050405020304" pitchFamily="18" charset="0"/>
+              </a:rPr>
+              <a:t>本次進度</a:t>
+            </a:r>
+            <a:r>
+              <a:rPr lang="en-US" altLang="zh-TW" dirty="0">
+                <a:latin typeface="Times New Roman" panose="02020603050405020304" pitchFamily="18" charset="0"/>
+                <a:ea typeface="標楷體" panose="03000509000000000000" pitchFamily="65" charset="-120"/>
+                <a:cs typeface="Times New Roman" panose="02020603050405020304" pitchFamily="18" charset="0"/>
+              </a:rPr>
+              <a:t>: </a:t>
+            </a:r>
+            <a:r>
+              <a:rPr lang="en-US" altLang="zh-TW" dirty="0" err="1">
+                <a:latin typeface="Times New Roman" panose="02020603050405020304" pitchFamily="18" charset="0"/>
+                <a:ea typeface="標楷體" panose="03000509000000000000" pitchFamily="65" charset="-120"/>
+                <a:cs typeface="Times New Roman" panose="02020603050405020304" pitchFamily="18" charset="0"/>
+              </a:rPr>
+              <a:t>LiteX</a:t>
+            </a:r>
+            <a:r>
+              <a:rPr lang="en-US" altLang="zh-TW" dirty="0">
+                <a:latin typeface="Times New Roman" panose="02020603050405020304" pitchFamily="18" charset="0"/>
+                <a:ea typeface="標楷體" panose="03000509000000000000" pitchFamily="65" charset="-120"/>
+                <a:cs typeface="Times New Roman" panose="02020603050405020304" pitchFamily="18" charset="0"/>
+              </a:rPr>
+              <a:t> </a:t>
+            </a:r>
+            <a:r>
+              <a:rPr lang="zh-TW" altLang="en-US" dirty="0">
+                <a:latin typeface="Times New Roman" panose="02020603050405020304" pitchFamily="18" charset="0"/>
+                <a:ea typeface="標楷體" panose="03000509000000000000" pitchFamily="65" charset="-120"/>
+                <a:cs typeface="Times New Roman" panose="02020603050405020304" pitchFamily="18" charset="0"/>
+              </a:rPr>
+              <a:t>生態</a:t>
+            </a:r>
+          </a:p>
+        </p:txBody>
+      </p:sp>
+      <p:sp>
+        <p:nvSpPr>
+          <p:cNvPr id="8" name="文字版面配置區 6">
+            <a:extLst>
+              <a:ext uri="{FF2B5EF4-FFF2-40B4-BE49-F238E27FC236}">
+                <a16:creationId xmlns:a16="http://schemas.microsoft.com/office/drawing/2014/main" id="{521FBAA4-6E6B-1B82-9C1F-77D9FAD35C41}"/>
+              </a:ext>
+            </a:extLst>
+          </p:cNvPr>
+          <p:cNvSpPr txBox="1"/>
+          <p:nvPr/>
+        </p:nvSpPr>
+        <p:spPr>
+          <a:xfrm>
+            <a:off x="609602" y="935857"/>
+            <a:ext cx="8686796" cy="4700685"/>
+          </a:xfrm>
+          <a:prstGeom prst="rect">
+            <a:avLst/>
+          </a:prstGeom>
+          <a:noFill/>
+          <a:ln>
+            <a:noFill/>
+          </a:ln>
+        </p:spPr>
+        <p:txBody>
+          <a:bodyPr spcFirstLastPara="1" wrap="square" lIns="91425" tIns="45700" rIns="91425" bIns="45700" anchor="t" anchorCtr="0">
+            <a:noAutofit/>
+          </a:bodyPr>
+          <a:lstStyle>
+            <a:defPPr marR="0" lvl="0" algn="l" rtl="0">
+              <a:lnSpc>
+                <a:spcPct val="100000"/>
+              </a:lnSpc>
+              <a:spcBef>
+                <a:spcPts val="0"/>
+              </a:spcBef>
+              <a:spcAft>
+                <a:spcPts val="0"/>
+              </a:spcAft>
+            </a:defPPr>
+            <a:lvl1pPr marL="457200" marR="0" lvl="0" indent="-406400" algn="l" rtl="0">
+              <a:lnSpc>
+                <a:spcPct val="100000"/>
+              </a:lnSpc>
+              <a:spcBef>
+                <a:spcPts val="560"/>
+              </a:spcBef>
+              <a:spcAft>
+                <a:spcPts val="0"/>
+              </a:spcAft>
+              <a:buClr>
+                <a:schemeClr val="accent2"/>
+              </a:buClr>
+              <a:buSzPts val="2800"/>
+              <a:buFont typeface="Noto Sans Symbols"/>
+              <a:buChar char="❖"/>
+              <a:defRPr sz="2800" b="0" i="0" u="none" strike="noStrike" cap="none">
+                <a:solidFill>
+                  <a:schemeClr val="dk1"/>
+                </a:solidFill>
+                <a:latin typeface="Times New Roman"/>
+                <a:ea typeface="Times New Roman"/>
+                <a:cs typeface="Times New Roman"/>
+                <a:sym typeface="Times New Roman"/>
+              </a:defRPr>
+            </a:lvl1pPr>
+            <a:lvl2pPr marL="914400" marR="0" lvl="1" indent="-381000" algn="l" rtl="0">
+              <a:lnSpc>
+                <a:spcPct val="100000"/>
+              </a:lnSpc>
+              <a:spcBef>
+                <a:spcPts val="480"/>
+              </a:spcBef>
+              <a:spcAft>
+                <a:spcPts val="0"/>
+              </a:spcAft>
+              <a:buClr>
+                <a:srgbClr val="FF5050"/>
+              </a:buClr>
+              <a:buSzPts val="2400"/>
+              <a:buFont typeface="Noto Sans Symbols"/>
+              <a:buChar char="▪"/>
+              <a:defRPr sz="2400" b="0" i="0" u="none" strike="noStrike" cap="none">
+                <a:solidFill>
+                  <a:schemeClr val="dk1"/>
+                </a:solidFill>
+                <a:latin typeface="Times New Roman"/>
+                <a:ea typeface="Times New Roman"/>
+                <a:cs typeface="Times New Roman"/>
+                <a:sym typeface="Times New Roman"/>
+              </a:defRPr>
+            </a:lvl2pPr>
+            <a:lvl3pPr marL="1371600" marR="0" lvl="2" indent="-355600" algn="l" rtl="0">
+              <a:lnSpc>
+                <a:spcPct val="100000"/>
+              </a:lnSpc>
+              <a:spcBef>
+                <a:spcPts val="400"/>
+              </a:spcBef>
+              <a:spcAft>
+                <a:spcPts val="0"/>
+              </a:spcAft>
+              <a:buClr>
+                <a:srgbClr val="6699FF"/>
+              </a:buClr>
+              <a:buSzPts val="2000"/>
+              <a:buFont typeface="Times New Roman"/>
+              <a:buChar char="•"/>
+              <a:defRPr sz="2000" b="0" i="0" u="none" strike="noStrike" cap="none">
+                <a:solidFill>
+                  <a:schemeClr val="dk1"/>
+                </a:solidFill>
+                <a:latin typeface="Times New Roman"/>
+                <a:ea typeface="Times New Roman"/>
+                <a:cs typeface="Times New Roman"/>
+                <a:sym typeface="Times New Roman"/>
+              </a:defRPr>
+            </a:lvl3pPr>
+            <a:lvl4pPr marL="1828800" marR="0" lvl="3" indent="-355600" algn="l" rtl="0">
+              <a:lnSpc>
+                <a:spcPct val="100000"/>
+              </a:lnSpc>
+              <a:spcBef>
+                <a:spcPts val="400"/>
+              </a:spcBef>
+              <a:spcAft>
+                <a:spcPts val="0"/>
+              </a:spcAft>
+              <a:buClr>
+                <a:srgbClr val="FF5050"/>
+              </a:buClr>
+              <a:buSzPts val="2000"/>
+              <a:buFont typeface="Times New Roman"/>
+              <a:buChar char="o"/>
+              <a:defRPr sz="2000" b="0" i="0" u="none" strike="noStrike" cap="none">
+                <a:solidFill>
+                  <a:schemeClr val="dk1"/>
+                </a:solidFill>
+                <a:latin typeface="Times New Roman"/>
+                <a:ea typeface="Times New Roman"/>
+                <a:cs typeface="Times New Roman"/>
+                <a:sym typeface="Times New Roman"/>
+              </a:defRPr>
+            </a:lvl4pPr>
+            <a:lvl5pPr marL="2286000" marR="0" lvl="4" indent="-355600" algn="l" rtl="0">
+              <a:lnSpc>
+                <a:spcPct val="100000"/>
+              </a:lnSpc>
+              <a:spcBef>
+                <a:spcPts val="400"/>
+              </a:spcBef>
+              <a:spcAft>
+                <a:spcPts val="0"/>
+              </a:spcAft>
+              <a:buClr>
+                <a:srgbClr val="FF5050"/>
+              </a:buClr>
+              <a:buSzPts val="2000"/>
+              <a:buFont typeface="Times New Roman"/>
+              <a:buChar char="o"/>
+              <a:defRPr sz="2000" b="0" i="0" u="none" strike="noStrike" cap="none">
+                <a:solidFill>
+                  <a:schemeClr val="dk1"/>
+                </a:solidFill>
+                <a:latin typeface="Times New Roman"/>
+                <a:ea typeface="Times New Roman"/>
+                <a:cs typeface="Times New Roman"/>
+                <a:sym typeface="Times New Roman"/>
+              </a:defRPr>
+            </a:lvl5pPr>
+            <a:lvl6pPr marL="2743200" marR="0" lvl="5" indent="-355600" algn="l" rtl="0">
+              <a:lnSpc>
+                <a:spcPct val="100000"/>
+              </a:lnSpc>
+              <a:spcBef>
+                <a:spcPts val="400"/>
+              </a:spcBef>
+              <a:spcAft>
+                <a:spcPts val="0"/>
+              </a:spcAft>
+              <a:buClr>
+                <a:srgbClr val="FF5050"/>
+              </a:buClr>
+              <a:buSzPts val="2000"/>
+              <a:buFont typeface="Times New Roman"/>
+              <a:buChar char="o"/>
+              <a:defRPr sz="2000" b="0" i="0" u="none" strike="noStrike" cap="none">
+                <a:solidFill>
+                  <a:schemeClr val="dk1"/>
+                </a:solidFill>
+                <a:latin typeface="Times New Roman"/>
+                <a:ea typeface="Times New Roman"/>
+                <a:cs typeface="Times New Roman"/>
+                <a:sym typeface="Times New Roman"/>
+              </a:defRPr>
+            </a:lvl6pPr>
+            <a:lvl7pPr marL="3200400" marR="0" lvl="6" indent="-355600" algn="l" rtl="0">
+              <a:lnSpc>
+                <a:spcPct val="100000"/>
+              </a:lnSpc>
+              <a:spcBef>
+                <a:spcPts val="400"/>
+              </a:spcBef>
+              <a:spcAft>
+                <a:spcPts val="0"/>
+              </a:spcAft>
+              <a:buClr>
+                <a:srgbClr val="FF5050"/>
+              </a:buClr>
+              <a:buSzPts val="2000"/>
+              <a:buFont typeface="Times New Roman"/>
+              <a:buChar char="o"/>
+              <a:defRPr sz="2000" b="0" i="0" u="none" strike="noStrike" cap="none">
+                <a:solidFill>
+                  <a:schemeClr val="dk1"/>
+                </a:solidFill>
+                <a:latin typeface="Times New Roman"/>
+                <a:ea typeface="Times New Roman"/>
+                <a:cs typeface="Times New Roman"/>
+                <a:sym typeface="Times New Roman"/>
+              </a:defRPr>
+            </a:lvl7pPr>
+            <a:lvl8pPr marL="3657600" marR="0" lvl="7" indent="-355600" algn="l" rtl="0">
+              <a:lnSpc>
+                <a:spcPct val="100000"/>
+              </a:lnSpc>
+              <a:spcBef>
+                <a:spcPts val="400"/>
+              </a:spcBef>
+              <a:spcAft>
+                <a:spcPts val="0"/>
+              </a:spcAft>
+              <a:buClr>
+                <a:srgbClr val="FF5050"/>
+              </a:buClr>
+              <a:buSzPts val="2000"/>
+              <a:buFont typeface="Times New Roman"/>
+              <a:buChar char="o"/>
+              <a:defRPr sz="2000" b="0" i="0" u="none" strike="noStrike" cap="none">
+                <a:solidFill>
+                  <a:schemeClr val="dk1"/>
+                </a:solidFill>
+                <a:latin typeface="Times New Roman"/>
+                <a:ea typeface="Times New Roman"/>
+                <a:cs typeface="Times New Roman"/>
+                <a:sym typeface="Times New Roman"/>
+              </a:defRPr>
+            </a:lvl8pPr>
+            <a:lvl9pPr marL="4114800" marR="0" lvl="8" indent="-355600" algn="l" rtl="0">
+              <a:lnSpc>
+                <a:spcPct val="100000"/>
+              </a:lnSpc>
+              <a:spcBef>
+                <a:spcPts val="400"/>
+              </a:spcBef>
+              <a:spcAft>
+                <a:spcPts val="0"/>
+              </a:spcAft>
+              <a:buClr>
+                <a:srgbClr val="FF5050"/>
+              </a:buClr>
+              <a:buSzPts val="2000"/>
+              <a:buFont typeface="Times New Roman"/>
+              <a:buChar char="o"/>
+              <a:defRPr sz="2000" b="0" i="0" u="none" strike="noStrike" cap="none">
+                <a:solidFill>
+                  <a:schemeClr val="dk1"/>
+                </a:solidFill>
+                <a:latin typeface="Times New Roman"/>
+                <a:ea typeface="Times New Roman"/>
+                <a:cs typeface="Times New Roman"/>
+                <a:sym typeface="Times New Roman"/>
+              </a:defRPr>
+            </a:lvl9pPr>
+          </a:lstStyle>
+          <a:p>
+            <a:pPr>
+              <a:lnSpc>
+                <a:spcPct val="150000"/>
+              </a:lnSpc>
+            </a:pPr>
+            <a:r>
+              <a:rPr lang="zh-TW" altLang="en-US" sz="2000" dirty="0">
+                <a:solidFill>
+                  <a:schemeClr val="tx1"/>
+                </a:solidFill>
+                <a:latin typeface="Times New Roman" panose="02020603050405020304" pitchFamily="18" charset="0"/>
+                <a:ea typeface="標楷體" panose="03000509000000000000" pitchFamily="65" charset="-120"/>
+                <a:cs typeface="Times New Roman" panose="02020603050405020304" pitchFamily="18" charset="0"/>
+              </a:rPr>
+              <a:t>架構</a:t>
+            </a:r>
+            <a:endParaRPr lang="en-US" altLang="zh-TW" sz="2000" dirty="0">
+              <a:solidFill>
+                <a:schemeClr val="tx1"/>
+              </a:solidFill>
+              <a:latin typeface="Times New Roman" panose="02020603050405020304" pitchFamily="18" charset="0"/>
+              <a:ea typeface="標楷體" panose="03000509000000000000" pitchFamily="65" charset="-120"/>
+              <a:cs typeface="Times New Roman" panose="02020603050405020304" pitchFamily="18" charset="0"/>
+            </a:endParaRPr>
+          </a:p>
+          <a:p>
+            <a:pPr>
+              <a:lnSpc>
+                <a:spcPct val="150000"/>
+              </a:lnSpc>
+            </a:pPr>
+            <a:endParaRPr lang="en-US" altLang="zh-TW" sz="2000" dirty="0">
+              <a:solidFill>
+                <a:schemeClr val="tx1"/>
+              </a:solidFill>
+              <a:latin typeface="Times New Roman" panose="02020603050405020304" pitchFamily="18" charset="0"/>
+              <a:ea typeface="標楷體" panose="03000509000000000000" pitchFamily="65" charset="-120"/>
+              <a:cs typeface="Times New Roman" panose="02020603050405020304" pitchFamily="18" charset="0"/>
+            </a:endParaRPr>
+          </a:p>
+          <a:p>
+            <a:pPr>
+              <a:lnSpc>
+                <a:spcPct val="150000"/>
+              </a:lnSpc>
+            </a:pPr>
+            <a:endParaRPr lang="en-US" altLang="zh-TW" sz="2000" dirty="0">
+              <a:solidFill>
+                <a:schemeClr val="tx1"/>
+              </a:solidFill>
+              <a:latin typeface="Times New Roman" panose="02020603050405020304" pitchFamily="18" charset="0"/>
+              <a:ea typeface="標楷體" panose="03000509000000000000" pitchFamily="65" charset="-120"/>
+              <a:cs typeface="Times New Roman" panose="02020603050405020304" pitchFamily="18" charset="0"/>
+            </a:endParaRPr>
+          </a:p>
+          <a:p>
+            <a:pPr>
+              <a:lnSpc>
+                <a:spcPct val="150000"/>
+              </a:lnSpc>
+            </a:pPr>
+            <a:r>
+              <a:rPr lang="zh-TW" altLang="en-US" sz="2000" dirty="0">
+                <a:solidFill>
+                  <a:schemeClr val="tx1"/>
+                </a:solidFill>
+                <a:latin typeface="Times New Roman" panose="02020603050405020304" pitchFamily="18" charset="0"/>
+                <a:ea typeface="標楷體" panose="03000509000000000000" pitchFamily="65" charset="-120"/>
+                <a:cs typeface="Times New Roman" panose="02020603050405020304" pitchFamily="18" charset="0"/>
+              </a:rPr>
+              <a:t>優勢</a:t>
+            </a:r>
+            <a:endParaRPr lang="en-US" altLang="zh-TW" sz="2000" dirty="0">
+              <a:solidFill>
+                <a:schemeClr val="tx1"/>
+              </a:solidFill>
+              <a:latin typeface="Times New Roman" panose="02020603050405020304" pitchFamily="18" charset="0"/>
+              <a:ea typeface="標楷體" panose="03000509000000000000" pitchFamily="65" charset="-120"/>
+              <a:cs typeface="Times New Roman" panose="02020603050405020304" pitchFamily="18" charset="0"/>
+            </a:endParaRPr>
+          </a:p>
+          <a:p>
+            <a:pPr lvl="1">
+              <a:lnSpc>
+                <a:spcPts val="3000"/>
+              </a:lnSpc>
+            </a:pPr>
+            <a:r>
+              <a:rPr lang="en-US" altLang="zh-TW" sz="1600" dirty="0" err="1">
+                <a:latin typeface="Times New Roman" panose="02020603050405020304" pitchFamily="18" charset="0"/>
+                <a:ea typeface="標楷體" panose="03000509000000000000" pitchFamily="65" charset="-120"/>
+                <a:cs typeface="Times New Roman" panose="02020603050405020304" pitchFamily="18" charset="0"/>
+              </a:rPr>
+              <a:t>LiteX</a:t>
+            </a:r>
+            <a:r>
+              <a:rPr lang="en-US" altLang="zh-TW" sz="1600" dirty="0">
+                <a:latin typeface="Times New Roman" panose="02020603050405020304" pitchFamily="18" charset="0"/>
+                <a:ea typeface="標楷體" panose="03000509000000000000" pitchFamily="65" charset="-120"/>
+                <a:cs typeface="Times New Roman" panose="02020603050405020304" pitchFamily="18" charset="0"/>
+              </a:rPr>
+              <a:t> </a:t>
+            </a:r>
+            <a:r>
+              <a:rPr lang="zh-TW" altLang="en-US" sz="1600" dirty="0">
+                <a:latin typeface="Times New Roman" panose="02020603050405020304" pitchFamily="18" charset="0"/>
+                <a:ea typeface="標楷體" panose="03000509000000000000" pitchFamily="65" charset="-120"/>
+                <a:cs typeface="Times New Roman" panose="02020603050405020304" pitchFamily="18" charset="0"/>
+              </a:rPr>
+              <a:t>的互連與建置基礎，減少建立整套系統的工作</a:t>
+            </a:r>
+            <a:endParaRPr lang="en-US" altLang="zh-TW" sz="1600" dirty="0">
+              <a:latin typeface="Times New Roman" panose="02020603050405020304" pitchFamily="18" charset="0"/>
+              <a:ea typeface="標楷體" panose="03000509000000000000" pitchFamily="65" charset="-120"/>
+              <a:cs typeface="Times New Roman" panose="02020603050405020304" pitchFamily="18" charset="0"/>
+            </a:endParaRPr>
+          </a:p>
+          <a:p>
+            <a:pPr lvl="1">
+              <a:lnSpc>
+                <a:spcPts val="3000"/>
+              </a:lnSpc>
+            </a:pPr>
+            <a:r>
+              <a:rPr lang="zh-TW" altLang="en-US" sz="1600" dirty="0">
+                <a:latin typeface="Times New Roman" panose="02020603050405020304" pitchFamily="18" charset="0"/>
+                <a:ea typeface="標楷體" panose="03000509000000000000" pitchFamily="65" charset="-120"/>
+                <a:cs typeface="Times New Roman" panose="02020603050405020304" pitchFamily="18" charset="0"/>
+              </a:rPr>
+              <a:t>既有框架及 </a:t>
+            </a:r>
+            <a:r>
+              <a:rPr lang="en-US" altLang="zh-TW" sz="1600" dirty="0" err="1">
+                <a:latin typeface="Times New Roman" panose="02020603050405020304" pitchFamily="18" charset="0"/>
+                <a:ea typeface="標楷體" panose="03000509000000000000" pitchFamily="65" charset="-120"/>
+                <a:cs typeface="Times New Roman" panose="02020603050405020304" pitchFamily="18" charset="0"/>
+              </a:rPr>
+              <a:t>LiteVideo</a:t>
+            </a:r>
+            <a:r>
+              <a:rPr lang="zh-TW" altLang="en-US" sz="1600" dirty="0">
+                <a:latin typeface="Times New Roman" panose="02020603050405020304" pitchFamily="18" charset="0"/>
+                <a:ea typeface="標楷體" panose="03000509000000000000" pitchFamily="65" charset="-120"/>
+                <a:cs typeface="Times New Roman" panose="02020603050405020304" pitchFamily="18" charset="0"/>
+              </a:rPr>
+              <a:t>、</a:t>
+            </a:r>
+            <a:r>
+              <a:rPr lang="en-US" altLang="zh-TW" sz="1600" dirty="0" err="1">
+                <a:latin typeface="Times New Roman" panose="02020603050405020304" pitchFamily="18" charset="0"/>
+                <a:ea typeface="標楷體" panose="03000509000000000000" pitchFamily="65" charset="-120"/>
+                <a:cs typeface="Times New Roman" panose="02020603050405020304" pitchFamily="18" charset="0"/>
+              </a:rPr>
+              <a:t>LitePCIe</a:t>
+            </a:r>
+            <a:r>
+              <a:rPr lang="zh-TW" altLang="en-US" sz="1600" dirty="0">
+                <a:latin typeface="Times New Roman" panose="02020603050405020304" pitchFamily="18" charset="0"/>
+                <a:ea typeface="標楷體" panose="03000509000000000000" pitchFamily="65" charset="-120"/>
+                <a:cs typeface="Times New Roman" panose="02020603050405020304" pitchFamily="18" charset="0"/>
+              </a:rPr>
+              <a:t>、</a:t>
+            </a:r>
+            <a:r>
+              <a:rPr lang="en-US" altLang="zh-TW" sz="1600" dirty="0" err="1">
+                <a:latin typeface="Times New Roman" panose="02020603050405020304" pitchFamily="18" charset="0"/>
+                <a:ea typeface="標楷體" panose="03000509000000000000" pitchFamily="65" charset="-120"/>
+                <a:cs typeface="Times New Roman" panose="02020603050405020304" pitchFamily="18" charset="0"/>
+              </a:rPr>
+              <a:t>LiteDRAM</a:t>
+            </a:r>
+            <a:r>
+              <a:rPr lang="en-US" altLang="zh-TW" sz="1600" dirty="0">
+                <a:latin typeface="Times New Roman" panose="02020603050405020304" pitchFamily="18" charset="0"/>
+                <a:ea typeface="標楷體" panose="03000509000000000000" pitchFamily="65" charset="-120"/>
+                <a:cs typeface="Times New Roman" panose="02020603050405020304" pitchFamily="18" charset="0"/>
+              </a:rPr>
+              <a:t> </a:t>
+            </a:r>
+            <a:r>
+              <a:rPr lang="zh-TW" altLang="en-US" sz="1600" dirty="0">
+                <a:latin typeface="Times New Roman" panose="02020603050405020304" pitchFamily="18" charset="0"/>
+                <a:ea typeface="標楷體" panose="03000509000000000000" pitchFamily="65" charset="-120"/>
+                <a:cs typeface="Times New Roman" panose="02020603050405020304" pitchFamily="18" charset="0"/>
+              </a:rPr>
+              <a:t>等模組可減少重複開發</a:t>
+            </a:r>
+            <a:endParaRPr lang="en-US" altLang="zh-TW" sz="1600" dirty="0">
+              <a:latin typeface="Times New Roman" panose="02020603050405020304" pitchFamily="18" charset="0"/>
+              <a:ea typeface="標楷體" panose="03000509000000000000" pitchFamily="65" charset="-120"/>
+              <a:cs typeface="Times New Roman" panose="02020603050405020304" pitchFamily="18" charset="0"/>
+            </a:endParaRPr>
+          </a:p>
+          <a:p>
+            <a:pPr>
+              <a:lnSpc>
+                <a:spcPts val="3000"/>
+              </a:lnSpc>
+            </a:pPr>
+            <a:r>
+              <a:rPr lang="zh-TW" altLang="en-US" sz="2000" dirty="0">
+                <a:latin typeface="Times New Roman" panose="02020603050405020304" pitchFamily="18" charset="0"/>
+                <a:ea typeface="標楷體" panose="03000509000000000000" pitchFamily="65" charset="-120"/>
+                <a:cs typeface="Times New Roman" panose="02020603050405020304" pitchFamily="18" charset="0"/>
+              </a:rPr>
+              <a:t>風險與待評估事項</a:t>
+            </a:r>
+          </a:p>
+          <a:p>
+            <a:pPr lvl="1">
+              <a:lnSpc>
+                <a:spcPts val="3000"/>
+              </a:lnSpc>
+            </a:pPr>
+            <a:r>
+              <a:rPr lang="zh-TW" altLang="en-US" sz="1600" dirty="0">
+                <a:latin typeface="Times New Roman" panose="02020603050405020304" pitchFamily="18" charset="0"/>
+                <a:ea typeface="標楷體" panose="03000509000000000000" pitchFamily="65" charset="-120"/>
+                <a:cs typeface="Times New Roman" panose="02020603050405020304" pitchFamily="18" charset="0"/>
+              </a:rPr>
+              <a:t>須確認目標 </a:t>
+            </a:r>
+            <a:r>
+              <a:rPr lang="en-US" altLang="zh-TW" sz="1600" dirty="0">
+                <a:latin typeface="Times New Roman" panose="02020603050405020304" pitchFamily="18" charset="0"/>
+                <a:ea typeface="標楷體" panose="03000509000000000000" pitchFamily="65" charset="-120"/>
+                <a:cs typeface="Times New Roman" panose="02020603050405020304" pitchFamily="18" charset="0"/>
+              </a:rPr>
+              <a:t>FPGA</a:t>
+            </a:r>
+            <a:r>
+              <a:rPr lang="zh-TW" altLang="en-US" sz="1600" dirty="0">
+                <a:latin typeface="Times New Roman" panose="02020603050405020304" pitchFamily="18" charset="0"/>
+                <a:ea typeface="標楷體" panose="03000509000000000000" pitchFamily="65" charset="-120"/>
+                <a:cs typeface="Times New Roman" panose="02020603050405020304" pitchFamily="18" charset="0"/>
+              </a:rPr>
+              <a:t>、</a:t>
+            </a:r>
+            <a:r>
+              <a:rPr lang="en-US" altLang="zh-TW" sz="1600" dirty="0">
+                <a:latin typeface="Times New Roman" panose="02020603050405020304" pitchFamily="18" charset="0"/>
+                <a:ea typeface="標楷體" panose="03000509000000000000" pitchFamily="65" charset="-120"/>
+                <a:cs typeface="Times New Roman" panose="02020603050405020304" pitchFamily="18" charset="0"/>
+              </a:rPr>
+              <a:t>PCIe </a:t>
+            </a:r>
+            <a:r>
+              <a:rPr lang="zh-TW" altLang="en-US" sz="1600" dirty="0">
+                <a:latin typeface="Times New Roman" panose="02020603050405020304" pitchFamily="18" charset="0"/>
+                <a:ea typeface="標楷體" panose="03000509000000000000" pitchFamily="65" charset="-120"/>
+                <a:cs typeface="Times New Roman" panose="02020603050405020304" pitchFamily="18" charset="0"/>
+              </a:rPr>
+              <a:t>介面、記憶體及工具鏈的支援情況</a:t>
+            </a:r>
+            <a:endParaRPr lang="en-US" altLang="zh-TW" sz="1600" dirty="0">
+              <a:latin typeface="Times New Roman" panose="02020603050405020304" pitchFamily="18" charset="0"/>
+              <a:ea typeface="標楷體" panose="03000509000000000000" pitchFamily="65" charset="-120"/>
+              <a:cs typeface="Times New Roman" panose="02020603050405020304" pitchFamily="18" charset="0"/>
+            </a:endParaRPr>
+          </a:p>
+          <a:p>
+            <a:pPr lvl="1">
+              <a:lnSpc>
+                <a:spcPts val="3000"/>
+              </a:lnSpc>
+            </a:pPr>
+            <a:r>
+              <a:rPr lang="en-US" altLang="zh-TW" sz="1600" dirty="0" err="1">
+                <a:latin typeface="Times New Roman" panose="02020603050405020304" pitchFamily="18" charset="0"/>
+                <a:ea typeface="標楷體" panose="03000509000000000000" pitchFamily="65" charset="-120"/>
+                <a:cs typeface="Times New Roman" panose="02020603050405020304" pitchFamily="18" charset="0"/>
+              </a:rPr>
+              <a:t>LiteVideo</a:t>
+            </a:r>
+            <a:r>
+              <a:rPr lang="en-US" altLang="zh-TW" sz="1600" dirty="0">
+                <a:latin typeface="Times New Roman" panose="02020603050405020304" pitchFamily="18" charset="0"/>
+                <a:ea typeface="標楷體" panose="03000509000000000000" pitchFamily="65" charset="-120"/>
+                <a:cs typeface="Times New Roman" panose="02020603050405020304" pitchFamily="18" charset="0"/>
+              </a:rPr>
+              <a:t> </a:t>
+            </a:r>
+            <a:r>
+              <a:rPr lang="zh-TW" altLang="en-US" sz="1600" dirty="0">
+                <a:latin typeface="Times New Roman" panose="02020603050405020304" pitchFamily="18" charset="0"/>
+                <a:ea typeface="標楷體" panose="03000509000000000000" pitchFamily="65" charset="-120"/>
+                <a:cs typeface="Times New Roman" panose="02020603050405020304" pitchFamily="18" charset="0"/>
+              </a:rPr>
+              <a:t>可用性與 </a:t>
+            </a:r>
+            <a:r>
+              <a:rPr lang="en-US" altLang="zh-TW" sz="1600" dirty="0">
+                <a:latin typeface="Times New Roman" panose="02020603050405020304" pitchFamily="18" charset="0"/>
+                <a:ea typeface="標楷體" panose="03000509000000000000" pitchFamily="65" charset="-120"/>
+                <a:cs typeface="Times New Roman" panose="02020603050405020304" pitchFamily="18" charset="0"/>
+              </a:rPr>
+              <a:t>NeTV2 </a:t>
+            </a:r>
+            <a:r>
+              <a:rPr lang="zh-TW" altLang="en-US" sz="1600" dirty="0">
+                <a:latin typeface="Times New Roman" panose="02020603050405020304" pitchFamily="18" charset="0"/>
+                <a:ea typeface="標楷體" panose="03000509000000000000" pitchFamily="65" charset="-120"/>
+                <a:cs typeface="Times New Roman" panose="02020603050405020304" pitchFamily="18" charset="0"/>
+              </a:rPr>
+              <a:t>是否能提供可重用的 </a:t>
+            </a:r>
+            <a:r>
+              <a:rPr lang="en-US" altLang="zh-TW" sz="1600" dirty="0">
+                <a:latin typeface="Times New Roman" panose="02020603050405020304" pitchFamily="18" charset="0"/>
+                <a:ea typeface="標楷體" panose="03000509000000000000" pitchFamily="65" charset="-120"/>
+                <a:cs typeface="Times New Roman" panose="02020603050405020304" pitchFamily="18" charset="0"/>
+              </a:rPr>
+              <a:t>HDMI </a:t>
+            </a:r>
+            <a:r>
+              <a:rPr lang="zh-TW" altLang="en-US" sz="1600" dirty="0">
+                <a:latin typeface="Times New Roman" panose="02020603050405020304" pitchFamily="18" charset="0"/>
+                <a:ea typeface="標楷體" panose="03000509000000000000" pitchFamily="65" charset="-120"/>
+                <a:cs typeface="Times New Roman" panose="02020603050405020304" pitchFamily="18" charset="0"/>
+              </a:rPr>
+              <a:t>影像端 </a:t>
+            </a:r>
+            <a:r>
+              <a:rPr lang="en-US" altLang="zh-TW" sz="1600" dirty="0">
+                <a:latin typeface="Times New Roman" panose="02020603050405020304" pitchFamily="18" charset="0"/>
+                <a:ea typeface="標楷體" panose="03000509000000000000" pitchFamily="65" charset="-120"/>
+                <a:cs typeface="Times New Roman" panose="02020603050405020304" pitchFamily="18" charset="0"/>
+              </a:rPr>
+              <a:t>RTL</a:t>
+            </a:r>
+          </a:p>
+          <a:p>
+            <a:pPr lvl="1">
+              <a:lnSpc>
+                <a:spcPts val="3000"/>
+              </a:lnSpc>
+            </a:pPr>
+            <a:endParaRPr lang="zh-TW" altLang="en-US" sz="1200" dirty="0">
+              <a:latin typeface="Times New Roman" panose="02020603050405020304" pitchFamily="18" charset="0"/>
+              <a:ea typeface="標楷體" panose="03000509000000000000" pitchFamily="65" charset="-120"/>
+              <a:cs typeface="Times New Roman" panose="02020603050405020304" pitchFamily="18" charset="0"/>
+            </a:endParaRPr>
+          </a:p>
+          <a:p>
+            <a:pPr lvl="1">
+              <a:lnSpc>
+                <a:spcPts val="3000"/>
+              </a:lnSpc>
+            </a:pPr>
+            <a:endParaRPr lang="en-US" altLang="zh-TW" sz="1600" dirty="0">
+              <a:latin typeface="Times New Roman" panose="02020603050405020304" pitchFamily="18" charset="0"/>
+              <a:ea typeface="標楷體" panose="03000509000000000000" pitchFamily="65" charset="-120"/>
+              <a:cs typeface="Times New Roman" panose="02020603050405020304" pitchFamily="18" charset="0"/>
+            </a:endParaRPr>
+          </a:p>
+          <a:p>
+            <a:pPr lvl="1">
+              <a:lnSpc>
+                <a:spcPts val="3000"/>
+              </a:lnSpc>
+            </a:pPr>
+            <a:endParaRPr lang="zh-TW" altLang="en-US" sz="1600" dirty="0">
+              <a:latin typeface="Times New Roman" panose="02020603050405020304" pitchFamily="18" charset="0"/>
+              <a:ea typeface="標楷體" panose="03000509000000000000" pitchFamily="65" charset="-120"/>
+              <a:cs typeface="Times New Roman" panose="02020603050405020304" pitchFamily="18" charset="0"/>
+            </a:endParaRPr>
+          </a:p>
+          <a:p>
+            <a:pPr lvl="1">
+              <a:lnSpc>
+                <a:spcPts val="3000"/>
+              </a:lnSpc>
+            </a:pPr>
+            <a:endParaRPr lang="en-US" altLang="zh-TW" sz="1600" dirty="0">
+              <a:solidFill>
+                <a:schemeClr val="tx1"/>
+              </a:solidFill>
+              <a:latin typeface="Times New Roman" panose="02020603050405020304" pitchFamily="18" charset="0"/>
+              <a:ea typeface="標楷體" panose="03000509000000000000" pitchFamily="65" charset="-120"/>
+              <a:cs typeface="Times New Roman" panose="02020603050405020304" pitchFamily="18" charset="0"/>
+            </a:endParaRPr>
+          </a:p>
+          <a:p>
+            <a:pPr lvl="1">
+              <a:lnSpc>
+                <a:spcPts val="3000"/>
+              </a:lnSpc>
+            </a:pPr>
+            <a:endParaRPr lang="zh-TW" altLang="en-US" sz="1600" dirty="0">
+              <a:latin typeface="Times New Roman" panose="02020603050405020304" pitchFamily="18" charset="0"/>
+              <a:ea typeface="標楷體" panose="03000509000000000000" pitchFamily="65" charset="-120"/>
+              <a:cs typeface="Times New Roman" panose="02020603050405020304" pitchFamily="18" charset="0"/>
+            </a:endParaRPr>
+          </a:p>
+          <a:p>
+            <a:pPr lvl="1">
+              <a:lnSpc>
+                <a:spcPts val="3000"/>
+              </a:lnSpc>
+            </a:pPr>
+            <a:endParaRPr lang="en-US" altLang="zh-TW" sz="1600" dirty="0">
+              <a:solidFill>
+                <a:schemeClr val="tx1"/>
+              </a:solidFill>
+              <a:latin typeface="Times New Roman" panose="02020603050405020304" pitchFamily="18" charset="0"/>
+              <a:ea typeface="標楷體" panose="03000509000000000000" pitchFamily="65" charset="-120"/>
+              <a:cs typeface="Times New Roman" panose="02020603050405020304" pitchFamily="18" charset="0"/>
+            </a:endParaRPr>
+          </a:p>
+        </p:txBody>
+      </p:sp>
+      <p:pic>
+        <p:nvPicPr>
+          <p:cNvPr id="10" name="圖片 9">
+            <a:extLst>
+              <a:ext uri="{FF2B5EF4-FFF2-40B4-BE49-F238E27FC236}">
+                <a16:creationId xmlns:a16="http://schemas.microsoft.com/office/drawing/2014/main" id="{A60169C1-DABD-C18E-CA96-E01B44C30E51}"/>
+              </a:ext>
+            </a:extLst>
+          </p:cNvPr>
+          <p:cNvPicPr>
+            <a:picLocks noChangeAspect="1"/>
+          </p:cNvPicPr>
+          <p:nvPr/>
+        </p:nvPicPr>
+        <p:blipFill>
+          <a:blip r:embed="rId3"/>
+          <a:stretch>
+            <a:fillRect/>
+          </a:stretch>
+        </p:blipFill>
+        <p:spPr>
+          <a:xfrm>
+            <a:off x="395968" y="1593078"/>
+            <a:ext cx="9114064" cy="981248"/>
+          </a:xfrm>
+          <a:prstGeom prst="rect">
+            <a:avLst/>
+          </a:prstGeom>
+        </p:spPr>
+      </p:pic>
+    </p:spTree>
+    <p:extLst>
+      <p:ext uri="{BB962C8B-B14F-4D97-AF65-F5344CB8AC3E}">
+        <p14:creationId xmlns:p14="http://schemas.microsoft.com/office/powerpoint/2010/main" val="302465700"/>
+      </p:ext>
+    </p:extLst>
+  </p:cSld>
+  <p:clrMapOvr>
+    <a:masterClrMapping/>
+  </p:clrMapOvr>
+</p:sld>
+</file>
+
+<file path=ppt/slides/slide5.xml><?xml version="1.0" encoding="utf-8"?>
+<p:sld xmlns:a="http://schemas.openxmlformats.org/drawingml/2006/main" xmlns:r="http://schemas.openxmlformats.org/officeDocument/2006/relationships" xmlns:p="http://schemas.openxmlformats.org/presentationml/2006/main">
+  <p:cSld>
+    <p:spTree>
+      <p:nvGrpSpPr>
+        <p:cNvPr id="1" name="">
+          <a:extLst>
+            <a:ext uri="{FF2B5EF4-FFF2-40B4-BE49-F238E27FC236}">
+              <a16:creationId xmlns:a16="http://schemas.microsoft.com/office/drawing/2014/main" id="{C25E9AAA-7E36-1E17-83F9-FD3A18A28BE9}"/>
+            </a:ext>
+          </a:extLst>
+        </p:cNvPr>
+        <p:cNvGrpSpPr/>
+        <p:nvPr/>
+      </p:nvGrpSpPr>
+      <p:grpSpPr>
+        <a:xfrm>
+          <a:off x="0" y="0"/>
+          <a:ext cx="0" cy="0"/>
+          <a:chOff x="0" y="0"/>
+          <a:chExt cx="0" cy="0"/>
+        </a:xfrm>
+      </p:grpSpPr>
+      <p:sp>
+        <p:nvSpPr>
+          <p:cNvPr id="15" name="標題 1">
+            <a:extLst>
+              <a:ext uri="{FF2B5EF4-FFF2-40B4-BE49-F238E27FC236}">
+                <a16:creationId xmlns:a16="http://schemas.microsoft.com/office/drawing/2014/main" id="{142C8726-E890-9988-40FC-8984FDA21FEE}"/>
+              </a:ext>
+            </a:extLst>
+          </p:cNvPr>
+          <p:cNvSpPr>
+            <a:spLocks noGrp="1"/>
+          </p:cNvSpPr>
+          <p:nvPr>
+            <p:ph type="title"/>
+          </p:nvPr>
+        </p:nvSpPr>
+        <p:spPr>
+          <a:xfrm>
+            <a:off x="609602" y="609600"/>
+            <a:ext cx="8077200" cy="533400"/>
+          </a:xfrm>
+          <a:ln>
+            <a:noFill/>
+          </a:ln>
+        </p:spPr>
+        <p:txBody>
+          <a:bodyPr/>
+          <a:lstStyle/>
+          <a:p>
+            <a:pPr algn="l" fontAlgn="t"/>
+            <a:r>
+              <a:rPr lang="zh-TW" altLang="en-US" dirty="0">
+                <a:latin typeface="Times New Roman" panose="02020603050405020304" pitchFamily="18" charset="0"/>
+                <a:ea typeface="標楷體" panose="03000509000000000000" pitchFamily="65" charset="-120"/>
+                <a:cs typeface="Times New Roman" panose="02020603050405020304" pitchFamily="18" charset="0"/>
+              </a:rPr>
+              <a:t>本次進度</a:t>
+            </a:r>
+            <a:r>
+              <a:rPr lang="en-US" altLang="zh-TW" dirty="0">
+                <a:latin typeface="Times New Roman" panose="02020603050405020304" pitchFamily="18" charset="0"/>
+                <a:ea typeface="標楷體" panose="03000509000000000000" pitchFamily="65" charset="-120"/>
+                <a:cs typeface="Times New Roman" panose="02020603050405020304" pitchFamily="18" charset="0"/>
+              </a:rPr>
+              <a:t>: Xilinx </a:t>
+            </a:r>
+            <a:r>
+              <a:rPr lang="zh-TW" altLang="en-US" dirty="0">
+                <a:latin typeface="Times New Roman" panose="02020603050405020304" pitchFamily="18" charset="0"/>
+                <a:ea typeface="標楷體" panose="03000509000000000000" pitchFamily="65" charset="-120"/>
+                <a:cs typeface="Times New Roman" panose="02020603050405020304" pitchFamily="18" charset="0"/>
+              </a:rPr>
+              <a:t>生態</a:t>
+            </a:r>
+          </a:p>
+        </p:txBody>
+      </p:sp>
+      <p:sp>
+        <p:nvSpPr>
+          <p:cNvPr id="8" name="文字版面配置區 6">
+            <a:extLst>
+              <a:ext uri="{FF2B5EF4-FFF2-40B4-BE49-F238E27FC236}">
+                <a16:creationId xmlns:a16="http://schemas.microsoft.com/office/drawing/2014/main" id="{521FBAA4-6E6B-1B82-9C1F-77D9FAD35C41}"/>
+              </a:ext>
+            </a:extLst>
+          </p:cNvPr>
+          <p:cNvSpPr txBox="1"/>
+          <p:nvPr/>
+        </p:nvSpPr>
+        <p:spPr>
+          <a:xfrm>
+            <a:off x="609602" y="935857"/>
+            <a:ext cx="8686796" cy="4700685"/>
+          </a:xfrm>
+          <a:prstGeom prst="rect">
+            <a:avLst/>
+          </a:prstGeom>
+          <a:noFill/>
+          <a:ln>
+            <a:noFill/>
+          </a:ln>
+        </p:spPr>
+        <p:txBody>
+          <a:bodyPr spcFirstLastPara="1" wrap="square" lIns="91425" tIns="45700" rIns="91425" bIns="45700" anchor="t" anchorCtr="0">
+            <a:noAutofit/>
+          </a:bodyPr>
+          <a:lstStyle>
+            <a:defPPr marR="0" lvl="0" algn="l" rtl="0">
+              <a:lnSpc>
+                <a:spcPct val="100000"/>
+              </a:lnSpc>
+              <a:spcBef>
+                <a:spcPts val="0"/>
+              </a:spcBef>
+              <a:spcAft>
+                <a:spcPts val="0"/>
+              </a:spcAft>
+            </a:defPPr>
+            <a:lvl1pPr marL="457200" marR="0" lvl="0" indent="-406400" algn="l" rtl="0">
+              <a:lnSpc>
+                <a:spcPct val="100000"/>
+              </a:lnSpc>
+              <a:spcBef>
+                <a:spcPts val="560"/>
+              </a:spcBef>
+              <a:spcAft>
+                <a:spcPts val="0"/>
+              </a:spcAft>
+              <a:buClr>
+                <a:schemeClr val="accent2"/>
+              </a:buClr>
+              <a:buSzPts val="2800"/>
+              <a:buFont typeface="Noto Sans Symbols"/>
+              <a:buChar char="❖"/>
+              <a:defRPr sz="2800" b="0" i="0" u="none" strike="noStrike" cap="none">
+                <a:solidFill>
+                  <a:schemeClr val="dk1"/>
+                </a:solidFill>
+                <a:latin typeface="Times New Roman"/>
+                <a:ea typeface="Times New Roman"/>
+                <a:cs typeface="Times New Roman"/>
+                <a:sym typeface="Times New Roman"/>
+              </a:defRPr>
+            </a:lvl1pPr>
+            <a:lvl2pPr marL="914400" marR="0" lvl="1" indent="-381000" algn="l" rtl="0">
+              <a:lnSpc>
+                <a:spcPct val="100000"/>
+              </a:lnSpc>
+              <a:spcBef>
+                <a:spcPts val="480"/>
+              </a:spcBef>
+              <a:spcAft>
+                <a:spcPts val="0"/>
+              </a:spcAft>
+              <a:buClr>
+                <a:srgbClr val="FF5050"/>
+              </a:buClr>
+              <a:buSzPts val="2400"/>
+              <a:buFont typeface="Noto Sans Symbols"/>
+              <a:buChar char="▪"/>
+              <a:defRPr sz="2400" b="0" i="0" u="none" strike="noStrike" cap="none">
+                <a:solidFill>
+                  <a:schemeClr val="dk1"/>
+                </a:solidFill>
+                <a:latin typeface="Times New Roman"/>
+                <a:ea typeface="Times New Roman"/>
+                <a:cs typeface="Times New Roman"/>
+                <a:sym typeface="Times New Roman"/>
+              </a:defRPr>
+            </a:lvl2pPr>
+            <a:lvl3pPr marL="1371600" marR="0" lvl="2" indent="-355600" algn="l" rtl="0">
+              <a:lnSpc>
+                <a:spcPct val="100000"/>
+              </a:lnSpc>
+              <a:spcBef>
+                <a:spcPts val="400"/>
+              </a:spcBef>
+              <a:spcAft>
+                <a:spcPts val="0"/>
+              </a:spcAft>
+              <a:buClr>
+                <a:srgbClr val="6699FF"/>
+              </a:buClr>
+              <a:buSzPts val="2000"/>
+              <a:buFont typeface="Times New Roman"/>
+              <a:buChar char="•"/>
+              <a:defRPr sz="2000" b="0" i="0" u="none" strike="noStrike" cap="none">
+                <a:solidFill>
+                  <a:schemeClr val="dk1"/>
+                </a:solidFill>
+                <a:latin typeface="Times New Roman"/>
+                <a:ea typeface="Times New Roman"/>
+                <a:cs typeface="Times New Roman"/>
+                <a:sym typeface="Times New Roman"/>
+              </a:defRPr>
+            </a:lvl3pPr>
+            <a:lvl4pPr marL="1828800" marR="0" lvl="3" indent="-355600" algn="l" rtl="0">
+              <a:lnSpc>
+                <a:spcPct val="100000"/>
+              </a:lnSpc>
+              <a:spcBef>
+                <a:spcPts val="400"/>
+              </a:spcBef>
+              <a:spcAft>
+                <a:spcPts val="0"/>
+              </a:spcAft>
+              <a:buClr>
+                <a:srgbClr val="FF5050"/>
+              </a:buClr>
+              <a:buSzPts val="2000"/>
+              <a:buFont typeface="Times New Roman"/>
+              <a:buChar char="o"/>
+              <a:defRPr sz="2000" b="0" i="0" u="none" strike="noStrike" cap="none">
+                <a:solidFill>
+                  <a:schemeClr val="dk1"/>
+                </a:solidFill>
+                <a:latin typeface="Times New Roman"/>
+                <a:ea typeface="Times New Roman"/>
+                <a:cs typeface="Times New Roman"/>
+                <a:sym typeface="Times New Roman"/>
+              </a:defRPr>
+            </a:lvl4pPr>
+            <a:lvl5pPr marL="2286000" marR="0" lvl="4" indent="-355600" algn="l" rtl="0">
+              <a:lnSpc>
+                <a:spcPct val="100000"/>
+              </a:lnSpc>
+              <a:spcBef>
+                <a:spcPts val="400"/>
+              </a:spcBef>
+              <a:spcAft>
+                <a:spcPts val="0"/>
+              </a:spcAft>
+              <a:buClr>
+                <a:srgbClr val="FF5050"/>
+              </a:buClr>
+              <a:buSzPts val="2000"/>
+              <a:buFont typeface="Times New Roman"/>
+              <a:buChar char="o"/>
+              <a:defRPr sz="2000" b="0" i="0" u="none" strike="noStrike" cap="none">
+                <a:solidFill>
+                  <a:schemeClr val="dk1"/>
+                </a:solidFill>
+                <a:latin typeface="Times New Roman"/>
+                <a:ea typeface="Times New Roman"/>
+                <a:cs typeface="Times New Roman"/>
+                <a:sym typeface="Times New Roman"/>
+              </a:defRPr>
+            </a:lvl5pPr>
+            <a:lvl6pPr marL="2743200" marR="0" lvl="5" indent="-355600" algn="l" rtl="0">
+              <a:lnSpc>
+                <a:spcPct val="100000"/>
+              </a:lnSpc>
+              <a:spcBef>
+                <a:spcPts val="400"/>
+              </a:spcBef>
+              <a:spcAft>
+                <a:spcPts val="0"/>
+              </a:spcAft>
+              <a:buClr>
+                <a:srgbClr val="FF5050"/>
+              </a:buClr>
+              <a:buSzPts val="2000"/>
+              <a:buFont typeface="Times New Roman"/>
+              <a:buChar char="o"/>
+              <a:defRPr sz="2000" b="0" i="0" u="none" strike="noStrike" cap="none">
+                <a:solidFill>
+                  <a:schemeClr val="dk1"/>
+                </a:solidFill>
+                <a:latin typeface="Times New Roman"/>
+                <a:ea typeface="Times New Roman"/>
+                <a:cs typeface="Times New Roman"/>
+                <a:sym typeface="Times New Roman"/>
+              </a:defRPr>
+            </a:lvl6pPr>
+            <a:lvl7pPr marL="3200400" marR="0" lvl="6" indent="-355600" algn="l" rtl="0">
+              <a:lnSpc>
+                <a:spcPct val="100000"/>
+              </a:lnSpc>
+              <a:spcBef>
+                <a:spcPts val="400"/>
+              </a:spcBef>
+              <a:spcAft>
+                <a:spcPts val="0"/>
+              </a:spcAft>
+              <a:buClr>
+                <a:srgbClr val="FF5050"/>
+              </a:buClr>
+              <a:buSzPts val="2000"/>
+              <a:buFont typeface="Times New Roman"/>
+              <a:buChar char="o"/>
+              <a:defRPr sz="2000" b="0" i="0" u="none" strike="noStrike" cap="none">
+                <a:solidFill>
+                  <a:schemeClr val="dk1"/>
+                </a:solidFill>
+                <a:latin typeface="Times New Roman"/>
+                <a:ea typeface="Times New Roman"/>
+                <a:cs typeface="Times New Roman"/>
+                <a:sym typeface="Times New Roman"/>
+              </a:defRPr>
+            </a:lvl7pPr>
+            <a:lvl8pPr marL="3657600" marR="0" lvl="7" indent="-355600" algn="l" rtl="0">
+              <a:lnSpc>
+                <a:spcPct val="100000"/>
+              </a:lnSpc>
+              <a:spcBef>
+                <a:spcPts val="400"/>
+              </a:spcBef>
+              <a:spcAft>
+                <a:spcPts val="0"/>
+              </a:spcAft>
+              <a:buClr>
+                <a:srgbClr val="FF5050"/>
+              </a:buClr>
+              <a:buSzPts val="2000"/>
+              <a:buFont typeface="Times New Roman"/>
+              <a:buChar char="o"/>
+              <a:defRPr sz="2000" b="0" i="0" u="none" strike="noStrike" cap="none">
+                <a:solidFill>
+                  <a:schemeClr val="dk1"/>
+                </a:solidFill>
+                <a:latin typeface="Times New Roman"/>
+                <a:ea typeface="Times New Roman"/>
+                <a:cs typeface="Times New Roman"/>
+                <a:sym typeface="Times New Roman"/>
+              </a:defRPr>
+            </a:lvl8pPr>
+            <a:lvl9pPr marL="4114800" marR="0" lvl="8" indent="-355600" algn="l" rtl="0">
+              <a:lnSpc>
+                <a:spcPct val="100000"/>
+              </a:lnSpc>
+              <a:spcBef>
+                <a:spcPts val="400"/>
+              </a:spcBef>
+              <a:spcAft>
+                <a:spcPts val="0"/>
+              </a:spcAft>
+              <a:buClr>
+                <a:srgbClr val="FF5050"/>
+              </a:buClr>
+              <a:buSzPts val="2000"/>
+              <a:buFont typeface="Times New Roman"/>
+              <a:buChar char="o"/>
+              <a:defRPr sz="2000" b="0" i="0" u="none" strike="noStrike" cap="none">
+                <a:solidFill>
+                  <a:schemeClr val="dk1"/>
+                </a:solidFill>
+                <a:latin typeface="Times New Roman"/>
+                <a:ea typeface="Times New Roman"/>
+                <a:cs typeface="Times New Roman"/>
+                <a:sym typeface="Times New Roman"/>
+              </a:defRPr>
+            </a:lvl9pPr>
+          </a:lstStyle>
+          <a:p>
+            <a:pPr>
+              <a:lnSpc>
+                <a:spcPct val="150000"/>
+              </a:lnSpc>
+            </a:pPr>
+            <a:r>
+              <a:rPr lang="zh-TW" altLang="en-US" sz="2000" dirty="0">
+                <a:solidFill>
+                  <a:schemeClr val="tx1"/>
+                </a:solidFill>
+                <a:latin typeface="Times New Roman" panose="02020603050405020304" pitchFamily="18" charset="0"/>
+                <a:ea typeface="標楷體" panose="03000509000000000000" pitchFamily="65" charset="-120"/>
+                <a:cs typeface="Times New Roman" panose="02020603050405020304" pitchFamily="18" charset="0"/>
+              </a:rPr>
+              <a:t>架構</a:t>
+            </a:r>
+            <a:endParaRPr lang="en-US" altLang="zh-TW" sz="2000" dirty="0">
+              <a:solidFill>
+                <a:schemeClr val="tx1"/>
+              </a:solidFill>
+              <a:latin typeface="Times New Roman" panose="02020603050405020304" pitchFamily="18" charset="0"/>
+              <a:ea typeface="標楷體" panose="03000509000000000000" pitchFamily="65" charset="-120"/>
+              <a:cs typeface="Times New Roman" panose="02020603050405020304" pitchFamily="18" charset="0"/>
+            </a:endParaRPr>
+          </a:p>
+          <a:p>
+            <a:pPr>
+              <a:lnSpc>
+                <a:spcPct val="150000"/>
+              </a:lnSpc>
+            </a:pPr>
+            <a:endParaRPr lang="en-US" altLang="zh-TW" sz="2000" dirty="0">
+              <a:solidFill>
+                <a:schemeClr val="tx1"/>
+              </a:solidFill>
+              <a:latin typeface="Times New Roman" panose="02020603050405020304" pitchFamily="18" charset="0"/>
+              <a:ea typeface="標楷體" panose="03000509000000000000" pitchFamily="65" charset="-120"/>
+              <a:cs typeface="Times New Roman" panose="02020603050405020304" pitchFamily="18" charset="0"/>
+            </a:endParaRPr>
+          </a:p>
+          <a:p>
+            <a:pPr>
+              <a:lnSpc>
+                <a:spcPct val="150000"/>
+              </a:lnSpc>
+            </a:pPr>
+            <a:endParaRPr lang="en-US" altLang="zh-TW" sz="2000" dirty="0">
+              <a:solidFill>
+                <a:schemeClr val="tx1"/>
+              </a:solidFill>
+              <a:latin typeface="Times New Roman" panose="02020603050405020304" pitchFamily="18" charset="0"/>
+              <a:ea typeface="標楷體" panose="03000509000000000000" pitchFamily="65" charset="-120"/>
+              <a:cs typeface="Times New Roman" panose="02020603050405020304" pitchFamily="18" charset="0"/>
+            </a:endParaRPr>
+          </a:p>
+          <a:p>
+            <a:pPr>
+              <a:lnSpc>
+                <a:spcPct val="150000"/>
+              </a:lnSpc>
+            </a:pPr>
+            <a:endParaRPr lang="en-US" altLang="zh-TW" sz="2000" dirty="0">
+              <a:solidFill>
+                <a:schemeClr val="tx1"/>
+              </a:solidFill>
+              <a:latin typeface="Times New Roman" panose="02020603050405020304" pitchFamily="18" charset="0"/>
+              <a:ea typeface="標楷體" panose="03000509000000000000" pitchFamily="65" charset="-120"/>
+              <a:cs typeface="Times New Roman" panose="02020603050405020304" pitchFamily="18" charset="0"/>
+            </a:endParaRPr>
+          </a:p>
+          <a:p>
+            <a:pPr>
+              <a:lnSpc>
+                <a:spcPct val="150000"/>
+              </a:lnSpc>
+            </a:pPr>
+            <a:r>
+              <a:rPr lang="zh-TW" altLang="en-US" sz="2000" dirty="0">
+                <a:solidFill>
+                  <a:schemeClr val="tx1"/>
+                </a:solidFill>
+                <a:latin typeface="Times New Roman" panose="02020603050405020304" pitchFamily="18" charset="0"/>
+                <a:ea typeface="標楷體" panose="03000509000000000000" pitchFamily="65" charset="-120"/>
+                <a:cs typeface="Times New Roman" panose="02020603050405020304" pitchFamily="18" charset="0"/>
+              </a:rPr>
+              <a:t>優勢</a:t>
+            </a:r>
+            <a:endParaRPr lang="en-US" altLang="zh-TW" sz="2000" dirty="0">
+              <a:solidFill>
+                <a:schemeClr val="tx1"/>
+              </a:solidFill>
+              <a:latin typeface="Times New Roman" panose="02020603050405020304" pitchFamily="18" charset="0"/>
+              <a:ea typeface="標楷體" panose="03000509000000000000" pitchFamily="65" charset="-120"/>
+              <a:cs typeface="Times New Roman" panose="02020603050405020304" pitchFamily="18" charset="0"/>
+            </a:endParaRPr>
+          </a:p>
+          <a:p>
+            <a:pPr lvl="1">
+              <a:lnSpc>
+                <a:spcPts val="3000"/>
+              </a:lnSpc>
+            </a:pPr>
+            <a:r>
+              <a:rPr lang="zh-TW" altLang="en-US" sz="1600" dirty="0">
+                <a:latin typeface="Times New Roman" panose="02020603050405020304" pitchFamily="18" charset="0"/>
+                <a:ea typeface="標楷體" panose="03000509000000000000" pitchFamily="65" charset="-120"/>
+                <a:cs typeface="Times New Roman" panose="02020603050405020304" pitchFamily="18" charset="0"/>
+              </a:rPr>
+              <a:t>重用既有 </a:t>
+            </a:r>
+            <a:r>
+              <a:rPr lang="en-US" altLang="zh-TW" sz="1600" dirty="0">
+                <a:latin typeface="Times New Roman" panose="02020603050405020304" pitchFamily="18" charset="0"/>
+                <a:ea typeface="標楷體" panose="03000509000000000000" pitchFamily="65" charset="-120"/>
+                <a:cs typeface="Times New Roman" panose="02020603050405020304" pitchFamily="18" charset="0"/>
+              </a:rPr>
+              <a:t>HDMI </a:t>
+            </a:r>
+            <a:r>
+              <a:rPr lang="zh-TW" altLang="en-US" sz="1600" dirty="0">
+                <a:latin typeface="Times New Roman" panose="02020603050405020304" pitchFamily="18" charset="0"/>
+                <a:ea typeface="標楷體" panose="03000509000000000000" pitchFamily="65" charset="-120"/>
+                <a:cs typeface="Times New Roman" panose="02020603050405020304" pitchFamily="18" charset="0"/>
+              </a:rPr>
+              <a:t>接收與影像處理 </a:t>
+            </a:r>
+            <a:r>
+              <a:rPr lang="en-US" altLang="zh-TW" sz="1600" dirty="0">
+                <a:latin typeface="Times New Roman" panose="02020603050405020304" pitchFamily="18" charset="0"/>
+                <a:ea typeface="標楷體" panose="03000509000000000000" pitchFamily="65" charset="-120"/>
+                <a:cs typeface="Times New Roman" panose="02020603050405020304" pitchFamily="18" charset="0"/>
+              </a:rPr>
+              <a:t>IP </a:t>
+            </a:r>
+            <a:r>
+              <a:rPr lang="zh-TW" altLang="en-US" sz="1600" dirty="0">
+                <a:latin typeface="Times New Roman" panose="02020603050405020304" pitchFamily="18" charset="0"/>
+                <a:ea typeface="標楷體" panose="03000509000000000000" pitchFamily="65" charset="-120"/>
+                <a:cs typeface="Times New Roman" panose="02020603050405020304" pitchFamily="18" charset="0"/>
+              </a:rPr>
+              <a:t>整合範例</a:t>
+            </a:r>
+            <a:endParaRPr lang="en-US" altLang="zh-TW" sz="1600" dirty="0">
+              <a:latin typeface="Times New Roman" panose="02020603050405020304" pitchFamily="18" charset="0"/>
+              <a:ea typeface="標楷體" panose="03000509000000000000" pitchFamily="65" charset="-120"/>
+              <a:cs typeface="Times New Roman" panose="02020603050405020304" pitchFamily="18" charset="0"/>
+            </a:endParaRPr>
+          </a:p>
+          <a:p>
+            <a:pPr lvl="1">
+              <a:lnSpc>
+                <a:spcPts val="3000"/>
+              </a:lnSpc>
+            </a:pPr>
+            <a:r>
+              <a:rPr lang="zh-TW" altLang="en-US" sz="1600" dirty="0">
+                <a:latin typeface="Times New Roman" panose="02020603050405020304" pitchFamily="18" charset="0"/>
+                <a:ea typeface="標楷體" panose="03000509000000000000" pitchFamily="65" charset="-120"/>
+                <a:cs typeface="Times New Roman" panose="02020603050405020304" pitchFamily="18" charset="0"/>
+              </a:rPr>
+              <a:t>使用 </a:t>
+            </a:r>
+            <a:r>
+              <a:rPr lang="en-US" altLang="zh-TW" sz="1600" dirty="0">
+                <a:latin typeface="Times New Roman" panose="02020603050405020304" pitchFamily="18" charset="0"/>
+                <a:ea typeface="標楷體" panose="03000509000000000000" pitchFamily="65" charset="-120"/>
+                <a:cs typeface="Times New Roman" panose="02020603050405020304" pitchFamily="18" charset="0"/>
+              </a:rPr>
+              <a:t>Xilinx DMA IP </a:t>
+            </a:r>
+            <a:r>
+              <a:rPr lang="zh-TW" altLang="en-US" sz="1600" dirty="0">
+                <a:latin typeface="Times New Roman" panose="02020603050405020304" pitchFamily="18" charset="0"/>
+                <a:ea typeface="標楷體" panose="03000509000000000000" pitchFamily="65" charset="-120"/>
+                <a:cs typeface="Times New Roman" panose="02020603050405020304" pitchFamily="18" charset="0"/>
+              </a:rPr>
+              <a:t>與配套驅動程式，減少 </a:t>
+            </a:r>
+            <a:r>
+              <a:rPr lang="en-US" altLang="zh-TW" sz="1600" dirty="0">
+                <a:latin typeface="Times New Roman" panose="02020603050405020304" pitchFamily="18" charset="0"/>
+                <a:ea typeface="標楷體" panose="03000509000000000000" pitchFamily="65" charset="-120"/>
+                <a:cs typeface="Times New Roman" panose="02020603050405020304" pitchFamily="18" charset="0"/>
+              </a:rPr>
+              <a:t>PCIe DMA </a:t>
+            </a:r>
+            <a:r>
+              <a:rPr lang="zh-TW" altLang="en-US" sz="1600" dirty="0">
+                <a:latin typeface="Times New Roman" panose="02020603050405020304" pitchFamily="18" charset="0"/>
+                <a:ea typeface="標楷體" panose="03000509000000000000" pitchFamily="65" charset="-120"/>
+                <a:cs typeface="Times New Roman" panose="02020603050405020304" pitchFamily="18" charset="0"/>
+              </a:rPr>
+              <a:t>控制及 </a:t>
+            </a:r>
+            <a:r>
+              <a:rPr lang="en-US" altLang="zh-TW" sz="1600" dirty="0">
+                <a:latin typeface="Times New Roman" panose="02020603050405020304" pitchFamily="18" charset="0"/>
+                <a:ea typeface="標楷體" panose="03000509000000000000" pitchFamily="65" charset="-120"/>
+                <a:cs typeface="Times New Roman" panose="02020603050405020304" pitchFamily="18" charset="0"/>
+              </a:rPr>
+              <a:t>PC Driver </a:t>
+            </a:r>
+            <a:r>
+              <a:rPr lang="zh-TW" altLang="en-US" sz="1600" dirty="0">
+                <a:latin typeface="Times New Roman" panose="02020603050405020304" pitchFamily="18" charset="0"/>
+                <a:ea typeface="標楷體" panose="03000509000000000000" pitchFamily="65" charset="-120"/>
+                <a:cs typeface="Times New Roman" panose="02020603050405020304" pitchFamily="18" charset="0"/>
+              </a:rPr>
+              <a:t>開發</a:t>
+            </a:r>
+            <a:endParaRPr lang="en-US" altLang="zh-TW" sz="1600" dirty="0">
+              <a:latin typeface="Times New Roman" panose="02020603050405020304" pitchFamily="18" charset="0"/>
+              <a:ea typeface="標楷體" panose="03000509000000000000" pitchFamily="65" charset="-120"/>
+              <a:cs typeface="Times New Roman" panose="02020603050405020304" pitchFamily="18" charset="0"/>
+            </a:endParaRPr>
+          </a:p>
+          <a:p>
+            <a:pPr>
+              <a:lnSpc>
+                <a:spcPts val="3000"/>
+              </a:lnSpc>
+            </a:pPr>
+            <a:r>
+              <a:rPr lang="zh-TW" altLang="en-US" sz="2000" dirty="0">
+                <a:latin typeface="Times New Roman" panose="02020603050405020304" pitchFamily="18" charset="0"/>
+                <a:ea typeface="標楷體" panose="03000509000000000000" pitchFamily="65" charset="-120"/>
+                <a:cs typeface="Times New Roman" panose="02020603050405020304" pitchFamily="18" charset="0"/>
+              </a:rPr>
+              <a:t>風險與待評估事項</a:t>
+            </a:r>
+          </a:p>
+          <a:p>
+            <a:pPr lvl="1">
+              <a:lnSpc>
+                <a:spcPts val="3000"/>
+              </a:lnSpc>
+            </a:pPr>
+            <a:r>
+              <a:rPr lang="zh-TW" altLang="en-US" sz="1600" dirty="0">
+                <a:latin typeface="Times New Roman" panose="02020603050405020304" pitchFamily="18" charset="0"/>
+                <a:ea typeface="標楷體" panose="03000509000000000000" pitchFamily="65" charset="-120"/>
+                <a:cs typeface="Times New Roman" panose="02020603050405020304" pitchFamily="18" charset="0"/>
+              </a:rPr>
+              <a:t>硬體相容性與工具鏈相容性 </a:t>
+            </a:r>
+            <a:r>
+              <a:rPr lang="en-US" altLang="zh-TW" sz="1600" dirty="0">
+                <a:latin typeface="Times New Roman" panose="02020603050405020304" pitchFamily="18" charset="0"/>
+                <a:ea typeface="標楷體" panose="03000509000000000000" pitchFamily="65" charset="-120"/>
+                <a:cs typeface="Times New Roman" panose="02020603050405020304" pitchFamily="18" charset="0"/>
+              </a:rPr>
+              <a:t>(</a:t>
+            </a:r>
+            <a:r>
+              <a:rPr lang="en-US" altLang="zh-TW" sz="1600" dirty="0" err="1">
+                <a:latin typeface="Times New Roman" panose="02020603050405020304" pitchFamily="18" charset="0"/>
+                <a:ea typeface="標楷體" panose="03000509000000000000" pitchFamily="65" charset="-120"/>
+                <a:cs typeface="Times New Roman" panose="02020603050405020304" pitchFamily="18" charset="0"/>
+              </a:rPr>
+              <a:t>Vivado</a:t>
+            </a:r>
+            <a:r>
+              <a:rPr lang="en-US" altLang="zh-TW" sz="1600" dirty="0">
+                <a:latin typeface="Times New Roman" panose="02020603050405020304" pitchFamily="18" charset="0"/>
+                <a:ea typeface="標楷體" panose="03000509000000000000" pitchFamily="65" charset="-120"/>
+                <a:cs typeface="Times New Roman" panose="02020603050405020304" pitchFamily="18" charset="0"/>
+              </a:rPr>
+              <a:t> / Vitis </a:t>
+            </a:r>
+            <a:r>
+              <a:rPr lang="zh-TW" altLang="en-US" sz="1600" dirty="0">
+                <a:latin typeface="Times New Roman" panose="02020603050405020304" pitchFamily="18" charset="0"/>
+                <a:ea typeface="標楷體" panose="03000509000000000000" pitchFamily="65" charset="-120"/>
+                <a:cs typeface="Times New Roman" panose="02020603050405020304" pitchFamily="18" charset="0"/>
+              </a:rPr>
+              <a:t>版本、</a:t>
+            </a:r>
+            <a:r>
+              <a:rPr lang="en-US" altLang="zh-TW" sz="1600" dirty="0">
+                <a:latin typeface="Times New Roman" panose="02020603050405020304" pitchFamily="18" charset="0"/>
+                <a:ea typeface="標楷體" panose="03000509000000000000" pitchFamily="65" charset="-120"/>
+                <a:cs typeface="Times New Roman" panose="02020603050405020304" pitchFamily="18" charset="0"/>
+              </a:rPr>
+              <a:t>IP </a:t>
+            </a:r>
+            <a:r>
+              <a:rPr lang="zh-TW" altLang="en-US" sz="1600" dirty="0">
+                <a:latin typeface="Times New Roman" panose="02020603050405020304" pitchFamily="18" charset="0"/>
+                <a:ea typeface="標楷體" panose="03000509000000000000" pitchFamily="65" charset="-120"/>
+                <a:cs typeface="Times New Roman" panose="02020603050405020304" pitchFamily="18" charset="0"/>
+              </a:rPr>
+              <a:t>授權</a:t>
+            </a:r>
+            <a:r>
+              <a:rPr lang="en-US" altLang="zh-TW" sz="1600" dirty="0">
+                <a:latin typeface="Times New Roman" panose="02020603050405020304" pitchFamily="18" charset="0"/>
+                <a:ea typeface="標楷體" panose="03000509000000000000" pitchFamily="65" charset="-120"/>
+                <a:cs typeface="Times New Roman" panose="02020603050405020304" pitchFamily="18" charset="0"/>
+              </a:rPr>
+              <a:t>)</a:t>
+            </a:r>
+          </a:p>
+          <a:p>
+            <a:pPr lvl="1">
+              <a:lnSpc>
+                <a:spcPts val="3000"/>
+              </a:lnSpc>
+            </a:pPr>
+            <a:r>
+              <a:rPr lang="zh-TW" altLang="en-US" sz="1600" dirty="0">
+                <a:latin typeface="Times New Roman" panose="02020603050405020304" pitchFamily="18" charset="0"/>
+                <a:ea typeface="標楷體" panose="03000509000000000000" pitchFamily="65" charset="-120"/>
+                <a:cs typeface="Times New Roman" panose="02020603050405020304" pitchFamily="18" charset="0"/>
+              </a:rPr>
+              <a:t>確認選定 </a:t>
+            </a:r>
+            <a:r>
+              <a:rPr lang="en-US" altLang="zh-TW" sz="1600" dirty="0">
+                <a:latin typeface="Times New Roman" panose="02020603050405020304" pitchFamily="18" charset="0"/>
+                <a:ea typeface="標楷體" panose="03000509000000000000" pitchFamily="65" charset="-120"/>
+                <a:cs typeface="Times New Roman" panose="02020603050405020304" pitchFamily="18" charset="0"/>
+              </a:rPr>
+              <a:t>XDMA </a:t>
+            </a:r>
+            <a:r>
+              <a:rPr lang="zh-TW" altLang="en-US" sz="1600" dirty="0">
+                <a:latin typeface="Times New Roman" panose="02020603050405020304" pitchFamily="18" charset="0"/>
+                <a:ea typeface="標楷體" panose="03000509000000000000" pitchFamily="65" charset="-120"/>
+                <a:cs typeface="Times New Roman" panose="02020603050405020304" pitchFamily="18" charset="0"/>
+              </a:rPr>
+              <a:t>或 </a:t>
+            </a:r>
+            <a:r>
+              <a:rPr lang="en-US" altLang="zh-TW" sz="1600" dirty="0">
+                <a:latin typeface="Times New Roman" panose="02020603050405020304" pitchFamily="18" charset="0"/>
+                <a:ea typeface="標楷體" panose="03000509000000000000" pitchFamily="65" charset="-120"/>
+                <a:cs typeface="Times New Roman" panose="02020603050405020304" pitchFamily="18" charset="0"/>
+              </a:rPr>
+              <a:t>QDMA </a:t>
+            </a:r>
+            <a:r>
+              <a:rPr lang="zh-TW" altLang="en-US" sz="1600" dirty="0">
+                <a:latin typeface="Times New Roman" panose="02020603050405020304" pitchFamily="18" charset="0"/>
+                <a:ea typeface="標楷體" panose="03000509000000000000" pitchFamily="65" charset="-120"/>
+                <a:cs typeface="Times New Roman" panose="02020603050405020304" pitchFamily="18" charset="0"/>
+              </a:rPr>
+              <a:t>後，驅動程式與 </a:t>
+            </a:r>
+            <a:r>
+              <a:rPr lang="en-US" altLang="zh-TW" sz="1600" dirty="0">
+                <a:latin typeface="Times New Roman" panose="02020603050405020304" pitchFamily="18" charset="0"/>
+                <a:ea typeface="標楷體" panose="03000509000000000000" pitchFamily="65" charset="-120"/>
+                <a:cs typeface="Times New Roman" panose="02020603050405020304" pitchFamily="18" charset="0"/>
+              </a:rPr>
+              <a:t>FPGA </a:t>
+            </a:r>
+            <a:r>
+              <a:rPr lang="zh-TW" altLang="en-US" sz="1600" dirty="0">
+                <a:latin typeface="Times New Roman" panose="02020603050405020304" pitchFamily="18" charset="0"/>
+                <a:ea typeface="標楷體" panose="03000509000000000000" pitchFamily="65" charset="-120"/>
+                <a:cs typeface="Times New Roman" panose="02020603050405020304" pitchFamily="18" charset="0"/>
+              </a:rPr>
+              <a:t>硬體設定相符</a:t>
+            </a:r>
+            <a:endParaRPr lang="en-US" altLang="zh-TW" sz="1600" dirty="0">
+              <a:latin typeface="Times New Roman" panose="02020603050405020304" pitchFamily="18" charset="0"/>
+              <a:ea typeface="標楷體" panose="03000509000000000000" pitchFamily="65" charset="-120"/>
+              <a:cs typeface="Times New Roman" panose="02020603050405020304" pitchFamily="18" charset="0"/>
+            </a:endParaRPr>
+          </a:p>
+          <a:p>
+            <a:pPr lvl="1">
+              <a:lnSpc>
+                <a:spcPts val="3000"/>
+              </a:lnSpc>
+            </a:pPr>
+            <a:endParaRPr lang="zh-TW" altLang="en-US" sz="1200" dirty="0">
+              <a:latin typeface="Times New Roman" panose="02020603050405020304" pitchFamily="18" charset="0"/>
+              <a:ea typeface="標楷體" panose="03000509000000000000" pitchFamily="65" charset="-120"/>
+              <a:cs typeface="Times New Roman" panose="02020603050405020304" pitchFamily="18" charset="0"/>
+            </a:endParaRPr>
+          </a:p>
+          <a:p>
+            <a:pPr lvl="1">
+              <a:lnSpc>
+                <a:spcPts val="3000"/>
+              </a:lnSpc>
+            </a:pPr>
+            <a:endParaRPr lang="en-US" altLang="zh-TW" sz="1600" dirty="0">
+              <a:latin typeface="Times New Roman" panose="02020603050405020304" pitchFamily="18" charset="0"/>
+              <a:ea typeface="標楷體" panose="03000509000000000000" pitchFamily="65" charset="-120"/>
+              <a:cs typeface="Times New Roman" panose="02020603050405020304" pitchFamily="18" charset="0"/>
+            </a:endParaRPr>
+          </a:p>
+          <a:p>
+            <a:pPr lvl="1">
+              <a:lnSpc>
+                <a:spcPts val="3000"/>
+              </a:lnSpc>
+            </a:pPr>
+            <a:endParaRPr lang="zh-TW" altLang="en-US" sz="1600" dirty="0">
+              <a:latin typeface="Times New Roman" panose="02020603050405020304" pitchFamily="18" charset="0"/>
+              <a:ea typeface="標楷體" panose="03000509000000000000" pitchFamily="65" charset="-120"/>
+              <a:cs typeface="Times New Roman" panose="02020603050405020304" pitchFamily="18" charset="0"/>
+            </a:endParaRPr>
+          </a:p>
+          <a:p>
+            <a:pPr lvl="1">
+              <a:lnSpc>
+                <a:spcPts val="3000"/>
+              </a:lnSpc>
+            </a:pPr>
+            <a:endParaRPr lang="en-US" altLang="zh-TW" sz="1600" dirty="0">
+              <a:solidFill>
+                <a:schemeClr val="tx1"/>
+              </a:solidFill>
+              <a:latin typeface="Times New Roman" panose="02020603050405020304" pitchFamily="18" charset="0"/>
+              <a:ea typeface="標楷體" panose="03000509000000000000" pitchFamily="65" charset="-120"/>
+              <a:cs typeface="Times New Roman" panose="02020603050405020304" pitchFamily="18" charset="0"/>
+            </a:endParaRPr>
+          </a:p>
+          <a:p>
+            <a:pPr lvl="1">
+              <a:lnSpc>
+                <a:spcPts val="3000"/>
+              </a:lnSpc>
+            </a:pPr>
+            <a:endParaRPr lang="zh-TW" altLang="en-US" sz="1600" dirty="0">
+              <a:latin typeface="Times New Roman" panose="02020603050405020304" pitchFamily="18" charset="0"/>
+              <a:ea typeface="標楷體" panose="03000509000000000000" pitchFamily="65" charset="-120"/>
+              <a:cs typeface="Times New Roman" panose="02020603050405020304" pitchFamily="18" charset="0"/>
+            </a:endParaRPr>
+          </a:p>
+          <a:p>
+            <a:pPr lvl="1">
+              <a:lnSpc>
+                <a:spcPts val="3000"/>
+              </a:lnSpc>
+            </a:pPr>
+            <a:endParaRPr lang="en-US" altLang="zh-TW" sz="1600" dirty="0">
+              <a:solidFill>
+                <a:schemeClr val="tx1"/>
+              </a:solidFill>
+              <a:latin typeface="Times New Roman" panose="02020603050405020304" pitchFamily="18" charset="0"/>
+              <a:ea typeface="標楷體" panose="03000509000000000000" pitchFamily="65" charset="-120"/>
+              <a:cs typeface="Times New Roman" panose="02020603050405020304" pitchFamily="18" charset="0"/>
+            </a:endParaRPr>
+          </a:p>
+        </p:txBody>
+      </p:sp>
+      <p:pic>
+        <p:nvPicPr>
+          <p:cNvPr id="3" name="圖片 2">
+            <a:extLst>
+              <a:ext uri="{FF2B5EF4-FFF2-40B4-BE49-F238E27FC236}">
+                <a16:creationId xmlns:a16="http://schemas.microsoft.com/office/drawing/2014/main" id="{0C861312-6738-1E5A-CE4A-7188C92ACA03}"/>
+              </a:ext>
+            </a:extLst>
+          </p:cNvPr>
+          <p:cNvPicPr>
+            <a:picLocks noChangeAspect="1"/>
+          </p:cNvPicPr>
+          <p:nvPr/>
+        </p:nvPicPr>
+        <p:blipFill>
+          <a:blip r:embed="rId3"/>
+          <a:stretch>
+            <a:fillRect/>
+          </a:stretch>
+        </p:blipFill>
+        <p:spPr>
+          <a:xfrm>
+            <a:off x="341292" y="1632857"/>
+            <a:ext cx="9223415" cy="1538207"/>
+          </a:xfrm>
+          <a:prstGeom prst="rect">
+            <a:avLst/>
+          </a:prstGeom>
+        </p:spPr>
+      </p:pic>
+    </p:spTree>
+    <p:extLst>
+      <p:ext uri="{BB962C8B-B14F-4D97-AF65-F5344CB8AC3E}">
+        <p14:creationId xmlns:p14="http://schemas.microsoft.com/office/powerpoint/2010/main" val="1808778153"/>
+      </p:ext>
+    </p:extLst>
+  </p:cSld>
+  <p:clrMapOvr>
+    <a:masterClrMapping/>
+  </p:clrMapOvr>
+</p:sld>
+</file>
+
+<file path=ppt/slides/slide6.xml><?xml version="1.0" encoding="utf-8"?>
 <p:sld xmlns:a="http://schemas.openxmlformats.org/drawingml/2006/main" xmlns:r="http://schemas.openxmlformats.org/officeDocument/2006/relationships" xmlns:p="http://schemas.openxmlformats.org/presentationml/2006/main">
   <p:cSld>
     <p:spTree>
@@ -7637,7 +12359,7 @@
 </p:sld>
 </file>
 
-<file path=ppt/slides/slide2.xml><?xml version="1.0" encoding="utf-8"?>
+<file path=ppt/slides/slide7.xml><?xml version="1.0" encoding="utf-8"?>
 <p:sld xmlns:a="http://schemas.openxmlformats.org/drawingml/2006/main" xmlns:r="http://schemas.openxmlformats.org/officeDocument/2006/relationships" xmlns:p="http://schemas.openxmlformats.org/presentationml/2006/main">
   <p:cSld>
     <p:spTree>
@@ -8378,7 +13100,7 @@
 </p:sld>
 </file>
 
-<file path=ppt/slides/slide3.xml><?xml version="1.0" encoding="utf-8"?>
+<file path=ppt/slides/slide8.xml><?xml version="1.0" encoding="utf-8"?>
 <p:sld xmlns:a="http://schemas.openxmlformats.org/drawingml/2006/main" xmlns:r="http://schemas.openxmlformats.org/officeDocument/2006/relationships" xmlns:p="http://schemas.openxmlformats.org/presentationml/2006/main">
   <p:cSld>
     <p:spTree>
@@ -8497,7 +13219,7 @@
 </p:sld>
 </file>
 
-<file path=ppt/slides/slide4.xml><?xml version="1.0" encoding="utf-8"?>
+<file path=ppt/slides/slide9.xml><?xml version="1.0" encoding="utf-8"?>
 <p:sld xmlns:a="http://schemas.openxmlformats.org/drawingml/2006/main" xmlns:r="http://schemas.openxmlformats.org/officeDocument/2006/relationships" xmlns:p="http://schemas.openxmlformats.org/presentationml/2006/main">
   <p:cSld>
     <p:spTree>
